--- a/_wp移行素材/★引継ぎ資料/★サイト更新マニュアル.pptx
+++ b/_wp移行素材/★引継ぎ資料/★サイト更新マニュアル.pptx
@@ -21,9 +21,10 @@
     <p:sldId id="269" r:id="rId15"/>
     <p:sldId id="270" r:id="rId16"/>
     <p:sldId id="271" r:id="rId17"/>
+    <p:sldId id="272" r:id="rId18"/>
   </p:sldIdLst>
   <p:notesMasterIdLst>
-    <p:notesMasterId r:id="rId18"/>
+    <p:notesMasterId r:id="rId19"/>
   </p:notesMasterIdLst>
   <p:sldSz cx="12192000" cy="6858000"/>
   <p:notesSz cx="6858000" cy="12192000"/>
@@ -1175,6 +1176,94 @@
 </p:notes>
 </file>
 
+<file path=ppt/notesSlides/notesSlide17.xml><?xml version="1.0" encoding="utf-8"?>
+<p:notes xmlns:a="http://schemas.openxmlformats.org/drawingml/2006/main" xmlns:r="http://schemas.openxmlformats.org/officeDocument/2006/relationships" xmlns:p="http://schemas.openxmlformats.org/presentationml/2006/main">
+  <p:cSld>
+    <p:spTree>
+      <p:nvGrpSpPr>
+        <p:cNvPr id="1" name=""/>
+        <p:cNvGrpSpPr/>
+        <p:nvPr/>
+      </p:nvGrpSpPr>
+      <p:grpSpPr>
+        <a:xfrm>
+          <a:off x="0" y="0"/>
+          <a:ext cx="0" cy="0"/>
+          <a:chOff x="0" y="0"/>
+          <a:chExt cx="0" cy="0"/>
+        </a:xfrm>
+      </p:grpSpPr>
+      <p:sp>
+        <p:nvSpPr>
+          <p:cNvPr id="2" name="Slide Image Placeholder 1"/>
+          <p:cNvSpPr>
+            <a:spLocks noGrp="1" noRot="1" noChangeAspect="1"/>
+          </p:cNvSpPr>
+          <p:nvPr>
+            <p:ph type="sldImg"/>
+          </p:nvPr>
+        </p:nvSpPr>
+        <p:spPr/>
+      </p:sp>
+      <p:sp>
+        <p:nvSpPr>
+          <p:cNvPr id="3" name="Notes Placeholder 2"/>
+          <p:cNvSpPr>
+            <a:spLocks noGrp="1"/>
+          </p:cNvSpPr>
+          <p:nvPr>
+            <p:ph type="body" idx="1"/>
+          </p:nvPr>
+        </p:nvSpPr>
+        <p:spPr/>
+        <p:txBody>
+          <a:bodyPr/>
+          <a:lstStyle/>
+          <a:p>
+            <a:r>
+              <a:rPr lang="en-US" dirty="0"/>
+              <a:t/>
+            </a:r>
+            <a:endParaRPr lang="en-US" dirty="0"/>
+          </a:p>
+        </p:txBody>
+      </p:sp>
+      <p:sp>
+        <p:nvSpPr>
+          <p:cNvPr id="4" name="Slide Number Placeholder 3"/>
+          <p:cNvSpPr>
+            <a:spLocks noGrp="1"/>
+          </p:cNvSpPr>
+          <p:nvPr>
+            <p:ph type="sldNum" sz="quarter" idx="10"/>
+          </p:nvPr>
+        </p:nvSpPr>
+        <p:spPr/>
+        <p:txBody>
+          <a:bodyPr/>
+          <a:lstStyle/>
+          <a:p>
+            <a:fld id="{F7021451-1387-4CA6-816F-3879F97B5CBC}" type="slidenum">
+              <a:rPr lang="en-US"/>
+              <a:t>17</a:t>
+            </a:fld>
+            <a:endParaRPr lang="en-US"/>
+          </a:p>
+        </p:txBody>
+      </p:sp>
+    </p:spTree>
+    <p:extLst>
+      <p:ext uri="{BB962C8B-B14F-4D97-AF65-F5344CB8AC3E}">
+        <p14:creationId xmlns:p14="http://schemas.microsoft.com/office/powerpoint/2010/main" val="1024086991"/>
+      </p:ext>
+    </p:extLst>
+  </p:cSld>
+  <p:clrMapOvr>
+    <a:masterClrMapping/>
+  </p:clrMapOvr>
+</p:notes>
+</file>
+
 <file path=ppt/notesSlides/notesSlide2.xml><?xml version="1.0" encoding="utf-8"?>
 <p:notes xmlns:a="http://schemas.openxmlformats.org/drawingml/2006/main" xmlns:r="http://schemas.openxmlformats.org/officeDocument/2006/relationships" xmlns:p="http://schemas.openxmlformats.org/presentationml/2006/main">
   <p:cSld>
@@ -1309,7 +1398,7 @@
           <a:p>
             <a:r>
               <a:rPr lang="en-US" dirty="0"/>
-              <a:t>固定ページの文章はテーマの中にある。だからWordPressの編集画面には出てこない。</a:t>
+              <a:t>5冊の役割分担。レクチャーでは基本編を使い、この資料は手元の参照用として渡す。</a:t>
             </a:r>
             <a:endParaRPr lang="en-US" dirty="0"/>
           </a:p>
@@ -1397,7 +1486,7 @@
           <a:p>
             <a:r>
               <a:rPr lang="en-US" dirty="0"/>
-              <a:t/>
+              <a:t>固定ページの文章はテーマの中にある。だからWordPressの編集画面には出てこない。</a:t>
             </a:r>
             <a:endParaRPr lang="en-US" dirty="0"/>
           </a:p>
@@ -2437,7 +2526,7 @@
                 <a:ea typeface="Meiryo" pitchFamily="34" charset="-122"/>
                 <a:cs typeface="Meiryo" pitchFamily="34" charset="-120"/>
               </a:rPr>
-              <a:t>【道B】どのファイルを直すか</a:t>
+              <a:t>【道B】固定ページを直すときの流れ</a:t>
             </a:r>
             <a:endParaRPr lang="en-US" sz="3200" dirty="0"/>
           </a:p>
@@ -2476,7 +2565,7 @@
                 <a:ea typeface="Meiryo" pitchFamily="34" charset="-122"/>
                 <a:cs typeface="Meiryo" pitchFamily="34" charset="-120"/>
               </a:rPr>
-              <a:t>この表がいちばん大事です</a:t>
+              <a:t>「ASPATHについて」を例に</a:t>
             </a:r>
             <a:endParaRPr lang="en-US" sz="1500" dirty="0"/>
           </a:p>
@@ -2521,9 +2610,182 @@
           </a:p>
         </p:txBody>
       </p:sp>
+      <p:pic>
+        <p:nvPicPr>
+          <p:cNvPr id="5" name="Image 0" descr="/sessions/compassionate-sweet-heisenberg/mnt/dev-aspath-life-main/_wp移行素材/★引継ぎ資料/画像/07_固定ページの流れ.png">    </p:cNvPr>
+          <p:cNvPicPr>
+            <a:picLocks noChangeAspect="1"/>
+          </p:cNvPicPr>
+          <p:nvPr/>
+        </p:nvPicPr>
+        <p:blipFill>
+          <a:blip r:embed="rId1"/>
+          <a:stretch>
+            <a:fillRect/>
+          </a:stretch>
+        </p:blipFill>
+        <p:spPr>
+          <a:xfrm>
+            <a:off x="777240" y="1645920"/>
+            <a:ext cx="10607040" cy="5303520"/>
+          </a:xfrm>
+          <a:prstGeom prst="rect">
+            <a:avLst/>
+          </a:prstGeom>
+        </p:spPr>
+      </p:pic>
+    </p:spTree>
+  </p:cSld>
+  <p:clrMapOvr>
+    <a:masterClrMapping/>
+  </p:clrMapOvr>
+</p:sld>
+</file>
+
+<file path=ppt/slides/slide11.xml><?xml version="1.0" encoding="utf-8"?>
+<p:sld xmlns:a="http://schemas.openxmlformats.org/drawingml/2006/main" xmlns:r="http://schemas.openxmlformats.org/officeDocument/2006/relationships" xmlns:p="http://schemas.openxmlformats.org/presentationml/2006/main">
+  <p:cSld name="Slide 11">
+    <p:bg>
+      <p:bgPr>
+        <a:solidFill>
+          <a:srgbClr val="FFFFFF"/>
+        </a:solidFill>
+      </p:bgPr>
+    </p:bg>
+    <p:spTree>
+      <p:nvGrpSpPr>
+        <p:cNvPr id="1" name=""/>
+        <p:cNvGrpSpPr/>
+        <p:nvPr/>
+      </p:nvGrpSpPr>
+      <p:grpSpPr>
+        <a:xfrm>
+          <a:off x="0" y="0"/>
+          <a:ext cx="0" cy="0"/>
+          <a:chOff x="0" y="0"/>
+          <a:chExt cx="0" cy="0"/>
+        </a:xfrm>
+      </p:grpSpPr>
+      <p:sp>
+        <p:nvSpPr>
+          <p:cNvPr id="2" name="Text 0"/>
+          <p:cNvSpPr/>
+          <p:nvPr/>
+        </p:nvSpPr>
+        <p:spPr>
+          <a:xfrm>
+            <a:off x="548640" y="320040"/>
+            <a:ext cx="10424160" cy="685800"/>
+          </a:xfrm>
+          <a:prstGeom prst="rect">
+            <a:avLst/>
+          </a:prstGeom>
+          <a:noFill/>
+          <a:ln/>
+        </p:spPr>
+        <p:txBody>
+          <a:bodyPr wrap="square" lIns="0" tIns="0" rIns="0" bIns="0" rtlCol="0" anchor="ctr"/>
+          <a:lstStyle/>
+          <a:p>
+            <a:pPr indent="0" marL="0">
+              <a:buNone/>
+            </a:pPr>
+            <a:r>
+              <a:rPr lang="en-US" sz="3200" b="1" dirty="0">
+                <a:solidFill>
+                  <a:srgbClr val="264653"/>
+                </a:solidFill>
+                <a:latin typeface="Meiryo" pitchFamily="34" charset="0"/>
+                <a:ea typeface="Meiryo" pitchFamily="34" charset="-122"/>
+                <a:cs typeface="Meiryo" pitchFamily="34" charset="-120"/>
+              </a:rPr>
+              <a:t>【道B】どのファイルを直すか</a:t>
+            </a:r>
+            <a:endParaRPr lang="en-US" sz="3200" dirty="0"/>
+          </a:p>
+        </p:txBody>
+      </p:sp>
+      <p:sp>
+        <p:nvSpPr>
+          <p:cNvPr id="3" name="Text 1"/>
+          <p:cNvSpPr/>
+          <p:nvPr/>
+        </p:nvSpPr>
+        <p:spPr>
+          <a:xfrm>
+            <a:off x="566928" y="1024128"/>
+            <a:ext cx="10424160" cy="365760"/>
+          </a:xfrm>
+          <a:prstGeom prst="rect">
+            <a:avLst/>
+          </a:prstGeom>
+          <a:noFill/>
+          <a:ln/>
+        </p:spPr>
+        <p:txBody>
+          <a:bodyPr wrap="square" lIns="0" tIns="0" rIns="0" bIns="0" rtlCol="0" anchor="ctr"/>
+          <a:lstStyle/>
+          <a:p>
+            <a:pPr indent="0" marL="0">
+              <a:buNone/>
+            </a:pPr>
+            <a:r>
+              <a:rPr lang="en-US" sz="1500" dirty="0">
+                <a:solidFill>
+                  <a:srgbClr val="5E7681"/>
+                </a:solidFill>
+                <a:latin typeface="Meiryo" pitchFamily="34" charset="0"/>
+                <a:ea typeface="Meiryo" pitchFamily="34" charset="-122"/>
+                <a:cs typeface="Meiryo" pitchFamily="34" charset="-120"/>
+              </a:rPr>
+              <a:t>この表がいちばん大事です</a:t>
+            </a:r>
+            <a:endParaRPr lang="en-US" sz="1500" dirty="0"/>
+          </a:p>
+        </p:txBody>
+      </p:sp>
+      <p:sp>
+        <p:nvSpPr>
+          <p:cNvPr id="4" name="Text 2"/>
+          <p:cNvSpPr/>
+          <p:nvPr/>
+        </p:nvSpPr>
+        <p:spPr>
+          <a:xfrm>
+            <a:off x="11338560" y="6263640"/>
+            <a:ext cx="457200" cy="274320"/>
+          </a:xfrm>
+          <a:prstGeom prst="rect">
+            <a:avLst/>
+          </a:prstGeom>
+          <a:noFill/>
+          <a:ln/>
+        </p:spPr>
+        <p:txBody>
+          <a:bodyPr wrap="square" lIns="0" tIns="0" rIns="0" bIns="0" rtlCol="0" anchor="ctr"/>
+          <a:lstStyle/>
+          <a:p>
+            <a:pPr algn="r" indent="0" marL="0">
+              <a:buNone/>
+            </a:pPr>
+            <a:r>
+              <a:rPr lang="en-US" sz="1100" dirty="0">
+                <a:solidFill>
+                  <a:srgbClr val="A8B4B8"/>
+                </a:solidFill>
+                <a:latin typeface="Meiryo" pitchFamily="34" charset="0"/>
+                <a:ea typeface="Meiryo" pitchFamily="34" charset="-122"/>
+                <a:cs typeface="Meiryo" pitchFamily="34" charset="-120"/>
+              </a:rPr>
+              <a:t>10</a:t>
+            </a:r>
+            <a:endParaRPr lang="en-US" sz="1100" dirty="0"/>
+          </a:p>
+        </p:txBody>
+      </p:sp>
       <p:graphicFrame>
         <p:nvGraphicFramePr>
-          <p:cNvPr id="11" name="Table 0"/>
+          <p:cNvPr id="12" name="Table 0"/>
           <p:cNvGraphicFramePr>
             <a:graphicFrameLocks noGrp="1"/>
           </p:cNvGraphicFramePr>
@@ -4832,6 +5094,212 @@
                           <a:ea typeface="Meiryo" pitchFamily="34" charset="-122"/>
                           <a:cs typeface="Meiryo" pitchFamily="34" charset="-120"/>
                         </a:rPr>
+                        <a:t>サイトマップ</a:t>
+                      </a:r>
+                      <a:endParaRPr lang="en-US" sz="1300" dirty="0">
+                        <a:latin typeface="Meiryo" charset="0"/>
+                        <a:ea typeface="Meiryo" charset="0"/>
+                        <a:cs typeface="Meiryo" charset="0"/>
+                      </a:endParaRPr>
+                    </a:p>
+                  </a:txBody>
+                  <a:tcPr marL="91440" marR="91440" marT="45720" marB="45720" anchor="ctr">
+                    <a:lnL w="12700" cap="flat" cmpd="sng" algn="ctr">
+                      <a:solidFill>
+                        <a:srgbClr val="E2E6E8"/>
+                      </a:solidFill>
+                      <a:prstDash val="solid"/>
+                      <a:round/>
+                      <a:headEnd type="none" w="med" len="med"/>
+                      <a:tailEnd type="none" w="med" len="med"/>
+                    </a:lnL>
+                    <a:lnR w="12700" cap="flat" cmpd="sng" algn="ctr">
+                      <a:solidFill>
+                        <a:srgbClr val="E2E6E8"/>
+                      </a:solidFill>
+                      <a:prstDash val="solid"/>
+                      <a:round/>
+                      <a:headEnd type="none" w="med" len="med"/>
+                      <a:tailEnd type="none" w="med" len="med"/>
+                    </a:lnR>
+                    <a:lnT w="12700" cap="flat" cmpd="sng" algn="ctr">
+                      <a:solidFill>
+                        <a:srgbClr val="E2E6E8"/>
+                      </a:solidFill>
+                      <a:prstDash val="solid"/>
+                      <a:round/>
+                      <a:headEnd type="none" w="med" len="med"/>
+                      <a:tailEnd type="none" w="med" len="med"/>
+                    </a:lnT>
+                    <a:lnB w="12700" cap="flat" cmpd="sng" algn="ctr">
+                      <a:solidFill>
+                        <a:srgbClr val="E2E6E8"/>
+                      </a:solidFill>
+                      <a:prstDash val="solid"/>
+                      <a:round/>
+                      <a:headEnd type="none" w="med" len="med"/>
+                      <a:tailEnd type="none" w="med" len="med"/>
+                    </a:lnB>
+                    <a:solidFill>
+                      <a:srgbClr val="FFFFFF"/>
+                    </a:solidFill>
+                  </a:tcPr>
+                </a:tc>
+                <a:tc>
+                  <a:txBody>
+                    <a:bodyPr/>
+                    <a:lstStyle/>
+                    <a:p>
+                      <a:pPr indent="0" marL="0">
+                        <a:buNone/>
+                      </a:pPr>
+                      <a:r>
+                        <a:rPr lang="en-US" sz="1300" dirty="0">
+                          <a:solidFill>
+                            <a:srgbClr val="1E2D34"/>
+                          </a:solidFill>
+                          <a:latin typeface="Consolas" pitchFamily="34" charset="0"/>
+                          <a:ea typeface="Consolas" pitchFamily="34" charset="-122"/>
+                          <a:cs typeface="Consolas" pitchFamily="34" charset="-120"/>
+                        </a:rPr>
+                        <a:t>/sitemap/</a:t>
+                      </a:r>
+                      <a:endParaRPr lang="en-US" sz="1300" dirty="0">
+                        <a:latin typeface="Consolas" charset="0"/>
+                        <a:ea typeface="Consolas" charset="0"/>
+                        <a:cs typeface="Consolas" charset="0"/>
+                      </a:endParaRPr>
+                    </a:p>
+                  </a:txBody>
+                  <a:tcPr marL="91440" marR="91440" marT="45720" marB="45720" anchor="ctr">
+                    <a:lnL w="12700" cap="flat" cmpd="sng" algn="ctr">
+                      <a:solidFill>
+                        <a:srgbClr val="E2E6E8"/>
+                      </a:solidFill>
+                      <a:prstDash val="solid"/>
+                      <a:round/>
+                      <a:headEnd type="none" w="med" len="med"/>
+                      <a:tailEnd type="none" w="med" len="med"/>
+                    </a:lnL>
+                    <a:lnR w="12700" cap="flat" cmpd="sng" algn="ctr">
+                      <a:solidFill>
+                        <a:srgbClr val="E2E6E8"/>
+                      </a:solidFill>
+                      <a:prstDash val="solid"/>
+                      <a:round/>
+                      <a:headEnd type="none" w="med" len="med"/>
+                      <a:tailEnd type="none" w="med" len="med"/>
+                    </a:lnR>
+                    <a:lnT w="12700" cap="flat" cmpd="sng" algn="ctr">
+                      <a:solidFill>
+                        <a:srgbClr val="E2E6E8"/>
+                      </a:solidFill>
+                      <a:prstDash val="solid"/>
+                      <a:round/>
+                      <a:headEnd type="none" w="med" len="med"/>
+                      <a:tailEnd type="none" w="med" len="med"/>
+                    </a:lnT>
+                    <a:lnB w="12700" cap="flat" cmpd="sng" algn="ctr">
+                      <a:solidFill>
+                        <a:srgbClr val="E2E6E8"/>
+                      </a:solidFill>
+                      <a:prstDash val="solid"/>
+                      <a:round/>
+                      <a:headEnd type="none" w="med" len="med"/>
+                      <a:tailEnd type="none" w="med" len="med"/>
+                    </a:lnB>
+                    <a:solidFill>
+                      <a:srgbClr val="FFFFFF"/>
+                    </a:solidFill>
+                  </a:tcPr>
+                </a:tc>
+                <a:tc>
+                  <a:txBody>
+                    <a:bodyPr/>
+                    <a:lstStyle/>
+                    <a:p>
+                      <a:pPr indent="0" marL="0">
+                        <a:buNone/>
+                      </a:pPr>
+                      <a:r>
+                        <a:rPr lang="en-US" sz="1300" dirty="0">
+                          <a:solidFill>
+                            <a:srgbClr val="1E2D34"/>
+                          </a:solidFill>
+                          <a:latin typeface="Meiryo" pitchFamily="34" charset="0"/>
+                          <a:ea typeface="Meiryo" pitchFamily="34" charset="-122"/>
+                          <a:cs typeface="Meiryo" pitchFamily="34" charset="-120"/>
+                        </a:rPr>
+                        <a:t>sitemap.html</a:t>
+                      </a:r>
+                      <a:endParaRPr lang="en-US" sz="1300" dirty="0">
+                        <a:latin typeface="Meiryo" charset="0"/>
+                        <a:ea typeface="Meiryo" charset="0"/>
+                        <a:cs typeface="Meiryo" charset="0"/>
+                      </a:endParaRPr>
+                    </a:p>
+                  </a:txBody>
+                  <a:tcPr marL="91440" marR="91440" marT="45720" marB="45720" anchor="ctr">
+                    <a:lnL w="12700" cap="flat" cmpd="sng" algn="ctr">
+                      <a:solidFill>
+                        <a:srgbClr val="E2E6E8"/>
+                      </a:solidFill>
+                      <a:prstDash val="solid"/>
+                      <a:round/>
+                      <a:headEnd type="none" w="med" len="med"/>
+                      <a:tailEnd type="none" w="med" len="med"/>
+                    </a:lnL>
+                    <a:lnR w="12700" cap="flat" cmpd="sng" algn="ctr">
+                      <a:solidFill>
+                        <a:srgbClr val="E2E6E8"/>
+                      </a:solidFill>
+                      <a:prstDash val="solid"/>
+                      <a:round/>
+                      <a:headEnd type="none" w="med" len="med"/>
+                      <a:tailEnd type="none" w="med" len="med"/>
+                    </a:lnR>
+                    <a:lnT w="12700" cap="flat" cmpd="sng" algn="ctr">
+                      <a:solidFill>
+                        <a:srgbClr val="E2E6E8"/>
+                      </a:solidFill>
+                      <a:prstDash val="solid"/>
+                      <a:round/>
+                      <a:headEnd type="none" w="med" len="med"/>
+                      <a:tailEnd type="none" w="med" len="med"/>
+                    </a:lnT>
+                    <a:lnB w="12700" cap="flat" cmpd="sng" algn="ctr">
+                      <a:solidFill>
+                        <a:srgbClr val="E2E6E8"/>
+                      </a:solidFill>
+                      <a:prstDash val="solid"/>
+                      <a:round/>
+                      <a:headEnd type="none" w="med" len="med"/>
+                      <a:tailEnd type="none" w="med" len="med"/>
+                    </a:lnB>
+                    <a:solidFill>
+                      <a:srgbClr val="FFFFFF"/>
+                    </a:solidFill>
+                  </a:tcPr>
+                </a:tc>
+              </a:tr>
+              <a:tr h="329184">
+                <a:tc>
+                  <a:txBody>
+                    <a:bodyPr/>
+                    <a:lstStyle/>
+                    <a:p>
+                      <a:pPr indent="0" marL="0">
+                        <a:buNone/>
+                      </a:pPr>
+                      <a:r>
+                        <a:rPr lang="en-US" sz="1300" dirty="0">
+                          <a:solidFill>
+                            <a:srgbClr val="1E2D34"/>
+                          </a:solidFill>
+                          <a:latin typeface="Meiryo" pitchFamily="34" charset="0"/>
+                          <a:ea typeface="Meiryo" pitchFamily="34" charset="-122"/>
+                          <a:cs typeface="Meiryo" pitchFamily="34" charset="-120"/>
+                        </a:rPr>
                         <a:t>初回体験フォーム</a:t>
                       </a:r>
                       <a:endParaRPr lang="en-US" sz="1300" dirty="0">
@@ -5032,877 +5500,6 @@
 </p:sld>
 </file>
 
-<file path=ppt/slides/slide11.xml><?xml version="1.0" encoding="utf-8"?>
-<p:sld xmlns:a="http://schemas.openxmlformats.org/drawingml/2006/main" xmlns:r="http://schemas.openxmlformats.org/officeDocument/2006/relationships" xmlns:p="http://schemas.openxmlformats.org/presentationml/2006/main">
-  <p:cSld name="Slide 11">
-    <p:bg>
-      <p:bgPr>
-        <a:solidFill>
-          <a:srgbClr val="FFFFFF"/>
-        </a:solidFill>
-      </p:bgPr>
-    </p:bg>
-    <p:spTree>
-      <p:nvGrpSpPr>
-        <p:cNvPr id="1" name=""/>
-        <p:cNvGrpSpPr/>
-        <p:nvPr/>
-      </p:nvGrpSpPr>
-      <p:grpSpPr>
-        <a:xfrm>
-          <a:off x="0" y="0"/>
-          <a:ext cx="0" cy="0"/>
-          <a:chOff x="0" y="0"/>
-          <a:chExt cx="0" cy="0"/>
-        </a:xfrm>
-      </p:grpSpPr>
-      <p:sp>
-        <p:nvSpPr>
-          <p:cNvPr id="2" name="Text 0"/>
-          <p:cNvSpPr/>
-          <p:nvPr/>
-        </p:nvSpPr>
-        <p:spPr>
-          <a:xfrm>
-            <a:off x="548640" y="320040"/>
-            <a:ext cx="10424160" cy="685800"/>
-          </a:xfrm>
-          <a:prstGeom prst="rect">
-            <a:avLst/>
-          </a:prstGeom>
-          <a:noFill/>
-          <a:ln/>
-        </p:spPr>
-        <p:txBody>
-          <a:bodyPr wrap="square" lIns="0" tIns="0" rIns="0" bIns="0" rtlCol="0" anchor="ctr"/>
-          <a:lstStyle/>
-          <a:p>
-            <a:pPr indent="0" marL="0">
-              <a:buNone/>
-            </a:pPr>
-            <a:r>
-              <a:rPr lang="en-US" sz="3200" b="1" dirty="0">
-                <a:solidFill>
-                  <a:srgbClr val="264653"/>
-                </a:solidFill>
-                <a:latin typeface="Meiryo" pitchFamily="34" charset="0"/>
-                <a:ea typeface="Meiryo" pitchFamily="34" charset="-122"/>
-                <a:cs typeface="Meiryo" pitchFamily="34" charset="-120"/>
-              </a:rPr>
-              <a:t>【道B】例：「ASPATHについて」を直す</a:t>
-            </a:r>
-            <a:endParaRPr lang="en-US" sz="3200" dirty="0"/>
-          </a:p>
-        </p:txBody>
-      </p:sp>
-      <p:sp>
-        <p:nvSpPr>
-          <p:cNvPr id="3" name="Text 1"/>
-          <p:cNvSpPr/>
-          <p:nvPr/>
-        </p:nvSpPr>
-        <p:spPr>
-          <a:xfrm>
-            <a:off x="566928" y="1024128"/>
-            <a:ext cx="10424160" cy="365760"/>
-          </a:xfrm>
-          <a:prstGeom prst="rect">
-            <a:avLst/>
-          </a:prstGeom>
-          <a:noFill/>
-          <a:ln/>
-        </p:spPr>
-        <p:txBody>
-          <a:bodyPr wrap="square" lIns="0" tIns="0" rIns="0" bIns="0" rtlCol="0" anchor="ctr"/>
-          <a:lstStyle/>
-          <a:p>
-            <a:pPr indent="0" marL="0">
-              <a:buNone/>
-            </a:pPr>
-            <a:r>
-              <a:rPr lang="en-US" sz="1500" dirty="0">
-                <a:solidFill>
-                  <a:srgbClr val="5E7681"/>
-                </a:solidFill>
-                <a:latin typeface="Meiryo" pitchFamily="34" charset="0"/>
-                <a:ea typeface="Meiryo" pitchFamily="34" charset="-122"/>
-                <a:cs typeface="Meiryo" pitchFamily="34" charset="-120"/>
-              </a:rPr>
-              <a:t>文章の探し方まで</a:t>
-            </a:r>
-            <a:endParaRPr lang="en-US" sz="1500" dirty="0"/>
-          </a:p>
-        </p:txBody>
-      </p:sp>
-      <p:sp>
-        <p:nvSpPr>
-          <p:cNvPr id="4" name="Text 2"/>
-          <p:cNvSpPr/>
-          <p:nvPr/>
-        </p:nvSpPr>
-        <p:spPr>
-          <a:xfrm>
-            <a:off x="11338560" y="6263640"/>
-            <a:ext cx="457200" cy="274320"/>
-          </a:xfrm>
-          <a:prstGeom prst="rect">
-            <a:avLst/>
-          </a:prstGeom>
-          <a:noFill/>
-          <a:ln/>
-        </p:spPr>
-        <p:txBody>
-          <a:bodyPr wrap="square" lIns="0" tIns="0" rIns="0" bIns="0" rtlCol="0" anchor="ctr"/>
-          <a:lstStyle/>
-          <a:p>
-            <a:pPr algn="r" indent="0" marL="0">
-              <a:buNone/>
-            </a:pPr>
-            <a:r>
-              <a:rPr lang="en-US" sz="1100" dirty="0">
-                <a:solidFill>
-                  <a:srgbClr val="A8B4B8"/>
-                </a:solidFill>
-                <a:latin typeface="Meiryo" pitchFamily="34" charset="0"/>
-                <a:ea typeface="Meiryo" pitchFamily="34" charset="-122"/>
-                <a:cs typeface="Meiryo" pitchFamily="34" charset="-120"/>
-              </a:rPr>
-              <a:t>10</a:t>
-            </a:r>
-            <a:endParaRPr lang="en-US" sz="1100" dirty="0"/>
-          </a:p>
-        </p:txBody>
-      </p:sp>
-      <p:sp>
-        <p:nvSpPr>
-          <p:cNvPr id="5" name="Text 3"/>
-          <p:cNvSpPr/>
-          <p:nvPr/>
-        </p:nvSpPr>
-        <p:spPr>
-          <a:xfrm>
-            <a:off x="685800" y="1737360"/>
-            <a:ext cx="457200" cy="365760"/>
-          </a:xfrm>
-          <a:prstGeom prst="rect">
-            <a:avLst/>
-          </a:prstGeom>
-          <a:noFill/>
-          <a:ln/>
-        </p:spPr>
-        <p:txBody>
-          <a:bodyPr wrap="square" lIns="0" tIns="0" rIns="0" bIns="0" rtlCol="0" anchor="ctr"/>
-          <a:lstStyle/>
-          <a:p>
-            <a:pPr indent="0" marL="0">
-              <a:buNone/>
-            </a:pPr>
-            <a:r>
-              <a:rPr lang="en-US" sz="2000" b="1" dirty="0">
-                <a:solidFill>
-                  <a:srgbClr val="DD8236"/>
-                </a:solidFill>
-                <a:latin typeface="Meiryo" pitchFamily="34" charset="0"/>
-                <a:ea typeface="Meiryo" pitchFamily="34" charset="-122"/>
-                <a:cs typeface="Meiryo" pitchFamily="34" charset="-120"/>
-              </a:rPr>
-              <a:t>①</a:t>
-            </a:r>
-            <a:endParaRPr lang="en-US" sz="2000" dirty="0"/>
-          </a:p>
-        </p:txBody>
-      </p:sp>
-      <p:sp>
-        <p:nvSpPr>
-          <p:cNvPr id="6" name="Text 4"/>
-          <p:cNvSpPr/>
-          <p:nvPr/>
-        </p:nvSpPr>
-        <p:spPr>
-          <a:xfrm>
-            <a:off x="1234440" y="1755648"/>
-            <a:ext cx="10058400" cy="329184"/>
-          </a:xfrm>
-          <a:prstGeom prst="rect">
-            <a:avLst/>
-          </a:prstGeom>
-          <a:noFill/>
-          <a:ln/>
-        </p:spPr>
-        <p:txBody>
-          <a:bodyPr wrap="square" lIns="0" tIns="0" rIns="0" bIns="0" rtlCol="0" anchor="ctr"/>
-          <a:lstStyle/>
-          <a:p>
-            <a:pPr indent="0" marL="0">
-              <a:buNone/>
-            </a:pPr>
-            <a:r>
-              <a:rPr lang="en-US" sz="1600" b="1" dirty="0">
-                <a:solidFill>
-                  <a:srgbClr val="264653"/>
-                </a:solidFill>
-                <a:latin typeface="Meiryo" pitchFamily="34" charset="0"/>
-                <a:ea typeface="Meiryo" pitchFamily="34" charset="-122"/>
-                <a:cs typeface="Meiryo" pitchFamily="34" charset="-120"/>
-              </a:rPr>
-              <a:t>GitHub Desktop で Pull origin</a:t>
-            </a:r>
-            <a:endParaRPr lang="en-US" sz="1600" dirty="0"/>
-          </a:p>
-        </p:txBody>
-      </p:sp>
-      <p:sp>
-        <p:nvSpPr>
-          <p:cNvPr id="7" name="Text 5"/>
-          <p:cNvSpPr/>
-          <p:nvPr/>
-        </p:nvSpPr>
-        <p:spPr>
-          <a:xfrm>
-            <a:off x="1234440" y="2103120"/>
-            <a:ext cx="10058400" cy="310896"/>
-          </a:xfrm>
-          <a:prstGeom prst="rect">
-            <a:avLst/>
-          </a:prstGeom>
-          <a:noFill/>
-          <a:ln/>
-        </p:spPr>
-        <p:txBody>
-          <a:bodyPr wrap="square" lIns="0" tIns="0" rIns="0" bIns="0" rtlCol="0" anchor="ctr"/>
-          <a:lstStyle/>
-          <a:p>
-            <a:pPr indent="0" marL="0">
-              <a:buNone/>
-            </a:pPr>
-            <a:r>
-              <a:rPr lang="en-US" sz="1300" dirty="0">
-                <a:solidFill>
-                  <a:srgbClr val="5E7681"/>
-                </a:solidFill>
-                <a:latin typeface="Meiryo" pitchFamily="34" charset="0"/>
-                <a:ea typeface="Meiryo" pitchFamily="34" charset="-122"/>
-                <a:cs typeface="Meiryo" pitchFamily="34" charset="-120"/>
-              </a:rPr>
-              <a:t>先に他の人の変更を取り込む。飛ばすと衝突します。</a:t>
-            </a:r>
-            <a:endParaRPr lang="en-US" sz="1300" dirty="0"/>
-          </a:p>
-        </p:txBody>
-      </p:sp>
-      <p:sp>
-        <p:nvSpPr>
-          <p:cNvPr id="8" name="Text 6"/>
-          <p:cNvSpPr/>
-          <p:nvPr/>
-        </p:nvSpPr>
-        <p:spPr>
-          <a:xfrm>
-            <a:off x="685800" y="2487168"/>
-            <a:ext cx="457200" cy="365760"/>
-          </a:xfrm>
-          <a:prstGeom prst="rect">
-            <a:avLst/>
-          </a:prstGeom>
-          <a:noFill/>
-          <a:ln/>
-        </p:spPr>
-        <p:txBody>
-          <a:bodyPr wrap="square" lIns="0" tIns="0" rIns="0" bIns="0" rtlCol="0" anchor="ctr"/>
-          <a:lstStyle/>
-          <a:p>
-            <a:pPr indent="0" marL="0">
-              <a:buNone/>
-            </a:pPr>
-            <a:r>
-              <a:rPr lang="en-US" sz="2000" b="1" dirty="0">
-                <a:solidFill>
-                  <a:srgbClr val="DD8236"/>
-                </a:solidFill>
-                <a:latin typeface="Meiryo" pitchFamily="34" charset="0"/>
-                <a:ea typeface="Meiryo" pitchFamily="34" charset="-122"/>
-                <a:cs typeface="Meiryo" pitchFamily="34" charset="-120"/>
-              </a:rPr>
-              <a:t>②</a:t>
-            </a:r>
-            <a:endParaRPr lang="en-US" sz="2000" dirty="0"/>
-          </a:p>
-        </p:txBody>
-      </p:sp>
-      <p:sp>
-        <p:nvSpPr>
-          <p:cNvPr id="9" name="Text 7"/>
-          <p:cNvSpPr/>
-          <p:nvPr/>
-        </p:nvSpPr>
-        <p:spPr>
-          <a:xfrm>
-            <a:off x="1234440" y="2505456"/>
-            <a:ext cx="10058400" cy="329184"/>
-          </a:xfrm>
-          <a:prstGeom prst="rect">
-            <a:avLst/>
-          </a:prstGeom>
-          <a:noFill/>
-          <a:ln/>
-        </p:spPr>
-        <p:txBody>
-          <a:bodyPr wrap="square" lIns="0" tIns="0" rIns="0" bIns="0" rtlCol="0" anchor="ctr"/>
-          <a:lstStyle/>
-          <a:p>
-            <a:pPr indent="0" marL="0">
-              <a:buNone/>
-            </a:pPr>
-            <a:r>
-              <a:rPr lang="en-US" sz="1600" b="1" dirty="0">
-                <a:solidFill>
-                  <a:srgbClr val="264653"/>
-                </a:solidFill>
-                <a:latin typeface="Meiryo" pitchFamily="34" charset="0"/>
-                <a:ea typeface="Meiryo" pitchFamily="34" charset="-122"/>
-                <a:cs typeface="Meiryo" pitchFamily="34" charset="-120"/>
-              </a:rPr>
-              <a:t>about.html を開く</a:t>
-            </a:r>
-            <a:endParaRPr lang="en-US" sz="1600" dirty="0"/>
-          </a:p>
-        </p:txBody>
-      </p:sp>
-      <p:sp>
-        <p:nvSpPr>
-          <p:cNvPr id="10" name="Text 8"/>
-          <p:cNvSpPr/>
-          <p:nvPr/>
-        </p:nvSpPr>
-        <p:spPr>
-          <a:xfrm>
-            <a:off x="1234440" y="2852928"/>
-            <a:ext cx="10058400" cy="310896"/>
-          </a:xfrm>
-          <a:prstGeom prst="rect">
-            <a:avLst/>
-          </a:prstGeom>
-          <a:noFill/>
-          <a:ln/>
-        </p:spPr>
-        <p:txBody>
-          <a:bodyPr wrap="square" lIns="0" tIns="0" rIns="0" bIns="0" rtlCol="0" anchor="ctr"/>
-          <a:lstStyle/>
-          <a:p>
-            <a:pPr indent="0" marL="0">
-              <a:buNone/>
-            </a:pPr>
-            <a:r>
-              <a:rPr lang="en-US" sz="1300" dirty="0">
-                <a:solidFill>
-                  <a:srgbClr val="5E7681"/>
-                </a:solidFill>
-                <a:latin typeface="Meiryo" pitchFamily="34" charset="0"/>
-                <a:ea typeface="Meiryo" pitchFamily="34" charset="-122"/>
-                <a:cs typeface="Meiryo" pitchFamily="34" charset="-120"/>
-              </a:rPr>
-              <a:t>メモ帳でも可。VS Code が扱いやすいです。</a:t>
-            </a:r>
-            <a:endParaRPr lang="en-US" sz="1300" dirty="0"/>
-          </a:p>
-        </p:txBody>
-      </p:sp>
-      <p:sp>
-        <p:nvSpPr>
-          <p:cNvPr id="11" name="Text 9"/>
-          <p:cNvSpPr/>
-          <p:nvPr/>
-        </p:nvSpPr>
-        <p:spPr>
-          <a:xfrm>
-            <a:off x="685800" y="3236976"/>
-            <a:ext cx="457200" cy="365760"/>
-          </a:xfrm>
-          <a:prstGeom prst="rect">
-            <a:avLst/>
-          </a:prstGeom>
-          <a:noFill/>
-          <a:ln/>
-        </p:spPr>
-        <p:txBody>
-          <a:bodyPr wrap="square" lIns="0" tIns="0" rIns="0" bIns="0" rtlCol="0" anchor="ctr"/>
-          <a:lstStyle/>
-          <a:p>
-            <a:pPr indent="0" marL="0">
-              <a:buNone/>
-            </a:pPr>
-            <a:r>
-              <a:rPr lang="en-US" sz="2000" b="1" dirty="0">
-                <a:solidFill>
-                  <a:srgbClr val="DD8236"/>
-                </a:solidFill>
-                <a:latin typeface="Meiryo" pitchFamily="34" charset="0"/>
-                <a:ea typeface="Meiryo" pitchFamily="34" charset="-122"/>
-                <a:cs typeface="Meiryo" pitchFamily="34" charset="-120"/>
-              </a:rPr>
-              <a:t>③</a:t>
-            </a:r>
-            <a:endParaRPr lang="en-US" sz="2000" dirty="0"/>
-          </a:p>
-        </p:txBody>
-      </p:sp>
-      <p:sp>
-        <p:nvSpPr>
-          <p:cNvPr id="12" name="Text 10"/>
-          <p:cNvSpPr/>
-          <p:nvPr/>
-        </p:nvSpPr>
-        <p:spPr>
-          <a:xfrm>
-            <a:off x="1234440" y="3255264"/>
-            <a:ext cx="10058400" cy="329184"/>
-          </a:xfrm>
-          <a:prstGeom prst="rect">
-            <a:avLst/>
-          </a:prstGeom>
-          <a:noFill/>
-          <a:ln/>
-        </p:spPr>
-        <p:txBody>
-          <a:bodyPr wrap="square" lIns="0" tIns="0" rIns="0" bIns="0" rtlCol="0" anchor="ctr"/>
-          <a:lstStyle/>
-          <a:p>
-            <a:pPr indent="0" marL="0">
-              <a:buNone/>
-            </a:pPr>
-            <a:r>
-              <a:rPr lang="en-US" sz="1600" b="1" dirty="0">
-                <a:solidFill>
-                  <a:srgbClr val="264653"/>
-                </a:solidFill>
-                <a:latin typeface="Meiryo" pitchFamily="34" charset="0"/>
-                <a:ea typeface="Meiryo" pitchFamily="34" charset="-122"/>
-                <a:cs typeface="Meiryo" pitchFamily="34" charset="-120"/>
-              </a:rPr>
-              <a:t>Ctrl+F で文章の一部を検索</a:t>
-            </a:r>
-            <a:endParaRPr lang="en-US" sz="1600" dirty="0"/>
-          </a:p>
-        </p:txBody>
-      </p:sp>
-      <p:sp>
-        <p:nvSpPr>
-          <p:cNvPr id="13" name="Text 11"/>
-          <p:cNvSpPr/>
-          <p:nvPr/>
-        </p:nvSpPr>
-        <p:spPr>
-          <a:xfrm>
-            <a:off x="1234440" y="3602736"/>
-            <a:ext cx="10058400" cy="310896"/>
-          </a:xfrm>
-          <a:prstGeom prst="rect">
-            <a:avLst/>
-          </a:prstGeom>
-          <a:noFill/>
-          <a:ln/>
-        </p:spPr>
-        <p:txBody>
-          <a:bodyPr wrap="square" lIns="0" tIns="0" rIns="0" bIns="0" rtlCol="0" anchor="ctr"/>
-          <a:lstStyle/>
-          <a:p>
-            <a:pPr indent="0" marL="0">
-              <a:buNone/>
-            </a:pPr>
-            <a:r>
-              <a:rPr lang="en-US" sz="1300" dirty="0">
-                <a:solidFill>
-                  <a:srgbClr val="5E7681"/>
-                </a:solidFill>
-                <a:latin typeface="Meiryo" pitchFamily="34" charset="0"/>
-                <a:ea typeface="Meiryo" pitchFamily="34" charset="-122"/>
-                <a:cs typeface="Meiryo" pitchFamily="34" charset="-120"/>
-              </a:rPr>
-              <a:t>例：「一番初めに動かしにくさ」（10〜15文字で探す）</a:t>
-            </a:r>
-            <a:endParaRPr lang="en-US" sz="1300" dirty="0"/>
-          </a:p>
-        </p:txBody>
-      </p:sp>
-      <p:sp>
-        <p:nvSpPr>
-          <p:cNvPr id="14" name="Text 12"/>
-          <p:cNvSpPr/>
-          <p:nvPr/>
-        </p:nvSpPr>
-        <p:spPr>
-          <a:xfrm>
-            <a:off x="685800" y="3986784"/>
-            <a:ext cx="457200" cy="365760"/>
-          </a:xfrm>
-          <a:prstGeom prst="rect">
-            <a:avLst/>
-          </a:prstGeom>
-          <a:noFill/>
-          <a:ln/>
-        </p:spPr>
-        <p:txBody>
-          <a:bodyPr wrap="square" lIns="0" tIns="0" rIns="0" bIns="0" rtlCol="0" anchor="ctr"/>
-          <a:lstStyle/>
-          <a:p>
-            <a:pPr indent="0" marL="0">
-              <a:buNone/>
-            </a:pPr>
-            <a:r>
-              <a:rPr lang="en-US" sz="2000" b="1" dirty="0">
-                <a:solidFill>
-                  <a:srgbClr val="DD8236"/>
-                </a:solidFill>
-                <a:latin typeface="Meiryo" pitchFamily="34" charset="0"/>
-                <a:ea typeface="Meiryo" pitchFamily="34" charset="-122"/>
-                <a:cs typeface="Meiryo" pitchFamily="34" charset="-120"/>
-              </a:rPr>
-              <a:t>④</a:t>
-            </a:r>
-            <a:endParaRPr lang="en-US" sz="2000" dirty="0"/>
-          </a:p>
-        </p:txBody>
-      </p:sp>
-      <p:sp>
-        <p:nvSpPr>
-          <p:cNvPr id="15" name="Text 13"/>
-          <p:cNvSpPr/>
-          <p:nvPr/>
-        </p:nvSpPr>
-        <p:spPr>
-          <a:xfrm>
-            <a:off x="1234440" y="4005072"/>
-            <a:ext cx="10058400" cy="329184"/>
-          </a:xfrm>
-          <a:prstGeom prst="rect">
-            <a:avLst/>
-          </a:prstGeom>
-          <a:noFill/>
-          <a:ln/>
-        </p:spPr>
-        <p:txBody>
-          <a:bodyPr wrap="square" lIns="0" tIns="0" rIns="0" bIns="0" rtlCol="0" anchor="ctr"/>
-          <a:lstStyle/>
-          <a:p>
-            <a:pPr indent="0" marL="0">
-              <a:buNone/>
-            </a:pPr>
-            <a:r>
-              <a:rPr lang="en-US" sz="1600" b="1" dirty="0">
-                <a:solidFill>
-                  <a:srgbClr val="264653"/>
-                </a:solidFill>
-                <a:latin typeface="Meiryo" pitchFamily="34" charset="0"/>
-                <a:ea typeface="Meiryo" pitchFamily="34" charset="-122"/>
-                <a:cs typeface="Meiryo" pitchFamily="34" charset="-120"/>
-              </a:rPr>
-              <a:t>タグの間の文字だけ書き換える</a:t>
-            </a:r>
-            <a:endParaRPr lang="en-US" sz="1600" dirty="0"/>
-          </a:p>
-        </p:txBody>
-      </p:sp>
-      <p:sp>
-        <p:nvSpPr>
-          <p:cNvPr id="16" name="Text 14"/>
-          <p:cNvSpPr/>
-          <p:nvPr/>
-        </p:nvSpPr>
-        <p:spPr>
-          <a:xfrm>
-            <a:off x="1234440" y="4352544"/>
-            <a:ext cx="10058400" cy="310896"/>
-          </a:xfrm>
-          <a:prstGeom prst="rect">
-            <a:avLst/>
-          </a:prstGeom>
-          <a:noFill/>
-          <a:ln/>
-        </p:spPr>
-        <p:txBody>
-          <a:bodyPr wrap="square" lIns="0" tIns="0" rIns="0" bIns="0" rtlCol="0" anchor="ctr"/>
-          <a:lstStyle/>
-          <a:p>
-            <a:pPr indent="0" marL="0">
-              <a:buNone/>
-            </a:pPr>
-            <a:r>
-              <a:rPr lang="en-US" sz="1300" dirty="0">
-                <a:solidFill>
-                  <a:srgbClr val="5E7681"/>
-                </a:solidFill>
-                <a:latin typeface="Meiryo" pitchFamily="34" charset="0"/>
-                <a:ea typeface="Meiryo" pitchFamily="34" charset="-122"/>
-                <a:cs typeface="Meiryo" pitchFamily="34" charset="-120"/>
-              </a:rPr>
-              <a:t>&lt; と &gt; の記号は消さない。心配ならコピーを残す。</a:t>
-            </a:r>
-            <a:endParaRPr lang="en-US" sz="1300" dirty="0"/>
-          </a:p>
-        </p:txBody>
-      </p:sp>
-      <p:sp>
-        <p:nvSpPr>
-          <p:cNvPr id="17" name="Text 15"/>
-          <p:cNvSpPr/>
-          <p:nvPr/>
-        </p:nvSpPr>
-        <p:spPr>
-          <a:xfrm>
-            <a:off x="685800" y="4736592"/>
-            <a:ext cx="457200" cy="365760"/>
-          </a:xfrm>
-          <a:prstGeom prst="rect">
-            <a:avLst/>
-          </a:prstGeom>
-          <a:noFill/>
-          <a:ln/>
-        </p:spPr>
-        <p:txBody>
-          <a:bodyPr wrap="square" lIns="0" tIns="0" rIns="0" bIns="0" rtlCol="0" anchor="ctr"/>
-          <a:lstStyle/>
-          <a:p>
-            <a:pPr indent="0" marL="0">
-              <a:buNone/>
-            </a:pPr>
-            <a:r>
-              <a:rPr lang="en-US" sz="2000" b="1" dirty="0">
-                <a:solidFill>
-                  <a:srgbClr val="DD8236"/>
-                </a:solidFill>
-                <a:latin typeface="Meiryo" pitchFamily="34" charset="0"/>
-                <a:ea typeface="Meiryo" pitchFamily="34" charset="-122"/>
-                <a:cs typeface="Meiryo" pitchFamily="34" charset="-120"/>
-              </a:rPr>
-              <a:t>⑤</a:t>
-            </a:r>
-            <a:endParaRPr lang="en-US" sz="2000" dirty="0"/>
-          </a:p>
-        </p:txBody>
-      </p:sp>
-      <p:sp>
-        <p:nvSpPr>
-          <p:cNvPr id="18" name="Text 16"/>
-          <p:cNvSpPr/>
-          <p:nvPr/>
-        </p:nvSpPr>
-        <p:spPr>
-          <a:xfrm>
-            <a:off x="1234440" y="4754880"/>
-            <a:ext cx="10058400" cy="329184"/>
-          </a:xfrm>
-          <a:prstGeom prst="rect">
-            <a:avLst/>
-          </a:prstGeom>
-          <a:noFill/>
-          <a:ln/>
-        </p:spPr>
-        <p:txBody>
-          <a:bodyPr wrap="square" lIns="0" tIns="0" rIns="0" bIns="0" rtlCol="0" anchor="ctr"/>
-          <a:lstStyle/>
-          <a:p>
-            <a:pPr indent="0" marL="0">
-              <a:buNone/>
-            </a:pPr>
-            <a:r>
-              <a:rPr lang="en-US" sz="1600" b="1" dirty="0">
-                <a:solidFill>
-                  <a:srgbClr val="264653"/>
-                </a:solidFill>
-                <a:latin typeface="Meiryo" pitchFamily="34" charset="0"/>
-                <a:ea typeface="Meiryo" pitchFamily="34" charset="-122"/>
-                <a:cs typeface="Meiryo" pitchFamily="34" charset="-120"/>
-              </a:rPr>
-              <a:t>保存 →「テーマを作る.ps1」を実行</a:t>
-            </a:r>
-            <a:endParaRPr lang="en-US" sz="1600" dirty="0"/>
-          </a:p>
-        </p:txBody>
-      </p:sp>
-      <p:sp>
-        <p:nvSpPr>
-          <p:cNvPr id="19" name="Text 17"/>
-          <p:cNvSpPr/>
-          <p:nvPr/>
-        </p:nvSpPr>
-        <p:spPr>
-          <a:xfrm>
-            <a:off x="1234440" y="5102352"/>
-            <a:ext cx="10058400" cy="310896"/>
-          </a:xfrm>
-          <a:prstGeom prst="rect">
-            <a:avLst/>
-          </a:prstGeom>
-          <a:noFill/>
-          <a:ln/>
-        </p:spPr>
-        <p:txBody>
-          <a:bodyPr wrap="square" lIns="0" tIns="0" rIns="0" bIns="0" rtlCol="0" anchor="ctr"/>
-          <a:lstStyle/>
-          <a:p>
-            <a:pPr indent="0" marL="0">
-              <a:buNone/>
-            </a:pPr>
-            <a:r>
-              <a:rPr lang="en-US" sz="1300" dirty="0">
-                <a:solidFill>
-                  <a:srgbClr val="5E7681"/>
-                </a:solidFill>
-                <a:latin typeface="Meiryo" pitchFamily="34" charset="0"/>
-                <a:ea typeface="Meiryo" pitchFamily="34" charset="-122"/>
-                <a:cs typeface="Meiryo" pitchFamily="34" charset="-120"/>
-              </a:rPr>
-              <a:t>右クリック →「PowerShell で実行」</a:t>
-            </a:r>
-            <a:endParaRPr lang="en-US" sz="1300" dirty="0"/>
-          </a:p>
-        </p:txBody>
-      </p:sp>
-      <p:sp>
-        <p:nvSpPr>
-          <p:cNvPr id="20" name="Text 18"/>
-          <p:cNvSpPr/>
-          <p:nvPr/>
-        </p:nvSpPr>
-        <p:spPr>
-          <a:xfrm>
-            <a:off x="685800" y="5486400"/>
-            <a:ext cx="457200" cy="365760"/>
-          </a:xfrm>
-          <a:prstGeom prst="rect">
-            <a:avLst/>
-          </a:prstGeom>
-          <a:noFill/>
-          <a:ln/>
-        </p:spPr>
-        <p:txBody>
-          <a:bodyPr wrap="square" lIns="0" tIns="0" rIns="0" bIns="0" rtlCol="0" anchor="ctr"/>
-          <a:lstStyle/>
-          <a:p>
-            <a:pPr indent="0" marL="0">
-              <a:buNone/>
-            </a:pPr>
-            <a:r>
-              <a:rPr lang="en-US" sz="2000" b="1" dirty="0">
-                <a:solidFill>
-                  <a:srgbClr val="DD8236"/>
-                </a:solidFill>
-                <a:latin typeface="Meiryo" pitchFamily="34" charset="0"/>
-                <a:ea typeface="Meiryo" pitchFamily="34" charset="-122"/>
-                <a:cs typeface="Meiryo" pitchFamily="34" charset="-120"/>
-              </a:rPr>
-              <a:t>⑥</a:t>
-            </a:r>
-            <a:endParaRPr lang="en-US" sz="2000" dirty="0"/>
-          </a:p>
-        </p:txBody>
-      </p:sp>
-      <p:sp>
-        <p:nvSpPr>
-          <p:cNvPr id="21" name="Text 19"/>
-          <p:cNvSpPr/>
-          <p:nvPr/>
-        </p:nvSpPr>
-        <p:spPr>
-          <a:xfrm>
-            <a:off x="1234440" y="5504688"/>
-            <a:ext cx="10058400" cy="329184"/>
-          </a:xfrm>
-          <a:prstGeom prst="rect">
-            <a:avLst/>
-          </a:prstGeom>
-          <a:noFill/>
-          <a:ln/>
-        </p:spPr>
-        <p:txBody>
-          <a:bodyPr wrap="square" lIns="0" tIns="0" rIns="0" bIns="0" rtlCol="0" anchor="ctr"/>
-          <a:lstStyle/>
-          <a:p>
-            <a:pPr indent="0" marL="0">
-              <a:buNone/>
-            </a:pPr>
-            <a:r>
-              <a:rPr lang="en-US" sz="1600" b="1" dirty="0">
-                <a:solidFill>
-                  <a:srgbClr val="264653"/>
-                </a:solidFill>
-                <a:latin typeface="Meiryo" pitchFamily="34" charset="0"/>
-                <a:ea typeface="Meiryo" pitchFamily="34" charset="-122"/>
-                <a:cs typeface="Meiryo" pitchFamily="34" charset="-120"/>
-              </a:rPr>
-              <a:t>WordPressにアップロード → Push origin</a:t>
-            </a:r>
-            <a:endParaRPr lang="en-US" sz="1600" dirty="0"/>
-          </a:p>
-        </p:txBody>
-      </p:sp>
-      <p:sp>
-        <p:nvSpPr>
-          <p:cNvPr id="22" name="Text 20"/>
-          <p:cNvSpPr/>
-          <p:nvPr/>
-        </p:nvSpPr>
-        <p:spPr>
-          <a:xfrm>
-            <a:off x="1234440" y="5852160"/>
-            <a:ext cx="10058400" cy="310896"/>
-          </a:xfrm>
-          <a:prstGeom prst="rect">
-            <a:avLst/>
-          </a:prstGeom>
-          <a:noFill/>
-          <a:ln/>
-        </p:spPr>
-        <p:txBody>
-          <a:bodyPr wrap="square" lIns="0" tIns="0" rIns="0" bIns="0" rtlCol="0" anchor="ctr"/>
-          <a:lstStyle/>
-          <a:p>
-            <a:pPr indent="0" marL="0">
-              <a:buNone/>
-            </a:pPr>
-            <a:r>
-              <a:rPr lang="en-US" sz="1300" dirty="0">
-                <a:solidFill>
-                  <a:srgbClr val="5E7681"/>
-                </a:solidFill>
-                <a:latin typeface="Meiryo" pitchFamily="34" charset="0"/>
-                <a:ea typeface="Meiryo" pitchFamily="34" charset="-122"/>
-                <a:cs typeface="Meiryo" pitchFamily="34" charset="-120"/>
-              </a:rPr>
-              <a:t>次のページへ</a:t>
-            </a:r>
-            <a:endParaRPr lang="en-US" sz="1300" dirty="0"/>
-          </a:p>
-        </p:txBody>
-      </p:sp>
-      <p:sp>
-        <p:nvSpPr>
-          <p:cNvPr id="23" name="Shape 21"/>
-          <p:cNvSpPr/>
-          <p:nvPr/>
-        </p:nvSpPr>
-        <p:spPr>
-          <a:xfrm>
-            <a:off x="640080" y="6263640"/>
-            <a:ext cx="0" cy="0"/>
-          </a:xfrm>
-          <a:prstGeom prst="roundRect">
-            <a:avLst/>
-          </a:prstGeom>
-          <a:solidFill>
-            <a:srgbClr val="FFFFFF"/>
-          </a:solidFill>
-          <a:ln/>
-        </p:spPr>
-      </p:sp>
-    </p:spTree>
-  </p:cSld>
-  <p:clrMapOvr>
-    <a:masterClrMapping/>
-  </p:clrMapOvr>
-</p:sld>
-</file>
-
 <file path=ppt/slides/slide12.xml><?xml version="1.0" encoding="utf-8"?>
 <p:sld xmlns:a="http://schemas.openxmlformats.org/drawingml/2006/main" xmlns:r="http://schemas.openxmlformats.org/officeDocument/2006/relationships" xmlns:p="http://schemas.openxmlformats.org/presentationml/2006/main">
   <p:cSld name="Slide 12">
@@ -5960,7 +5557,7 @@
                 <a:ea typeface="Meiryo" pitchFamily="34" charset="-122"/>
                 <a:cs typeface="Meiryo" pitchFamily="34" charset="-120"/>
               </a:rPr>
-              <a:t>【道B】文章が見つからないとき</a:t>
+              <a:t>【道B】例：「ASPATHについて」を直す</a:t>
             </a:r>
             <a:endParaRPr lang="en-US" sz="3200" dirty="0"/>
           </a:p>
@@ -5999,7 +5596,7 @@
                 <a:ea typeface="Meiryo" pitchFamily="34" charset="-122"/>
                 <a:cs typeface="Meiryo" pitchFamily="34" charset="-120"/>
               </a:rPr>
-              <a:t>丸ごとコピーして検索しても出てこないことがあります</a:t>
+              <a:t>文章の探し方まで</a:t>
             </a:r>
             <a:endParaRPr lang="en-US" sz="1500" dirty="0"/>
           </a:p>
@@ -6046,470 +5643,725 @@
       </p:sp>
       <p:sp>
         <p:nvSpPr>
-          <p:cNvPr id="5" name="Shape 3"/>
-          <p:cNvSpPr/>
-          <p:nvPr/>
-        </p:nvSpPr>
-        <p:spPr>
-          <a:xfrm>
-            <a:off x="640080" y="1737360"/>
-            <a:ext cx="10881360" cy="1737360"/>
+          <p:cNvPr id="5" name="Text 3"/>
+          <p:cNvSpPr/>
+          <p:nvPr/>
+        </p:nvSpPr>
+        <p:spPr>
+          <a:xfrm>
+            <a:off x="685800" y="1737360"/>
+            <a:ext cx="457200" cy="365760"/>
+          </a:xfrm>
+          <a:prstGeom prst="rect">
+            <a:avLst/>
+          </a:prstGeom>
+          <a:noFill/>
+          <a:ln/>
+        </p:spPr>
+        <p:txBody>
+          <a:bodyPr wrap="square" lIns="0" tIns="0" rIns="0" bIns="0" rtlCol="0" anchor="ctr"/>
+          <a:lstStyle/>
+          <a:p>
+            <a:pPr indent="0" marL="0">
+              <a:buNone/>
+            </a:pPr>
+            <a:r>
+              <a:rPr lang="en-US" sz="2000" b="1" dirty="0">
+                <a:solidFill>
+                  <a:srgbClr val="DD8236"/>
+                </a:solidFill>
+                <a:latin typeface="Meiryo" pitchFamily="34" charset="0"/>
+                <a:ea typeface="Meiryo" pitchFamily="34" charset="-122"/>
+                <a:cs typeface="Meiryo" pitchFamily="34" charset="-120"/>
+              </a:rPr>
+              <a:t>①</a:t>
+            </a:r>
+            <a:endParaRPr lang="en-US" sz="2000" dirty="0"/>
+          </a:p>
+        </p:txBody>
+      </p:sp>
+      <p:sp>
+        <p:nvSpPr>
+          <p:cNvPr id="6" name="Text 4"/>
+          <p:cNvSpPr/>
+          <p:nvPr/>
+        </p:nvSpPr>
+        <p:spPr>
+          <a:xfrm>
+            <a:off x="1234440" y="1755648"/>
+            <a:ext cx="10058400" cy="329184"/>
+          </a:xfrm>
+          <a:prstGeom prst="rect">
+            <a:avLst/>
+          </a:prstGeom>
+          <a:noFill/>
+          <a:ln/>
+        </p:spPr>
+        <p:txBody>
+          <a:bodyPr wrap="square" lIns="0" tIns="0" rIns="0" bIns="0" rtlCol="0" anchor="ctr"/>
+          <a:lstStyle/>
+          <a:p>
+            <a:pPr indent="0" marL="0">
+              <a:buNone/>
+            </a:pPr>
+            <a:r>
+              <a:rPr lang="en-US" sz="1600" b="1" dirty="0">
+                <a:solidFill>
+                  <a:srgbClr val="264653"/>
+                </a:solidFill>
+                <a:latin typeface="Meiryo" pitchFamily="34" charset="0"/>
+                <a:ea typeface="Meiryo" pitchFamily="34" charset="-122"/>
+                <a:cs typeface="Meiryo" pitchFamily="34" charset="-120"/>
+              </a:rPr>
+              <a:t>GitHub Desktop で Pull origin</a:t>
+            </a:r>
+            <a:endParaRPr lang="en-US" sz="1600" dirty="0"/>
+          </a:p>
+        </p:txBody>
+      </p:sp>
+      <p:sp>
+        <p:nvSpPr>
+          <p:cNvPr id="7" name="Text 5"/>
+          <p:cNvSpPr/>
+          <p:nvPr/>
+        </p:nvSpPr>
+        <p:spPr>
+          <a:xfrm>
+            <a:off x="1234440" y="2103120"/>
+            <a:ext cx="10058400" cy="310896"/>
+          </a:xfrm>
+          <a:prstGeom prst="rect">
+            <a:avLst/>
+          </a:prstGeom>
+          <a:noFill/>
+          <a:ln/>
+        </p:spPr>
+        <p:txBody>
+          <a:bodyPr wrap="square" lIns="0" tIns="0" rIns="0" bIns="0" rtlCol="0" anchor="ctr"/>
+          <a:lstStyle/>
+          <a:p>
+            <a:pPr indent="0" marL="0">
+              <a:buNone/>
+            </a:pPr>
+            <a:r>
+              <a:rPr lang="en-US" sz="1300" dirty="0">
+                <a:solidFill>
+                  <a:srgbClr val="5E7681"/>
+                </a:solidFill>
+                <a:latin typeface="Meiryo" pitchFamily="34" charset="0"/>
+                <a:ea typeface="Meiryo" pitchFamily="34" charset="-122"/>
+                <a:cs typeface="Meiryo" pitchFamily="34" charset="-120"/>
+              </a:rPr>
+              <a:t>先に他の人の変更を取り込む。飛ばすと衝突します。</a:t>
+            </a:r>
+            <a:endParaRPr lang="en-US" sz="1300" dirty="0"/>
+          </a:p>
+        </p:txBody>
+      </p:sp>
+      <p:sp>
+        <p:nvSpPr>
+          <p:cNvPr id="8" name="Text 6"/>
+          <p:cNvSpPr/>
+          <p:nvPr/>
+        </p:nvSpPr>
+        <p:spPr>
+          <a:xfrm>
+            <a:off x="685800" y="2487168"/>
+            <a:ext cx="457200" cy="365760"/>
+          </a:xfrm>
+          <a:prstGeom prst="rect">
+            <a:avLst/>
+          </a:prstGeom>
+          <a:noFill/>
+          <a:ln/>
+        </p:spPr>
+        <p:txBody>
+          <a:bodyPr wrap="square" lIns="0" tIns="0" rIns="0" bIns="0" rtlCol="0" anchor="ctr"/>
+          <a:lstStyle/>
+          <a:p>
+            <a:pPr indent="0" marL="0">
+              <a:buNone/>
+            </a:pPr>
+            <a:r>
+              <a:rPr lang="en-US" sz="2000" b="1" dirty="0">
+                <a:solidFill>
+                  <a:srgbClr val="DD8236"/>
+                </a:solidFill>
+                <a:latin typeface="Meiryo" pitchFamily="34" charset="0"/>
+                <a:ea typeface="Meiryo" pitchFamily="34" charset="-122"/>
+                <a:cs typeface="Meiryo" pitchFamily="34" charset="-120"/>
+              </a:rPr>
+              <a:t>②</a:t>
+            </a:r>
+            <a:endParaRPr lang="en-US" sz="2000" dirty="0"/>
+          </a:p>
+        </p:txBody>
+      </p:sp>
+      <p:sp>
+        <p:nvSpPr>
+          <p:cNvPr id="9" name="Text 7"/>
+          <p:cNvSpPr/>
+          <p:nvPr/>
+        </p:nvSpPr>
+        <p:spPr>
+          <a:xfrm>
+            <a:off x="1234440" y="2505456"/>
+            <a:ext cx="10058400" cy="329184"/>
+          </a:xfrm>
+          <a:prstGeom prst="rect">
+            <a:avLst/>
+          </a:prstGeom>
+          <a:noFill/>
+          <a:ln/>
+        </p:spPr>
+        <p:txBody>
+          <a:bodyPr wrap="square" lIns="0" tIns="0" rIns="0" bIns="0" rtlCol="0" anchor="ctr"/>
+          <a:lstStyle/>
+          <a:p>
+            <a:pPr indent="0" marL="0">
+              <a:buNone/>
+            </a:pPr>
+            <a:r>
+              <a:rPr lang="en-US" sz="1600" b="1" dirty="0">
+                <a:solidFill>
+                  <a:srgbClr val="264653"/>
+                </a:solidFill>
+                <a:latin typeface="Meiryo" pitchFamily="34" charset="0"/>
+                <a:ea typeface="Meiryo" pitchFamily="34" charset="-122"/>
+                <a:cs typeface="Meiryo" pitchFamily="34" charset="-120"/>
+              </a:rPr>
+              <a:t>about.html を開く</a:t>
+            </a:r>
+            <a:endParaRPr lang="en-US" sz="1600" dirty="0"/>
+          </a:p>
+        </p:txBody>
+      </p:sp>
+      <p:sp>
+        <p:nvSpPr>
+          <p:cNvPr id="10" name="Text 8"/>
+          <p:cNvSpPr/>
+          <p:nvPr/>
+        </p:nvSpPr>
+        <p:spPr>
+          <a:xfrm>
+            <a:off x="1234440" y="2852928"/>
+            <a:ext cx="10058400" cy="310896"/>
+          </a:xfrm>
+          <a:prstGeom prst="rect">
+            <a:avLst/>
+          </a:prstGeom>
+          <a:noFill/>
+          <a:ln/>
+        </p:spPr>
+        <p:txBody>
+          <a:bodyPr wrap="square" lIns="0" tIns="0" rIns="0" bIns="0" rtlCol="0" anchor="ctr"/>
+          <a:lstStyle/>
+          <a:p>
+            <a:pPr indent="0" marL="0">
+              <a:buNone/>
+            </a:pPr>
+            <a:r>
+              <a:rPr lang="en-US" sz="1300" dirty="0">
+                <a:solidFill>
+                  <a:srgbClr val="5E7681"/>
+                </a:solidFill>
+                <a:latin typeface="Meiryo" pitchFamily="34" charset="0"/>
+                <a:ea typeface="Meiryo" pitchFamily="34" charset="-122"/>
+                <a:cs typeface="Meiryo" pitchFamily="34" charset="-120"/>
+              </a:rPr>
+              <a:t>メモ帳でも可。VS Code が扱いやすいです。</a:t>
+            </a:r>
+            <a:endParaRPr lang="en-US" sz="1300" dirty="0"/>
+          </a:p>
+        </p:txBody>
+      </p:sp>
+      <p:sp>
+        <p:nvSpPr>
+          <p:cNvPr id="11" name="Text 9"/>
+          <p:cNvSpPr/>
+          <p:nvPr/>
+        </p:nvSpPr>
+        <p:spPr>
+          <a:xfrm>
+            <a:off x="685800" y="3236976"/>
+            <a:ext cx="457200" cy="365760"/>
+          </a:xfrm>
+          <a:prstGeom prst="rect">
+            <a:avLst/>
+          </a:prstGeom>
+          <a:noFill/>
+          <a:ln/>
+        </p:spPr>
+        <p:txBody>
+          <a:bodyPr wrap="square" lIns="0" tIns="0" rIns="0" bIns="0" rtlCol="0" anchor="ctr"/>
+          <a:lstStyle/>
+          <a:p>
+            <a:pPr indent="0" marL="0">
+              <a:buNone/>
+            </a:pPr>
+            <a:r>
+              <a:rPr lang="en-US" sz="2000" b="1" dirty="0">
+                <a:solidFill>
+                  <a:srgbClr val="DD8236"/>
+                </a:solidFill>
+                <a:latin typeface="Meiryo" pitchFamily="34" charset="0"/>
+                <a:ea typeface="Meiryo" pitchFamily="34" charset="-122"/>
+                <a:cs typeface="Meiryo" pitchFamily="34" charset="-120"/>
+              </a:rPr>
+              <a:t>③</a:t>
+            </a:r>
+            <a:endParaRPr lang="en-US" sz="2000" dirty="0"/>
+          </a:p>
+        </p:txBody>
+      </p:sp>
+      <p:sp>
+        <p:nvSpPr>
+          <p:cNvPr id="12" name="Text 10"/>
+          <p:cNvSpPr/>
+          <p:nvPr/>
+        </p:nvSpPr>
+        <p:spPr>
+          <a:xfrm>
+            <a:off x="1234440" y="3255264"/>
+            <a:ext cx="10058400" cy="329184"/>
+          </a:xfrm>
+          <a:prstGeom prst="rect">
+            <a:avLst/>
+          </a:prstGeom>
+          <a:noFill/>
+          <a:ln/>
+        </p:spPr>
+        <p:txBody>
+          <a:bodyPr wrap="square" lIns="0" tIns="0" rIns="0" bIns="0" rtlCol="0" anchor="ctr"/>
+          <a:lstStyle/>
+          <a:p>
+            <a:pPr indent="0" marL="0">
+              <a:buNone/>
+            </a:pPr>
+            <a:r>
+              <a:rPr lang="en-US" sz="1600" b="1" dirty="0">
+                <a:solidFill>
+                  <a:srgbClr val="264653"/>
+                </a:solidFill>
+                <a:latin typeface="Meiryo" pitchFamily="34" charset="0"/>
+                <a:ea typeface="Meiryo" pitchFamily="34" charset="-122"/>
+                <a:cs typeface="Meiryo" pitchFamily="34" charset="-120"/>
+              </a:rPr>
+              <a:t>Ctrl+F で文章の一部を検索</a:t>
+            </a:r>
+            <a:endParaRPr lang="en-US" sz="1600" dirty="0"/>
+          </a:p>
+        </p:txBody>
+      </p:sp>
+      <p:sp>
+        <p:nvSpPr>
+          <p:cNvPr id="13" name="Text 11"/>
+          <p:cNvSpPr/>
+          <p:nvPr/>
+        </p:nvSpPr>
+        <p:spPr>
+          <a:xfrm>
+            <a:off x="1234440" y="3602736"/>
+            <a:ext cx="10058400" cy="310896"/>
+          </a:xfrm>
+          <a:prstGeom prst="rect">
+            <a:avLst/>
+          </a:prstGeom>
+          <a:noFill/>
+          <a:ln/>
+        </p:spPr>
+        <p:txBody>
+          <a:bodyPr wrap="square" lIns="0" tIns="0" rIns="0" bIns="0" rtlCol="0" anchor="ctr"/>
+          <a:lstStyle/>
+          <a:p>
+            <a:pPr indent="0" marL="0">
+              <a:buNone/>
+            </a:pPr>
+            <a:r>
+              <a:rPr lang="en-US" sz="1300" dirty="0">
+                <a:solidFill>
+                  <a:srgbClr val="5E7681"/>
+                </a:solidFill>
+                <a:latin typeface="Meiryo" pitchFamily="34" charset="0"/>
+                <a:ea typeface="Meiryo" pitchFamily="34" charset="-122"/>
+                <a:cs typeface="Meiryo" pitchFamily="34" charset="-120"/>
+              </a:rPr>
+              <a:t>例：「一番初めに動かしにくさ」（10〜15文字で探す）</a:t>
+            </a:r>
+            <a:endParaRPr lang="en-US" sz="1300" dirty="0"/>
+          </a:p>
+        </p:txBody>
+      </p:sp>
+      <p:sp>
+        <p:nvSpPr>
+          <p:cNvPr id="14" name="Text 12"/>
+          <p:cNvSpPr/>
+          <p:nvPr/>
+        </p:nvSpPr>
+        <p:spPr>
+          <a:xfrm>
+            <a:off x="685800" y="3986784"/>
+            <a:ext cx="457200" cy="365760"/>
+          </a:xfrm>
+          <a:prstGeom prst="rect">
+            <a:avLst/>
+          </a:prstGeom>
+          <a:noFill/>
+          <a:ln/>
+        </p:spPr>
+        <p:txBody>
+          <a:bodyPr wrap="square" lIns="0" tIns="0" rIns="0" bIns="0" rtlCol="0" anchor="ctr"/>
+          <a:lstStyle/>
+          <a:p>
+            <a:pPr indent="0" marL="0">
+              <a:buNone/>
+            </a:pPr>
+            <a:r>
+              <a:rPr lang="en-US" sz="2000" b="1" dirty="0">
+                <a:solidFill>
+                  <a:srgbClr val="DD8236"/>
+                </a:solidFill>
+                <a:latin typeface="Meiryo" pitchFamily="34" charset="0"/>
+                <a:ea typeface="Meiryo" pitchFamily="34" charset="-122"/>
+                <a:cs typeface="Meiryo" pitchFamily="34" charset="-120"/>
+              </a:rPr>
+              <a:t>④</a:t>
+            </a:r>
+            <a:endParaRPr lang="en-US" sz="2000" dirty="0"/>
+          </a:p>
+        </p:txBody>
+      </p:sp>
+      <p:sp>
+        <p:nvSpPr>
+          <p:cNvPr id="15" name="Text 13"/>
+          <p:cNvSpPr/>
+          <p:nvPr/>
+        </p:nvSpPr>
+        <p:spPr>
+          <a:xfrm>
+            <a:off x="1234440" y="4005072"/>
+            <a:ext cx="10058400" cy="329184"/>
+          </a:xfrm>
+          <a:prstGeom prst="rect">
+            <a:avLst/>
+          </a:prstGeom>
+          <a:noFill/>
+          <a:ln/>
+        </p:spPr>
+        <p:txBody>
+          <a:bodyPr wrap="square" lIns="0" tIns="0" rIns="0" bIns="0" rtlCol="0" anchor="ctr"/>
+          <a:lstStyle/>
+          <a:p>
+            <a:pPr indent="0" marL="0">
+              <a:buNone/>
+            </a:pPr>
+            <a:r>
+              <a:rPr lang="en-US" sz="1600" b="1" dirty="0">
+                <a:solidFill>
+                  <a:srgbClr val="264653"/>
+                </a:solidFill>
+                <a:latin typeface="Meiryo" pitchFamily="34" charset="0"/>
+                <a:ea typeface="Meiryo" pitchFamily="34" charset="-122"/>
+                <a:cs typeface="Meiryo" pitchFamily="34" charset="-120"/>
+              </a:rPr>
+              <a:t>タグの間の文字だけ書き換える</a:t>
+            </a:r>
+            <a:endParaRPr lang="en-US" sz="1600" dirty="0"/>
+          </a:p>
+        </p:txBody>
+      </p:sp>
+      <p:sp>
+        <p:nvSpPr>
+          <p:cNvPr id="16" name="Text 14"/>
+          <p:cNvSpPr/>
+          <p:nvPr/>
+        </p:nvSpPr>
+        <p:spPr>
+          <a:xfrm>
+            <a:off x="1234440" y="4352544"/>
+            <a:ext cx="10058400" cy="310896"/>
+          </a:xfrm>
+          <a:prstGeom prst="rect">
+            <a:avLst/>
+          </a:prstGeom>
+          <a:noFill/>
+          <a:ln/>
+        </p:spPr>
+        <p:txBody>
+          <a:bodyPr wrap="square" lIns="0" tIns="0" rIns="0" bIns="0" rtlCol="0" anchor="ctr"/>
+          <a:lstStyle/>
+          <a:p>
+            <a:pPr indent="0" marL="0">
+              <a:buNone/>
+            </a:pPr>
+            <a:r>
+              <a:rPr lang="en-US" sz="1300" dirty="0">
+                <a:solidFill>
+                  <a:srgbClr val="5E7681"/>
+                </a:solidFill>
+                <a:latin typeface="Meiryo" pitchFamily="34" charset="0"/>
+                <a:ea typeface="Meiryo" pitchFamily="34" charset="-122"/>
+                <a:cs typeface="Meiryo" pitchFamily="34" charset="-120"/>
+              </a:rPr>
+              <a:t>&lt; と &gt; の記号は消さない。心配ならコピーを残す。</a:t>
+            </a:r>
+            <a:endParaRPr lang="en-US" sz="1300" dirty="0"/>
+          </a:p>
+        </p:txBody>
+      </p:sp>
+      <p:sp>
+        <p:nvSpPr>
+          <p:cNvPr id="17" name="Text 15"/>
+          <p:cNvSpPr/>
+          <p:nvPr/>
+        </p:nvSpPr>
+        <p:spPr>
+          <a:xfrm>
+            <a:off x="685800" y="4736592"/>
+            <a:ext cx="457200" cy="365760"/>
+          </a:xfrm>
+          <a:prstGeom prst="rect">
+            <a:avLst/>
+          </a:prstGeom>
+          <a:noFill/>
+          <a:ln/>
+        </p:spPr>
+        <p:txBody>
+          <a:bodyPr wrap="square" lIns="0" tIns="0" rIns="0" bIns="0" rtlCol="0" anchor="ctr"/>
+          <a:lstStyle/>
+          <a:p>
+            <a:pPr indent="0" marL="0">
+              <a:buNone/>
+            </a:pPr>
+            <a:r>
+              <a:rPr lang="en-US" sz="2000" b="1" dirty="0">
+                <a:solidFill>
+                  <a:srgbClr val="DD8236"/>
+                </a:solidFill>
+                <a:latin typeface="Meiryo" pitchFamily="34" charset="0"/>
+                <a:ea typeface="Meiryo" pitchFamily="34" charset="-122"/>
+                <a:cs typeface="Meiryo" pitchFamily="34" charset="-120"/>
+              </a:rPr>
+              <a:t>⑤</a:t>
+            </a:r>
+            <a:endParaRPr lang="en-US" sz="2000" dirty="0"/>
+          </a:p>
+        </p:txBody>
+      </p:sp>
+      <p:sp>
+        <p:nvSpPr>
+          <p:cNvPr id="18" name="Text 16"/>
+          <p:cNvSpPr/>
+          <p:nvPr/>
+        </p:nvSpPr>
+        <p:spPr>
+          <a:xfrm>
+            <a:off x="1234440" y="4754880"/>
+            <a:ext cx="10058400" cy="329184"/>
+          </a:xfrm>
+          <a:prstGeom prst="rect">
+            <a:avLst/>
+          </a:prstGeom>
+          <a:noFill/>
+          <a:ln/>
+        </p:spPr>
+        <p:txBody>
+          <a:bodyPr wrap="square" lIns="0" tIns="0" rIns="0" bIns="0" rtlCol="0" anchor="ctr"/>
+          <a:lstStyle/>
+          <a:p>
+            <a:pPr indent="0" marL="0">
+              <a:buNone/>
+            </a:pPr>
+            <a:r>
+              <a:rPr lang="en-US" sz="1600" b="1" dirty="0">
+                <a:solidFill>
+                  <a:srgbClr val="264653"/>
+                </a:solidFill>
+                <a:latin typeface="Meiryo" pitchFamily="34" charset="0"/>
+                <a:ea typeface="Meiryo" pitchFamily="34" charset="-122"/>
+                <a:cs typeface="Meiryo" pitchFamily="34" charset="-120"/>
+              </a:rPr>
+              <a:t>保存 →「テーマを作る.ps1」を実行</a:t>
+            </a:r>
+            <a:endParaRPr lang="en-US" sz="1600" dirty="0"/>
+          </a:p>
+        </p:txBody>
+      </p:sp>
+      <p:sp>
+        <p:nvSpPr>
+          <p:cNvPr id="19" name="Text 17"/>
+          <p:cNvSpPr/>
+          <p:nvPr/>
+        </p:nvSpPr>
+        <p:spPr>
+          <a:xfrm>
+            <a:off x="1234440" y="5102352"/>
+            <a:ext cx="10058400" cy="310896"/>
+          </a:xfrm>
+          <a:prstGeom prst="rect">
+            <a:avLst/>
+          </a:prstGeom>
+          <a:noFill/>
+          <a:ln/>
+        </p:spPr>
+        <p:txBody>
+          <a:bodyPr wrap="square" lIns="0" tIns="0" rIns="0" bIns="0" rtlCol="0" anchor="ctr"/>
+          <a:lstStyle/>
+          <a:p>
+            <a:pPr indent="0" marL="0">
+              <a:buNone/>
+            </a:pPr>
+            <a:r>
+              <a:rPr lang="en-US" sz="1300" dirty="0">
+                <a:solidFill>
+                  <a:srgbClr val="5E7681"/>
+                </a:solidFill>
+                <a:latin typeface="Meiryo" pitchFamily="34" charset="0"/>
+                <a:ea typeface="Meiryo" pitchFamily="34" charset="-122"/>
+                <a:cs typeface="Meiryo" pitchFamily="34" charset="-120"/>
+              </a:rPr>
+              <a:t>右クリック →「PowerShell で実行」</a:t>
+            </a:r>
+            <a:endParaRPr lang="en-US" sz="1300" dirty="0"/>
+          </a:p>
+        </p:txBody>
+      </p:sp>
+      <p:sp>
+        <p:nvSpPr>
+          <p:cNvPr id="20" name="Text 18"/>
+          <p:cNvSpPr/>
+          <p:nvPr/>
+        </p:nvSpPr>
+        <p:spPr>
+          <a:xfrm>
+            <a:off x="685800" y="5486400"/>
+            <a:ext cx="457200" cy="365760"/>
+          </a:xfrm>
+          <a:prstGeom prst="rect">
+            <a:avLst/>
+          </a:prstGeom>
+          <a:noFill/>
+          <a:ln/>
+        </p:spPr>
+        <p:txBody>
+          <a:bodyPr wrap="square" lIns="0" tIns="0" rIns="0" bIns="0" rtlCol="0" anchor="ctr"/>
+          <a:lstStyle/>
+          <a:p>
+            <a:pPr indent="0" marL="0">
+              <a:buNone/>
+            </a:pPr>
+            <a:r>
+              <a:rPr lang="en-US" sz="2000" b="1" dirty="0">
+                <a:solidFill>
+                  <a:srgbClr val="DD8236"/>
+                </a:solidFill>
+                <a:latin typeface="Meiryo" pitchFamily="34" charset="0"/>
+                <a:ea typeface="Meiryo" pitchFamily="34" charset="-122"/>
+                <a:cs typeface="Meiryo" pitchFamily="34" charset="-120"/>
+              </a:rPr>
+              <a:t>⑥</a:t>
+            </a:r>
+            <a:endParaRPr lang="en-US" sz="2000" dirty="0"/>
+          </a:p>
+        </p:txBody>
+      </p:sp>
+      <p:sp>
+        <p:nvSpPr>
+          <p:cNvPr id="21" name="Text 19"/>
+          <p:cNvSpPr/>
+          <p:nvPr/>
+        </p:nvSpPr>
+        <p:spPr>
+          <a:xfrm>
+            <a:off x="1234440" y="5504688"/>
+            <a:ext cx="10058400" cy="329184"/>
+          </a:xfrm>
+          <a:prstGeom prst="rect">
+            <a:avLst/>
+          </a:prstGeom>
+          <a:noFill/>
+          <a:ln/>
+        </p:spPr>
+        <p:txBody>
+          <a:bodyPr wrap="square" lIns="0" tIns="0" rIns="0" bIns="0" rtlCol="0" anchor="ctr"/>
+          <a:lstStyle/>
+          <a:p>
+            <a:pPr indent="0" marL="0">
+              <a:buNone/>
+            </a:pPr>
+            <a:r>
+              <a:rPr lang="en-US" sz="1600" b="1" dirty="0">
+                <a:solidFill>
+                  <a:srgbClr val="264653"/>
+                </a:solidFill>
+                <a:latin typeface="Meiryo" pitchFamily="34" charset="0"/>
+                <a:ea typeface="Meiryo" pitchFamily="34" charset="-122"/>
+                <a:cs typeface="Meiryo" pitchFamily="34" charset="-120"/>
+              </a:rPr>
+              <a:t>WordPressにアップロード → Push origin</a:t>
+            </a:r>
+            <a:endParaRPr lang="en-US" sz="1600" dirty="0"/>
+          </a:p>
+        </p:txBody>
+      </p:sp>
+      <p:sp>
+        <p:nvSpPr>
+          <p:cNvPr id="22" name="Text 20"/>
+          <p:cNvSpPr/>
+          <p:nvPr/>
+        </p:nvSpPr>
+        <p:spPr>
+          <a:xfrm>
+            <a:off x="1234440" y="5852160"/>
+            <a:ext cx="10058400" cy="310896"/>
+          </a:xfrm>
+          <a:prstGeom prst="rect">
+            <a:avLst/>
+          </a:prstGeom>
+          <a:noFill/>
+          <a:ln/>
+        </p:spPr>
+        <p:txBody>
+          <a:bodyPr wrap="square" lIns="0" tIns="0" rIns="0" bIns="0" rtlCol="0" anchor="ctr"/>
+          <a:lstStyle/>
+          <a:p>
+            <a:pPr indent="0" marL="0">
+              <a:buNone/>
+            </a:pPr>
+            <a:r>
+              <a:rPr lang="en-US" sz="1300" dirty="0">
+                <a:solidFill>
+                  <a:srgbClr val="5E7681"/>
+                </a:solidFill>
+                <a:latin typeface="Meiryo" pitchFamily="34" charset="0"/>
+                <a:ea typeface="Meiryo" pitchFamily="34" charset="-122"/>
+                <a:cs typeface="Meiryo" pitchFamily="34" charset="-120"/>
+              </a:rPr>
+              <a:t>次のページへ</a:t>
+            </a:r>
+            <a:endParaRPr lang="en-US" sz="1300" dirty="0"/>
+          </a:p>
+        </p:txBody>
+      </p:sp>
+      <p:sp>
+        <p:nvSpPr>
+          <p:cNvPr id="23" name="Shape 21"/>
+          <p:cNvSpPr/>
+          <p:nvPr/>
+        </p:nvSpPr>
+        <p:spPr>
+          <a:xfrm>
+            <a:off x="640080" y="6263640"/>
+            <a:ext cx="0" cy="0"/>
           </a:xfrm>
           <a:prstGeom prst="roundRect">
-            <a:avLst>
-              <a:gd name="adj" fmla="val 6316"/>
-            </a:avLst>
+            <a:avLst/>
           </a:prstGeom>
           <a:solidFill>
-            <a:srgbClr val="F6F7F8"/>
+            <a:srgbClr val="FFFFFF"/>
           </a:solidFill>
           <a:ln/>
         </p:spPr>
-      </p:sp>
-      <p:sp>
-        <p:nvSpPr>
-          <p:cNvPr id="6" name="Text 4"/>
-          <p:cNvSpPr/>
-          <p:nvPr/>
-        </p:nvSpPr>
-        <p:spPr>
-          <a:xfrm>
-            <a:off x="914400" y="1920240"/>
-            <a:ext cx="10332720" cy="320040"/>
-          </a:xfrm>
-          <a:prstGeom prst="rect">
-            <a:avLst/>
-          </a:prstGeom>
-          <a:noFill/>
-          <a:ln/>
-        </p:spPr>
-        <p:txBody>
-          <a:bodyPr wrap="square" lIns="0" tIns="0" rIns="0" bIns="0" rtlCol="0" anchor="ctr"/>
-          <a:lstStyle/>
-          <a:p>
-            <a:pPr indent="0" marL="0">
-              <a:buNone/>
-            </a:pPr>
-            <a:r>
-              <a:rPr lang="en-US" sz="1500" b="1" dirty="0">
-                <a:solidFill>
-                  <a:srgbClr val="5E7681"/>
-                </a:solidFill>
-                <a:latin typeface="Meiryo" pitchFamily="34" charset="0"/>
-                <a:ea typeface="Meiryo" pitchFamily="34" charset="-122"/>
-                <a:cs typeface="Meiryo" pitchFamily="34" charset="-120"/>
-              </a:rPr>
-              <a:t>ファイルの中では、こう書かれています</a:t>
-            </a:r>
-            <a:endParaRPr lang="en-US" sz="1500" dirty="0"/>
-          </a:p>
-        </p:txBody>
-      </p:sp>
-      <p:sp>
-        <p:nvSpPr>
-          <p:cNvPr id="7" name="Text 5"/>
-          <p:cNvSpPr/>
-          <p:nvPr/>
-        </p:nvSpPr>
-        <p:spPr>
-          <a:xfrm>
-            <a:off x="914400" y="2331720"/>
-            <a:ext cx="10332720" cy="914400"/>
-          </a:xfrm>
-          <a:prstGeom prst="rect">
-            <a:avLst/>
-          </a:prstGeom>
-          <a:noFill/>
-          <a:ln/>
-        </p:spPr>
-        <p:txBody>
-          <a:bodyPr wrap="square" lIns="0" tIns="0" rIns="0" bIns="0" rtlCol="0" anchor="ctr"/>
-          <a:lstStyle/>
-          <a:p>
-            <a:pPr indent="0" marL="0">
-              <a:lnSpc>
-                <a:spcPts val="2200"/>
-              </a:lnSpc>
-              <a:buNone/>
-            </a:pPr>
-            <a:r>
-              <a:rPr lang="en-US" sz="1400" dirty="0">
-                <a:solidFill>
-                  <a:srgbClr val="1E2D34"/>
-                </a:solidFill>
-                <a:latin typeface="Consolas" pitchFamily="34" charset="0"/>
-                <a:ea typeface="Consolas" pitchFamily="34" charset="-122"/>
-                <a:cs typeface="Consolas" pitchFamily="34" charset="-120"/>
-              </a:rPr>
-              <a:t>&lt;p class="tr-p"&gt;&lt;span class="nw"&gt;パーキンソン病&lt;/span&gt;において、多くの方が一番初めに動かしにくさを感じるのが……&lt;/p&gt;</a:t>
-            </a:r>
-            <a:endParaRPr lang="en-US" sz="1400" dirty="0"/>
-          </a:p>
-        </p:txBody>
-      </p:sp>
-      <p:sp>
-        <p:nvSpPr>
-          <p:cNvPr id="8" name="Shape 6"/>
-          <p:cNvSpPr/>
-          <p:nvPr/>
-        </p:nvSpPr>
-        <p:spPr>
-          <a:xfrm>
-            <a:off x="640080" y="3657600"/>
-            <a:ext cx="5303520" cy="2194560"/>
-          </a:xfrm>
-          <a:prstGeom prst="roundRect">
-            <a:avLst>
-              <a:gd name="adj" fmla="val 5000"/>
-            </a:avLst>
-          </a:prstGeom>
-          <a:solidFill>
-            <a:srgbClr val="FFF4EA"/>
-          </a:solidFill>
-          <a:ln/>
-        </p:spPr>
-      </p:sp>
-      <p:sp>
-        <p:nvSpPr>
-          <p:cNvPr id="9" name="Text 7"/>
-          <p:cNvSpPr/>
-          <p:nvPr/>
-        </p:nvSpPr>
-        <p:spPr>
-          <a:xfrm>
-            <a:off x="914400" y="3840480"/>
-            <a:ext cx="4754880" cy="320040"/>
-          </a:xfrm>
-          <a:prstGeom prst="rect">
-            <a:avLst/>
-          </a:prstGeom>
-          <a:noFill/>
-          <a:ln/>
-        </p:spPr>
-        <p:txBody>
-          <a:bodyPr wrap="square" lIns="0" tIns="0" rIns="0" bIns="0" rtlCol="0" anchor="ctr"/>
-          <a:lstStyle/>
-          <a:p>
-            <a:pPr indent="0" marL="0">
-              <a:buNone/>
-            </a:pPr>
-            <a:r>
-              <a:rPr lang="en-US" sz="1700" b="1" dirty="0">
-                <a:solidFill>
-                  <a:srgbClr val="B85042"/>
-                </a:solidFill>
-                <a:latin typeface="Meiryo" pitchFamily="34" charset="0"/>
-                <a:ea typeface="Meiryo" pitchFamily="34" charset="-122"/>
-                <a:cs typeface="Meiryo" pitchFamily="34" charset="-120"/>
-              </a:rPr>
-              <a:t>なぜ見つからないのか</a:t>
-            </a:r>
-            <a:endParaRPr lang="en-US" sz="1700" dirty="0"/>
-          </a:p>
-        </p:txBody>
-      </p:sp>
-      <p:sp>
-        <p:nvSpPr>
-          <p:cNvPr id="10" name="Text 8"/>
-          <p:cNvSpPr/>
-          <p:nvPr/>
-        </p:nvSpPr>
-        <p:spPr>
-          <a:xfrm>
-            <a:off x="914400" y="4251960"/>
-            <a:ext cx="4846320" cy="1463040"/>
-          </a:xfrm>
-          <a:prstGeom prst="rect">
-            <a:avLst/>
-          </a:prstGeom>
-          <a:noFill/>
-          <a:ln/>
-        </p:spPr>
-        <p:txBody>
-          <a:bodyPr wrap="square" lIns="0" tIns="0" rIns="0" bIns="0" rtlCol="0" anchor="ctr"/>
-          <a:lstStyle/>
-          <a:p>
-            <a:pPr indent="0" marL="0">
-              <a:lnSpc>
-                <a:spcPts val="1900"/>
-              </a:lnSpc>
-              <a:buNone/>
-            </a:pPr>
-            <a:r>
-              <a:rPr lang="en-US" sz="1300" dirty="0">
-                <a:solidFill>
-                  <a:srgbClr val="1E2D34"/>
-                </a:solidFill>
-                <a:latin typeface="Meiryo" pitchFamily="34" charset="0"/>
-                <a:ea typeface="Meiryo" pitchFamily="34" charset="-122"/>
-                <a:cs typeface="Meiryo" pitchFamily="34" charset="-120"/>
-              </a:rPr>
-              <a:t>途中に &lt;span class="nw"&gt;…&lt;/span&gt; が</a:t>
-            </a:r>
-            <a:endParaRPr lang="en-US" sz="1300" dirty="0"/>
-          </a:p>
-          <a:p>
-            <a:pPr indent="0" marL="0">
-              <a:lnSpc>
-                <a:spcPts val="1900"/>
-              </a:lnSpc>
-              <a:buNone/>
-            </a:pPr>
-            <a:r>
-              <a:rPr lang="en-US" sz="1300" dirty="0">
-                <a:solidFill>
-                  <a:srgbClr val="1E2D34"/>
-                </a:solidFill>
-                <a:latin typeface="Meiryo" pitchFamily="34" charset="0"/>
-                <a:ea typeface="Meiryo" pitchFamily="34" charset="-122"/>
-                <a:cs typeface="Meiryo" pitchFamily="34" charset="-120"/>
-              </a:rPr>
-              <a:t>挟まっているためです。</a:t>
-            </a:r>
-            <a:endParaRPr lang="en-US" sz="1300" dirty="0"/>
-          </a:p>
-          <a:p>
-            <a:pPr indent="0" marL="0">
-              <a:lnSpc>
-                <a:spcPts val="1900"/>
-              </a:lnSpc>
-              <a:buNone/>
-            </a:pPr>
-            <a:endParaRPr lang="en-US" sz="1300" dirty="0"/>
-          </a:p>
-          <a:p>
-            <a:pPr indent="0" marL="0">
-              <a:lnSpc>
-                <a:spcPts val="1900"/>
-              </a:lnSpc>
-              <a:buNone/>
-            </a:pPr>
-            <a:r>
-              <a:rPr lang="en-US" sz="1300" dirty="0">
-                <a:solidFill>
-                  <a:srgbClr val="1E2D34"/>
-                </a:solidFill>
-                <a:latin typeface="Meiryo" pitchFamily="34" charset="0"/>
-                <a:ea typeface="Meiryo" pitchFamily="34" charset="-122"/>
-                <a:cs typeface="Meiryo" pitchFamily="34" charset="-120"/>
-              </a:rPr>
-              <a:t>「パーキンソン病」のような語が</a:t>
-            </a:r>
-            <a:endParaRPr lang="en-US" sz="1300" dirty="0"/>
-          </a:p>
-          <a:p>
-            <a:pPr indent="0" marL="0">
-              <a:lnSpc>
-                <a:spcPts val="1900"/>
-              </a:lnSpc>
-              <a:buNone/>
-            </a:pPr>
-            <a:r>
-              <a:rPr lang="en-US" sz="1300" dirty="0">
-                <a:solidFill>
-                  <a:srgbClr val="1E2D34"/>
-                </a:solidFill>
-                <a:latin typeface="Meiryo" pitchFamily="34" charset="0"/>
-                <a:ea typeface="Meiryo" pitchFamily="34" charset="-122"/>
-                <a:cs typeface="Meiryo" pitchFamily="34" charset="-120"/>
-              </a:rPr>
-              <a:t>変な位置で改行されないための印。</a:t>
-            </a:r>
-            <a:endParaRPr lang="en-US" sz="1300" dirty="0"/>
-          </a:p>
-          <a:p>
-            <a:pPr indent="0" marL="0">
-              <a:lnSpc>
-                <a:spcPts val="1900"/>
-              </a:lnSpc>
-              <a:buNone/>
-            </a:pPr>
-            <a:r>
-              <a:rPr lang="en-US" sz="1300" dirty="0">
-                <a:solidFill>
-                  <a:srgbClr val="1E2D34"/>
-                </a:solidFill>
-                <a:latin typeface="Meiryo" pitchFamily="34" charset="0"/>
-                <a:ea typeface="Meiryo" pitchFamily="34" charset="-122"/>
-                <a:cs typeface="Meiryo" pitchFamily="34" charset="-120"/>
-              </a:rPr>
-              <a:t>消してはいけません。</a:t>
-            </a:r>
-            <a:endParaRPr lang="en-US" sz="1300" dirty="0"/>
-          </a:p>
-        </p:txBody>
-      </p:sp>
-      <p:sp>
-        <p:nvSpPr>
-          <p:cNvPr id="11" name="Shape 9"/>
-          <p:cNvSpPr/>
-          <p:nvPr/>
-        </p:nvSpPr>
-        <p:spPr>
-          <a:xfrm>
-            <a:off x="6217920" y="3657600"/>
-            <a:ext cx="5303520" cy="2194560"/>
-          </a:xfrm>
-          <a:prstGeom prst="roundRect">
-            <a:avLst>
-              <a:gd name="adj" fmla="val 5000"/>
-            </a:avLst>
-          </a:prstGeom>
-          <a:solidFill>
-            <a:srgbClr val="EDF6EE"/>
-          </a:solidFill>
-          <a:ln/>
-        </p:spPr>
-      </p:sp>
-      <p:sp>
-        <p:nvSpPr>
-          <p:cNvPr id="12" name="Text 10"/>
-          <p:cNvSpPr/>
-          <p:nvPr/>
-        </p:nvSpPr>
-        <p:spPr>
-          <a:xfrm>
-            <a:off x="6492240" y="3840480"/>
-            <a:ext cx="4754880" cy="320040"/>
-          </a:xfrm>
-          <a:prstGeom prst="rect">
-            <a:avLst/>
-          </a:prstGeom>
-          <a:noFill/>
-          <a:ln/>
-        </p:spPr>
-        <p:txBody>
-          <a:bodyPr wrap="square" lIns="0" tIns="0" rIns="0" bIns="0" rtlCol="0" anchor="ctr"/>
-          <a:lstStyle/>
-          <a:p>
-            <a:pPr indent="0" marL="0">
-              <a:buNone/>
-            </a:pPr>
-            <a:r>
-              <a:rPr lang="en-US" sz="1700" b="1" dirty="0">
-                <a:solidFill>
-                  <a:srgbClr val="2E7D32"/>
-                </a:solidFill>
-                <a:latin typeface="Meiryo" pitchFamily="34" charset="0"/>
-                <a:ea typeface="Meiryo" pitchFamily="34" charset="-122"/>
-                <a:cs typeface="Meiryo" pitchFamily="34" charset="-120"/>
-              </a:rPr>
-              <a:t>探すコツ</a:t>
-            </a:r>
-            <a:endParaRPr lang="en-US" sz="1700" dirty="0"/>
-          </a:p>
-        </p:txBody>
-      </p:sp>
-      <p:sp>
-        <p:nvSpPr>
-          <p:cNvPr id="13" name="Text 11"/>
-          <p:cNvSpPr/>
-          <p:nvPr/>
-        </p:nvSpPr>
-        <p:spPr>
-          <a:xfrm>
-            <a:off x="6492240" y="4251960"/>
-            <a:ext cx="4846320" cy="1463040"/>
-          </a:xfrm>
-          <a:prstGeom prst="rect">
-            <a:avLst/>
-          </a:prstGeom>
-          <a:noFill/>
-          <a:ln/>
-        </p:spPr>
-        <p:txBody>
-          <a:bodyPr wrap="square" lIns="0" tIns="0" rIns="0" bIns="0" rtlCol="0" anchor="ctr"/>
-          <a:lstStyle/>
-          <a:p>
-            <a:pPr indent="0" marL="0">
-              <a:lnSpc>
-                <a:spcPts val="1900"/>
-              </a:lnSpc>
-              <a:buNone/>
-            </a:pPr>
-            <a:r>
-              <a:rPr lang="en-US" sz="1300" dirty="0">
-                <a:solidFill>
-                  <a:srgbClr val="1E2D34"/>
-                </a:solidFill>
-                <a:latin typeface="Meiryo" pitchFamily="34" charset="0"/>
-                <a:ea typeface="Meiryo" pitchFamily="34" charset="-122"/>
-                <a:cs typeface="Meiryo" pitchFamily="34" charset="-120"/>
-              </a:rPr>
-              <a:t>10〜15文字くらいの、</a:t>
-            </a:r>
-            <a:endParaRPr lang="en-US" sz="1300" dirty="0"/>
-          </a:p>
-          <a:p>
-            <a:pPr indent="0" marL="0">
-              <a:lnSpc>
-                <a:spcPts val="1900"/>
-              </a:lnSpc>
-              <a:buNone/>
-            </a:pPr>
-            <a:r>
-              <a:rPr lang="en-US" sz="1300" dirty="0">
-                <a:solidFill>
-                  <a:srgbClr val="1E2D34"/>
-                </a:solidFill>
-                <a:latin typeface="Meiryo" pitchFamily="34" charset="0"/>
-                <a:ea typeface="Meiryo" pitchFamily="34" charset="-122"/>
-                <a:cs typeface="Meiryo" pitchFamily="34" charset="-120"/>
-              </a:rPr>
-              <a:t>記号を含まない部分で検索する。</a:t>
-            </a:r>
-            <a:endParaRPr lang="en-US" sz="1300" dirty="0"/>
-          </a:p>
-          <a:p>
-            <a:pPr indent="0" marL="0">
-              <a:lnSpc>
-                <a:spcPts val="1900"/>
-              </a:lnSpc>
-              <a:buNone/>
-            </a:pPr>
-            <a:endParaRPr lang="en-US" sz="1300" dirty="0"/>
-          </a:p>
-          <a:p>
-            <a:pPr indent="0" marL="0">
-              <a:lnSpc>
-                <a:spcPts val="1900"/>
-              </a:lnSpc>
-              <a:buNone/>
-            </a:pPr>
-            <a:r>
-              <a:rPr lang="en-US" sz="1300" dirty="0">
-                <a:solidFill>
-                  <a:srgbClr val="1E2D34"/>
-                </a:solidFill>
-                <a:latin typeface="Meiryo" pitchFamily="34" charset="0"/>
-                <a:ea typeface="Meiryo" pitchFamily="34" charset="-122"/>
-                <a:cs typeface="Meiryo" pitchFamily="34" charset="-120"/>
-              </a:rPr>
-              <a:t>○ 一番初めに動かしにくさ</a:t>
-            </a:r>
-            <a:endParaRPr lang="en-US" sz="1300" dirty="0"/>
-          </a:p>
-          <a:p>
-            <a:pPr indent="0" marL="0">
-              <a:lnSpc>
-                <a:spcPts val="1900"/>
-              </a:lnSpc>
-              <a:buNone/>
-            </a:pPr>
-            <a:r>
-              <a:rPr lang="en-US" sz="1300" dirty="0">
-                <a:solidFill>
-                  <a:srgbClr val="1E2D34"/>
-                </a:solidFill>
-                <a:latin typeface="Meiryo" pitchFamily="34" charset="0"/>
-                <a:ea typeface="Meiryo" pitchFamily="34" charset="-122"/>
-                <a:cs typeface="Meiryo" pitchFamily="34" charset="-120"/>
-              </a:rPr>
-              <a:t>× パーキンソン病において、多くの方が</a:t>
-            </a:r>
-            <a:endParaRPr lang="en-US" sz="1300" dirty="0"/>
-          </a:p>
-        </p:txBody>
       </p:sp>
     </p:spTree>
   </p:cSld>
@@ -6576,7 +6428,7 @@
                 <a:ea typeface="Meiryo" pitchFamily="34" charset="-122"/>
                 <a:cs typeface="Meiryo" pitchFamily="34" charset="-120"/>
               </a:rPr>
-              <a:t>【道B】テーマをアップロードする</a:t>
+              <a:t>【道B】文章が見つからないとき</a:t>
             </a:r>
             <a:endParaRPr lang="en-US" sz="3200" dirty="0"/>
           </a:p>
@@ -6615,7 +6467,7 @@
                 <a:ea typeface="Meiryo" pitchFamily="34" charset="-122"/>
                 <a:cs typeface="Meiryo" pitchFamily="34" charset="-120"/>
               </a:rPr>
-              <a:t>外観 → テーマ → 新規追加 → テーマのアップロード</a:t>
+              <a:t>丸ごとコピーして検索しても出てこないことがあります</a:t>
             </a:r>
             <a:endParaRPr lang="en-US" sz="1500" dirty="0"/>
           </a:p>
@@ -6660,40 +6512,77 @@
           </a:p>
         </p:txBody>
       </p:sp>
-      <p:pic>
-        <p:nvPicPr>
-          <p:cNvPr id="5" name="Image 0" descr="/sessions/compassionate-sweet-heisenberg/mnt/dev-aspath-life-main/_wp移行素材/★引継ぎ資料/画像/05_テーマのアップロード.jpg">    </p:cNvPr>
-          <p:cNvPicPr>
-            <a:picLocks noChangeAspect="1"/>
-          </p:cNvPicPr>
-          <p:nvPr/>
-        </p:nvPicPr>
-        <p:blipFill>
-          <a:blip r:embed="rId1"/>
-          <a:stretch>
-            <a:fillRect/>
-          </a:stretch>
-        </p:blipFill>
-        <p:spPr>
-          <a:xfrm>
-            <a:off x="640080" y="1691640"/>
-            <a:ext cx="6766560" cy="3296972"/>
-          </a:xfrm>
-          <a:prstGeom prst="rect">
-            <a:avLst/>
-          </a:prstGeom>
-        </p:spPr>
-      </p:pic>
-      <p:sp>
-        <p:nvSpPr>
-          <p:cNvPr id="6" name="Text 3"/>
-          <p:cNvSpPr/>
-          <p:nvPr/>
-        </p:nvSpPr>
-        <p:spPr>
-          <a:xfrm>
-            <a:off x="7772400" y="1783080"/>
-            <a:ext cx="3840480" cy="731520"/>
+      <p:sp>
+        <p:nvSpPr>
+          <p:cNvPr id="5" name="Shape 3"/>
+          <p:cNvSpPr/>
+          <p:nvPr/>
+        </p:nvSpPr>
+        <p:spPr>
+          <a:xfrm>
+            <a:off x="640080" y="1737360"/>
+            <a:ext cx="10881360" cy="1737360"/>
+          </a:xfrm>
+          <a:prstGeom prst="roundRect">
+            <a:avLst>
+              <a:gd name="adj" fmla="val 6316"/>
+            </a:avLst>
+          </a:prstGeom>
+          <a:solidFill>
+            <a:srgbClr val="F6F7F8"/>
+          </a:solidFill>
+          <a:ln/>
+        </p:spPr>
+      </p:sp>
+      <p:sp>
+        <p:nvSpPr>
+          <p:cNvPr id="6" name="Text 4"/>
+          <p:cNvSpPr/>
+          <p:nvPr/>
+        </p:nvSpPr>
+        <p:spPr>
+          <a:xfrm>
+            <a:off x="914400" y="1920240"/>
+            <a:ext cx="10332720" cy="320040"/>
+          </a:xfrm>
+          <a:prstGeom prst="rect">
+            <a:avLst/>
+          </a:prstGeom>
+          <a:noFill/>
+          <a:ln/>
+        </p:spPr>
+        <p:txBody>
+          <a:bodyPr wrap="square" lIns="0" tIns="0" rIns="0" bIns="0" rtlCol="0" anchor="ctr"/>
+          <a:lstStyle/>
+          <a:p>
+            <a:pPr indent="0" marL="0">
+              <a:buNone/>
+            </a:pPr>
+            <a:r>
+              <a:rPr lang="en-US" sz="1500" b="1" dirty="0">
+                <a:solidFill>
+                  <a:srgbClr val="5E7681"/>
+                </a:solidFill>
+                <a:latin typeface="Meiryo" pitchFamily="34" charset="0"/>
+                <a:ea typeface="Meiryo" pitchFamily="34" charset="-122"/>
+                <a:cs typeface="Meiryo" pitchFamily="34" charset="-120"/>
+              </a:rPr>
+              <a:t>ファイルの中では、こう書かれています</a:t>
+            </a:r>
+            <a:endParaRPr lang="en-US" sz="1500" dirty="0"/>
+          </a:p>
+        </p:txBody>
+      </p:sp>
+      <p:sp>
+        <p:nvSpPr>
+          <p:cNvPr id="7" name="Text 5"/>
+          <p:cNvSpPr/>
+          <p:nvPr/>
+        </p:nvSpPr>
+        <p:spPr>
+          <a:xfrm>
+            <a:off x="914400" y="2331720"/>
+            <a:ext cx="10332720" cy="914400"/>
           </a:xfrm>
           <a:prstGeom prst="rect">
             <a:avLst/>
@@ -6707,59 +6596,39 @@
           <a:p>
             <a:pPr indent="0" marL="0">
               <a:lnSpc>
-                <a:spcPts val="2400"/>
+                <a:spcPts val="2200"/>
               </a:lnSpc>
               <a:buNone/>
             </a:pPr>
             <a:r>
-              <a:rPr lang="en-US" sz="1600" b="1" dirty="0">
-                <a:solidFill>
-                  <a:srgbClr val="264653"/>
-                </a:solidFill>
-                <a:latin typeface="Meiryo" pitchFamily="34" charset="0"/>
-                <a:ea typeface="Meiryo" pitchFamily="34" charset="-122"/>
-                <a:cs typeface="Meiryo" pitchFamily="34" charset="-120"/>
-              </a:rPr>
-              <a:t>aspath-theme.zip を選び</a:t>
-            </a:r>
-            <a:endParaRPr lang="en-US" sz="1600" dirty="0"/>
-          </a:p>
-          <a:p>
-            <a:pPr indent="0" marL="0">
-              <a:lnSpc>
-                <a:spcPts val="2400"/>
-              </a:lnSpc>
-              <a:buNone/>
-            </a:pPr>
-            <a:r>
-              <a:rPr lang="en-US" sz="1600" b="1" dirty="0">
-                <a:solidFill>
-                  <a:srgbClr val="264653"/>
-                </a:solidFill>
-                <a:latin typeface="Meiryo" pitchFamily="34" charset="0"/>
-                <a:ea typeface="Meiryo" pitchFamily="34" charset="-122"/>
-                <a:cs typeface="Meiryo" pitchFamily="34" charset="-120"/>
-              </a:rPr>
-              <a:t>「既存のものを置き換える」</a:t>
-            </a:r>
-            <a:endParaRPr lang="en-US" sz="1600" dirty="0"/>
-          </a:p>
-        </p:txBody>
-      </p:sp>
-      <p:sp>
-        <p:nvSpPr>
-          <p:cNvPr id="7" name="Shape 4"/>
-          <p:cNvSpPr/>
-          <p:nvPr/>
-        </p:nvSpPr>
-        <p:spPr>
-          <a:xfrm>
-            <a:off x="7726680" y="2697480"/>
-            <a:ext cx="3840480" cy="1188720"/>
+              <a:rPr lang="en-US" sz="1400" dirty="0">
+                <a:solidFill>
+                  <a:srgbClr val="1E2D34"/>
+                </a:solidFill>
+                <a:latin typeface="Consolas" pitchFamily="34" charset="0"/>
+                <a:ea typeface="Consolas" pitchFamily="34" charset="-122"/>
+                <a:cs typeface="Consolas" pitchFamily="34" charset="-120"/>
+              </a:rPr>
+              <a:t>&lt;p class="tr-p"&gt;&lt;span class="nw"&gt;パーキンソン病&lt;/span&gt;において、多くの方が一番初めに動かしにくさを感じるのが……&lt;/p&gt;</a:t>
+            </a:r>
+            <a:endParaRPr lang="en-US" sz="1400" dirty="0"/>
+          </a:p>
+        </p:txBody>
+      </p:sp>
+      <p:sp>
+        <p:nvSpPr>
+          <p:cNvPr id="8" name="Shape 6"/>
+          <p:cNvSpPr/>
+          <p:nvPr/>
+        </p:nvSpPr>
+        <p:spPr>
+          <a:xfrm>
+            <a:off x="640080" y="3657600"/>
+            <a:ext cx="5303520" cy="2194560"/>
           </a:xfrm>
           <a:prstGeom prst="roundRect">
             <a:avLst>
-              <a:gd name="adj" fmla="val 7692"/>
+              <a:gd name="adj" fmla="val 5000"/>
             </a:avLst>
           </a:prstGeom>
           <a:solidFill>
@@ -6770,14 +6639,14 @@
       </p:sp>
       <p:sp>
         <p:nvSpPr>
-          <p:cNvPr id="8" name="Text 5"/>
-          <p:cNvSpPr/>
-          <p:nvPr/>
-        </p:nvSpPr>
-        <p:spPr>
-          <a:xfrm>
-            <a:off x="7955280" y="2971800"/>
-            <a:ext cx="3566160" cy="731520"/>
+          <p:cNvPr id="9" name="Text 7"/>
+          <p:cNvSpPr/>
+          <p:nvPr/>
+        </p:nvSpPr>
+        <p:spPr>
+          <a:xfrm>
+            <a:off x="914400" y="3840480"/>
+            <a:ext cx="4754880" cy="320040"/>
           </a:xfrm>
           <a:prstGeom prst="rect">
             <a:avLst/>
@@ -6790,13 +6659,10 @@
           <a:lstStyle/>
           <a:p>
             <a:pPr indent="0" marL="0">
-              <a:lnSpc>
-                <a:spcPts val="2000"/>
-              </a:lnSpc>
-              <a:buNone/>
-            </a:pPr>
-            <a:r>
-              <a:rPr lang="en-US" sz="1400" b="1" dirty="0">
+              <a:buNone/>
+            </a:pPr>
+            <a:r>
+              <a:rPr lang="en-US" sz="1700" b="1" dirty="0">
                 <a:solidFill>
                   <a:srgbClr val="B85042"/>
                 </a:solidFill>
@@ -6804,64 +6670,22 @@
                 <a:ea typeface="Meiryo" pitchFamily="34" charset="-122"/>
                 <a:cs typeface="Meiryo" pitchFamily="34" charset="-120"/>
               </a:rPr>
-              <a:t>「テーマを有効化」は</a:t>
-            </a:r>
-            <a:endParaRPr lang="en-US" sz="1400" dirty="0"/>
-          </a:p>
-          <a:p>
-            <a:pPr indent="0" marL="0">
-              <a:lnSpc>
-                <a:spcPts val="2000"/>
-              </a:lnSpc>
-              <a:buNone/>
-            </a:pPr>
-            <a:r>
-              <a:rPr lang="en-US" sz="1400" b="1" dirty="0">
-                <a:solidFill>
-                  <a:srgbClr val="B85042"/>
-                </a:solidFill>
-                <a:latin typeface="Meiryo" pitchFamily="34" charset="0"/>
-                <a:ea typeface="Meiryo" pitchFamily="34" charset="-122"/>
-                <a:cs typeface="Meiryo" pitchFamily="34" charset="-120"/>
-              </a:rPr>
-              <a:t>最初の1回だけです。</a:t>
-            </a:r>
-            <a:endParaRPr lang="en-US" sz="1400" dirty="0"/>
-          </a:p>
-        </p:txBody>
-      </p:sp>
-      <p:sp>
-        <p:nvSpPr>
-          <p:cNvPr id="9" name="Shape 6"/>
-          <p:cNvSpPr/>
-          <p:nvPr/>
-        </p:nvSpPr>
-        <p:spPr>
-          <a:xfrm>
-            <a:off x="7726680" y="4023360"/>
-            <a:ext cx="3840480" cy="1463040"/>
-          </a:xfrm>
-          <a:prstGeom prst="roundRect">
-            <a:avLst>
-              <a:gd name="adj" fmla="val 6250"/>
-            </a:avLst>
-          </a:prstGeom>
-          <a:solidFill>
-            <a:srgbClr val="FFF4EA"/>
-          </a:solidFill>
-          <a:ln/>
-        </p:spPr>
-      </p:sp>
-      <p:sp>
-        <p:nvSpPr>
-          <p:cNvPr id="10" name="Text 7"/>
-          <p:cNvSpPr/>
-          <p:nvPr/>
-        </p:nvSpPr>
-        <p:spPr>
-          <a:xfrm>
-            <a:off x="7955280" y="4206240"/>
-            <a:ext cx="3566160" cy="1188720"/>
+              <a:t>なぜ見つからないのか</a:t>
+            </a:r>
+            <a:endParaRPr lang="en-US" sz="1700" dirty="0"/>
+          </a:p>
+        </p:txBody>
+      </p:sp>
+      <p:sp>
+        <p:nvSpPr>
+          <p:cNvPr id="10" name="Text 8"/>
+          <p:cNvSpPr/>
+          <p:nvPr/>
+        </p:nvSpPr>
+        <p:spPr>
+          <a:xfrm>
+            <a:off x="914400" y="4251960"/>
+            <a:ext cx="4846320" cy="1463040"/>
           </a:xfrm>
           <a:prstGeom prst="rect">
             <a:avLst/>
@@ -6882,13 +6706,13 @@
             <a:r>
               <a:rPr lang="en-US" sz="1300" dirty="0">
                 <a:solidFill>
-                  <a:srgbClr val="B85042"/>
-                </a:solidFill>
-                <a:latin typeface="Meiryo" pitchFamily="34" charset="0"/>
-                <a:ea typeface="Meiryo" pitchFamily="34" charset="-122"/>
-                <a:cs typeface="Meiryo" pitchFamily="34" charset="-120"/>
-              </a:rPr>
-              <a:t>aspath-trial-form.zip を</a:t>
+                  <a:srgbClr val="1E2D34"/>
+                </a:solidFill>
+                <a:latin typeface="Meiryo" pitchFamily="34" charset="0"/>
+                <a:ea typeface="Meiryo" pitchFamily="34" charset="-122"/>
+                <a:cs typeface="Meiryo" pitchFamily="34" charset="-120"/>
+              </a:rPr>
+              <a:t>途中に &lt;span class="nw"&gt;…&lt;/span&gt; が</a:t>
             </a:r>
             <a:endParaRPr lang="en-US" sz="1300" dirty="0"/>
           </a:p>
@@ -6902,13 +6726,13 @@
             <a:r>
               <a:rPr lang="en-US" sz="1300" dirty="0">
                 <a:solidFill>
-                  <a:srgbClr val="B85042"/>
-                </a:solidFill>
-                <a:latin typeface="Meiryo" pitchFamily="34" charset="0"/>
-                <a:ea typeface="Meiryo" pitchFamily="34" charset="-122"/>
-                <a:cs typeface="Meiryo" pitchFamily="34" charset="-120"/>
-              </a:rPr>
-              <a:t>ここに入れないでください。</a:t>
+                  <a:srgbClr val="1E2D34"/>
+                </a:solidFill>
+                <a:latin typeface="Meiryo" pitchFamily="34" charset="0"/>
+                <a:ea typeface="Meiryo" pitchFamily="34" charset="-122"/>
+                <a:cs typeface="Meiryo" pitchFamily="34" charset="-120"/>
+              </a:rPr>
+              <a:t>挟まっているためです。</a:t>
             </a:r>
             <a:endParaRPr lang="en-US" sz="1300" dirty="0"/>
           </a:p>
@@ -6919,17 +6743,6 @@
               </a:lnSpc>
               <a:buNone/>
             </a:pPr>
-            <a:r>
-              <a:rPr lang="en-US" sz="1300" dirty="0">
-                <a:solidFill>
-                  <a:srgbClr val="B85042"/>
-                </a:solidFill>
-                <a:latin typeface="Meiryo" pitchFamily="34" charset="0"/>
-                <a:ea typeface="Meiryo" pitchFamily="34" charset="-122"/>
-                <a:cs typeface="Meiryo" pitchFamily="34" charset="-120"/>
-              </a:rPr>
-              <a:t>「style.css がありません」</a:t>
-            </a:r>
             <a:endParaRPr lang="en-US" sz="1300" dirty="0"/>
           </a:p>
           <a:p>
@@ -6942,38 +6755,16 @@
             <a:r>
               <a:rPr lang="en-US" sz="1300" dirty="0">
                 <a:solidFill>
-                  <a:srgbClr val="B85042"/>
-                </a:solidFill>
-                <a:latin typeface="Meiryo" pitchFamily="34" charset="0"/>
-                <a:ea typeface="Meiryo" pitchFamily="34" charset="-122"/>
-                <a:cs typeface="Meiryo" pitchFamily="34" charset="-120"/>
-              </a:rPr>
-              <a:t>と出ます。あれはプラグイン。</a:t>
+                  <a:srgbClr val="1E2D34"/>
+                </a:solidFill>
+                <a:latin typeface="Meiryo" pitchFamily="34" charset="0"/>
+                <a:ea typeface="Meiryo" pitchFamily="34" charset="-122"/>
+                <a:cs typeface="Meiryo" pitchFamily="34" charset="-120"/>
+              </a:rPr>
+              <a:t>「パーキンソン病」のような語が</a:t>
             </a:r>
             <a:endParaRPr lang="en-US" sz="1300" dirty="0"/>
           </a:p>
-        </p:txBody>
-      </p:sp>
-      <p:sp>
-        <p:nvSpPr>
-          <p:cNvPr id="11" name="Text 8"/>
-          <p:cNvSpPr/>
-          <p:nvPr/>
-        </p:nvSpPr>
-        <p:spPr>
-          <a:xfrm>
-            <a:off x="7772400" y="5623560"/>
-            <a:ext cx="3840480" cy="548640"/>
-          </a:xfrm>
-          <a:prstGeom prst="rect">
-            <a:avLst/>
-          </a:prstGeom>
-          <a:noFill/>
-          <a:ln/>
-        </p:spPr>
-        <p:txBody>
-          <a:bodyPr wrap="square" lIns="0" tIns="0" rIns="0" bIns="0" rtlCol="0" anchor="ctr"/>
-          <a:lstStyle/>
           <a:p>
             <a:pPr indent="0" marL="0">
               <a:lnSpc>
@@ -6984,13 +6775,13 @@
             <a:r>
               <a:rPr lang="en-US" sz="1300" dirty="0">
                 <a:solidFill>
-                  <a:srgbClr val="5E7681"/>
-                </a:solidFill>
-                <a:latin typeface="Meiryo" pitchFamily="34" charset="0"/>
-                <a:ea typeface="Meiryo" pitchFamily="34" charset="-122"/>
-                <a:cs typeface="Meiryo" pitchFamily="34" charset="-120"/>
-              </a:rPr>
-              <a:t>フォームを直したときは</a:t>
+                  <a:srgbClr val="1E2D34"/>
+                </a:solidFill>
+                <a:latin typeface="Meiryo" pitchFamily="34" charset="0"/>
+                <a:ea typeface="Meiryo" pitchFamily="34" charset="-122"/>
+                <a:cs typeface="Meiryo" pitchFamily="34" charset="-120"/>
+              </a:rPr>
+              <a:t>変な位置で改行されないための印。</a:t>
             </a:r>
             <a:endParaRPr lang="en-US" sz="1300" dirty="0"/>
           </a:p>
@@ -7004,13 +6795,185 @@
             <a:r>
               <a:rPr lang="en-US" sz="1300" dirty="0">
                 <a:solidFill>
-                  <a:srgbClr val="5E7681"/>
-                </a:solidFill>
-                <a:latin typeface="Meiryo" pitchFamily="34" charset="0"/>
-                <a:ea typeface="Meiryo" pitchFamily="34" charset="-122"/>
-                <a:cs typeface="Meiryo" pitchFamily="34" charset="-120"/>
-              </a:rPr>
-              <a:t>プラグインも入れ替えます。</a:t>
+                  <a:srgbClr val="1E2D34"/>
+                </a:solidFill>
+                <a:latin typeface="Meiryo" pitchFamily="34" charset="0"/>
+                <a:ea typeface="Meiryo" pitchFamily="34" charset="-122"/>
+                <a:cs typeface="Meiryo" pitchFamily="34" charset="-120"/>
+              </a:rPr>
+              <a:t>消してはいけません。</a:t>
+            </a:r>
+            <a:endParaRPr lang="en-US" sz="1300" dirty="0"/>
+          </a:p>
+        </p:txBody>
+      </p:sp>
+      <p:sp>
+        <p:nvSpPr>
+          <p:cNvPr id="11" name="Shape 9"/>
+          <p:cNvSpPr/>
+          <p:nvPr/>
+        </p:nvSpPr>
+        <p:spPr>
+          <a:xfrm>
+            <a:off x="6217920" y="3657600"/>
+            <a:ext cx="5303520" cy="2194560"/>
+          </a:xfrm>
+          <a:prstGeom prst="roundRect">
+            <a:avLst>
+              <a:gd name="adj" fmla="val 5000"/>
+            </a:avLst>
+          </a:prstGeom>
+          <a:solidFill>
+            <a:srgbClr val="EDF6EE"/>
+          </a:solidFill>
+          <a:ln/>
+        </p:spPr>
+      </p:sp>
+      <p:sp>
+        <p:nvSpPr>
+          <p:cNvPr id="12" name="Text 10"/>
+          <p:cNvSpPr/>
+          <p:nvPr/>
+        </p:nvSpPr>
+        <p:spPr>
+          <a:xfrm>
+            <a:off x="6492240" y="3840480"/>
+            <a:ext cx="4754880" cy="320040"/>
+          </a:xfrm>
+          <a:prstGeom prst="rect">
+            <a:avLst/>
+          </a:prstGeom>
+          <a:noFill/>
+          <a:ln/>
+        </p:spPr>
+        <p:txBody>
+          <a:bodyPr wrap="square" lIns="0" tIns="0" rIns="0" bIns="0" rtlCol="0" anchor="ctr"/>
+          <a:lstStyle/>
+          <a:p>
+            <a:pPr indent="0" marL="0">
+              <a:buNone/>
+            </a:pPr>
+            <a:r>
+              <a:rPr lang="en-US" sz="1700" b="1" dirty="0">
+                <a:solidFill>
+                  <a:srgbClr val="2E7D32"/>
+                </a:solidFill>
+                <a:latin typeface="Meiryo" pitchFamily="34" charset="0"/>
+                <a:ea typeface="Meiryo" pitchFamily="34" charset="-122"/>
+                <a:cs typeface="Meiryo" pitchFamily="34" charset="-120"/>
+              </a:rPr>
+              <a:t>探すコツ</a:t>
+            </a:r>
+            <a:endParaRPr lang="en-US" sz="1700" dirty="0"/>
+          </a:p>
+        </p:txBody>
+      </p:sp>
+      <p:sp>
+        <p:nvSpPr>
+          <p:cNvPr id="13" name="Text 11"/>
+          <p:cNvSpPr/>
+          <p:nvPr/>
+        </p:nvSpPr>
+        <p:spPr>
+          <a:xfrm>
+            <a:off x="6492240" y="4251960"/>
+            <a:ext cx="4846320" cy="1463040"/>
+          </a:xfrm>
+          <a:prstGeom prst="rect">
+            <a:avLst/>
+          </a:prstGeom>
+          <a:noFill/>
+          <a:ln/>
+        </p:spPr>
+        <p:txBody>
+          <a:bodyPr wrap="square" lIns="0" tIns="0" rIns="0" bIns="0" rtlCol="0" anchor="ctr"/>
+          <a:lstStyle/>
+          <a:p>
+            <a:pPr indent="0" marL="0">
+              <a:lnSpc>
+                <a:spcPts val="1900"/>
+              </a:lnSpc>
+              <a:buNone/>
+            </a:pPr>
+            <a:r>
+              <a:rPr lang="en-US" sz="1300" dirty="0">
+                <a:solidFill>
+                  <a:srgbClr val="1E2D34"/>
+                </a:solidFill>
+                <a:latin typeface="Meiryo" pitchFamily="34" charset="0"/>
+                <a:ea typeface="Meiryo" pitchFamily="34" charset="-122"/>
+                <a:cs typeface="Meiryo" pitchFamily="34" charset="-120"/>
+              </a:rPr>
+              <a:t>10〜15文字くらいの、</a:t>
+            </a:r>
+            <a:endParaRPr lang="en-US" sz="1300" dirty="0"/>
+          </a:p>
+          <a:p>
+            <a:pPr indent="0" marL="0">
+              <a:lnSpc>
+                <a:spcPts val="1900"/>
+              </a:lnSpc>
+              <a:buNone/>
+            </a:pPr>
+            <a:r>
+              <a:rPr lang="en-US" sz="1300" dirty="0">
+                <a:solidFill>
+                  <a:srgbClr val="1E2D34"/>
+                </a:solidFill>
+                <a:latin typeface="Meiryo" pitchFamily="34" charset="0"/>
+                <a:ea typeface="Meiryo" pitchFamily="34" charset="-122"/>
+                <a:cs typeface="Meiryo" pitchFamily="34" charset="-120"/>
+              </a:rPr>
+              <a:t>記号を含まない部分で検索する。</a:t>
+            </a:r>
+            <a:endParaRPr lang="en-US" sz="1300" dirty="0"/>
+          </a:p>
+          <a:p>
+            <a:pPr indent="0" marL="0">
+              <a:lnSpc>
+                <a:spcPts val="1900"/>
+              </a:lnSpc>
+              <a:buNone/>
+            </a:pPr>
+            <a:endParaRPr lang="en-US" sz="1300" dirty="0"/>
+          </a:p>
+          <a:p>
+            <a:pPr indent="0" marL="0">
+              <a:lnSpc>
+                <a:spcPts val="1900"/>
+              </a:lnSpc>
+              <a:buNone/>
+            </a:pPr>
+            <a:r>
+              <a:rPr lang="en-US" sz="1300" dirty="0">
+                <a:solidFill>
+                  <a:srgbClr val="1E2D34"/>
+                </a:solidFill>
+                <a:latin typeface="Meiryo" pitchFamily="34" charset="0"/>
+                <a:ea typeface="Meiryo" pitchFamily="34" charset="-122"/>
+                <a:cs typeface="Meiryo" pitchFamily="34" charset="-120"/>
+              </a:rPr>
+              <a:t>○ 一番初めに動かしにくさ</a:t>
+            </a:r>
+            <a:endParaRPr lang="en-US" sz="1300" dirty="0"/>
+          </a:p>
+          <a:p>
+            <a:pPr indent="0" marL="0">
+              <a:lnSpc>
+                <a:spcPts val="1900"/>
+              </a:lnSpc>
+              <a:buNone/>
+            </a:pPr>
+            <a:r>
+              <a:rPr lang="en-US" sz="1300" dirty="0">
+                <a:solidFill>
+                  <a:srgbClr val="1E2D34"/>
+                </a:solidFill>
+                <a:latin typeface="Meiryo" pitchFamily="34" charset="0"/>
+                <a:ea typeface="Meiryo" pitchFamily="34" charset="-122"/>
+                <a:cs typeface="Meiryo" pitchFamily="34" charset="-120"/>
+              </a:rPr>
+              <a:t>× パーキンソン病において、多くの方が</a:t>
             </a:r>
             <a:endParaRPr lang="en-US" sz="1300" dirty="0"/>
           </a:p>
@@ -7081,7 +7044,7 @@
                 <a:ea typeface="Meiryo" pitchFamily="34" charset="-122"/>
                 <a:cs typeface="Meiryo" pitchFamily="34" charset="-120"/>
               </a:rPr>
-              <a:t>【道B】最後に必ずキャッシュを消す</a:t>
+              <a:t>【道B】テーマをアップロードする</a:t>
             </a:r>
             <a:endParaRPr lang="en-US" sz="3200" dirty="0"/>
           </a:p>
@@ -7120,7 +7083,7 @@
                 <a:ea typeface="Meiryo" pitchFamily="34" charset="-122"/>
                 <a:cs typeface="Meiryo" pitchFamily="34" charset="-120"/>
               </a:rPr>
-              <a:t>これを忘れると「直したのに変わらない」になります</a:t>
+              <a:t>外観 → テーマ → 新規追加 → テーマのアップロード</a:t>
             </a:r>
             <a:endParaRPr lang="en-US" sz="1500" dirty="0"/>
           </a:p>
@@ -7167,7 +7130,7 @@
       </p:sp>
       <p:pic>
         <p:nvPicPr>
-          <p:cNvPr id="5" name="Image 0" descr="/sessions/compassionate-sweet-heisenberg/mnt/dev-aspath-life-main/_wp移行素材/★引継ぎ資料/画像/06_キャッシュ削除.jpg">    </p:cNvPr>
+          <p:cNvPr id="5" name="Image 0" descr="/sessions/compassionate-sweet-heisenberg/mnt/dev-aspath-life-main/_wp移行素材/★引継ぎ資料/画像/05_テーマのアップロード.jpg">    </p:cNvPr>
           <p:cNvPicPr>
             <a:picLocks noChangeAspect="1"/>
           </p:cNvPicPr>
@@ -7198,7 +7161,7 @@
         <p:spPr>
           <a:xfrm>
             <a:off x="7772400" y="1783080"/>
-            <a:ext cx="3749040" cy="1280160"/>
+            <a:ext cx="3840480" cy="731520"/>
           </a:xfrm>
           <a:prstGeom prst="rect">
             <a:avLst/>
@@ -7210,68 +7173,45 @@
           <a:bodyPr wrap="square" lIns="0" tIns="0" rIns="0" bIns="0" rtlCol="0" anchor="ctr"/>
           <a:lstStyle/>
           <a:p>
-            <a:pPr marL="342900" indent="-342900">
-              <a:spcAft>
-                <a:spcPts val="1200"/>
-              </a:spcAft>
-              <a:buSzPct val="100000"/>
-              <a:buChar char="•"/>
-            </a:pPr>
-            <a:r>
-              <a:rPr lang="en-US" sz="1600" dirty="0">
-                <a:solidFill>
-                  <a:srgbClr val="1E2D34"/>
-                </a:solidFill>
-                <a:latin typeface="Meiryo" pitchFamily="34" charset="0"/>
-                <a:ea typeface="Meiryo" pitchFamily="34" charset="-122"/>
-                <a:cs typeface="Meiryo" pitchFamily="34" charset="-120"/>
-              </a:rPr>
-              <a:t>Super Page Cache を開く</a:t>
+            <a:pPr indent="0" marL="0">
+              <a:lnSpc>
+                <a:spcPts val="2400"/>
+              </a:lnSpc>
+              <a:buNone/>
+            </a:pPr>
+            <a:r>
+              <a:rPr lang="en-US" sz="1600" b="1" dirty="0">
+                <a:solidFill>
+                  <a:srgbClr val="264653"/>
+                </a:solidFill>
+                <a:latin typeface="Meiryo" pitchFamily="34" charset="0"/>
+                <a:ea typeface="Meiryo" pitchFamily="34" charset="-122"/>
+                <a:cs typeface="Meiryo" pitchFamily="34" charset="-120"/>
+              </a:rPr>
+              <a:t>aspath-theme.zip を選び</a:t>
             </a:r>
             <a:endParaRPr lang="en-US" sz="1600" dirty="0"/>
           </a:p>
           <a:p>
-            <a:pPr marL="342900" indent="-342900">
-              <a:spcAft>
-                <a:spcPts val="1200"/>
-              </a:spcAft>
-              <a:buSzPct val="100000"/>
-              <a:buChar char="•"/>
-            </a:pPr>
-            <a:r>
-              <a:rPr lang="en-US" sz="1600" dirty="0">
-                <a:solidFill>
-                  <a:srgbClr val="1E2D34"/>
-                </a:solidFill>
-                <a:latin typeface="Meiryo" pitchFamily="34" charset="0"/>
-                <a:ea typeface="Meiryo" pitchFamily="34" charset="-122"/>
-                <a:cs typeface="Meiryo" pitchFamily="34" charset="-120"/>
-              </a:rPr>
-              <a:t>【Purge Cache】を押す</a:t>
+            <a:pPr indent="0" marL="0">
+              <a:lnSpc>
+                <a:spcPts val="2400"/>
+              </a:lnSpc>
+              <a:buNone/>
+            </a:pPr>
+            <a:r>
+              <a:rPr lang="en-US" sz="1600" b="1" dirty="0">
+                <a:solidFill>
+                  <a:srgbClr val="264653"/>
+                </a:solidFill>
+                <a:latin typeface="Meiryo" pitchFamily="34" charset="0"/>
+                <a:ea typeface="Meiryo" pitchFamily="34" charset="-122"/>
+                <a:cs typeface="Meiryo" pitchFamily="34" charset="-120"/>
+              </a:rPr>
+              <a:t>「既存のものを置き換える」</a:t>
             </a:r>
             <a:endParaRPr lang="en-US" sz="1600" dirty="0"/>
           </a:p>
-          <a:p>
-            <a:pPr marL="342900" indent="-342900">
-              <a:spcAft>
-                <a:spcPts val="1200"/>
-              </a:spcAft>
-              <a:buSzPct val="100000"/>
-              <a:buChar char="•"/>
-            </a:pPr>
-            <a:r>
-              <a:rPr lang="en-US" sz="1600" dirty="0">
-                <a:solidFill>
-                  <a:srgbClr val="1E2D34"/>
-                </a:solidFill>
-                <a:latin typeface="Meiryo" pitchFamily="34" charset="0"/>
-                <a:ea typeface="Meiryo" pitchFamily="34" charset="-122"/>
-                <a:cs typeface="Meiryo" pitchFamily="34" charset="-120"/>
-              </a:rPr>
-              <a:t>ブラウザで Ctrl + F5</a:t>
-            </a:r>
-            <a:endParaRPr lang="en-US" sz="1600" dirty="0"/>
-          </a:p>
         </p:txBody>
       </p:sp>
       <p:sp>
@@ -7282,16 +7222,16 @@
         </p:nvSpPr>
         <p:spPr>
           <a:xfrm>
-            <a:off x="7726680" y="3291840"/>
-            <a:ext cx="3840480" cy="1828800"/>
+            <a:off x="7726680" y="2697480"/>
+            <a:ext cx="3840480" cy="1188720"/>
           </a:xfrm>
           <a:prstGeom prst="roundRect">
             <a:avLst>
-              <a:gd name="adj" fmla="val 5000"/>
+              <a:gd name="adj" fmla="val 7692"/>
             </a:avLst>
           </a:prstGeom>
           <a:solidFill>
-            <a:srgbClr val="264653"/>
+            <a:srgbClr val="FFF4EA"/>
           </a:solidFill>
           <a:ln/>
         </p:spPr>
@@ -7304,47 +7244,8 @@
         </p:nvSpPr>
         <p:spPr>
           <a:xfrm>
-            <a:off x="7955280" y="3474720"/>
-            <a:ext cx="3566160" cy="320040"/>
-          </a:xfrm>
-          <a:prstGeom prst="rect">
-            <a:avLst/>
-          </a:prstGeom>
-          <a:noFill/>
-          <a:ln/>
-        </p:spPr>
-        <p:txBody>
-          <a:bodyPr wrap="square" lIns="0" tIns="0" rIns="0" bIns="0" rtlCol="0" anchor="ctr"/>
-          <a:lstStyle/>
-          <a:p>
-            <a:pPr indent="0" marL="0">
-              <a:buNone/>
-            </a:pPr>
-            <a:r>
-              <a:rPr lang="en-US" sz="1500" b="1" dirty="0">
-                <a:solidFill>
-                  <a:srgbClr val="F4A261"/>
-                </a:solidFill>
-                <a:latin typeface="Meiryo" pitchFamily="34" charset="0"/>
-                <a:ea typeface="Meiryo" pitchFamily="34" charset="-122"/>
-                <a:cs typeface="Meiryo" pitchFamily="34" charset="-120"/>
-              </a:rPr>
-              <a:t>それでも変わらないとき</a:t>
-            </a:r>
-            <a:endParaRPr lang="en-US" sz="1500" dirty="0"/>
-          </a:p>
-        </p:txBody>
-      </p:sp>
-      <p:sp>
-        <p:nvSpPr>
-          <p:cNvPr id="9" name="Text 6"/>
-          <p:cNvSpPr/>
-          <p:nvPr/>
-        </p:nvSpPr>
-        <p:spPr>
-          <a:xfrm>
-            <a:off x="7955280" y="3886200"/>
-            <a:ext cx="3566160" cy="1097280"/>
+            <a:off x="7955280" y="2971800"/>
+            <a:ext cx="3566160" cy="731520"/>
           </a:xfrm>
           <a:prstGeom prst="rect">
             <a:avLst/>
@@ -7358,62 +7259,228 @@
           <a:p>
             <a:pPr indent="0" marL="0">
               <a:lnSpc>
-                <a:spcPts val="2100"/>
+                <a:spcPts val="2000"/>
               </a:lnSpc>
               <a:buNone/>
             </a:pPr>
             <a:r>
-              <a:rPr lang="en-US" sz="1400" dirty="0">
-                <a:solidFill>
-                  <a:srgbClr val="FFFFFF"/>
-                </a:solidFill>
-                <a:latin typeface="Meiryo" pitchFamily="34" charset="0"/>
-                <a:ea typeface="Meiryo" pitchFamily="34" charset="-122"/>
-                <a:cs typeface="Meiryo" pitchFamily="34" charset="-120"/>
-              </a:rPr>
-              <a:t>URLの末尾に ?v=2 を付けて</a:t>
+              <a:rPr lang="en-US" sz="1400" b="1" dirty="0">
+                <a:solidFill>
+                  <a:srgbClr val="B85042"/>
+                </a:solidFill>
+                <a:latin typeface="Meiryo" pitchFamily="34" charset="0"/>
+                <a:ea typeface="Meiryo" pitchFamily="34" charset="-122"/>
+                <a:cs typeface="Meiryo" pitchFamily="34" charset="-120"/>
+              </a:rPr>
+              <a:t>「テーマを有効化」は</a:t>
             </a:r>
             <a:endParaRPr lang="en-US" sz="1400" dirty="0"/>
           </a:p>
           <a:p>
             <a:pPr indent="0" marL="0">
               <a:lnSpc>
-                <a:spcPts val="2100"/>
+                <a:spcPts val="2000"/>
               </a:lnSpc>
               <a:buNone/>
             </a:pPr>
             <a:r>
-              <a:rPr lang="en-US" sz="1400" dirty="0">
-                <a:solidFill>
-                  <a:srgbClr val="FFFFFF"/>
-                </a:solidFill>
-                <a:latin typeface="Meiryo" pitchFamily="34" charset="0"/>
-                <a:ea typeface="Meiryo" pitchFamily="34" charset="-122"/>
-                <a:cs typeface="Meiryo" pitchFamily="34" charset="-120"/>
-              </a:rPr>
-              <a:t>開いてください。</a:t>
+              <a:rPr lang="en-US" sz="1400" b="1" dirty="0">
+                <a:solidFill>
+                  <a:srgbClr val="B85042"/>
+                </a:solidFill>
+                <a:latin typeface="Meiryo" pitchFamily="34" charset="0"/>
+                <a:ea typeface="Meiryo" pitchFamily="34" charset="-122"/>
+                <a:cs typeface="Meiryo" pitchFamily="34" charset="-120"/>
+              </a:rPr>
+              <a:t>最初の1回だけです。</a:t>
             </a:r>
             <a:endParaRPr lang="en-US" sz="1400" dirty="0"/>
           </a:p>
+        </p:txBody>
+      </p:sp>
+      <p:sp>
+        <p:nvSpPr>
+          <p:cNvPr id="9" name="Shape 6"/>
+          <p:cNvSpPr/>
+          <p:nvPr/>
+        </p:nvSpPr>
+        <p:spPr>
+          <a:xfrm>
+            <a:off x="7726680" y="4023360"/>
+            <a:ext cx="3840480" cy="1463040"/>
+          </a:xfrm>
+          <a:prstGeom prst="roundRect">
+            <a:avLst>
+              <a:gd name="adj" fmla="val 6250"/>
+            </a:avLst>
+          </a:prstGeom>
+          <a:solidFill>
+            <a:srgbClr val="FFF4EA"/>
+          </a:solidFill>
+          <a:ln/>
+        </p:spPr>
+      </p:sp>
+      <p:sp>
+        <p:nvSpPr>
+          <p:cNvPr id="10" name="Text 7"/>
+          <p:cNvSpPr/>
+          <p:nvPr/>
+        </p:nvSpPr>
+        <p:spPr>
+          <a:xfrm>
+            <a:off x="7955280" y="4206240"/>
+            <a:ext cx="3566160" cy="1188720"/>
+          </a:xfrm>
+          <a:prstGeom prst="rect">
+            <a:avLst/>
+          </a:prstGeom>
+          <a:noFill/>
+          <a:ln/>
+        </p:spPr>
+        <p:txBody>
+          <a:bodyPr wrap="square" lIns="0" tIns="0" rIns="0" bIns="0" rtlCol="0" anchor="ctr"/>
+          <a:lstStyle/>
           <a:p>
             <a:pPr indent="0" marL="0">
               <a:lnSpc>
-                <a:spcPts val="2100"/>
+                <a:spcPts val="1900"/>
               </a:lnSpc>
               <a:buNone/>
             </a:pPr>
             <a:r>
-              <a:rPr lang="en-US" sz="1400" dirty="0">
-                <a:solidFill>
-                  <a:srgbClr val="FFFFFF"/>
-                </a:solidFill>
-                <a:latin typeface="Meiryo" pitchFamily="34" charset="0"/>
-                <a:ea typeface="Meiryo" pitchFamily="34" charset="-122"/>
-                <a:cs typeface="Meiryo" pitchFamily="34" charset="-120"/>
-              </a:rPr>
-              <a:t>キャッシュを確実に飛ばせます。</a:t>
-            </a:r>
-            <a:endParaRPr lang="en-US" sz="1400" dirty="0"/>
+              <a:rPr lang="en-US" sz="1300" dirty="0">
+                <a:solidFill>
+                  <a:srgbClr val="B85042"/>
+                </a:solidFill>
+                <a:latin typeface="Meiryo" pitchFamily="34" charset="0"/>
+                <a:ea typeface="Meiryo" pitchFamily="34" charset="-122"/>
+                <a:cs typeface="Meiryo" pitchFamily="34" charset="-120"/>
+              </a:rPr>
+              <a:t>aspath-trial-form.zip を</a:t>
+            </a:r>
+            <a:endParaRPr lang="en-US" sz="1300" dirty="0"/>
+          </a:p>
+          <a:p>
+            <a:pPr indent="0" marL="0">
+              <a:lnSpc>
+                <a:spcPts val="1900"/>
+              </a:lnSpc>
+              <a:buNone/>
+            </a:pPr>
+            <a:r>
+              <a:rPr lang="en-US" sz="1300" dirty="0">
+                <a:solidFill>
+                  <a:srgbClr val="B85042"/>
+                </a:solidFill>
+                <a:latin typeface="Meiryo" pitchFamily="34" charset="0"/>
+                <a:ea typeface="Meiryo" pitchFamily="34" charset="-122"/>
+                <a:cs typeface="Meiryo" pitchFamily="34" charset="-120"/>
+              </a:rPr>
+              <a:t>ここに入れないでください。</a:t>
+            </a:r>
+            <a:endParaRPr lang="en-US" sz="1300" dirty="0"/>
+          </a:p>
+          <a:p>
+            <a:pPr indent="0" marL="0">
+              <a:lnSpc>
+                <a:spcPts val="1900"/>
+              </a:lnSpc>
+              <a:buNone/>
+            </a:pPr>
+            <a:r>
+              <a:rPr lang="en-US" sz="1300" dirty="0">
+                <a:solidFill>
+                  <a:srgbClr val="B85042"/>
+                </a:solidFill>
+                <a:latin typeface="Meiryo" pitchFamily="34" charset="0"/>
+                <a:ea typeface="Meiryo" pitchFamily="34" charset="-122"/>
+                <a:cs typeface="Meiryo" pitchFamily="34" charset="-120"/>
+              </a:rPr>
+              <a:t>「style.css がありません」</a:t>
+            </a:r>
+            <a:endParaRPr lang="en-US" sz="1300" dirty="0"/>
+          </a:p>
+          <a:p>
+            <a:pPr indent="0" marL="0">
+              <a:lnSpc>
+                <a:spcPts val="1900"/>
+              </a:lnSpc>
+              <a:buNone/>
+            </a:pPr>
+            <a:r>
+              <a:rPr lang="en-US" sz="1300" dirty="0">
+                <a:solidFill>
+                  <a:srgbClr val="B85042"/>
+                </a:solidFill>
+                <a:latin typeface="Meiryo" pitchFamily="34" charset="0"/>
+                <a:ea typeface="Meiryo" pitchFamily="34" charset="-122"/>
+                <a:cs typeface="Meiryo" pitchFamily="34" charset="-120"/>
+              </a:rPr>
+              <a:t>と出ます。あれはプラグイン。</a:t>
+            </a:r>
+            <a:endParaRPr lang="en-US" sz="1300" dirty="0"/>
+          </a:p>
+        </p:txBody>
+      </p:sp>
+      <p:sp>
+        <p:nvSpPr>
+          <p:cNvPr id="11" name="Text 8"/>
+          <p:cNvSpPr/>
+          <p:nvPr/>
+        </p:nvSpPr>
+        <p:spPr>
+          <a:xfrm>
+            <a:off x="7772400" y="5623560"/>
+            <a:ext cx="3840480" cy="548640"/>
+          </a:xfrm>
+          <a:prstGeom prst="rect">
+            <a:avLst/>
+          </a:prstGeom>
+          <a:noFill/>
+          <a:ln/>
+        </p:spPr>
+        <p:txBody>
+          <a:bodyPr wrap="square" lIns="0" tIns="0" rIns="0" bIns="0" rtlCol="0" anchor="ctr"/>
+          <a:lstStyle/>
+          <a:p>
+            <a:pPr indent="0" marL="0">
+              <a:lnSpc>
+                <a:spcPts val="1900"/>
+              </a:lnSpc>
+              <a:buNone/>
+            </a:pPr>
+            <a:r>
+              <a:rPr lang="en-US" sz="1300" dirty="0">
+                <a:solidFill>
+                  <a:srgbClr val="5E7681"/>
+                </a:solidFill>
+                <a:latin typeface="Meiryo" pitchFamily="34" charset="0"/>
+                <a:ea typeface="Meiryo" pitchFamily="34" charset="-122"/>
+                <a:cs typeface="Meiryo" pitchFamily="34" charset="-120"/>
+              </a:rPr>
+              <a:t>フォームを直したときは</a:t>
+            </a:r>
+            <a:endParaRPr lang="en-US" sz="1300" dirty="0"/>
+          </a:p>
+          <a:p>
+            <a:pPr indent="0" marL="0">
+              <a:lnSpc>
+                <a:spcPts val="1900"/>
+              </a:lnSpc>
+              <a:buNone/>
+            </a:pPr>
+            <a:r>
+              <a:rPr lang="en-US" sz="1300" dirty="0">
+                <a:solidFill>
+                  <a:srgbClr val="5E7681"/>
+                </a:solidFill>
+                <a:latin typeface="Meiryo" pitchFamily="34" charset="0"/>
+                <a:ea typeface="Meiryo" pitchFamily="34" charset="-122"/>
+                <a:cs typeface="Meiryo" pitchFamily="34" charset="-120"/>
+              </a:rPr>
+              <a:t>プラグインも入れ替えます。</a:t>
+            </a:r>
+            <a:endParaRPr lang="en-US" sz="1300" dirty="0"/>
           </a:p>
         </p:txBody>
       </p:sp>
@@ -7482,7 +7549,7 @@
                 <a:ea typeface="Meiryo" pitchFamily="34" charset="-122"/>
                 <a:cs typeface="Meiryo" pitchFamily="34" charset="-120"/>
               </a:rPr>
-              <a:t>困ったとき</a:t>
+              <a:t>【道B】最後に必ずキャッシュを消す</a:t>
             </a:r>
             <a:endParaRPr lang="en-US" sz="3200" dirty="0"/>
           </a:p>
@@ -7521,7 +7588,7 @@
                 <a:ea typeface="Meiryo" pitchFamily="34" charset="-122"/>
                 <a:cs typeface="Meiryo" pitchFamily="34" charset="-120"/>
               </a:rPr>
-              <a:t>症状から原因を引けます</a:t>
+              <a:t>これを忘れると「直したのに変わらない」になります</a:t>
             </a:r>
             <a:endParaRPr lang="en-US" sz="1500" dirty="0"/>
           </a:p>
@@ -7566,9 +7633,410 @@
           </a:p>
         </p:txBody>
       </p:sp>
+      <p:pic>
+        <p:nvPicPr>
+          <p:cNvPr id="5" name="Image 0" descr="/sessions/compassionate-sweet-heisenberg/mnt/dev-aspath-life-main/_wp移行素材/★引継ぎ資料/画像/06_キャッシュ削除.jpg">    </p:cNvPr>
+          <p:cNvPicPr>
+            <a:picLocks noChangeAspect="1"/>
+          </p:cNvPicPr>
+          <p:nvPr/>
+        </p:nvPicPr>
+        <p:blipFill>
+          <a:blip r:embed="rId1"/>
+          <a:stretch>
+            <a:fillRect/>
+          </a:stretch>
+        </p:blipFill>
+        <p:spPr>
+          <a:xfrm>
+            <a:off x="640080" y="1691640"/>
+            <a:ext cx="6766560" cy="3296972"/>
+          </a:xfrm>
+          <a:prstGeom prst="rect">
+            <a:avLst/>
+          </a:prstGeom>
+        </p:spPr>
+      </p:pic>
+      <p:sp>
+        <p:nvSpPr>
+          <p:cNvPr id="6" name="Text 3"/>
+          <p:cNvSpPr/>
+          <p:nvPr/>
+        </p:nvSpPr>
+        <p:spPr>
+          <a:xfrm>
+            <a:off x="7772400" y="1783080"/>
+            <a:ext cx="3749040" cy="1280160"/>
+          </a:xfrm>
+          <a:prstGeom prst="rect">
+            <a:avLst/>
+          </a:prstGeom>
+          <a:noFill/>
+          <a:ln/>
+        </p:spPr>
+        <p:txBody>
+          <a:bodyPr wrap="square" lIns="0" tIns="0" rIns="0" bIns="0" rtlCol="0" anchor="ctr"/>
+          <a:lstStyle/>
+          <a:p>
+            <a:pPr marL="342900" indent="-342900">
+              <a:spcAft>
+                <a:spcPts val="1200"/>
+              </a:spcAft>
+              <a:buSzPct val="100000"/>
+              <a:buChar char="•"/>
+            </a:pPr>
+            <a:r>
+              <a:rPr lang="en-US" sz="1600" dirty="0">
+                <a:solidFill>
+                  <a:srgbClr val="1E2D34"/>
+                </a:solidFill>
+                <a:latin typeface="Meiryo" pitchFamily="34" charset="0"/>
+                <a:ea typeface="Meiryo" pitchFamily="34" charset="-122"/>
+                <a:cs typeface="Meiryo" pitchFamily="34" charset="-120"/>
+              </a:rPr>
+              <a:t>Super Page Cache を開く</a:t>
+            </a:r>
+            <a:endParaRPr lang="en-US" sz="1600" dirty="0"/>
+          </a:p>
+          <a:p>
+            <a:pPr marL="342900" indent="-342900">
+              <a:spcAft>
+                <a:spcPts val="1200"/>
+              </a:spcAft>
+              <a:buSzPct val="100000"/>
+              <a:buChar char="•"/>
+            </a:pPr>
+            <a:r>
+              <a:rPr lang="en-US" sz="1600" dirty="0">
+                <a:solidFill>
+                  <a:srgbClr val="1E2D34"/>
+                </a:solidFill>
+                <a:latin typeface="Meiryo" pitchFamily="34" charset="0"/>
+                <a:ea typeface="Meiryo" pitchFamily="34" charset="-122"/>
+                <a:cs typeface="Meiryo" pitchFamily="34" charset="-120"/>
+              </a:rPr>
+              <a:t>【Purge Cache】を押す</a:t>
+            </a:r>
+            <a:endParaRPr lang="en-US" sz="1600" dirty="0"/>
+          </a:p>
+          <a:p>
+            <a:pPr marL="342900" indent="-342900">
+              <a:spcAft>
+                <a:spcPts val="1200"/>
+              </a:spcAft>
+              <a:buSzPct val="100000"/>
+              <a:buChar char="•"/>
+            </a:pPr>
+            <a:r>
+              <a:rPr lang="en-US" sz="1600" dirty="0">
+                <a:solidFill>
+                  <a:srgbClr val="1E2D34"/>
+                </a:solidFill>
+                <a:latin typeface="Meiryo" pitchFamily="34" charset="0"/>
+                <a:ea typeface="Meiryo" pitchFamily="34" charset="-122"/>
+                <a:cs typeface="Meiryo" pitchFamily="34" charset="-120"/>
+              </a:rPr>
+              <a:t>ブラウザで Ctrl + F5</a:t>
+            </a:r>
+            <a:endParaRPr lang="en-US" sz="1600" dirty="0"/>
+          </a:p>
+        </p:txBody>
+      </p:sp>
+      <p:sp>
+        <p:nvSpPr>
+          <p:cNvPr id="7" name="Shape 4"/>
+          <p:cNvSpPr/>
+          <p:nvPr/>
+        </p:nvSpPr>
+        <p:spPr>
+          <a:xfrm>
+            <a:off x="7726680" y="3291840"/>
+            <a:ext cx="3840480" cy="1828800"/>
+          </a:xfrm>
+          <a:prstGeom prst="roundRect">
+            <a:avLst>
+              <a:gd name="adj" fmla="val 5000"/>
+            </a:avLst>
+          </a:prstGeom>
+          <a:solidFill>
+            <a:srgbClr val="264653"/>
+          </a:solidFill>
+          <a:ln/>
+        </p:spPr>
+      </p:sp>
+      <p:sp>
+        <p:nvSpPr>
+          <p:cNvPr id="8" name="Text 5"/>
+          <p:cNvSpPr/>
+          <p:nvPr/>
+        </p:nvSpPr>
+        <p:spPr>
+          <a:xfrm>
+            <a:off x="7955280" y="3474720"/>
+            <a:ext cx="3566160" cy="320040"/>
+          </a:xfrm>
+          <a:prstGeom prst="rect">
+            <a:avLst/>
+          </a:prstGeom>
+          <a:noFill/>
+          <a:ln/>
+        </p:spPr>
+        <p:txBody>
+          <a:bodyPr wrap="square" lIns="0" tIns="0" rIns="0" bIns="0" rtlCol="0" anchor="ctr"/>
+          <a:lstStyle/>
+          <a:p>
+            <a:pPr indent="0" marL="0">
+              <a:buNone/>
+            </a:pPr>
+            <a:r>
+              <a:rPr lang="en-US" sz="1500" b="1" dirty="0">
+                <a:solidFill>
+                  <a:srgbClr val="F4A261"/>
+                </a:solidFill>
+                <a:latin typeface="Meiryo" pitchFamily="34" charset="0"/>
+                <a:ea typeface="Meiryo" pitchFamily="34" charset="-122"/>
+                <a:cs typeface="Meiryo" pitchFamily="34" charset="-120"/>
+              </a:rPr>
+              <a:t>それでも変わらないとき</a:t>
+            </a:r>
+            <a:endParaRPr lang="en-US" sz="1500" dirty="0"/>
+          </a:p>
+        </p:txBody>
+      </p:sp>
+      <p:sp>
+        <p:nvSpPr>
+          <p:cNvPr id="9" name="Text 6"/>
+          <p:cNvSpPr/>
+          <p:nvPr/>
+        </p:nvSpPr>
+        <p:spPr>
+          <a:xfrm>
+            <a:off x="7955280" y="3886200"/>
+            <a:ext cx="3566160" cy="1097280"/>
+          </a:xfrm>
+          <a:prstGeom prst="rect">
+            <a:avLst/>
+          </a:prstGeom>
+          <a:noFill/>
+          <a:ln/>
+        </p:spPr>
+        <p:txBody>
+          <a:bodyPr wrap="square" lIns="0" tIns="0" rIns="0" bIns="0" rtlCol="0" anchor="ctr"/>
+          <a:lstStyle/>
+          <a:p>
+            <a:pPr indent="0" marL="0">
+              <a:lnSpc>
+                <a:spcPts val="2100"/>
+              </a:lnSpc>
+              <a:buNone/>
+            </a:pPr>
+            <a:r>
+              <a:rPr lang="en-US" sz="1400" dirty="0">
+                <a:solidFill>
+                  <a:srgbClr val="FFFFFF"/>
+                </a:solidFill>
+                <a:latin typeface="Meiryo" pitchFamily="34" charset="0"/>
+                <a:ea typeface="Meiryo" pitchFamily="34" charset="-122"/>
+                <a:cs typeface="Meiryo" pitchFamily="34" charset="-120"/>
+              </a:rPr>
+              <a:t>URLの末尾に ?v=2 を付けて</a:t>
+            </a:r>
+            <a:endParaRPr lang="en-US" sz="1400" dirty="0"/>
+          </a:p>
+          <a:p>
+            <a:pPr indent="0" marL="0">
+              <a:lnSpc>
+                <a:spcPts val="2100"/>
+              </a:lnSpc>
+              <a:buNone/>
+            </a:pPr>
+            <a:r>
+              <a:rPr lang="en-US" sz="1400" dirty="0">
+                <a:solidFill>
+                  <a:srgbClr val="FFFFFF"/>
+                </a:solidFill>
+                <a:latin typeface="Meiryo" pitchFamily="34" charset="0"/>
+                <a:ea typeface="Meiryo" pitchFamily="34" charset="-122"/>
+                <a:cs typeface="Meiryo" pitchFamily="34" charset="-120"/>
+              </a:rPr>
+              <a:t>開いてください。</a:t>
+            </a:r>
+            <a:endParaRPr lang="en-US" sz="1400" dirty="0"/>
+          </a:p>
+          <a:p>
+            <a:pPr indent="0" marL="0">
+              <a:lnSpc>
+                <a:spcPts val="2100"/>
+              </a:lnSpc>
+              <a:buNone/>
+            </a:pPr>
+            <a:r>
+              <a:rPr lang="en-US" sz="1400" dirty="0">
+                <a:solidFill>
+                  <a:srgbClr val="FFFFFF"/>
+                </a:solidFill>
+                <a:latin typeface="Meiryo" pitchFamily="34" charset="0"/>
+                <a:ea typeface="Meiryo" pitchFamily="34" charset="-122"/>
+                <a:cs typeface="Meiryo" pitchFamily="34" charset="-120"/>
+              </a:rPr>
+              <a:t>キャッシュを確実に飛ばせます。</a:t>
+            </a:r>
+            <a:endParaRPr lang="en-US" sz="1400" dirty="0"/>
+          </a:p>
+        </p:txBody>
+      </p:sp>
+    </p:spTree>
+  </p:cSld>
+  <p:clrMapOvr>
+    <a:masterClrMapping/>
+  </p:clrMapOvr>
+</p:sld>
+</file>
+
+<file path=ppt/slides/slide16.xml><?xml version="1.0" encoding="utf-8"?>
+<p:sld xmlns:a="http://schemas.openxmlformats.org/drawingml/2006/main" xmlns:r="http://schemas.openxmlformats.org/officeDocument/2006/relationships" xmlns:p="http://schemas.openxmlformats.org/presentationml/2006/main">
+  <p:cSld name="Slide 16">
+    <p:bg>
+      <p:bgPr>
+        <a:solidFill>
+          <a:srgbClr val="FFFFFF"/>
+        </a:solidFill>
+      </p:bgPr>
+    </p:bg>
+    <p:spTree>
+      <p:nvGrpSpPr>
+        <p:cNvPr id="1" name=""/>
+        <p:cNvGrpSpPr/>
+        <p:nvPr/>
+      </p:nvGrpSpPr>
+      <p:grpSpPr>
+        <a:xfrm>
+          <a:off x="0" y="0"/>
+          <a:ext cx="0" cy="0"/>
+          <a:chOff x="0" y="0"/>
+          <a:chExt cx="0" cy="0"/>
+        </a:xfrm>
+      </p:grpSpPr>
+      <p:sp>
+        <p:nvSpPr>
+          <p:cNvPr id="2" name="Text 0"/>
+          <p:cNvSpPr/>
+          <p:nvPr/>
+        </p:nvSpPr>
+        <p:spPr>
+          <a:xfrm>
+            <a:off x="548640" y="320040"/>
+            <a:ext cx="10424160" cy="685800"/>
+          </a:xfrm>
+          <a:prstGeom prst="rect">
+            <a:avLst/>
+          </a:prstGeom>
+          <a:noFill/>
+          <a:ln/>
+        </p:spPr>
+        <p:txBody>
+          <a:bodyPr wrap="square" lIns="0" tIns="0" rIns="0" bIns="0" rtlCol="0" anchor="ctr"/>
+          <a:lstStyle/>
+          <a:p>
+            <a:pPr indent="0" marL="0">
+              <a:buNone/>
+            </a:pPr>
+            <a:r>
+              <a:rPr lang="en-US" sz="3200" b="1" dirty="0">
+                <a:solidFill>
+                  <a:srgbClr val="264653"/>
+                </a:solidFill>
+                <a:latin typeface="Meiryo" pitchFamily="34" charset="0"/>
+                <a:ea typeface="Meiryo" pitchFamily="34" charset="-122"/>
+                <a:cs typeface="Meiryo" pitchFamily="34" charset="-120"/>
+              </a:rPr>
+              <a:t>困ったとき</a:t>
+            </a:r>
+            <a:endParaRPr lang="en-US" sz="3200" dirty="0"/>
+          </a:p>
+        </p:txBody>
+      </p:sp>
+      <p:sp>
+        <p:nvSpPr>
+          <p:cNvPr id="3" name="Text 1"/>
+          <p:cNvSpPr/>
+          <p:nvPr/>
+        </p:nvSpPr>
+        <p:spPr>
+          <a:xfrm>
+            <a:off x="566928" y="1024128"/>
+            <a:ext cx="10424160" cy="365760"/>
+          </a:xfrm>
+          <a:prstGeom prst="rect">
+            <a:avLst/>
+          </a:prstGeom>
+          <a:noFill/>
+          <a:ln/>
+        </p:spPr>
+        <p:txBody>
+          <a:bodyPr wrap="square" lIns="0" tIns="0" rIns="0" bIns="0" rtlCol="0" anchor="ctr"/>
+          <a:lstStyle/>
+          <a:p>
+            <a:pPr indent="0" marL="0">
+              <a:buNone/>
+            </a:pPr>
+            <a:r>
+              <a:rPr lang="en-US" sz="1500" dirty="0">
+                <a:solidFill>
+                  <a:srgbClr val="5E7681"/>
+                </a:solidFill>
+                <a:latin typeface="Meiryo" pitchFamily="34" charset="0"/>
+                <a:ea typeface="Meiryo" pitchFamily="34" charset="-122"/>
+                <a:cs typeface="Meiryo" pitchFamily="34" charset="-120"/>
+              </a:rPr>
+              <a:t>症状から原因を引けます</a:t>
+            </a:r>
+            <a:endParaRPr lang="en-US" sz="1500" dirty="0"/>
+          </a:p>
+        </p:txBody>
+      </p:sp>
+      <p:sp>
+        <p:nvSpPr>
+          <p:cNvPr id="4" name="Text 2"/>
+          <p:cNvSpPr/>
+          <p:nvPr/>
+        </p:nvSpPr>
+        <p:spPr>
+          <a:xfrm>
+            <a:off x="11338560" y="6263640"/>
+            <a:ext cx="457200" cy="274320"/>
+          </a:xfrm>
+          <a:prstGeom prst="rect">
+            <a:avLst/>
+          </a:prstGeom>
+          <a:noFill/>
+          <a:ln/>
+        </p:spPr>
+        <p:txBody>
+          <a:bodyPr wrap="square" lIns="0" tIns="0" rIns="0" bIns="0" rtlCol="0" anchor="ctr"/>
+          <a:lstStyle/>
+          <a:p>
+            <a:pPr algn="r" indent="0" marL="0">
+              <a:buNone/>
+            </a:pPr>
+            <a:r>
+              <a:rPr lang="en-US" sz="1100" dirty="0">
+                <a:solidFill>
+                  <a:srgbClr val="A8B4B8"/>
+                </a:solidFill>
+                <a:latin typeface="Meiryo" pitchFamily="34" charset="0"/>
+                <a:ea typeface="Meiryo" pitchFamily="34" charset="-122"/>
+                <a:cs typeface="Meiryo" pitchFamily="34" charset="-120"/>
+              </a:rPr>
+              <a:t>15</a:t>
+            </a:r>
+            <a:endParaRPr lang="en-US" sz="1100" dirty="0"/>
+          </a:p>
+        </p:txBody>
+      </p:sp>
       <p:graphicFrame>
         <p:nvGraphicFramePr>
-          <p:cNvPr id="16" name="Table 0"/>
+          <p:cNvPr id="17" name="Table 0"/>
           <p:cNvGraphicFramePr>
             <a:graphicFrameLocks noGrp="1"/>
           </p:cNvGraphicFramePr>
@@ -9314,9 +9782,9 @@
 </p:sld>
 </file>
 
-<file path=ppt/slides/slide16.xml><?xml version="1.0" encoding="utf-8"?>
+<file path=ppt/slides/slide17.xml><?xml version="1.0" encoding="utf-8"?>
 <p:sld xmlns:a="http://schemas.openxmlformats.org/drawingml/2006/main" xmlns:r="http://schemas.openxmlformats.org/officeDocument/2006/relationships" xmlns:p="http://schemas.openxmlformats.org/presentationml/2006/main">
-  <p:cSld name="Slide 16">
+  <p:cSld name="Slide 17">
     <p:bg>
       <p:bgPr>
         <a:solidFill>
@@ -9449,7 +9917,7 @@
                 <a:ea typeface="Meiryo" pitchFamily="34" charset="-122"/>
                 <a:cs typeface="Meiryo" pitchFamily="34" charset="-120"/>
               </a:rPr>
-              <a:t>15</a:t>
+              <a:t>16</a:t>
             </a:r>
             <a:endParaRPr lang="en-US" sz="1100" dirty="0"/>
           </a:p>
@@ -11396,7 +11864,7 @@
                 <a:ea typeface="Meiryo" pitchFamily="34" charset="-122"/>
                 <a:cs typeface="Meiryo" pitchFamily="34" charset="-120"/>
               </a:rPr>
-              <a:t>更新には「2つの道」があります</a:t>
+              <a:t>資料は5冊あります</a:t>
             </a:r>
             <a:endParaRPr lang="en-US" sz="3200" dirty="0"/>
           </a:p>
@@ -11435,7 +11903,7 @@
                 <a:ea typeface="Meiryo" pitchFamily="34" charset="-122"/>
                 <a:cs typeface="Meiryo" pitchFamily="34" charset="-120"/>
               </a:rPr>
-              <a:t>どちらの道かを最初に見分けることが、いちばん大事です</a:t>
+              <a:t>困ったときに、どれを開けばよいか</a:t>
             </a:r>
             <a:endParaRPr lang="en-US" sz="1500" dirty="0"/>
           </a:p>
@@ -11480,30 +11948,945 @@
           </a:p>
         </p:txBody>
       </p:sp>
-      <p:pic>
-        <p:nvPicPr>
-          <p:cNvPr id="5" name="Image 0" descr="/sessions/compassionate-sweet-heisenberg/mnt/dev-aspath-life-main/_wp移行素材/★引継ぎ資料/画像/00_ふたつの道.png">    </p:cNvPr>
-          <p:cNvPicPr>
-            <a:picLocks noChangeAspect="1"/>
-          </p:cNvPicPr>
-          <p:nvPr/>
-        </p:nvPicPr>
-        <p:blipFill>
-          <a:blip r:embed="rId1"/>
-          <a:stretch>
-            <a:fillRect/>
-          </a:stretch>
-        </p:blipFill>
-        <p:spPr>
-          <a:xfrm>
-            <a:off x="777240" y="1600200"/>
-            <a:ext cx="10607040" cy="6061166"/>
-          </a:xfrm>
-          <a:prstGeom prst="rect">
-            <a:avLst/>
-          </a:prstGeom>
-        </p:spPr>
-      </p:pic>
+      <p:sp>
+        <p:nvSpPr>
+          <p:cNvPr id="5" name="Shape 3"/>
+          <p:cNvSpPr/>
+          <p:nvPr/>
+        </p:nvSpPr>
+        <p:spPr>
+          <a:xfrm>
+            <a:off x="640080" y="1691640"/>
+            <a:ext cx="11064240" cy="841248"/>
+          </a:xfrm>
+          <a:prstGeom prst="roundRect">
+            <a:avLst>
+              <a:gd name="adj" fmla="val 10870"/>
+            </a:avLst>
+          </a:prstGeom>
+          <a:solidFill>
+            <a:srgbClr val="F6F7F8"/>
+          </a:solidFill>
+          <a:ln/>
+        </p:spPr>
+      </p:sp>
+      <p:sp>
+        <p:nvSpPr>
+          <p:cNvPr id="6" name="Shape 4"/>
+          <p:cNvSpPr/>
+          <p:nvPr/>
+        </p:nvSpPr>
+        <p:spPr>
+          <a:xfrm>
+            <a:off x="868680" y="1892808"/>
+            <a:ext cx="1417320" cy="438912"/>
+          </a:xfrm>
+          <a:prstGeom prst="roundRect">
+            <a:avLst>
+              <a:gd name="adj" fmla="val 50000"/>
+            </a:avLst>
+          </a:prstGeom>
+          <a:solidFill>
+            <a:srgbClr val="DD8236"/>
+          </a:solidFill>
+          <a:ln/>
+        </p:spPr>
+      </p:sp>
+      <p:sp>
+        <p:nvSpPr>
+          <p:cNvPr id="7" name="Text 5"/>
+          <p:cNvSpPr/>
+          <p:nvPr/>
+        </p:nvSpPr>
+        <p:spPr>
+          <a:xfrm>
+            <a:off x="868680" y="1892808"/>
+            <a:ext cx="1417320" cy="438912"/>
+          </a:xfrm>
+          <a:prstGeom prst="rect">
+            <a:avLst/>
+          </a:prstGeom>
+          <a:noFill/>
+          <a:ln/>
+        </p:spPr>
+        <p:txBody>
+          <a:bodyPr wrap="square" lIns="0" tIns="0" rIns="0" bIns="0" rtlCol="0" anchor="ctr"/>
+          <a:lstStyle/>
+          <a:p>
+            <a:pPr algn="ctr" indent="0" marL="0">
+              <a:buNone/>
+            </a:pPr>
+            <a:r>
+              <a:rPr lang="en-US" sz="1250" b="1" dirty="0">
+                <a:solidFill>
+                  <a:srgbClr val="FFFFFF"/>
+                </a:solidFill>
+                <a:latin typeface="Meiryo" pitchFamily="34" charset="0"/>
+                <a:ea typeface="Meiryo" pitchFamily="34" charset="-122"/>
+                <a:cs typeface="Meiryo" pitchFamily="34" charset="-120"/>
+              </a:rPr>
+              <a:t>基本編</a:t>
+            </a:r>
+            <a:endParaRPr lang="en-US" sz="1250" dirty="0"/>
+          </a:p>
+        </p:txBody>
+      </p:sp>
+      <p:sp>
+        <p:nvSpPr>
+          <p:cNvPr id="8" name="Text 6"/>
+          <p:cNvSpPr/>
+          <p:nvPr/>
+        </p:nvSpPr>
+        <p:spPr>
+          <a:xfrm>
+            <a:off x="2468880" y="1801368"/>
+            <a:ext cx="4480560" cy="320040"/>
+          </a:xfrm>
+          <a:prstGeom prst="rect">
+            <a:avLst/>
+          </a:prstGeom>
+          <a:noFill/>
+          <a:ln/>
+        </p:spPr>
+        <p:txBody>
+          <a:bodyPr wrap="square" lIns="0" tIns="0" rIns="0" bIns="0" rtlCol="0" anchor="ctr"/>
+          <a:lstStyle/>
+          <a:p>
+            <a:pPr indent="0" marL="0">
+              <a:buNone/>
+            </a:pPr>
+            <a:r>
+              <a:rPr lang="en-US" sz="1350" b="1" dirty="0">
+                <a:solidFill>
+                  <a:srgbClr val="264653"/>
+                </a:solidFill>
+                <a:latin typeface="Meiryo" pitchFamily="34" charset="0"/>
+                <a:ea typeface="Meiryo" pitchFamily="34" charset="-122"/>
+                <a:cs typeface="Meiryo" pitchFamily="34" charset="-120"/>
+              </a:rPr>
+              <a:t>★ASPATH_サイト運用マニュアル_基本編</a:t>
+            </a:r>
+            <a:endParaRPr lang="en-US" sz="1350" dirty="0"/>
+          </a:p>
+        </p:txBody>
+      </p:sp>
+      <p:sp>
+        <p:nvSpPr>
+          <p:cNvPr id="9" name="Text 7"/>
+          <p:cNvSpPr/>
+          <p:nvPr/>
+        </p:nvSpPr>
+        <p:spPr>
+          <a:xfrm>
+            <a:off x="7132320" y="1764792"/>
+            <a:ext cx="4389120" cy="713232"/>
+          </a:xfrm>
+          <a:prstGeom prst="rect">
+            <a:avLst/>
+          </a:prstGeom>
+          <a:noFill/>
+          <a:ln/>
+        </p:spPr>
+        <p:txBody>
+          <a:bodyPr wrap="square" lIns="0" tIns="0" rIns="0" bIns="0" rtlCol="0" anchor="ctr"/>
+          <a:lstStyle/>
+          <a:p>
+            <a:pPr indent="0" marL="0">
+              <a:lnSpc>
+                <a:spcPts val="1500"/>
+              </a:lnSpc>
+              <a:buNone/>
+            </a:pPr>
+            <a:r>
+              <a:rPr lang="en-US" sz="1150" dirty="0">
+                <a:solidFill>
+                  <a:srgbClr val="5E7681"/>
+                </a:solidFill>
+                <a:latin typeface="Meiryo" pitchFamily="34" charset="0"/>
+                <a:ea typeface="Meiryo" pitchFamily="34" charset="-122"/>
+                <a:cs typeface="Meiryo" pitchFamily="34" charset="-120"/>
+              </a:rPr>
+              <a:t>日々の更新。画面写真つき。</a:t>
+            </a:r>
+            <a:endParaRPr lang="en-US" sz="1150" dirty="0"/>
+          </a:p>
+          <a:p>
+            <a:pPr indent="0" marL="0">
+              <a:lnSpc>
+                <a:spcPts val="1500"/>
+              </a:lnSpc>
+              <a:buNone/>
+            </a:pPr>
+            <a:r>
+              <a:rPr lang="en-US" sz="1150" dirty="0">
+                <a:solidFill>
+                  <a:srgbClr val="5E7681"/>
+                </a:solidFill>
+                <a:latin typeface="Meiryo" pitchFamily="34" charset="0"/>
+                <a:ea typeface="Meiryo" pitchFamily="34" charset="-122"/>
+                <a:cs typeface="Meiryo" pitchFamily="34" charset="-120"/>
+              </a:rPr>
+              <a:t>まずこれ</a:t>
+            </a:r>
+            <a:endParaRPr lang="en-US" sz="1150" dirty="0"/>
+          </a:p>
+        </p:txBody>
+      </p:sp>
+      <p:sp>
+        <p:nvSpPr>
+          <p:cNvPr id="10" name="Shape 8"/>
+          <p:cNvSpPr/>
+          <p:nvPr/>
+        </p:nvSpPr>
+        <p:spPr>
+          <a:xfrm>
+            <a:off x="640080" y="2624328"/>
+            <a:ext cx="11064240" cy="841248"/>
+          </a:xfrm>
+          <a:prstGeom prst="roundRect">
+            <a:avLst>
+              <a:gd name="adj" fmla="val 10870"/>
+            </a:avLst>
+          </a:prstGeom>
+          <a:solidFill>
+            <a:srgbClr val="F6F7F8"/>
+          </a:solidFill>
+          <a:ln/>
+        </p:spPr>
+      </p:sp>
+      <p:sp>
+        <p:nvSpPr>
+          <p:cNvPr id="11" name="Shape 9"/>
+          <p:cNvSpPr/>
+          <p:nvPr/>
+        </p:nvSpPr>
+        <p:spPr>
+          <a:xfrm>
+            <a:off x="868680" y="2825496"/>
+            <a:ext cx="1417320" cy="438912"/>
+          </a:xfrm>
+          <a:prstGeom prst="roundRect">
+            <a:avLst>
+              <a:gd name="adj" fmla="val 50000"/>
+            </a:avLst>
+          </a:prstGeom>
+          <a:solidFill>
+            <a:srgbClr val="264653"/>
+          </a:solidFill>
+          <a:ln/>
+        </p:spPr>
+      </p:sp>
+      <p:sp>
+        <p:nvSpPr>
+          <p:cNvPr id="12" name="Text 10"/>
+          <p:cNvSpPr/>
+          <p:nvPr/>
+        </p:nvSpPr>
+        <p:spPr>
+          <a:xfrm>
+            <a:off x="868680" y="2825496"/>
+            <a:ext cx="1417320" cy="438912"/>
+          </a:xfrm>
+          <a:prstGeom prst="rect">
+            <a:avLst/>
+          </a:prstGeom>
+          <a:noFill/>
+          <a:ln/>
+        </p:spPr>
+        <p:txBody>
+          <a:bodyPr wrap="square" lIns="0" tIns="0" rIns="0" bIns="0" rtlCol="0" anchor="ctr"/>
+          <a:lstStyle/>
+          <a:p>
+            <a:pPr algn="ctr" indent="0" marL="0">
+              <a:buNone/>
+            </a:pPr>
+            <a:r>
+              <a:rPr lang="en-US" sz="1250" b="1" dirty="0">
+                <a:solidFill>
+                  <a:srgbClr val="FFFFFF"/>
+                </a:solidFill>
+                <a:latin typeface="Meiryo" pitchFamily="34" charset="0"/>
+                <a:ea typeface="Meiryo" pitchFamily="34" charset="-122"/>
+                <a:cs typeface="Meiryo" pitchFamily="34" charset="-120"/>
+              </a:rPr>
+              <a:t>この資料</a:t>
+            </a:r>
+            <a:endParaRPr lang="en-US" sz="1250" dirty="0"/>
+          </a:p>
+        </p:txBody>
+      </p:sp>
+      <p:sp>
+        <p:nvSpPr>
+          <p:cNvPr id="13" name="Text 11"/>
+          <p:cNvSpPr/>
+          <p:nvPr/>
+        </p:nvSpPr>
+        <p:spPr>
+          <a:xfrm>
+            <a:off x="2468880" y="2734056"/>
+            <a:ext cx="4480560" cy="320040"/>
+          </a:xfrm>
+          <a:prstGeom prst="rect">
+            <a:avLst/>
+          </a:prstGeom>
+          <a:noFill/>
+          <a:ln/>
+        </p:spPr>
+        <p:txBody>
+          <a:bodyPr wrap="square" lIns="0" tIns="0" rIns="0" bIns="0" rtlCol="0" anchor="ctr"/>
+          <a:lstStyle/>
+          <a:p>
+            <a:pPr indent="0" marL="0">
+              <a:buNone/>
+            </a:pPr>
+            <a:r>
+              <a:rPr lang="en-US" sz="1350" b="1" dirty="0">
+                <a:solidFill>
+                  <a:srgbClr val="264653"/>
+                </a:solidFill>
+                <a:latin typeface="Meiryo" pitchFamily="34" charset="0"/>
+                <a:ea typeface="Meiryo" pitchFamily="34" charset="-122"/>
+                <a:cs typeface="Meiryo" pitchFamily="34" charset="-120"/>
+              </a:rPr>
+              <a:t>ASPATH_サイト更新マニュアル</a:t>
+            </a:r>
+            <a:endParaRPr lang="en-US" sz="1350" dirty="0"/>
+          </a:p>
+        </p:txBody>
+      </p:sp>
+      <p:sp>
+        <p:nvSpPr>
+          <p:cNvPr id="14" name="Text 12"/>
+          <p:cNvSpPr/>
+          <p:nvPr/>
+        </p:nvSpPr>
+        <p:spPr>
+          <a:xfrm>
+            <a:off x="7132320" y="2697480"/>
+            <a:ext cx="4389120" cy="713232"/>
+          </a:xfrm>
+          <a:prstGeom prst="rect">
+            <a:avLst/>
+          </a:prstGeom>
+          <a:noFill/>
+          <a:ln/>
+        </p:spPr>
+        <p:txBody>
+          <a:bodyPr wrap="square" lIns="0" tIns="0" rIns="0" bIns="0" rtlCol="0" anchor="ctr"/>
+          <a:lstStyle/>
+          <a:p>
+            <a:pPr indent="0" marL="0">
+              <a:lnSpc>
+                <a:spcPts val="1500"/>
+              </a:lnSpc>
+              <a:buNone/>
+            </a:pPr>
+            <a:r>
+              <a:rPr lang="en-US" sz="1150" dirty="0">
+                <a:solidFill>
+                  <a:srgbClr val="5E7681"/>
+                </a:solidFill>
+                <a:latin typeface="Meiryo" pitchFamily="34" charset="0"/>
+                <a:ea typeface="Meiryo" pitchFamily="34" charset="-122"/>
+                <a:cs typeface="Meiryo" pitchFamily="34" charset="-120"/>
+              </a:rPr>
+              <a:t>全体像と、PC作業の手順。</a:t>
+            </a:r>
+            <a:endParaRPr lang="en-US" sz="1150" dirty="0"/>
+          </a:p>
+          <a:p>
+            <a:pPr indent="0" marL="0">
+              <a:lnSpc>
+                <a:spcPts val="1500"/>
+              </a:lnSpc>
+              <a:buNone/>
+            </a:pPr>
+            <a:r>
+              <a:rPr lang="en-US" sz="1150" dirty="0">
+                <a:solidFill>
+                  <a:srgbClr val="5E7681"/>
+                </a:solidFill>
+                <a:latin typeface="Meiryo" pitchFamily="34" charset="0"/>
+                <a:ea typeface="Meiryo" pitchFamily="34" charset="-122"/>
+                <a:cs typeface="Meiryo" pitchFamily="34" charset="-120"/>
+              </a:rPr>
+              <a:t>開発担当も見る</a:t>
+            </a:r>
+            <a:endParaRPr lang="en-US" sz="1150" dirty="0"/>
+          </a:p>
+        </p:txBody>
+      </p:sp>
+      <p:sp>
+        <p:nvSpPr>
+          <p:cNvPr id="15" name="Shape 13"/>
+          <p:cNvSpPr/>
+          <p:nvPr/>
+        </p:nvSpPr>
+        <p:spPr>
+          <a:xfrm>
+            <a:off x="640080" y="3557016"/>
+            <a:ext cx="11064240" cy="841248"/>
+          </a:xfrm>
+          <a:prstGeom prst="roundRect">
+            <a:avLst>
+              <a:gd name="adj" fmla="val 10870"/>
+            </a:avLst>
+          </a:prstGeom>
+          <a:solidFill>
+            <a:srgbClr val="F6F7F8"/>
+          </a:solidFill>
+          <a:ln/>
+        </p:spPr>
+      </p:sp>
+      <p:sp>
+        <p:nvSpPr>
+          <p:cNvPr id="16" name="Shape 14"/>
+          <p:cNvSpPr/>
+          <p:nvPr/>
+        </p:nvSpPr>
+        <p:spPr>
+          <a:xfrm>
+            <a:off x="868680" y="3758184"/>
+            <a:ext cx="1417320" cy="438912"/>
+          </a:xfrm>
+          <a:prstGeom prst="roundRect">
+            <a:avLst>
+              <a:gd name="adj" fmla="val 50000"/>
+            </a:avLst>
+          </a:prstGeom>
+          <a:solidFill>
+            <a:srgbClr val="2E7D32"/>
+          </a:solidFill>
+          <a:ln/>
+        </p:spPr>
+      </p:sp>
+      <p:sp>
+        <p:nvSpPr>
+          <p:cNvPr id="17" name="Text 15"/>
+          <p:cNvSpPr/>
+          <p:nvPr/>
+        </p:nvSpPr>
+        <p:spPr>
+          <a:xfrm>
+            <a:off x="868680" y="3758184"/>
+            <a:ext cx="1417320" cy="438912"/>
+          </a:xfrm>
+          <a:prstGeom prst="rect">
+            <a:avLst/>
+          </a:prstGeom>
+          <a:noFill/>
+          <a:ln/>
+        </p:spPr>
+        <p:txBody>
+          <a:bodyPr wrap="square" lIns="0" tIns="0" rIns="0" bIns="0" rtlCol="0" anchor="ctr"/>
+          <a:lstStyle/>
+          <a:p>
+            <a:pPr algn="ctr" indent="0" marL="0">
+              <a:buNone/>
+            </a:pPr>
+            <a:r>
+              <a:rPr lang="en-US" sz="1250" b="1" dirty="0">
+                <a:solidFill>
+                  <a:srgbClr val="FFFFFF"/>
+                </a:solidFill>
+                <a:latin typeface="Meiryo" pitchFamily="34" charset="0"/>
+                <a:ea typeface="Meiryo" pitchFamily="34" charset="-122"/>
+                <a:cs typeface="Meiryo" pitchFamily="34" charset="-120"/>
+              </a:rPr>
+              <a:t>やさしい版</a:t>
+            </a:r>
+            <a:endParaRPr lang="en-US" sz="1250" dirty="0"/>
+          </a:p>
+        </p:txBody>
+      </p:sp>
+      <p:sp>
+        <p:nvSpPr>
+          <p:cNvPr id="18" name="Text 16"/>
+          <p:cNvSpPr/>
+          <p:nvPr/>
+        </p:nvSpPr>
+        <p:spPr>
+          <a:xfrm>
+            <a:off x="2468880" y="3666744"/>
+            <a:ext cx="4480560" cy="320040"/>
+          </a:xfrm>
+          <a:prstGeom prst="rect">
+            <a:avLst/>
+          </a:prstGeom>
+          <a:noFill/>
+          <a:ln/>
+        </p:spPr>
+        <p:txBody>
+          <a:bodyPr wrap="square" lIns="0" tIns="0" rIns="0" bIns="0" rtlCol="0" anchor="ctr"/>
+          <a:lstStyle/>
+          <a:p>
+            <a:pPr indent="0" marL="0">
+              <a:buNone/>
+            </a:pPr>
+            <a:r>
+              <a:rPr lang="en-US" sz="1350" b="1" dirty="0">
+                <a:solidFill>
+                  <a:srgbClr val="264653"/>
+                </a:solidFill>
+                <a:latin typeface="Meiryo" pitchFamily="34" charset="0"/>
+                <a:ea typeface="Meiryo" pitchFamily="34" charset="-122"/>
+                <a:cs typeface="Meiryo" pitchFamily="34" charset="-120"/>
+              </a:rPr>
+              <a:t>山口様向け_ページの直し方</a:t>
+            </a:r>
+            <a:endParaRPr lang="en-US" sz="1350" dirty="0"/>
+          </a:p>
+        </p:txBody>
+      </p:sp>
+      <p:sp>
+        <p:nvSpPr>
+          <p:cNvPr id="19" name="Text 17"/>
+          <p:cNvSpPr/>
+          <p:nvPr/>
+        </p:nvSpPr>
+        <p:spPr>
+          <a:xfrm>
+            <a:off x="7132320" y="3630168"/>
+            <a:ext cx="4389120" cy="713232"/>
+          </a:xfrm>
+          <a:prstGeom prst="rect">
+            <a:avLst/>
+          </a:prstGeom>
+          <a:noFill/>
+          <a:ln/>
+        </p:spPr>
+        <p:txBody>
+          <a:bodyPr wrap="square" lIns="0" tIns="0" rIns="0" bIns="0" rtlCol="0" anchor="ctr"/>
+          <a:lstStyle/>
+          <a:p>
+            <a:pPr indent="0" marL="0">
+              <a:lnSpc>
+                <a:spcPts val="1500"/>
+              </a:lnSpc>
+              <a:buNone/>
+            </a:pPr>
+            <a:r>
+              <a:rPr lang="en-US" sz="1150" dirty="0">
+                <a:solidFill>
+                  <a:srgbClr val="5E7681"/>
+                </a:solidFill>
+                <a:latin typeface="Meiryo" pitchFamily="34" charset="0"/>
+                <a:ea typeface="Meiryo" pitchFamily="34" charset="-122"/>
+                <a:cs typeface="Meiryo" pitchFamily="34" charset="-120"/>
+              </a:rPr>
+              <a:t>記事の書き方を、やさしく。</a:t>
+            </a:r>
+            <a:endParaRPr lang="en-US" sz="1150" dirty="0"/>
+          </a:p>
+          <a:p>
+            <a:pPr indent="0" marL="0">
+              <a:lnSpc>
+                <a:spcPts val="1500"/>
+              </a:lnSpc>
+              <a:buNone/>
+            </a:pPr>
+            <a:r>
+              <a:rPr lang="en-US" sz="1150" dirty="0">
+                <a:solidFill>
+                  <a:srgbClr val="5E7681"/>
+                </a:solidFill>
+                <a:latin typeface="Meiryo" pitchFamily="34" charset="0"/>
+                <a:ea typeface="Meiryo" pitchFamily="34" charset="-122"/>
+                <a:cs typeface="Meiryo" pitchFamily="34" charset="-120"/>
+              </a:rPr>
+              <a:t>連絡の文例つき</a:t>
+            </a:r>
+            <a:endParaRPr lang="en-US" sz="1150" dirty="0"/>
+          </a:p>
+        </p:txBody>
+      </p:sp>
+      <p:sp>
+        <p:nvSpPr>
+          <p:cNvPr id="20" name="Shape 18"/>
+          <p:cNvSpPr/>
+          <p:nvPr/>
+        </p:nvSpPr>
+        <p:spPr>
+          <a:xfrm>
+            <a:off x="640080" y="4489704"/>
+            <a:ext cx="11064240" cy="841248"/>
+          </a:xfrm>
+          <a:prstGeom prst="roundRect">
+            <a:avLst>
+              <a:gd name="adj" fmla="val 10870"/>
+            </a:avLst>
+          </a:prstGeom>
+          <a:solidFill>
+            <a:srgbClr val="F6F7F8"/>
+          </a:solidFill>
+          <a:ln/>
+        </p:spPr>
+      </p:sp>
+      <p:sp>
+        <p:nvSpPr>
+          <p:cNvPr id="21" name="Shape 19"/>
+          <p:cNvSpPr/>
+          <p:nvPr/>
+        </p:nvSpPr>
+        <p:spPr>
+          <a:xfrm>
+            <a:off x="868680" y="4690872"/>
+            <a:ext cx="1417320" cy="438912"/>
+          </a:xfrm>
+          <a:prstGeom prst="roundRect">
+            <a:avLst>
+              <a:gd name="adj" fmla="val 50000"/>
+            </a:avLst>
+          </a:prstGeom>
+          <a:solidFill>
+            <a:srgbClr val="5E7681"/>
+          </a:solidFill>
+          <a:ln/>
+        </p:spPr>
+      </p:sp>
+      <p:sp>
+        <p:nvSpPr>
+          <p:cNvPr id="22" name="Text 20"/>
+          <p:cNvSpPr/>
+          <p:nvPr/>
+        </p:nvSpPr>
+        <p:spPr>
+          <a:xfrm>
+            <a:off x="868680" y="4690872"/>
+            <a:ext cx="1417320" cy="438912"/>
+          </a:xfrm>
+          <a:prstGeom prst="rect">
+            <a:avLst/>
+          </a:prstGeom>
+          <a:noFill/>
+          <a:ln/>
+        </p:spPr>
+        <p:txBody>
+          <a:bodyPr wrap="square" lIns="0" tIns="0" rIns="0" bIns="0" rtlCol="0" anchor="ctr"/>
+          <a:lstStyle/>
+          <a:p>
+            <a:pPr algn="ctr" indent="0" marL="0">
+              <a:buNone/>
+            </a:pPr>
+            <a:r>
+              <a:rPr lang="en-US" sz="1250" b="1" dirty="0">
+                <a:solidFill>
+                  <a:srgbClr val="FFFFFF"/>
+                </a:solidFill>
+                <a:latin typeface="Meiryo" pitchFamily="34" charset="0"/>
+                <a:ea typeface="Meiryo" pitchFamily="34" charset="-122"/>
+                <a:cs typeface="Meiryo" pitchFamily="34" charset="-120"/>
+              </a:rPr>
+              <a:t>固定ページ</a:t>
+            </a:r>
+            <a:endParaRPr lang="en-US" sz="1250" dirty="0"/>
+          </a:p>
+        </p:txBody>
+      </p:sp>
+      <p:sp>
+        <p:nvSpPr>
+          <p:cNvPr id="23" name="Text 21"/>
+          <p:cNvSpPr/>
+          <p:nvPr/>
+        </p:nvSpPr>
+        <p:spPr>
+          <a:xfrm>
+            <a:off x="2468880" y="4599432"/>
+            <a:ext cx="4480560" cy="320040"/>
+          </a:xfrm>
+          <a:prstGeom prst="rect">
+            <a:avLst/>
+          </a:prstGeom>
+          <a:noFill/>
+          <a:ln/>
+        </p:spPr>
+        <p:txBody>
+          <a:bodyPr wrap="square" lIns="0" tIns="0" rIns="0" bIns="0" rtlCol="0" anchor="ctr"/>
+          <a:lstStyle/>
+          <a:p>
+            <a:pPr indent="0" marL="0">
+              <a:buNone/>
+            </a:pPr>
+            <a:r>
+              <a:rPr lang="en-US" sz="1350" b="1" dirty="0">
+                <a:solidFill>
+                  <a:srgbClr val="264653"/>
+                </a:solidFill>
+                <a:latin typeface="Meiryo" pitchFamily="34" charset="0"/>
+                <a:ea typeface="Meiryo" pitchFamily="34" charset="-122"/>
+                <a:cs typeface="Meiryo" pitchFamily="34" charset="-120"/>
+              </a:rPr>
+              <a:t>山口様向け_ASPATHについて_文章の直し方</a:t>
+            </a:r>
+            <a:endParaRPr lang="en-US" sz="1350" dirty="0"/>
+          </a:p>
+        </p:txBody>
+      </p:sp>
+      <p:sp>
+        <p:nvSpPr>
+          <p:cNvPr id="24" name="Text 22"/>
+          <p:cNvSpPr/>
+          <p:nvPr/>
+        </p:nvSpPr>
+        <p:spPr>
+          <a:xfrm>
+            <a:off x="7132320" y="4562856"/>
+            <a:ext cx="4389120" cy="713232"/>
+          </a:xfrm>
+          <a:prstGeom prst="rect">
+            <a:avLst/>
+          </a:prstGeom>
+          <a:noFill/>
+          <a:ln/>
+        </p:spPr>
+        <p:txBody>
+          <a:bodyPr wrap="square" lIns="0" tIns="0" rIns="0" bIns="0" rtlCol="0" anchor="ctr"/>
+          <a:lstStyle/>
+          <a:p>
+            <a:pPr indent="0" marL="0">
+              <a:lnSpc>
+                <a:spcPts val="1500"/>
+              </a:lnSpc>
+              <a:buNone/>
+            </a:pPr>
+            <a:r>
+              <a:rPr lang="en-US" sz="1150" dirty="0">
+                <a:solidFill>
+                  <a:srgbClr val="5E7681"/>
+                </a:solidFill>
+                <a:latin typeface="Meiryo" pitchFamily="34" charset="0"/>
+                <a:ea typeface="Meiryo" pitchFamily="34" charset="-122"/>
+                <a:cs typeface="Meiryo" pitchFamily="34" charset="-120"/>
+              </a:rPr>
+              <a:t>「ASPATHについて」だけの</a:t>
+            </a:r>
+            <a:endParaRPr lang="en-US" sz="1150" dirty="0"/>
+          </a:p>
+          <a:p>
+            <a:pPr indent="0" marL="0">
+              <a:lnSpc>
+                <a:spcPts val="1500"/>
+              </a:lnSpc>
+              <a:buNone/>
+            </a:pPr>
+            <a:r>
+              <a:rPr lang="en-US" sz="1150" dirty="0">
+                <a:solidFill>
+                  <a:srgbClr val="5E7681"/>
+                </a:solidFill>
+                <a:latin typeface="Meiryo" pitchFamily="34" charset="0"/>
+                <a:ea typeface="Meiryo" pitchFamily="34" charset="-122"/>
+                <a:cs typeface="Meiryo" pitchFamily="34" charset="-120"/>
+              </a:rPr>
+              <a:t>専用手順</a:t>
+            </a:r>
+            <a:endParaRPr lang="en-US" sz="1150" dirty="0"/>
+          </a:p>
+        </p:txBody>
+      </p:sp>
+      <p:sp>
+        <p:nvSpPr>
+          <p:cNvPr id="25" name="Shape 23"/>
+          <p:cNvSpPr/>
+          <p:nvPr/>
+        </p:nvSpPr>
+        <p:spPr>
+          <a:xfrm>
+            <a:off x="640080" y="5422392"/>
+            <a:ext cx="11064240" cy="841248"/>
+          </a:xfrm>
+          <a:prstGeom prst="roundRect">
+            <a:avLst>
+              <a:gd name="adj" fmla="val 10870"/>
+            </a:avLst>
+          </a:prstGeom>
+          <a:solidFill>
+            <a:srgbClr val="F6F7F8"/>
+          </a:solidFill>
+          <a:ln/>
+        </p:spPr>
+      </p:sp>
+      <p:sp>
+        <p:nvSpPr>
+          <p:cNvPr id="26" name="Shape 24"/>
+          <p:cNvSpPr/>
+          <p:nvPr/>
+        </p:nvSpPr>
+        <p:spPr>
+          <a:xfrm>
+            <a:off x="868680" y="5623560"/>
+            <a:ext cx="1417320" cy="438912"/>
+          </a:xfrm>
+          <a:prstGeom prst="roundRect">
+            <a:avLst>
+              <a:gd name="adj" fmla="val 50000"/>
+            </a:avLst>
+          </a:prstGeom>
+          <a:solidFill>
+            <a:srgbClr val="5E7681"/>
+          </a:solidFill>
+          <a:ln/>
+        </p:spPr>
+      </p:sp>
+      <p:sp>
+        <p:nvSpPr>
+          <p:cNvPr id="27" name="Text 25"/>
+          <p:cNvSpPr/>
+          <p:nvPr/>
+        </p:nvSpPr>
+        <p:spPr>
+          <a:xfrm>
+            <a:off x="868680" y="5623560"/>
+            <a:ext cx="1417320" cy="438912"/>
+          </a:xfrm>
+          <a:prstGeom prst="rect">
+            <a:avLst/>
+          </a:prstGeom>
+          <a:noFill/>
+          <a:ln/>
+        </p:spPr>
+        <p:txBody>
+          <a:bodyPr wrap="square" lIns="0" tIns="0" rIns="0" bIns="0" rtlCol="0" anchor="ctr"/>
+          <a:lstStyle/>
+          <a:p>
+            <a:pPr algn="ctr" indent="0" marL="0">
+              <a:buNone/>
+            </a:pPr>
+            <a:r>
+              <a:rPr lang="en-US" sz="1250" b="1" dirty="0">
+                <a:solidFill>
+                  <a:srgbClr val="FFFFFF"/>
+                </a:solidFill>
+                <a:latin typeface="Meiryo" pitchFamily="34" charset="0"/>
+                <a:ea typeface="Meiryo" pitchFamily="34" charset="-122"/>
+                <a:cs typeface="Meiryo" pitchFamily="34" charset="-120"/>
+              </a:rPr>
+              <a:t>検索対策</a:t>
+            </a:r>
+            <a:endParaRPr lang="en-US" sz="1250" dirty="0"/>
+          </a:p>
+        </p:txBody>
+      </p:sp>
+      <p:sp>
+        <p:nvSpPr>
+          <p:cNvPr id="28" name="Text 26"/>
+          <p:cNvSpPr/>
+          <p:nvPr/>
+        </p:nvSpPr>
+        <p:spPr>
+          <a:xfrm>
+            <a:off x="2468880" y="5532120"/>
+            <a:ext cx="4480560" cy="320040"/>
+          </a:xfrm>
+          <a:prstGeom prst="rect">
+            <a:avLst/>
+          </a:prstGeom>
+          <a:noFill/>
+          <a:ln/>
+        </p:spPr>
+        <p:txBody>
+          <a:bodyPr wrap="square" lIns="0" tIns="0" rIns="0" bIns="0" rtlCol="0" anchor="ctr"/>
+          <a:lstStyle/>
+          <a:p>
+            <a:pPr indent="0" marL="0">
+              <a:buNone/>
+            </a:pPr>
+            <a:r>
+              <a:rPr lang="en-US" sz="1350" b="1" dirty="0">
+                <a:solidFill>
+                  <a:srgbClr val="264653"/>
+                </a:solidFill>
+                <a:latin typeface="Meiryo" pitchFamily="34" charset="0"/>
+                <a:ea typeface="Meiryo" pitchFamily="34" charset="-122"/>
+                <a:cs typeface="Meiryo" pitchFamily="34" charset="-120"/>
+              </a:rPr>
+              <a:t>山口様向け_検索で見つけてもらう記事の書き方</a:t>
+            </a:r>
+            <a:endParaRPr lang="en-US" sz="1350" dirty="0"/>
+          </a:p>
+        </p:txBody>
+      </p:sp>
+      <p:sp>
+        <p:nvSpPr>
+          <p:cNvPr id="29" name="Text 27"/>
+          <p:cNvSpPr/>
+          <p:nvPr/>
+        </p:nvSpPr>
+        <p:spPr>
+          <a:xfrm>
+            <a:off x="7132320" y="5495544"/>
+            <a:ext cx="4389120" cy="713232"/>
+          </a:xfrm>
+          <a:prstGeom prst="rect">
+            <a:avLst/>
+          </a:prstGeom>
+          <a:noFill/>
+          <a:ln/>
+        </p:spPr>
+        <p:txBody>
+          <a:bodyPr wrap="square" lIns="0" tIns="0" rIns="0" bIns="0" rtlCol="0" anchor="ctr"/>
+          <a:lstStyle/>
+          <a:p>
+            <a:pPr indent="0" marL="0">
+              <a:lnSpc>
+                <a:spcPts val="1500"/>
+              </a:lnSpc>
+              <a:buNone/>
+            </a:pPr>
+            <a:r>
+              <a:rPr lang="en-US" sz="1150" dirty="0">
+                <a:solidFill>
+                  <a:srgbClr val="5E7681"/>
+                </a:solidFill>
+                <a:latin typeface="Meiryo" pitchFamily="34" charset="0"/>
+                <a:ea typeface="Meiryo" pitchFamily="34" charset="-122"/>
+                <a:cs typeface="Meiryo" pitchFamily="34" charset="-120"/>
+              </a:rPr>
+              <a:t>記事の題名の付け方</a:t>
+            </a:r>
+            <a:endParaRPr lang="en-US" sz="1150" dirty="0"/>
+          </a:p>
+        </p:txBody>
+      </p:sp>
+      <p:sp>
+        <p:nvSpPr>
+          <p:cNvPr id="30" name="Text 28"/>
+          <p:cNvSpPr/>
+          <p:nvPr/>
+        </p:nvSpPr>
+        <p:spPr>
+          <a:xfrm>
+            <a:off x="640080" y="6355080"/>
+            <a:ext cx="11064240" cy="320040"/>
+          </a:xfrm>
+          <a:prstGeom prst="rect">
+            <a:avLst/>
+          </a:prstGeom>
+          <a:noFill/>
+          <a:ln/>
+        </p:spPr>
+        <p:txBody>
+          <a:bodyPr wrap="square" lIns="0" tIns="0" rIns="0" bIns="0" rtlCol="0" anchor="ctr"/>
+          <a:lstStyle/>
+          <a:p>
+            <a:pPr indent="0" marL="0">
+              <a:buNone/>
+            </a:pPr>
+            <a:r>
+              <a:rPr lang="en-US" sz="1200" dirty="0">
+                <a:solidFill>
+                  <a:srgbClr val="5E7681"/>
+                </a:solidFill>
+                <a:latin typeface="Meiryo" pitchFamily="34" charset="0"/>
+                <a:ea typeface="Meiryo" pitchFamily="34" charset="-122"/>
+                <a:cs typeface="Meiryo" pitchFamily="34" charset="-120"/>
+              </a:rPr>
+              <a:t>内容が重なっている部分があります。迷ったら「基本編」→ この資料 の順に見てください。</a:t>
+            </a:r>
+            <a:endParaRPr lang="en-US" sz="1200" dirty="0"/>
+          </a:p>
+        </p:txBody>
+      </p:sp>
     </p:spTree>
   </p:cSld>
   <p:clrMapOvr>
@@ -11569,7 +12952,7 @@
                 <a:ea typeface="Meiryo" pitchFamily="34" charset="-122"/>
                 <a:cs typeface="Meiryo" pitchFamily="34" charset="-120"/>
               </a:rPr>
-              <a:t>なぜ2つに分かれるのか</a:t>
+              <a:t>更新には「2つの道」があります</a:t>
             </a:r>
             <a:endParaRPr lang="en-US" sz="3200" dirty="0"/>
           </a:p>
@@ -11608,7 +12991,7 @@
                 <a:ea typeface="Meiryo" pitchFamily="34" charset="-122"/>
                 <a:cs typeface="Meiryo" pitchFamily="34" charset="-120"/>
               </a:rPr>
-              <a:t>固定ページの文章は「テーマ」の中にあります</a:t>
+              <a:t>どちらの道かを最初に見分けることが、いちばん大事です</a:t>
             </a:r>
             <a:endParaRPr lang="en-US" sz="1500" dirty="0"/>
           </a:p>
@@ -11653,398 +13036,30 @@
           </a:p>
         </p:txBody>
       </p:sp>
-      <p:sp>
-        <p:nvSpPr>
-          <p:cNvPr id="5" name="Shape 3"/>
-          <p:cNvSpPr/>
-          <p:nvPr/>
-        </p:nvSpPr>
-        <p:spPr>
-          <a:xfrm>
-            <a:off x="640080" y="1737360"/>
-            <a:ext cx="5303520" cy="2286000"/>
-          </a:xfrm>
-          <a:prstGeom prst="roundRect">
-            <a:avLst>
-              <a:gd name="adj" fmla="val 4800"/>
-            </a:avLst>
-          </a:prstGeom>
-          <a:solidFill>
-            <a:srgbClr val="F6F7F8"/>
-          </a:solidFill>
-          <a:ln/>
-        </p:spPr>
-      </p:sp>
-      <p:sp>
-        <p:nvSpPr>
-          <p:cNvPr id="6" name="Text 4"/>
-          <p:cNvSpPr/>
-          <p:nvPr/>
-        </p:nvSpPr>
-        <p:spPr>
-          <a:xfrm>
-            <a:off x="914400" y="1920240"/>
-            <a:ext cx="4754880" cy="365760"/>
-          </a:xfrm>
-          <a:prstGeom prst="rect">
-            <a:avLst/>
-          </a:prstGeom>
-          <a:noFill/>
-          <a:ln/>
-        </p:spPr>
-        <p:txBody>
-          <a:bodyPr wrap="square" lIns="0" tIns="0" rIns="0" bIns="0" rtlCol="0" anchor="ctr"/>
-          <a:lstStyle/>
-          <a:p>
-            <a:pPr indent="0" marL="0">
-              <a:buNone/>
-            </a:pPr>
-            <a:r>
-              <a:rPr lang="en-US" sz="1800" b="1" dirty="0">
-                <a:solidFill>
-                  <a:srgbClr val="5E7681"/>
-                </a:solidFill>
-                <a:latin typeface="Meiryo" pitchFamily="34" charset="0"/>
-                <a:ea typeface="Meiryo" pitchFamily="34" charset="-122"/>
-                <a:cs typeface="Meiryo" pitchFamily="34" charset="-120"/>
-              </a:rPr>
-              <a:t>一般的なWordPressサイト</a:t>
-            </a:r>
-            <a:endParaRPr lang="en-US" sz="1800" dirty="0"/>
-          </a:p>
-        </p:txBody>
-      </p:sp>
-      <p:sp>
-        <p:nvSpPr>
-          <p:cNvPr id="7" name="Text 5"/>
-          <p:cNvSpPr/>
-          <p:nvPr/>
-        </p:nvSpPr>
-        <p:spPr>
-          <a:xfrm>
-            <a:off x="914400" y="2423160"/>
-            <a:ext cx="4754880" cy="1371600"/>
-          </a:xfrm>
-          <a:prstGeom prst="rect">
-            <a:avLst/>
-          </a:prstGeom>
-          <a:noFill/>
-          <a:ln/>
-        </p:spPr>
-        <p:txBody>
-          <a:bodyPr wrap="square" lIns="0" tIns="0" rIns="0" bIns="0" rtlCol="0" anchor="ctr"/>
-          <a:lstStyle/>
-          <a:p>
-            <a:pPr marL="342900" indent="-342900">
-              <a:spcAft>
-                <a:spcPts val="800"/>
-              </a:spcAft>
-              <a:buSzPct val="100000"/>
-              <a:buChar char="•"/>
-            </a:pPr>
-            <a:r>
-              <a:rPr lang="en-US" sz="1400" dirty="0">
-                <a:solidFill>
-                  <a:srgbClr val="1E2D34"/>
-                </a:solidFill>
-                <a:latin typeface="Meiryo" pitchFamily="34" charset="0"/>
-                <a:ea typeface="Meiryo" pitchFamily="34" charset="-122"/>
-                <a:cs typeface="Meiryo" pitchFamily="34" charset="-120"/>
-              </a:rPr>
-              <a:t>文章は WordPress の中に保存</a:t>
-            </a:r>
-            <a:endParaRPr lang="en-US" sz="1400" dirty="0"/>
-          </a:p>
-          <a:p>
-            <a:pPr marL="342900" indent="-342900">
-              <a:spcAft>
-                <a:spcPts val="800"/>
-              </a:spcAft>
-              <a:buSzPct val="100000"/>
-              <a:buChar char="•"/>
-            </a:pPr>
-            <a:r>
-              <a:rPr lang="en-US" sz="1400" dirty="0">
-                <a:solidFill>
-                  <a:srgbClr val="1E2D34"/>
-                </a:solidFill>
-                <a:latin typeface="Meiryo" pitchFamily="34" charset="0"/>
-                <a:ea typeface="Meiryo" pitchFamily="34" charset="-122"/>
-                <a:cs typeface="Meiryo" pitchFamily="34" charset="-120"/>
-              </a:rPr>
-              <a:t>誰でも管理画面から直せる</a:t>
-            </a:r>
-            <a:endParaRPr lang="en-US" sz="1400" dirty="0"/>
-          </a:p>
-          <a:p>
-            <a:pPr marL="342900" indent="-342900">
-              <a:spcAft>
-                <a:spcPts val="800"/>
-              </a:spcAft>
-              <a:buSzPct val="100000"/>
-              <a:buChar char="•"/>
-            </a:pPr>
-            <a:r>
-              <a:rPr lang="en-US" sz="1400" dirty="0">
-                <a:solidFill>
-                  <a:srgbClr val="1E2D34"/>
-                </a:solidFill>
-                <a:latin typeface="Meiryo" pitchFamily="34" charset="0"/>
-                <a:ea typeface="Meiryo" pitchFamily="34" charset="-122"/>
-                <a:cs typeface="Meiryo" pitchFamily="34" charset="-120"/>
-              </a:rPr>
-              <a:t>そのかわりデザインが崩れやすい</a:t>
-            </a:r>
-            <a:endParaRPr lang="en-US" sz="1400" dirty="0"/>
-          </a:p>
-        </p:txBody>
-      </p:sp>
-      <p:sp>
-        <p:nvSpPr>
-          <p:cNvPr id="8" name="Shape 6"/>
-          <p:cNvSpPr/>
-          <p:nvPr/>
-        </p:nvSpPr>
-        <p:spPr>
-          <a:xfrm>
-            <a:off x="6217920" y="1737360"/>
-            <a:ext cx="5303520" cy="2286000"/>
-          </a:xfrm>
-          <a:prstGeom prst="roundRect">
-            <a:avLst>
-              <a:gd name="adj" fmla="val 4800"/>
-            </a:avLst>
-          </a:prstGeom>
-          <a:solidFill>
-            <a:srgbClr val="FFF4EA"/>
-          </a:solidFill>
-          <a:ln/>
-        </p:spPr>
-      </p:sp>
-      <p:sp>
-        <p:nvSpPr>
-          <p:cNvPr id="9" name="Text 7"/>
-          <p:cNvSpPr/>
-          <p:nvPr/>
-        </p:nvSpPr>
-        <p:spPr>
-          <a:xfrm>
-            <a:off x="6492240" y="1920240"/>
-            <a:ext cx="4754880" cy="365760"/>
-          </a:xfrm>
-          <a:prstGeom prst="rect">
-            <a:avLst/>
-          </a:prstGeom>
-          <a:noFill/>
-          <a:ln/>
-        </p:spPr>
-        <p:txBody>
-          <a:bodyPr wrap="square" lIns="0" tIns="0" rIns="0" bIns="0" rtlCol="0" anchor="ctr"/>
-          <a:lstStyle/>
-          <a:p>
-            <a:pPr indent="0" marL="0">
-              <a:buNone/>
-            </a:pPr>
-            <a:r>
-              <a:rPr lang="en-US" sz="1800" b="1" dirty="0">
-                <a:solidFill>
-                  <a:srgbClr val="DD8236"/>
-                </a:solidFill>
-                <a:latin typeface="Meiryo" pitchFamily="34" charset="0"/>
-                <a:ea typeface="Meiryo" pitchFamily="34" charset="-122"/>
-                <a:cs typeface="Meiryo" pitchFamily="34" charset="-120"/>
-              </a:rPr>
-              <a:t>このサイト</a:t>
-            </a:r>
-            <a:endParaRPr lang="en-US" sz="1800" dirty="0"/>
-          </a:p>
-        </p:txBody>
-      </p:sp>
-      <p:sp>
-        <p:nvSpPr>
-          <p:cNvPr id="10" name="Text 8"/>
-          <p:cNvSpPr/>
-          <p:nvPr/>
-        </p:nvSpPr>
-        <p:spPr>
-          <a:xfrm>
-            <a:off x="6492240" y="2423160"/>
-            <a:ext cx="4754880" cy="1371600"/>
-          </a:xfrm>
-          <a:prstGeom prst="rect">
-            <a:avLst/>
-          </a:prstGeom>
-          <a:noFill/>
-          <a:ln/>
-        </p:spPr>
-        <p:txBody>
-          <a:bodyPr wrap="square" lIns="0" tIns="0" rIns="0" bIns="0" rtlCol="0" anchor="ctr"/>
-          <a:lstStyle/>
-          <a:p>
-            <a:pPr marL="342900" indent="-342900">
-              <a:spcAft>
-                <a:spcPts val="800"/>
-              </a:spcAft>
-              <a:buSzPct val="100000"/>
-              <a:buChar char="•"/>
-            </a:pPr>
-            <a:r>
-              <a:rPr lang="en-US" sz="1400" dirty="0">
-                <a:solidFill>
-                  <a:srgbClr val="1E2D34"/>
-                </a:solidFill>
-                <a:latin typeface="Meiryo" pitchFamily="34" charset="0"/>
-                <a:ea typeface="Meiryo" pitchFamily="34" charset="-122"/>
-                <a:cs typeface="Meiryo" pitchFamily="34" charset="-120"/>
-              </a:rPr>
-              <a:t>文章は テーマのファイル の中</a:t>
-            </a:r>
-            <a:endParaRPr lang="en-US" sz="1400" dirty="0"/>
-          </a:p>
-          <a:p>
-            <a:pPr marL="342900" indent="-342900">
-              <a:spcAft>
-                <a:spcPts val="800"/>
-              </a:spcAft>
-              <a:buSzPct val="100000"/>
-              <a:buChar char="•"/>
-            </a:pPr>
-            <a:r>
-              <a:rPr lang="en-US" sz="1400" dirty="0">
-                <a:solidFill>
-                  <a:srgbClr val="1E2D34"/>
-                </a:solidFill>
-                <a:latin typeface="Meiryo" pitchFamily="34" charset="0"/>
-                <a:ea typeface="Meiryo" pitchFamily="34" charset="-122"/>
-                <a:cs typeface="Meiryo" pitchFamily="34" charset="-120"/>
-              </a:rPr>
-              <a:t>直すにはパソコン作業が必要</a:t>
-            </a:r>
-            <a:endParaRPr lang="en-US" sz="1400" dirty="0"/>
-          </a:p>
-          <a:p>
-            <a:pPr marL="342900" indent="-342900">
-              <a:spcAft>
-                <a:spcPts val="800"/>
-              </a:spcAft>
-              <a:buSzPct val="100000"/>
-              <a:buChar char="•"/>
-            </a:pPr>
-            <a:r>
-              <a:rPr lang="en-US" sz="1400" dirty="0">
-                <a:solidFill>
-                  <a:srgbClr val="1E2D34"/>
-                </a:solidFill>
-                <a:latin typeface="Meiryo" pitchFamily="34" charset="0"/>
-                <a:ea typeface="Meiryo" pitchFamily="34" charset="-122"/>
-                <a:cs typeface="Meiryo" pitchFamily="34" charset="-120"/>
-              </a:rPr>
-              <a:t>そのかわりデザインが崩れない</a:t>
-            </a:r>
-            <a:endParaRPr lang="en-US" sz="1400" dirty="0"/>
-          </a:p>
-        </p:txBody>
-      </p:sp>
-      <p:sp>
-        <p:nvSpPr>
-          <p:cNvPr id="11" name="Shape 9"/>
-          <p:cNvSpPr/>
-          <p:nvPr/>
-        </p:nvSpPr>
-        <p:spPr>
-          <a:xfrm>
-            <a:off x="640080" y="4343400"/>
-            <a:ext cx="10881360" cy="1371600"/>
-          </a:xfrm>
-          <a:prstGeom prst="roundRect">
-            <a:avLst>
-              <a:gd name="adj" fmla="val 8000"/>
-            </a:avLst>
-          </a:prstGeom>
-          <a:solidFill>
-            <a:srgbClr val="264653"/>
-          </a:solidFill>
-          <a:ln/>
-        </p:spPr>
-      </p:sp>
-      <p:sp>
-        <p:nvSpPr>
-          <p:cNvPr id="12" name="Text 10"/>
-          <p:cNvSpPr/>
-          <p:nvPr/>
-        </p:nvSpPr>
-        <p:spPr>
-          <a:xfrm>
-            <a:off x="960120" y="4526280"/>
-            <a:ext cx="2743200" cy="365760"/>
-          </a:xfrm>
-          <a:prstGeom prst="rect">
-            <a:avLst/>
-          </a:prstGeom>
-          <a:noFill/>
-          <a:ln/>
-        </p:spPr>
-        <p:txBody>
-          <a:bodyPr wrap="square" lIns="0" tIns="0" rIns="0" bIns="0" rtlCol="0" anchor="ctr"/>
-          <a:lstStyle/>
-          <a:p>
-            <a:pPr indent="0" marL="0">
-              <a:buNone/>
-            </a:pPr>
-            <a:r>
-              <a:rPr lang="en-US" sz="1800" b="1" dirty="0">
-                <a:solidFill>
-                  <a:srgbClr val="F4A261"/>
-                </a:solidFill>
-                <a:latin typeface="Meiryo" pitchFamily="34" charset="0"/>
-                <a:ea typeface="Meiryo" pitchFamily="34" charset="-122"/>
-                <a:cs typeface="Meiryo" pitchFamily="34" charset="-120"/>
-              </a:rPr>
-              <a:t>見分け方</a:t>
-            </a:r>
-            <a:endParaRPr lang="en-US" sz="1800" dirty="0"/>
-          </a:p>
-        </p:txBody>
-      </p:sp>
-      <p:sp>
-        <p:nvSpPr>
-          <p:cNvPr id="13" name="Text 11"/>
-          <p:cNvSpPr/>
-          <p:nvPr/>
-        </p:nvSpPr>
-        <p:spPr>
-          <a:xfrm>
-            <a:off x="960120" y="4956048"/>
-            <a:ext cx="10241280" cy="548640"/>
-          </a:xfrm>
-          <a:prstGeom prst="rect">
-            <a:avLst/>
-          </a:prstGeom>
-          <a:noFill/>
-          <a:ln/>
-        </p:spPr>
-        <p:txBody>
-          <a:bodyPr wrap="square" lIns="0" tIns="0" rIns="0" bIns="0" rtlCol="0" anchor="ctr"/>
-          <a:lstStyle/>
-          <a:p>
-            <a:pPr indent="0" marL="0">
-              <a:buNone/>
-            </a:pPr>
-            <a:r>
-              <a:rPr lang="en-US" sz="1700" dirty="0">
-                <a:solidFill>
-                  <a:srgbClr val="FFFFFF"/>
-                </a:solidFill>
-                <a:latin typeface="Meiryo" pitchFamily="34" charset="0"/>
-                <a:ea typeface="Meiryo" pitchFamily="34" charset="-122"/>
-                <a:cs typeface="Meiryo" pitchFamily="34" charset="-120"/>
-              </a:rPr>
-              <a:t>WordPressの編集画面を開いて、その文章が出てくれば 道A。出てこなければ 道B です。</a:t>
-            </a:r>
-            <a:endParaRPr lang="en-US" sz="1700" dirty="0"/>
-          </a:p>
-        </p:txBody>
-      </p:sp>
+      <p:pic>
+        <p:nvPicPr>
+          <p:cNvPr id="5" name="Image 0" descr="/sessions/compassionate-sweet-heisenberg/mnt/dev-aspath-life-main/_wp移行素材/★引継ぎ資料/画像/00_ふたつの道.png">    </p:cNvPr>
+          <p:cNvPicPr>
+            <a:picLocks noChangeAspect="1"/>
+          </p:cNvPicPr>
+          <p:nvPr/>
+        </p:nvPicPr>
+        <p:blipFill>
+          <a:blip r:embed="rId1"/>
+          <a:stretch>
+            <a:fillRect/>
+          </a:stretch>
+        </p:blipFill>
+        <p:spPr>
+          <a:xfrm>
+            <a:off x="777240" y="1600200"/>
+            <a:ext cx="10607040" cy="6061166"/>
+          </a:xfrm>
+          <a:prstGeom prst="rect">
+            <a:avLst/>
+          </a:prstGeom>
+        </p:spPr>
+      </p:pic>
     </p:spTree>
   </p:cSld>
   <p:clrMapOvr>
@@ -12110,7 +13125,7 @@
                 <a:ea typeface="Meiryo" pitchFamily="34" charset="-122"/>
                 <a:cs typeface="Meiryo" pitchFamily="34" charset="-120"/>
               </a:rPr>
-              <a:t>【道A】記事を書く（コラム・お知らせ）</a:t>
+              <a:t>なぜ2つに分かれるのか</a:t>
             </a:r>
             <a:endParaRPr lang="en-US" sz="3200" dirty="0"/>
           </a:p>
@@ -12149,7 +13164,7 @@
                 <a:ea typeface="Meiryo" pitchFamily="34" charset="-122"/>
                 <a:cs typeface="Meiryo" pitchFamily="34" charset="-120"/>
               </a:rPr>
-              <a:t>投稿 → 投稿を追加</a:t>
+              <a:t>固定ページの文章は「テーマ」の中にあります</a:t>
             </a:r>
             <a:endParaRPr lang="en-US" sz="1500" dirty="0"/>
           </a:p>
@@ -12194,534 +13209,166 @@
           </a:p>
         </p:txBody>
       </p:sp>
-      <p:pic>
-        <p:nvPicPr>
-          <p:cNvPr id="5" name="Image 0" descr="/sessions/compassionate-sweet-heisenberg/mnt/dev-aspath-life-main/_wp移行素材/★引継ぎ資料/画像/02_投稿を追加.jpg">    </p:cNvPr>
-          <p:cNvPicPr>
-            <a:picLocks noChangeAspect="1"/>
-          </p:cNvPicPr>
-          <p:nvPr/>
-        </p:nvPicPr>
-        <p:blipFill>
-          <a:blip r:embed="rId1"/>
-          <a:stretch>
-            <a:fillRect/>
-          </a:stretch>
-        </p:blipFill>
-        <p:spPr>
-          <a:xfrm>
-            <a:off x="640080" y="1691640"/>
-            <a:ext cx="6766560" cy="3296972"/>
-          </a:xfrm>
-          <a:prstGeom prst="rect">
-            <a:avLst/>
-          </a:prstGeom>
-        </p:spPr>
-      </p:pic>
-      <p:sp>
-        <p:nvSpPr>
-          <p:cNvPr id="6" name="Shape 3"/>
-          <p:cNvSpPr/>
-          <p:nvPr/>
-        </p:nvSpPr>
-        <p:spPr>
-          <a:xfrm>
-            <a:off x="7772400" y="1783080"/>
-            <a:ext cx="384048" cy="384048"/>
-          </a:xfrm>
-          <a:prstGeom prst="ellipse">
-            <a:avLst/>
-          </a:prstGeom>
-          <a:solidFill>
-            <a:srgbClr val="2E7D32"/>
-          </a:solidFill>
-          <a:ln/>
-        </p:spPr>
-      </p:sp>
-      <p:sp>
-        <p:nvSpPr>
-          <p:cNvPr id="7" name="Text 4"/>
-          <p:cNvSpPr/>
-          <p:nvPr/>
-        </p:nvSpPr>
-        <p:spPr>
-          <a:xfrm>
-            <a:off x="7772400" y="1819656"/>
-            <a:ext cx="384048" cy="310896"/>
-          </a:xfrm>
-          <a:prstGeom prst="rect">
-            <a:avLst/>
-          </a:prstGeom>
-          <a:noFill/>
-          <a:ln/>
-        </p:spPr>
-        <p:txBody>
-          <a:bodyPr wrap="square" lIns="0" tIns="0" rIns="0" bIns="0" rtlCol="0" anchor="ctr"/>
-          <a:lstStyle/>
-          <a:p>
-            <a:pPr algn="ctr" indent="0" marL="0">
-              <a:buNone/>
-            </a:pPr>
-            <a:r>
-              <a:rPr lang="en-US" sz="1400" b="1" dirty="0">
-                <a:solidFill>
-                  <a:srgbClr val="FFFFFF"/>
-                </a:solidFill>
-                <a:latin typeface="Meiryo" pitchFamily="34" charset="0"/>
-                <a:ea typeface="Meiryo" pitchFamily="34" charset="-122"/>
-                <a:cs typeface="Meiryo" pitchFamily="34" charset="-120"/>
-              </a:rPr>
-              <a:t>1</a:t>
-            </a:r>
-            <a:endParaRPr lang="en-US" sz="1400" dirty="0"/>
-          </a:p>
-        </p:txBody>
-      </p:sp>
-      <p:sp>
-        <p:nvSpPr>
-          <p:cNvPr id="8" name="Text 5"/>
-          <p:cNvSpPr/>
-          <p:nvPr/>
-        </p:nvSpPr>
-        <p:spPr>
-          <a:xfrm>
-            <a:off x="8321040" y="1828800"/>
-            <a:ext cx="3291840" cy="320040"/>
-          </a:xfrm>
-          <a:prstGeom prst="rect">
-            <a:avLst/>
-          </a:prstGeom>
-          <a:noFill/>
-          <a:ln/>
-        </p:spPr>
-        <p:txBody>
-          <a:bodyPr wrap="square" lIns="0" tIns="0" rIns="0" bIns="0" rtlCol="0" anchor="ctr"/>
-          <a:lstStyle/>
-          <a:p>
-            <a:pPr indent="0" marL="0">
-              <a:buNone/>
-            </a:pPr>
-            <a:r>
-              <a:rPr lang="en-US" sz="1500" dirty="0">
-                <a:solidFill>
-                  <a:srgbClr val="1E2D34"/>
-                </a:solidFill>
-                <a:latin typeface="Meiryo" pitchFamily="34" charset="0"/>
-                <a:ea typeface="Meiryo" pitchFamily="34" charset="-122"/>
-                <a:cs typeface="Meiryo" pitchFamily="34" charset="-120"/>
-              </a:rPr>
-              <a:t>タイトルを入れる</a:t>
-            </a:r>
-            <a:endParaRPr lang="en-US" sz="1500" dirty="0"/>
-          </a:p>
-        </p:txBody>
-      </p:sp>
-      <p:sp>
-        <p:nvSpPr>
-          <p:cNvPr id="9" name="Shape 6"/>
-          <p:cNvSpPr/>
-          <p:nvPr/>
-        </p:nvSpPr>
-        <p:spPr>
-          <a:xfrm>
-            <a:off x="7772400" y="2350008"/>
-            <a:ext cx="384048" cy="384048"/>
-          </a:xfrm>
-          <a:prstGeom prst="ellipse">
-            <a:avLst/>
-          </a:prstGeom>
-          <a:solidFill>
-            <a:srgbClr val="2E7D32"/>
-          </a:solidFill>
-          <a:ln/>
-        </p:spPr>
-      </p:sp>
-      <p:sp>
-        <p:nvSpPr>
-          <p:cNvPr id="10" name="Text 7"/>
-          <p:cNvSpPr/>
-          <p:nvPr/>
-        </p:nvSpPr>
-        <p:spPr>
-          <a:xfrm>
-            <a:off x="7772400" y="2386584"/>
-            <a:ext cx="384048" cy="310896"/>
-          </a:xfrm>
-          <a:prstGeom prst="rect">
-            <a:avLst/>
-          </a:prstGeom>
-          <a:noFill/>
-          <a:ln/>
-        </p:spPr>
-        <p:txBody>
-          <a:bodyPr wrap="square" lIns="0" tIns="0" rIns="0" bIns="0" rtlCol="0" anchor="ctr"/>
-          <a:lstStyle/>
-          <a:p>
-            <a:pPr algn="ctr" indent="0" marL="0">
-              <a:buNone/>
-            </a:pPr>
-            <a:r>
-              <a:rPr lang="en-US" sz="1400" b="1" dirty="0">
-                <a:solidFill>
-                  <a:srgbClr val="FFFFFF"/>
-                </a:solidFill>
-                <a:latin typeface="Meiryo" pitchFamily="34" charset="0"/>
-                <a:ea typeface="Meiryo" pitchFamily="34" charset="-122"/>
-                <a:cs typeface="Meiryo" pitchFamily="34" charset="-120"/>
-              </a:rPr>
-              <a:t>2</a:t>
-            </a:r>
-            <a:endParaRPr lang="en-US" sz="1400" dirty="0"/>
-          </a:p>
-        </p:txBody>
-      </p:sp>
-      <p:sp>
-        <p:nvSpPr>
-          <p:cNvPr id="11" name="Text 8"/>
-          <p:cNvSpPr/>
-          <p:nvPr/>
-        </p:nvSpPr>
-        <p:spPr>
-          <a:xfrm>
-            <a:off x="8321040" y="2395728"/>
-            <a:ext cx="3291840" cy="320040"/>
-          </a:xfrm>
-          <a:prstGeom prst="rect">
-            <a:avLst/>
-          </a:prstGeom>
-          <a:noFill/>
-          <a:ln/>
-        </p:spPr>
-        <p:txBody>
-          <a:bodyPr wrap="square" lIns="0" tIns="0" rIns="0" bIns="0" rtlCol="0" anchor="ctr"/>
-          <a:lstStyle/>
-          <a:p>
-            <a:pPr indent="0" marL="0">
-              <a:buNone/>
-            </a:pPr>
-            <a:r>
-              <a:rPr lang="en-US" sz="1500" dirty="0">
-                <a:solidFill>
-                  <a:srgbClr val="1E2D34"/>
-                </a:solidFill>
-                <a:latin typeface="Meiryo" pitchFamily="34" charset="0"/>
-                <a:ea typeface="Meiryo" pitchFamily="34" charset="-122"/>
-                <a:cs typeface="Meiryo" pitchFamily="34" charset="-120"/>
-              </a:rPr>
-              <a:t>本文を書く</a:t>
-            </a:r>
-            <a:endParaRPr lang="en-US" sz="1500" dirty="0"/>
-          </a:p>
-        </p:txBody>
-      </p:sp>
-      <p:sp>
-        <p:nvSpPr>
-          <p:cNvPr id="12" name="Shape 9"/>
-          <p:cNvSpPr/>
-          <p:nvPr/>
-        </p:nvSpPr>
-        <p:spPr>
-          <a:xfrm>
-            <a:off x="7772400" y="2916936"/>
-            <a:ext cx="384048" cy="384048"/>
-          </a:xfrm>
-          <a:prstGeom prst="ellipse">
-            <a:avLst/>
-          </a:prstGeom>
-          <a:solidFill>
-            <a:srgbClr val="2E7D32"/>
-          </a:solidFill>
-          <a:ln/>
-        </p:spPr>
-      </p:sp>
-      <p:sp>
-        <p:nvSpPr>
-          <p:cNvPr id="13" name="Text 10"/>
-          <p:cNvSpPr/>
-          <p:nvPr/>
-        </p:nvSpPr>
-        <p:spPr>
-          <a:xfrm>
-            <a:off x="7772400" y="2953512"/>
-            <a:ext cx="384048" cy="310896"/>
-          </a:xfrm>
-          <a:prstGeom prst="rect">
-            <a:avLst/>
-          </a:prstGeom>
-          <a:noFill/>
-          <a:ln/>
-        </p:spPr>
-        <p:txBody>
-          <a:bodyPr wrap="square" lIns="0" tIns="0" rIns="0" bIns="0" rtlCol="0" anchor="ctr"/>
-          <a:lstStyle/>
-          <a:p>
-            <a:pPr algn="ctr" indent="0" marL="0">
-              <a:buNone/>
-            </a:pPr>
-            <a:r>
-              <a:rPr lang="en-US" sz="1400" b="1" dirty="0">
-                <a:solidFill>
-                  <a:srgbClr val="FFFFFF"/>
-                </a:solidFill>
-                <a:latin typeface="Meiryo" pitchFamily="34" charset="0"/>
-                <a:ea typeface="Meiryo" pitchFamily="34" charset="-122"/>
-                <a:cs typeface="Meiryo" pitchFamily="34" charset="-120"/>
-              </a:rPr>
-              <a:t>3</a:t>
-            </a:r>
-            <a:endParaRPr lang="en-US" sz="1400" dirty="0"/>
-          </a:p>
-        </p:txBody>
-      </p:sp>
-      <p:sp>
-        <p:nvSpPr>
-          <p:cNvPr id="14" name="Text 11"/>
-          <p:cNvSpPr/>
-          <p:nvPr/>
-        </p:nvSpPr>
-        <p:spPr>
-          <a:xfrm>
-            <a:off x="8321040" y="2962656"/>
-            <a:ext cx="3291840" cy="320040"/>
-          </a:xfrm>
-          <a:prstGeom prst="rect">
-            <a:avLst/>
-          </a:prstGeom>
-          <a:noFill/>
-          <a:ln/>
-        </p:spPr>
-        <p:txBody>
-          <a:bodyPr wrap="square" lIns="0" tIns="0" rIns="0" bIns="0" rtlCol="0" anchor="ctr"/>
-          <a:lstStyle/>
-          <a:p>
-            <a:pPr indent="0" marL="0">
-              <a:buNone/>
-            </a:pPr>
-            <a:r>
-              <a:rPr lang="en-US" sz="1500" dirty="0">
-                <a:solidFill>
-                  <a:srgbClr val="1E2D34"/>
-                </a:solidFill>
-                <a:latin typeface="Meiryo" pitchFamily="34" charset="0"/>
-                <a:ea typeface="Meiryo" pitchFamily="34" charset="-122"/>
-                <a:cs typeface="Meiryo" pitchFamily="34" charset="-120"/>
-              </a:rPr>
-              <a:t>カテゴリーを選ぶ（必須）</a:t>
-            </a:r>
-            <a:endParaRPr lang="en-US" sz="1500" dirty="0"/>
-          </a:p>
-        </p:txBody>
-      </p:sp>
-      <p:sp>
-        <p:nvSpPr>
-          <p:cNvPr id="15" name="Shape 12"/>
-          <p:cNvSpPr/>
-          <p:nvPr/>
-        </p:nvSpPr>
-        <p:spPr>
-          <a:xfrm>
-            <a:off x="7772400" y="3483864"/>
-            <a:ext cx="384048" cy="384048"/>
-          </a:xfrm>
-          <a:prstGeom prst="ellipse">
-            <a:avLst/>
-          </a:prstGeom>
-          <a:solidFill>
-            <a:srgbClr val="2E7D32"/>
-          </a:solidFill>
-          <a:ln/>
-        </p:spPr>
-      </p:sp>
-      <p:sp>
-        <p:nvSpPr>
-          <p:cNvPr id="16" name="Text 13"/>
-          <p:cNvSpPr/>
-          <p:nvPr/>
-        </p:nvSpPr>
-        <p:spPr>
-          <a:xfrm>
-            <a:off x="7772400" y="3520440"/>
-            <a:ext cx="384048" cy="310896"/>
-          </a:xfrm>
-          <a:prstGeom prst="rect">
-            <a:avLst/>
-          </a:prstGeom>
-          <a:noFill/>
-          <a:ln/>
-        </p:spPr>
-        <p:txBody>
-          <a:bodyPr wrap="square" lIns="0" tIns="0" rIns="0" bIns="0" rtlCol="0" anchor="ctr"/>
-          <a:lstStyle/>
-          <a:p>
-            <a:pPr algn="ctr" indent="0" marL="0">
-              <a:buNone/>
-            </a:pPr>
-            <a:r>
-              <a:rPr lang="en-US" sz="1400" b="1" dirty="0">
-                <a:solidFill>
-                  <a:srgbClr val="FFFFFF"/>
-                </a:solidFill>
-                <a:latin typeface="Meiryo" pitchFamily="34" charset="0"/>
-                <a:ea typeface="Meiryo" pitchFamily="34" charset="-122"/>
-                <a:cs typeface="Meiryo" pitchFamily="34" charset="-120"/>
-              </a:rPr>
-              <a:t>4</a:t>
-            </a:r>
-            <a:endParaRPr lang="en-US" sz="1400" dirty="0"/>
-          </a:p>
-        </p:txBody>
-      </p:sp>
-      <p:sp>
-        <p:nvSpPr>
-          <p:cNvPr id="17" name="Text 14"/>
-          <p:cNvSpPr/>
-          <p:nvPr/>
-        </p:nvSpPr>
-        <p:spPr>
-          <a:xfrm>
-            <a:off x="8321040" y="3529584"/>
-            <a:ext cx="3291840" cy="320040"/>
-          </a:xfrm>
-          <a:prstGeom prst="rect">
-            <a:avLst/>
-          </a:prstGeom>
-          <a:noFill/>
-          <a:ln/>
-        </p:spPr>
-        <p:txBody>
-          <a:bodyPr wrap="square" lIns="0" tIns="0" rIns="0" bIns="0" rtlCol="0" anchor="ctr"/>
-          <a:lstStyle/>
-          <a:p>
-            <a:pPr indent="0" marL="0">
-              <a:buNone/>
-            </a:pPr>
-            <a:r>
-              <a:rPr lang="en-US" sz="1500" dirty="0">
-                <a:solidFill>
-                  <a:srgbClr val="1E2D34"/>
-                </a:solidFill>
-                <a:latin typeface="Meiryo" pitchFamily="34" charset="0"/>
-                <a:ea typeface="Meiryo" pitchFamily="34" charset="-122"/>
-                <a:cs typeface="Meiryo" pitchFamily="34" charset="-120"/>
-              </a:rPr>
-              <a:t>アイキャッチ画像を設定</a:t>
-            </a:r>
-            <a:endParaRPr lang="en-US" sz="1500" dirty="0"/>
-          </a:p>
-        </p:txBody>
-      </p:sp>
-      <p:sp>
-        <p:nvSpPr>
-          <p:cNvPr id="18" name="Shape 15"/>
-          <p:cNvSpPr/>
-          <p:nvPr/>
-        </p:nvSpPr>
-        <p:spPr>
-          <a:xfrm>
-            <a:off x="7772400" y="4050792"/>
-            <a:ext cx="384048" cy="384048"/>
-          </a:xfrm>
-          <a:prstGeom prst="ellipse">
-            <a:avLst/>
-          </a:prstGeom>
-          <a:solidFill>
-            <a:srgbClr val="2E7D32"/>
-          </a:solidFill>
-          <a:ln/>
-        </p:spPr>
-      </p:sp>
-      <p:sp>
-        <p:nvSpPr>
-          <p:cNvPr id="19" name="Text 16"/>
-          <p:cNvSpPr/>
-          <p:nvPr/>
-        </p:nvSpPr>
-        <p:spPr>
-          <a:xfrm>
-            <a:off x="7772400" y="4087368"/>
-            <a:ext cx="384048" cy="310896"/>
-          </a:xfrm>
-          <a:prstGeom prst="rect">
-            <a:avLst/>
-          </a:prstGeom>
-          <a:noFill/>
-          <a:ln/>
-        </p:spPr>
-        <p:txBody>
-          <a:bodyPr wrap="square" lIns="0" tIns="0" rIns="0" bIns="0" rtlCol="0" anchor="ctr"/>
-          <a:lstStyle/>
-          <a:p>
-            <a:pPr algn="ctr" indent="0" marL="0">
-              <a:buNone/>
-            </a:pPr>
-            <a:r>
-              <a:rPr lang="en-US" sz="1400" b="1" dirty="0">
-                <a:solidFill>
-                  <a:srgbClr val="FFFFFF"/>
-                </a:solidFill>
-                <a:latin typeface="Meiryo" pitchFamily="34" charset="0"/>
-                <a:ea typeface="Meiryo" pitchFamily="34" charset="-122"/>
-                <a:cs typeface="Meiryo" pitchFamily="34" charset="-120"/>
-              </a:rPr>
-              <a:t>5</a:t>
-            </a:r>
-            <a:endParaRPr lang="en-US" sz="1400" dirty="0"/>
-          </a:p>
-        </p:txBody>
-      </p:sp>
-      <p:sp>
-        <p:nvSpPr>
-          <p:cNvPr id="20" name="Text 17"/>
-          <p:cNvSpPr/>
-          <p:nvPr/>
-        </p:nvSpPr>
-        <p:spPr>
-          <a:xfrm>
-            <a:off x="8321040" y="4096512"/>
-            <a:ext cx="3291840" cy="320040"/>
-          </a:xfrm>
-          <a:prstGeom prst="rect">
-            <a:avLst/>
-          </a:prstGeom>
-          <a:noFill/>
-          <a:ln/>
-        </p:spPr>
-        <p:txBody>
-          <a:bodyPr wrap="square" lIns="0" tIns="0" rIns="0" bIns="0" rtlCol="0" anchor="ctr"/>
-          <a:lstStyle/>
-          <a:p>
-            <a:pPr indent="0" marL="0">
-              <a:buNone/>
-            </a:pPr>
-            <a:r>
-              <a:rPr lang="en-US" sz="1500" dirty="0">
-                <a:solidFill>
-                  <a:srgbClr val="1E2D34"/>
-                </a:solidFill>
-                <a:latin typeface="Meiryo" pitchFamily="34" charset="0"/>
-                <a:ea typeface="Meiryo" pitchFamily="34" charset="-122"/>
-                <a:cs typeface="Meiryo" pitchFamily="34" charset="-120"/>
-              </a:rPr>
-              <a:t>右上の【公開】</a:t>
-            </a:r>
-            <a:endParaRPr lang="en-US" sz="1500" dirty="0"/>
-          </a:p>
-        </p:txBody>
-      </p:sp>
-      <p:sp>
-        <p:nvSpPr>
-          <p:cNvPr id="21" name="Shape 18"/>
-          <p:cNvSpPr/>
-          <p:nvPr/>
-        </p:nvSpPr>
-        <p:spPr>
-          <a:xfrm>
-            <a:off x="7726680" y="4754880"/>
-            <a:ext cx="3840480" cy="1417320"/>
+      <p:sp>
+        <p:nvSpPr>
+          <p:cNvPr id="5" name="Shape 3"/>
+          <p:cNvSpPr/>
+          <p:nvPr/>
+        </p:nvSpPr>
+        <p:spPr>
+          <a:xfrm>
+            <a:off x="640080" y="1737360"/>
+            <a:ext cx="5303520" cy="2286000"/>
           </a:xfrm>
           <a:prstGeom prst="roundRect">
             <a:avLst>
-              <a:gd name="adj" fmla="val 6452"/>
+              <a:gd name="adj" fmla="val 4800"/>
+            </a:avLst>
+          </a:prstGeom>
+          <a:solidFill>
+            <a:srgbClr val="F6F7F8"/>
+          </a:solidFill>
+          <a:ln/>
+        </p:spPr>
+      </p:sp>
+      <p:sp>
+        <p:nvSpPr>
+          <p:cNvPr id="6" name="Text 4"/>
+          <p:cNvSpPr/>
+          <p:nvPr/>
+        </p:nvSpPr>
+        <p:spPr>
+          <a:xfrm>
+            <a:off x="914400" y="1920240"/>
+            <a:ext cx="4754880" cy="365760"/>
+          </a:xfrm>
+          <a:prstGeom prst="rect">
+            <a:avLst/>
+          </a:prstGeom>
+          <a:noFill/>
+          <a:ln/>
+        </p:spPr>
+        <p:txBody>
+          <a:bodyPr wrap="square" lIns="0" tIns="0" rIns="0" bIns="0" rtlCol="0" anchor="ctr"/>
+          <a:lstStyle/>
+          <a:p>
+            <a:pPr indent="0" marL="0">
+              <a:buNone/>
+            </a:pPr>
+            <a:r>
+              <a:rPr lang="en-US" sz="1800" b="1" dirty="0">
+                <a:solidFill>
+                  <a:srgbClr val="5E7681"/>
+                </a:solidFill>
+                <a:latin typeface="Meiryo" pitchFamily="34" charset="0"/>
+                <a:ea typeface="Meiryo" pitchFamily="34" charset="-122"/>
+                <a:cs typeface="Meiryo" pitchFamily="34" charset="-120"/>
+              </a:rPr>
+              <a:t>一般的なWordPressサイト</a:t>
+            </a:r>
+            <a:endParaRPr lang="en-US" sz="1800" dirty="0"/>
+          </a:p>
+        </p:txBody>
+      </p:sp>
+      <p:sp>
+        <p:nvSpPr>
+          <p:cNvPr id="7" name="Text 5"/>
+          <p:cNvSpPr/>
+          <p:nvPr/>
+        </p:nvSpPr>
+        <p:spPr>
+          <a:xfrm>
+            <a:off x="914400" y="2423160"/>
+            <a:ext cx="4754880" cy="1371600"/>
+          </a:xfrm>
+          <a:prstGeom prst="rect">
+            <a:avLst/>
+          </a:prstGeom>
+          <a:noFill/>
+          <a:ln/>
+        </p:spPr>
+        <p:txBody>
+          <a:bodyPr wrap="square" lIns="0" tIns="0" rIns="0" bIns="0" rtlCol="0" anchor="ctr"/>
+          <a:lstStyle/>
+          <a:p>
+            <a:pPr marL="342900" indent="-342900">
+              <a:spcAft>
+                <a:spcPts val="800"/>
+              </a:spcAft>
+              <a:buSzPct val="100000"/>
+              <a:buChar char="•"/>
+            </a:pPr>
+            <a:r>
+              <a:rPr lang="en-US" sz="1400" dirty="0">
+                <a:solidFill>
+                  <a:srgbClr val="1E2D34"/>
+                </a:solidFill>
+                <a:latin typeface="Meiryo" pitchFamily="34" charset="0"/>
+                <a:ea typeface="Meiryo" pitchFamily="34" charset="-122"/>
+                <a:cs typeface="Meiryo" pitchFamily="34" charset="-120"/>
+              </a:rPr>
+              <a:t>文章は WordPress の中に保存</a:t>
+            </a:r>
+            <a:endParaRPr lang="en-US" sz="1400" dirty="0"/>
+          </a:p>
+          <a:p>
+            <a:pPr marL="342900" indent="-342900">
+              <a:spcAft>
+                <a:spcPts val="800"/>
+              </a:spcAft>
+              <a:buSzPct val="100000"/>
+              <a:buChar char="•"/>
+            </a:pPr>
+            <a:r>
+              <a:rPr lang="en-US" sz="1400" dirty="0">
+                <a:solidFill>
+                  <a:srgbClr val="1E2D34"/>
+                </a:solidFill>
+                <a:latin typeface="Meiryo" pitchFamily="34" charset="0"/>
+                <a:ea typeface="Meiryo" pitchFamily="34" charset="-122"/>
+                <a:cs typeface="Meiryo" pitchFamily="34" charset="-120"/>
+              </a:rPr>
+              <a:t>誰でも管理画面から直せる</a:t>
+            </a:r>
+            <a:endParaRPr lang="en-US" sz="1400" dirty="0"/>
+          </a:p>
+          <a:p>
+            <a:pPr marL="342900" indent="-342900">
+              <a:spcAft>
+                <a:spcPts val="800"/>
+              </a:spcAft>
+              <a:buSzPct val="100000"/>
+              <a:buChar char="•"/>
+            </a:pPr>
+            <a:r>
+              <a:rPr lang="en-US" sz="1400" dirty="0">
+                <a:solidFill>
+                  <a:srgbClr val="1E2D34"/>
+                </a:solidFill>
+                <a:latin typeface="Meiryo" pitchFamily="34" charset="0"/>
+                <a:ea typeface="Meiryo" pitchFamily="34" charset="-122"/>
+                <a:cs typeface="Meiryo" pitchFamily="34" charset="-120"/>
+              </a:rPr>
+              <a:t>そのかわりデザインが崩れやすい</a:t>
+            </a:r>
+            <a:endParaRPr lang="en-US" sz="1400" dirty="0"/>
+          </a:p>
+        </p:txBody>
+      </p:sp>
+      <p:sp>
+        <p:nvSpPr>
+          <p:cNvPr id="8" name="Shape 6"/>
+          <p:cNvSpPr/>
+          <p:nvPr/>
+        </p:nvSpPr>
+        <p:spPr>
+          <a:xfrm>
+            <a:off x="6217920" y="1737360"/>
+            <a:ext cx="5303520" cy="2286000"/>
+          </a:xfrm>
+          <a:prstGeom prst="roundRect">
+            <a:avLst>
+              <a:gd name="adj" fmla="val 4800"/>
             </a:avLst>
           </a:prstGeom>
           <a:solidFill>
@@ -12732,14 +13379,14 @@
       </p:sp>
       <p:sp>
         <p:nvSpPr>
-          <p:cNvPr id="22" name="Text 19"/>
-          <p:cNvSpPr/>
-          <p:nvPr/>
-        </p:nvSpPr>
-        <p:spPr>
-          <a:xfrm>
-            <a:off x="7955280" y="4937760"/>
-            <a:ext cx="3474720" cy="1005840"/>
+          <p:cNvPr id="9" name="Text 7"/>
+          <p:cNvSpPr/>
+          <p:nvPr/>
+        </p:nvSpPr>
+        <p:spPr>
+          <a:xfrm>
+            <a:off x="6492240" y="1920240"/>
+            <a:ext cx="4754880" cy="365760"/>
           </a:xfrm>
           <a:prstGeom prst="rect">
             <a:avLst/>
@@ -12752,43 +13399,205 @@
           <a:lstStyle/>
           <a:p>
             <a:pPr indent="0" marL="0">
-              <a:lnSpc>
-                <a:spcPts val="2000"/>
-              </a:lnSpc>
-              <a:buNone/>
-            </a:pPr>
-            <a:r>
-              <a:rPr lang="en-US" sz="1300" b="1" dirty="0">
-                <a:solidFill>
-                  <a:srgbClr val="B85042"/>
-                </a:solidFill>
-                <a:latin typeface="Meiryo" pitchFamily="34" charset="0"/>
-                <a:ea typeface="Meiryo" pitchFamily="34" charset="-122"/>
-                <a:cs typeface="Meiryo" pitchFamily="34" charset="-120"/>
-              </a:rPr>
-              <a:t>カテゴリーのチェックを忘れると、</a:t>
-            </a:r>
-            <a:endParaRPr lang="en-US" sz="1300" dirty="0"/>
-          </a:p>
+              <a:buNone/>
+            </a:pPr>
+            <a:r>
+              <a:rPr lang="en-US" sz="1800" b="1" dirty="0">
+                <a:solidFill>
+                  <a:srgbClr val="DD8236"/>
+                </a:solidFill>
+                <a:latin typeface="Meiryo" pitchFamily="34" charset="0"/>
+                <a:ea typeface="Meiryo" pitchFamily="34" charset="-122"/>
+                <a:cs typeface="Meiryo" pitchFamily="34" charset="-120"/>
+              </a:rPr>
+              <a:t>このサイト</a:t>
+            </a:r>
+            <a:endParaRPr lang="en-US" sz="1800" dirty="0"/>
+          </a:p>
+        </p:txBody>
+      </p:sp>
+      <p:sp>
+        <p:nvSpPr>
+          <p:cNvPr id="10" name="Text 8"/>
+          <p:cNvSpPr/>
+          <p:nvPr/>
+        </p:nvSpPr>
+        <p:spPr>
+          <a:xfrm>
+            <a:off x="6492240" y="2423160"/>
+            <a:ext cx="4754880" cy="1371600"/>
+          </a:xfrm>
+          <a:prstGeom prst="rect">
+            <a:avLst/>
+          </a:prstGeom>
+          <a:noFill/>
+          <a:ln/>
+        </p:spPr>
+        <p:txBody>
+          <a:bodyPr wrap="square" lIns="0" tIns="0" rIns="0" bIns="0" rtlCol="0" anchor="ctr"/>
+          <a:lstStyle/>
+          <a:p>
+            <a:pPr marL="342900" indent="-342900">
+              <a:spcAft>
+                <a:spcPts val="800"/>
+              </a:spcAft>
+              <a:buSzPct val="100000"/>
+              <a:buChar char="•"/>
+            </a:pPr>
+            <a:r>
+              <a:rPr lang="en-US" sz="1400" dirty="0">
+                <a:solidFill>
+                  <a:srgbClr val="1E2D34"/>
+                </a:solidFill>
+                <a:latin typeface="Meiryo" pitchFamily="34" charset="0"/>
+                <a:ea typeface="Meiryo" pitchFamily="34" charset="-122"/>
+                <a:cs typeface="Meiryo" pitchFamily="34" charset="-120"/>
+              </a:rPr>
+              <a:t>文章は テーマのファイル の中</a:t>
+            </a:r>
+            <a:endParaRPr lang="en-US" sz="1400" dirty="0"/>
+          </a:p>
+          <a:p>
+            <a:pPr marL="342900" indent="-342900">
+              <a:spcAft>
+                <a:spcPts val="800"/>
+              </a:spcAft>
+              <a:buSzPct val="100000"/>
+              <a:buChar char="•"/>
+            </a:pPr>
+            <a:r>
+              <a:rPr lang="en-US" sz="1400" dirty="0">
+                <a:solidFill>
+                  <a:srgbClr val="1E2D34"/>
+                </a:solidFill>
+                <a:latin typeface="Meiryo" pitchFamily="34" charset="0"/>
+                <a:ea typeface="Meiryo" pitchFamily="34" charset="-122"/>
+                <a:cs typeface="Meiryo" pitchFamily="34" charset="-120"/>
+              </a:rPr>
+              <a:t>直すにはパソコン作業が必要</a:t>
+            </a:r>
+            <a:endParaRPr lang="en-US" sz="1400" dirty="0"/>
+          </a:p>
+          <a:p>
+            <a:pPr marL="342900" indent="-342900">
+              <a:spcAft>
+                <a:spcPts val="800"/>
+              </a:spcAft>
+              <a:buSzPct val="100000"/>
+              <a:buChar char="•"/>
+            </a:pPr>
+            <a:r>
+              <a:rPr lang="en-US" sz="1400" dirty="0">
+                <a:solidFill>
+                  <a:srgbClr val="1E2D34"/>
+                </a:solidFill>
+                <a:latin typeface="Meiryo" pitchFamily="34" charset="0"/>
+                <a:ea typeface="Meiryo" pitchFamily="34" charset="-122"/>
+                <a:cs typeface="Meiryo" pitchFamily="34" charset="-120"/>
+              </a:rPr>
+              <a:t>そのかわりデザインが崩れない</a:t>
+            </a:r>
+            <a:endParaRPr lang="en-US" sz="1400" dirty="0"/>
+          </a:p>
+        </p:txBody>
+      </p:sp>
+      <p:sp>
+        <p:nvSpPr>
+          <p:cNvPr id="11" name="Shape 9"/>
+          <p:cNvSpPr/>
+          <p:nvPr/>
+        </p:nvSpPr>
+        <p:spPr>
+          <a:xfrm>
+            <a:off x="640080" y="4343400"/>
+            <a:ext cx="10881360" cy="1371600"/>
+          </a:xfrm>
+          <a:prstGeom prst="roundRect">
+            <a:avLst>
+              <a:gd name="adj" fmla="val 8000"/>
+            </a:avLst>
+          </a:prstGeom>
+          <a:solidFill>
+            <a:srgbClr val="264653"/>
+          </a:solidFill>
+          <a:ln/>
+        </p:spPr>
+      </p:sp>
+      <p:sp>
+        <p:nvSpPr>
+          <p:cNvPr id="12" name="Text 10"/>
+          <p:cNvSpPr/>
+          <p:nvPr/>
+        </p:nvSpPr>
+        <p:spPr>
+          <a:xfrm>
+            <a:off x="960120" y="4526280"/>
+            <a:ext cx="2743200" cy="365760"/>
+          </a:xfrm>
+          <a:prstGeom prst="rect">
+            <a:avLst/>
+          </a:prstGeom>
+          <a:noFill/>
+          <a:ln/>
+        </p:spPr>
+        <p:txBody>
+          <a:bodyPr wrap="square" lIns="0" tIns="0" rIns="0" bIns="0" rtlCol="0" anchor="ctr"/>
+          <a:lstStyle/>
           <a:p>
             <a:pPr indent="0" marL="0">
-              <a:lnSpc>
-                <a:spcPts val="2000"/>
-              </a:lnSpc>
-              <a:buNone/>
-            </a:pPr>
-            <a:r>
-              <a:rPr lang="en-US" sz="1300" b="1" dirty="0">
-                <a:solidFill>
-                  <a:srgbClr val="B85042"/>
-                </a:solidFill>
-                <a:latin typeface="Meiryo" pitchFamily="34" charset="0"/>
-                <a:ea typeface="Meiryo" pitchFamily="34" charset="-122"/>
-                <a:cs typeface="Meiryo" pitchFamily="34" charset="-120"/>
-              </a:rPr>
-              <a:t>一覧のどこにも出てきません。</a:t>
-            </a:r>
-            <a:endParaRPr lang="en-US" sz="1300" dirty="0"/>
+              <a:buNone/>
+            </a:pPr>
+            <a:r>
+              <a:rPr lang="en-US" sz="1800" b="1" dirty="0">
+                <a:solidFill>
+                  <a:srgbClr val="F4A261"/>
+                </a:solidFill>
+                <a:latin typeface="Meiryo" pitchFamily="34" charset="0"/>
+                <a:ea typeface="Meiryo" pitchFamily="34" charset="-122"/>
+                <a:cs typeface="Meiryo" pitchFamily="34" charset="-120"/>
+              </a:rPr>
+              <a:t>見分け方</a:t>
+            </a:r>
+            <a:endParaRPr lang="en-US" sz="1800" dirty="0"/>
+          </a:p>
+        </p:txBody>
+      </p:sp>
+      <p:sp>
+        <p:nvSpPr>
+          <p:cNvPr id="13" name="Text 11"/>
+          <p:cNvSpPr/>
+          <p:nvPr/>
+        </p:nvSpPr>
+        <p:spPr>
+          <a:xfrm>
+            <a:off x="960120" y="4956048"/>
+            <a:ext cx="10241280" cy="548640"/>
+          </a:xfrm>
+          <a:prstGeom prst="rect">
+            <a:avLst/>
+          </a:prstGeom>
+          <a:noFill/>
+          <a:ln/>
+        </p:spPr>
+        <p:txBody>
+          <a:bodyPr wrap="square" lIns="0" tIns="0" rIns="0" bIns="0" rtlCol="0" anchor="ctr"/>
+          <a:lstStyle/>
+          <a:p>
+            <a:pPr indent="0" marL="0">
+              <a:buNone/>
+            </a:pPr>
+            <a:r>
+              <a:rPr lang="en-US" sz="1700" dirty="0">
+                <a:solidFill>
+                  <a:srgbClr val="FFFFFF"/>
+                </a:solidFill>
+                <a:latin typeface="Meiryo" pitchFamily="34" charset="0"/>
+                <a:ea typeface="Meiryo" pitchFamily="34" charset="-122"/>
+                <a:cs typeface="Meiryo" pitchFamily="34" charset="-120"/>
+              </a:rPr>
+              <a:t>WordPressの編集画面を開いて、その文章が出てくれば 道A。出てこなければ 道B です。</a:t>
+            </a:r>
+            <a:endParaRPr lang="en-US" sz="1700" dirty="0"/>
           </a:p>
         </p:txBody>
       </p:sp>
@@ -12857,7 +13666,7 @@
                 <a:ea typeface="Meiryo" pitchFamily="34" charset="-122"/>
                 <a:cs typeface="Meiryo" pitchFamily="34" charset="-120"/>
               </a:rPr>
-              <a:t>【道A】記事を書くときの注意</a:t>
+              <a:t>【道A】記事を書く（コラム・お知らせ）</a:t>
             </a:r>
             <a:endParaRPr lang="en-US" sz="3200" dirty="0"/>
           </a:p>
@@ -12896,7 +13705,7 @@
                 <a:ea typeface="Meiryo" pitchFamily="34" charset="-122"/>
                 <a:cs typeface="Meiryo" pitchFamily="34" charset="-120"/>
               </a:rPr>
-              <a:t>つまずきやすい3点</a:t>
+              <a:t>投稿 → 投稿を追加</a:t>
             </a:r>
             <a:endParaRPr lang="en-US" sz="1500" dirty="0"/>
           </a:p>
@@ -12941,38 +13750,40 @@
           </a:p>
         </p:txBody>
       </p:sp>
-      <p:sp>
-        <p:nvSpPr>
-          <p:cNvPr id="5" name="Shape 3"/>
-          <p:cNvSpPr/>
-          <p:nvPr/>
-        </p:nvSpPr>
-        <p:spPr>
-          <a:xfrm>
-            <a:off x="640080" y="1783080"/>
-            <a:ext cx="10881360" cy="1371600"/>
-          </a:xfrm>
-          <a:prstGeom prst="roundRect">
-            <a:avLst>
-              <a:gd name="adj" fmla="val 8000"/>
-            </a:avLst>
-          </a:prstGeom>
-          <a:solidFill>
-            <a:srgbClr val="F6F7F8"/>
-          </a:solidFill>
-          <a:ln/>
-        </p:spPr>
-      </p:sp>
-      <p:sp>
-        <p:nvSpPr>
-          <p:cNvPr id="6" name="Shape 4"/>
-          <p:cNvSpPr/>
-          <p:nvPr/>
-        </p:nvSpPr>
-        <p:spPr>
-          <a:xfrm>
-            <a:off x="914400" y="2194560"/>
-            <a:ext cx="502920" cy="502920"/>
+      <p:pic>
+        <p:nvPicPr>
+          <p:cNvPr id="5" name="Image 0" descr="/sessions/compassionate-sweet-heisenberg/mnt/dev-aspath-life-main/_wp移行素材/★引継ぎ資料/画像/02_投稿を追加.jpg">    </p:cNvPr>
+          <p:cNvPicPr>
+            <a:picLocks noChangeAspect="1"/>
+          </p:cNvPicPr>
+          <p:nvPr/>
+        </p:nvPicPr>
+        <p:blipFill>
+          <a:blip r:embed="rId1"/>
+          <a:stretch>
+            <a:fillRect/>
+          </a:stretch>
+        </p:blipFill>
+        <p:spPr>
+          <a:xfrm>
+            <a:off x="640080" y="1691640"/>
+            <a:ext cx="6766560" cy="3296972"/>
+          </a:xfrm>
+          <a:prstGeom prst="rect">
+            <a:avLst/>
+          </a:prstGeom>
+        </p:spPr>
+      </p:pic>
+      <p:sp>
+        <p:nvSpPr>
+          <p:cNvPr id="6" name="Shape 3"/>
+          <p:cNvSpPr/>
+          <p:nvPr/>
+        </p:nvSpPr>
+        <p:spPr>
+          <a:xfrm>
+            <a:off x="7772400" y="1783080"/>
+            <a:ext cx="384048" cy="384048"/>
           </a:xfrm>
           <a:prstGeom prst="ellipse">
             <a:avLst/>
@@ -12985,14 +13796,14 @@
       </p:sp>
       <p:sp>
         <p:nvSpPr>
-          <p:cNvPr id="7" name="Text 5"/>
-          <p:cNvSpPr/>
-          <p:nvPr/>
-        </p:nvSpPr>
-        <p:spPr>
-          <a:xfrm>
-            <a:off x="914400" y="2267712"/>
-            <a:ext cx="502920" cy="365760"/>
+          <p:cNvPr id="7" name="Text 4"/>
+          <p:cNvSpPr/>
+          <p:nvPr/>
+        </p:nvSpPr>
+        <p:spPr>
+          <a:xfrm>
+            <a:off x="7772400" y="1819656"/>
+            <a:ext cx="384048" cy="310896"/>
           </a:xfrm>
           <a:prstGeom prst="rect">
             <a:avLst/>
@@ -13008,7 +13819,7 @@
               <a:buNone/>
             </a:pPr>
             <a:r>
-              <a:rPr lang="en-US" sz="1700" b="1" dirty="0">
+              <a:rPr lang="en-US" sz="1400" b="1" dirty="0">
                 <a:solidFill>
                   <a:srgbClr val="FFFFFF"/>
                 </a:solidFill>
@@ -13018,20 +13829,20 @@
               </a:rPr>
               <a:t>1</a:t>
             </a:r>
-            <a:endParaRPr lang="en-US" sz="1700" dirty="0"/>
-          </a:p>
-        </p:txBody>
-      </p:sp>
-      <p:sp>
-        <p:nvSpPr>
-          <p:cNvPr id="8" name="Text 6"/>
-          <p:cNvSpPr/>
-          <p:nvPr/>
-        </p:nvSpPr>
-        <p:spPr>
-          <a:xfrm>
-            <a:off x="1645920" y="1965960"/>
-            <a:ext cx="9509760" cy="365760"/>
+            <a:endParaRPr lang="en-US" sz="1400" dirty="0"/>
+          </a:p>
+        </p:txBody>
+      </p:sp>
+      <p:sp>
+        <p:nvSpPr>
+          <p:cNvPr id="8" name="Text 5"/>
+          <p:cNvSpPr/>
+          <p:nvPr/>
+        </p:nvSpPr>
+        <p:spPr>
+          <a:xfrm>
+            <a:off x="8321040" y="1828800"/>
+            <a:ext cx="3291840" cy="320040"/>
           </a:xfrm>
           <a:prstGeom prst="rect">
             <a:avLst/>
@@ -13047,30 +13858,444 @@
               <a:buNone/>
             </a:pPr>
             <a:r>
-              <a:rPr lang="en-US" sz="1800" b="1" dirty="0">
-                <a:solidFill>
-                  <a:srgbClr val="264653"/>
-                </a:solidFill>
-                <a:latin typeface="Meiryo" pitchFamily="34" charset="0"/>
-                <a:ea typeface="Meiryo" pitchFamily="34" charset="-122"/>
-                <a:cs typeface="Meiryo" pitchFamily="34" charset="-120"/>
-              </a:rPr>
-              <a:t>カテゴリーは必ず選ぶ</a:t>
-            </a:r>
-            <a:endParaRPr lang="en-US" sz="1800" dirty="0"/>
-          </a:p>
-        </p:txBody>
-      </p:sp>
-      <p:sp>
-        <p:nvSpPr>
-          <p:cNvPr id="9" name="Text 7"/>
-          <p:cNvSpPr/>
-          <p:nvPr/>
-        </p:nvSpPr>
-        <p:spPr>
-          <a:xfrm>
-            <a:off x="1645920" y="2404872"/>
-            <a:ext cx="9509760" cy="640080"/>
+              <a:rPr lang="en-US" sz="1500" dirty="0">
+                <a:solidFill>
+                  <a:srgbClr val="1E2D34"/>
+                </a:solidFill>
+                <a:latin typeface="Meiryo" pitchFamily="34" charset="0"/>
+                <a:ea typeface="Meiryo" pitchFamily="34" charset="-122"/>
+                <a:cs typeface="Meiryo" pitchFamily="34" charset="-120"/>
+              </a:rPr>
+              <a:t>タイトルを入れる</a:t>
+            </a:r>
+            <a:endParaRPr lang="en-US" sz="1500" dirty="0"/>
+          </a:p>
+        </p:txBody>
+      </p:sp>
+      <p:sp>
+        <p:nvSpPr>
+          <p:cNvPr id="9" name="Shape 6"/>
+          <p:cNvSpPr/>
+          <p:nvPr/>
+        </p:nvSpPr>
+        <p:spPr>
+          <a:xfrm>
+            <a:off x="7772400" y="2350008"/>
+            <a:ext cx="384048" cy="384048"/>
+          </a:xfrm>
+          <a:prstGeom prst="ellipse">
+            <a:avLst/>
+          </a:prstGeom>
+          <a:solidFill>
+            <a:srgbClr val="2E7D32"/>
+          </a:solidFill>
+          <a:ln/>
+        </p:spPr>
+      </p:sp>
+      <p:sp>
+        <p:nvSpPr>
+          <p:cNvPr id="10" name="Text 7"/>
+          <p:cNvSpPr/>
+          <p:nvPr/>
+        </p:nvSpPr>
+        <p:spPr>
+          <a:xfrm>
+            <a:off x="7772400" y="2386584"/>
+            <a:ext cx="384048" cy="310896"/>
+          </a:xfrm>
+          <a:prstGeom prst="rect">
+            <a:avLst/>
+          </a:prstGeom>
+          <a:noFill/>
+          <a:ln/>
+        </p:spPr>
+        <p:txBody>
+          <a:bodyPr wrap="square" lIns="0" tIns="0" rIns="0" bIns="0" rtlCol="0" anchor="ctr"/>
+          <a:lstStyle/>
+          <a:p>
+            <a:pPr algn="ctr" indent="0" marL="0">
+              <a:buNone/>
+            </a:pPr>
+            <a:r>
+              <a:rPr lang="en-US" sz="1400" b="1" dirty="0">
+                <a:solidFill>
+                  <a:srgbClr val="FFFFFF"/>
+                </a:solidFill>
+                <a:latin typeface="Meiryo" pitchFamily="34" charset="0"/>
+                <a:ea typeface="Meiryo" pitchFamily="34" charset="-122"/>
+                <a:cs typeface="Meiryo" pitchFamily="34" charset="-120"/>
+              </a:rPr>
+              <a:t>2</a:t>
+            </a:r>
+            <a:endParaRPr lang="en-US" sz="1400" dirty="0"/>
+          </a:p>
+        </p:txBody>
+      </p:sp>
+      <p:sp>
+        <p:nvSpPr>
+          <p:cNvPr id="11" name="Text 8"/>
+          <p:cNvSpPr/>
+          <p:nvPr/>
+        </p:nvSpPr>
+        <p:spPr>
+          <a:xfrm>
+            <a:off x="8321040" y="2395728"/>
+            <a:ext cx="3291840" cy="320040"/>
+          </a:xfrm>
+          <a:prstGeom prst="rect">
+            <a:avLst/>
+          </a:prstGeom>
+          <a:noFill/>
+          <a:ln/>
+        </p:spPr>
+        <p:txBody>
+          <a:bodyPr wrap="square" lIns="0" tIns="0" rIns="0" bIns="0" rtlCol="0" anchor="ctr"/>
+          <a:lstStyle/>
+          <a:p>
+            <a:pPr indent="0" marL="0">
+              <a:buNone/>
+            </a:pPr>
+            <a:r>
+              <a:rPr lang="en-US" sz="1500" dirty="0">
+                <a:solidFill>
+                  <a:srgbClr val="1E2D34"/>
+                </a:solidFill>
+                <a:latin typeface="Meiryo" pitchFamily="34" charset="0"/>
+                <a:ea typeface="Meiryo" pitchFamily="34" charset="-122"/>
+                <a:cs typeface="Meiryo" pitchFamily="34" charset="-120"/>
+              </a:rPr>
+              <a:t>本文を書く</a:t>
+            </a:r>
+            <a:endParaRPr lang="en-US" sz="1500" dirty="0"/>
+          </a:p>
+        </p:txBody>
+      </p:sp>
+      <p:sp>
+        <p:nvSpPr>
+          <p:cNvPr id="12" name="Shape 9"/>
+          <p:cNvSpPr/>
+          <p:nvPr/>
+        </p:nvSpPr>
+        <p:spPr>
+          <a:xfrm>
+            <a:off x="7772400" y="2916936"/>
+            <a:ext cx="384048" cy="384048"/>
+          </a:xfrm>
+          <a:prstGeom prst="ellipse">
+            <a:avLst/>
+          </a:prstGeom>
+          <a:solidFill>
+            <a:srgbClr val="2E7D32"/>
+          </a:solidFill>
+          <a:ln/>
+        </p:spPr>
+      </p:sp>
+      <p:sp>
+        <p:nvSpPr>
+          <p:cNvPr id="13" name="Text 10"/>
+          <p:cNvSpPr/>
+          <p:nvPr/>
+        </p:nvSpPr>
+        <p:spPr>
+          <a:xfrm>
+            <a:off x="7772400" y="2953512"/>
+            <a:ext cx="384048" cy="310896"/>
+          </a:xfrm>
+          <a:prstGeom prst="rect">
+            <a:avLst/>
+          </a:prstGeom>
+          <a:noFill/>
+          <a:ln/>
+        </p:spPr>
+        <p:txBody>
+          <a:bodyPr wrap="square" lIns="0" tIns="0" rIns="0" bIns="0" rtlCol="0" anchor="ctr"/>
+          <a:lstStyle/>
+          <a:p>
+            <a:pPr algn="ctr" indent="0" marL="0">
+              <a:buNone/>
+            </a:pPr>
+            <a:r>
+              <a:rPr lang="en-US" sz="1400" b="1" dirty="0">
+                <a:solidFill>
+                  <a:srgbClr val="FFFFFF"/>
+                </a:solidFill>
+                <a:latin typeface="Meiryo" pitchFamily="34" charset="0"/>
+                <a:ea typeface="Meiryo" pitchFamily="34" charset="-122"/>
+                <a:cs typeface="Meiryo" pitchFamily="34" charset="-120"/>
+              </a:rPr>
+              <a:t>3</a:t>
+            </a:r>
+            <a:endParaRPr lang="en-US" sz="1400" dirty="0"/>
+          </a:p>
+        </p:txBody>
+      </p:sp>
+      <p:sp>
+        <p:nvSpPr>
+          <p:cNvPr id="14" name="Text 11"/>
+          <p:cNvSpPr/>
+          <p:nvPr/>
+        </p:nvSpPr>
+        <p:spPr>
+          <a:xfrm>
+            <a:off x="8321040" y="2962656"/>
+            <a:ext cx="3291840" cy="320040"/>
+          </a:xfrm>
+          <a:prstGeom prst="rect">
+            <a:avLst/>
+          </a:prstGeom>
+          <a:noFill/>
+          <a:ln/>
+        </p:spPr>
+        <p:txBody>
+          <a:bodyPr wrap="square" lIns="0" tIns="0" rIns="0" bIns="0" rtlCol="0" anchor="ctr"/>
+          <a:lstStyle/>
+          <a:p>
+            <a:pPr indent="0" marL="0">
+              <a:buNone/>
+            </a:pPr>
+            <a:r>
+              <a:rPr lang="en-US" sz="1500" dirty="0">
+                <a:solidFill>
+                  <a:srgbClr val="1E2D34"/>
+                </a:solidFill>
+                <a:latin typeface="Meiryo" pitchFamily="34" charset="0"/>
+                <a:ea typeface="Meiryo" pitchFamily="34" charset="-122"/>
+                <a:cs typeface="Meiryo" pitchFamily="34" charset="-120"/>
+              </a:rPr>
+              <a:t>カテゴリーを選ぶ（必須）</a:t>
+            </a:r>
+            <a:endParaRPr lang="en-US" sz="1500" dirty="0"/>
+          </a:p>
+        </p:txBody>
+      </p:sp>
+      <p:sp>
+        <p:nvSpPr>
+          <p:cNvPr id="15" name="Shape 12"/>
+          <p:cNvSpPr/>
+          <p:nvPr/>
+        </p:nvSpPr>
+        <p:spPr>
+          <a:xfrm>
+            <a:off x="7772400" y="3483864"/>
+            <a:ext cx="384048" cy="384048"/>
+          </a:xfrm>
+          <a:prstGeom prst="ellipse">
+            <a:avLst/>
+          </a:prstGeom>
+          <a:solidFill>
+            <a:srgbClr val="2E7D32"/>
+          </a:solidFill>
+          <a:ln/>
+        </p:spPr>
+      </p:sp>
+      <p:sp>
+        <p:nvSpPr>
+          <p:cNvPr id="16" name="Text 13"/>
+          <p:cNvSpPr/>
+          <p:nvPr/>
+        </p:nvSpPr>
+        <p:spPr>
+          <a:xfrm>
+            <a:off x="7772400" y="3520440"/>
+            <a:ext cx="384048" cy="310896"/>
+          </a:xfrm>
+          <a:prstGeom prst="rect">
+            <a:avLst/>
+          </a:prstGeom>
+          <a:noFill/>
+          <a:ln/>
+        </p:spPr>
+        <p:txBody>
+          <a:bodyPr wrap="square" lIns="0" tIns="0" rIns="0" bIns="0" rtlCol="0" anchor="ctr"/>
+          <a:lstStyle/>
+          <a:p>
+            <a:pPr algn="ctr" indent="0" marL="0">
+              <a:buNone/>
+            </a:pPr>
+            <a:r>
+              <a:rPr lang="en-US" sz="1400" b="1" dirty="0">
+                <a:solidFill>
+                  <a:srgbClr val="FFFFFF"/>
+                </a:solidFill>
+                <a:latin typeface="Meiryo" pitchFamily="34" charset="0"/>
+                <a:ea typeface="Meiryo" pitchFamily="34" charset="-122"/>
+                <a:cs typeface="Meiryo" pitchFamily="34" charset="-120"/>
+              </a:rPr>
+              <a:t>4</a:t>
+            </a:r>
+            <a:endParaRPr lang="en-US" sz="1400" dirty="0"/>
+          </a:p>
+        </p:txBody>
+      </p:sp>
+      <p:sp>
+        <p:nvSpPr>
+          <p:cNvPr id="17" name="Text 14"/>
+          <p:cNvSpPr/>
+          <p:nvPr/>
+        </p:nvSpPr>
+        <p:spPr>
+          <a:xfrm>
+            <a:off x="8321040" y="3529584"/>
+            <a:ext cx="3291840" cy="320040"/>
+          </a:xfrm>
+          <a:prstGeom prst="rect">
+            <a:avLst/>
+          </a:prstGeom>
+          <a:noFill/>
+          <a:ln/>
+        </p:spPr>
+        <p:txBody>
+          <a:bodyPr wrap="square" lIns="0" tIns="0" rIns="0" bIns="0" rtlCol="0" anchor="ctr"/>
+          <a:lstStyle/>
+          <a:p>
+            <a:pPr indent="0" marL="0">
+              <a:buNone/>
+            </a:pPr>
+            <a:r>
+              <a:rPr lang="en-US" sz="1500" dirty="0">
+                <a:solidFill>
+                  <a:srgbClr val="1E2D34"/>
+                </a:solidFill>
+                <a:latin typeface="Meiryo" pitchFamily="34" charset="0"/>
+                <a:ea typeface="Meiryo" pitchFamily="34" charset="-122"/>
+                <a:cs typeface="Meiryo" pitchFamily="34" charset="-120"/>
+              </a:rPr>
+              <a:t>アイキャッチ画像を設定</a:t>
+            </a:r>
+            <a:endParaRPr lang="en-US" sz="1500" dirty="0"/>
+          </a:p>
+        </p:txBody>
+      </p:sp>
+      <p:sp>
+        <p:nvSpPr>
+          <p:cNvPr id="18" name="Shape 15"/>
+          <p:cNvSpPr/>
+          <p:nvPr/>
+        </p:nvSpPr>
+        <p:spPr>
+          <a:xfrm>
+            <a:off x="7772400" y="4050792"/>
+            <a:ext cx="384048" cy="384048"/>
+          </a:xfrm>
+          <a:prstGeom prst="ellipse">
+            <a:avLst/>
+          </a:prstGeom>
+          <a:solidFill>
+            <a:srgbClr val="2E7D32"/>
+          </a:solidFill>
+          <a:ln/>
+        </p:spPr>
+      </p:sp>
+      <p:sp>
+        <p:nvSpPr>
+          <p:cNvPr id="19" name="Text 16"/>
+          <p:cNvSpPr/>
+          <p:nvPr/>
+        </p:nvSpPr>
+        <p:spPr>
+          <a:xfrm>
+            <a:off x="7772400" y="4087368"/>
+            <a:ext cx="384048" cy="310896"/>
+          </a:xfrm>
+          <a:prstGeom prst="rect">
+            <a:avLst/>
+          </a:prstGeom>
+          <a:noFill/>
+          <a:ln/>
+        </p:spPr>
+        <p:txBody>
+          <a:bodyPr wrap="square" lIns="0" tIns="0" rIns="0" bIns="0" rtlCol="0" anchor="ctr"/>
+          <a:lstStyle/>
+          <a:p>
+            <a:pPr algn="ctr" indent="0" marL="0">
+              <a:buNone/>
+            </a:pPr>
+            <a:r>
+              <a:rPr lang="en-US" sz="1400" b="1" dirty="0">
+                <a:solidFill>
+                  <a:srgbClr val="FFFFFF"/>
+                </a:solidFill>
+                <a:latin typeface="Meiryo" pitchFamily="34" charset="0"/>
+                <a:ea typeface="Meiryo" pitchFamily="34" charset="-122"/>
+                <a:cs typeface="Meiryo" pitchFamily="34" charset="-120"/>
+              </a:rPr>
+              <a:t>5</a:t>
+            </a:r>
+            <a:endParaRPr lang="en-US" sz="1400" dirty="0"/>
+          </a:p>
+        </p:txBody>
+      </p:sp>
+      <p:sp>
+        <p:nvSpPr>
+          <p:cNvPr id="20" name="Text 17"/>
+          <p:cNvSpPr/>
+          <p:nvPr/>
+        </p:nvSpPr>
+        <p:spPr>
+          <a:xfrm>
+            <a:off x="8321040" y="4096512"/>
+            <a:ext cx="3291840" cy="320040"/>
+          </a:xfrm>
+          <a:prstGeom prst="rect">
+            <a:avLst/>
+          </a:prstGeom>
+          <a:noFill/>
+          <a:ln/>
+        </p:spPr>
+        <p:txBody>
+          <a:bodyPr wrap="square" lIns="0" tIns="0" rIns="0" bIns="0" rtlCol="0" anchor="ctr"/>
+          <a:lstStyle/>
+          <a:p>
+            <a:pPr indent="0" marL="0">
+              <a:buNone/>
+            </a:pPr>
+            <a:r>
+              <a:rPr lang="en-US" sz="1500" dirty="0">
+                <a:solidFill>
+                  <a:srgbClr val="1E2D34"/>
+                </a:solidFill>
+                <a:latin typeface="Meiryo" pitchFamily="34" charset="0"/>
+                <a:ea typeface="Meiryo" pitchFamily="34" charset="-122"/>
+                <a:cs typeface="Meiryo" pitchFamily="34" charset="-120"/>
+              </a:rPr>
+              <a:t>右上の【公開】</a:t>
+            </a:r>
+            <a:endParaRPr lang="en-US" sz="1500" dirty="0"/>
+          </a:p>
+        </p:txBody>
+      </p:sp>
+      <p:sp>
+        <p:nvSpPr>
+          <p:cNvPr id="21" name="Shape 18"/>
+          <p:cNvSpPr/>
+          <p:nvPr/>
+        </p:nvSpPr>
+        <p:spPr>
+          <a:xfrm>
+            <a:off x="7726680" y="4754880"/>
+            <a:ext cx="3840480" cy="1417320"/>
+          </a:xfrm>
+          <a:prstGeom prst="roundRect">
+            <a:avLst>
+              <a:gd name="adj" fmla="val 6452"/>
+            </a:avLst>
+          </a:prstGeom>
+          <a:solidFill>
+            <a:srgbClr val="FFF4EA"/>
+          </a:solidFill>
+          <a:ln/>
+        </p:spPr>
+      </p:sp>
+      <p:sp>
+        <p:nvSpPr>
+          <p:cNvPr id="22" name="Text 19"/>
+          <p:cNvSpPr/>
+          <p:nvPr/>
+        </p:nvSpPr>
+        <p:spPr>
+          <a:xfrm>
+            <a:off x="7955280" y="4937760"/>
+            <a:ext cx="3474720" cy="1005840"/>
           </a:xfrm>
           <a:prstGeom prst="rect">
             <a:avLst/>
@@ -13089,17 +14314,17 @@
               <a:buNone/>
             </a:pPr>
             <a:r>
-              <a:rPr lang="en-US" sz="1400" dirty="0">
-                <a:solidFill>
-                  <a:srgbClr val="5E7681"/>
-                </a:solidFill>
-                <a:latin typeface="Meiryo" pitchFamily="34" charset="0"/>
-                <a:ea typeface="Meiryo" pitchFamily="34" charset="-122"/>
-                <a:cs typeface="Meiryo" pitchFamily="34" charset="-120"/>
-              </a:rPr>
-              <a:t>「コラム」＝読みもの／「お知らせ」＝告知。</a:t>
-            </a:r>
-            <a:endParaRPr lang="en-US" sz="1400" dirty="0"/>
+              <a:rPr lang="en-US" sz="1300" b="1" dirty="0">
+                <a:solidFill>
+                  <a:srgbClr val="B85042"/>
+                </a:solidFill>
+                <a:latin typeface="Meiryo" pitchFamily="34" charset="0"/>
+                <a:ea typeface="Meiryo" pitchFamily="34" charset="-122"/>
+                <a:cs typeface="Meiryo" pitchFamily="34" charset="-120"/>
+              </a:rPr>
+              <a:t>カテゴリーのチェックを忘れると、</a:t>
+            </a:r>
+            <a:endParaRPr lang="en-US" sz="1300" dirty="0"/>
           </a:p>
           <a:p>
             <a:pPr indent="0" marL="0">
@@ -13109,381 +14334,17 @@
               <a:buNone/>
             </a:pPr>
             <a:r>
-              <a:rPr lang="en-US" sz="1400" dirty="0">
-                <a:solidFill>
-                  <a:srgbClr val="5E7681"/>
-                </a:solidFill>
-                <a:latin typeface="Meiryo" pitchFamily="34" charset="0"/>
-                <a:ea typeface="Meiryo" pitchFamily="34" charset="-122"/>
-                <a:cs typeface="Meiryo" pitchFamily="34" charset="-120"/>
-              </a:rPr>
-              <a:t>未選択だと一覧に出ません。</a:t>
-            </a:r>
-            <a:endParaRPr lang="en-US" sz="1400" dirty="0"/>
-          </a:p>
-        </p:txBody>
-      </p:sp>
-      <p:sp>
-        <p:nvSpPr>
-          <p:cNvPr id="10" name="Shape 8"/>
-          <p:cNvSpPr/>
-          <p:nvPr/>
-        </p:nvSpPr>
-        <p:spPr>
-          <a:xfrm>
-            <a:off x="640080" y="3337560"/>
-            <a:ext cx="10881360" cy="1371600"/>
-          </a:xfrm>
-          <a:prstGeom prst="roundRect">
-            <a:avLst>
-              <a:gd name="adj" fmla="val 8000"/>
-            </a:avLst>
-          </a:prstGeom>
-          <a:solidFill>
-            <a:srgbClr val="F6F7F8"/>
-          </a:solidFill>
-          <a:ln/>
-        </p:spPr>
-      </p:sp>
-      <p:sp>
-        <p:nvSpPr>
-          <p:cNvPr id="11" name="Shape 9"/>
-          <p:cNvSpPr/>
-          <p:nvPr/>
-        </p:nvSpPr>
-        <p:spPr>
-          <a:xfrm>
-            <a:off x="914400" y="3749040"/>
-            <a:ext cx="502920" cy="502920"/>
-          </a:xfrm>
-          <a:prstGeom prst="ellipse">
-            <a:avLst/>
-          </a:prstGeom>
-          <a:solidFill>
-            <a:srgbClr val="2E7D32"/>
-          </a:solidFill>
-          <a:ln/>
-        </p:spPr>
-      </p:sp>
-      <p:sp>
-        <p:nvSpPr>
-          <p:cNvPr id="12" name="Text 10"/>
-          <p:cNvSpPr/>
-          <p:nvPr/>
-        </p:nvSpPr>
-        <p:spPr>
-          <a:xfrm>
-            <a:off x="914400" y="3822192"/>
-            <a:ext cx="502920" cy="365760"/>
-          </a:xfrm>
-          <a:prstGeom prst="rect">
-            <a:avLst/>
-          </a:prstGeom>
-          <a:noFill/>
-          <a:ln/>
-        </p:spPr>
-        <p:txBody>
-          <a:bodyPr wrap="square" lIns="0" tIns="0" rIns="0" bIns="0" rtlCol="0" anchor="ctr"/>
-          <a:lstStyle/>
-          <a:p>
-            <a:pPr algn="ctr" indent="0" marL="0">
-              <a:buNone/>
-            </a:pPr>
-            <a:r>
-              <a:rPr lang="en-US" sz="1700" b="1" dirty="0">
-                <a:solidFill>
-                  <a:srgbClr val="FFFFFF"/>
-                </a:solidFill>
-                <a:latin typeface="Meiryo" pitchFamily="34" charset="0"/>
-                <a:ea typeface="Meiryo" pitchFamily="34" charset="-122"/>
-                <a:cs typeface="Meiryo" pitchFamily="34" charset="-120"/>
-              </a:rPr>
-              <a:t>2</a:t>
-            </a:r>
-            <a:endParaRPr lang="en-US" sz="1700" dirty="0"/>
-          </a:p>
-        </p:txBody>
-      </p:sp>
-      <p:sp>
-        <p:nvSpPr>
-          <p:cNvPr id="13" name="Text 11"/>
-          <p:cNvSpPr/>
-          <p:nvPr/>
-        </p:nvSpPr>
-        <p:spPr>
-          <a:xfrm>
-            <a:off x="1645920" y="3520440"/>
-            <a:ext cx="9509760" cy="365760"/>
-          </a:xfrm>
-          <a:prstGeom prst="rect">
-            <a:avLst/>
-          </a:prstGeom>
-          <a:noFill/>
-          <a:ln/>
-        </p:spPr>
-        <p:txBody>
-          <a:bodyPr wrap="square" lIns="0" tIns="0" rIns="0" bIns="0" rtlCol="0" anchor="ctr"/>
-          <a:lstStyle/>
-          <a:p>
-            <a:pPr indent="0" marL="0">
-              <a:buNone/>
-            </a:pPr>
-            <a:r>
-              <a:rPr lang="en-US" sz="1800" b="1" dirty="0">
-                <a:solidFill>
-                  <a:srgbClr val="264653"/>
-                </a:solidFill>
-                <a:latin typeface="Meiryo" pitchFamily="34" charset="0"/>
-                <a:ea typeface="Meiryo" pitchFamily="34" charset="-122"/>
-                <a:cs typeface="Meiryo" pitchFamily="34" charset="-120"/>
-              </a:rPr>
-              <a:t>「コードを編集」と出ていたら</a:t>
-            </a:r>
-            <a:endParaRPr lang="en-US" sz="1800" dirty="0"/>
-          </a:p>
-        </p:txBody>
-      </p:sp>
-      <p:sp>
-        <p:nvSpPr>
-          <p:cNvPr id="14" name="Text 12"/>
-          <p:cNvSpPr/>
-          <p:nvPr/>
-        </p:nvSpPr>
-        <p:spPr>
-          <a:xfrm>
-            <a:off x="1645920" y="3959352"/>
-            <a:ext cx="9509760" cy="640080"/>
-          </a:xfrm>
-          <a:prstGeom prst="rect">
-            <a:avLst/>
-          </a:prstGeom>
-          <a:noFill/>
-          <a:ln/>
-        </p:spPr>
-        <p:txBody>
-          <a:bodyPr wrap="square" lIns="0" tIns="0" rIns="0" bIns="0" rtlCol="0" anchor="ctr"/>
-          <a:lstStyle/>
-          <a:p>
-            <a:pPr indent="0" marL="0">
-              <a:lnSpc>
-                <a:spcPts val="2000"/>
-              </a:lnSpc>
-              <a:buNone/>
-            </a:pPr>
-            <a:r>
-              <a:rPr lang="en-US" sz="1400" dirty="0">
-                <a:solidFill>
-                  <a:srgbClr val="5E7681"/>
-                </a:solidFill>
-                <a:latin typeface="Meiryo" pitchFamily="34" charset="0"/>
-                <a:ea typeface="Meiryo" pitchFamily="34" charset="-122"/>
-                <a:cs typeface="Meiryo" pitchFamily="34" charset="-120"/>
-              </a:rPr>
-              <a:t>右上の「コードエディターを終了」を押してから書く。</a:t>
-            </a:r>
-            <a:endParaRPr lang="en-US" sz="1400" dirty="0"/>
-          </a:p>
-          <a:p>
-            <a:pPr indent="0" marL="0">
-              <a:lnSpc>
-                <a:spcPts val="2000"/>
-              </a:lnSpc>
-              <a:buNone/>
-            </a:pPr>
-            <a:r>
-              <a:rPr lang="en-US" sz="1400" dirty="0">
-                <a:solidFill>
-                  <a:srgbClr val="5E7681"/>
-                </a:solidFill>
-                <a:latin typeface="Meiryo" pitchFamily="34" charset="0"/>
-                <a:ea typeface="Meiryo" pitchFamily="34" charset="-122"/>
-                <a:cs typeface="Meiryo" pitchFamily="34" charset="-120"/>
-              </a:rPr>
-              <a:t>そのまま書くと表示が崩れます。</a:t>
-            </a:r>
-            <a:endParaRPr lang="en-US" sz="1400" dirty="0"/>
-          </a:p>
-        </p:txBody>
-      </p:sp>
-      <p:sp>
-        <p:nvSpPr>
-          <p:cNvPr id="15" name="Shape 13"/>
-          <p:cNvSpPr/>
-          <p:nvPr/>
-        </p:nvSpPr>
-        <p:spPr>
-          <a:xfrm>
-            <a:off x="640080" y="4892040"/>
-            <a:ext cx="10881360" cy="1371600"/>
-          </a:xfrm>
-          <a:prstGeom prst="roundRect">
-            <a:avLst>
-              <a:gd name="adj" fmla="val 8000"/>
-            </a:avLst>
-          </a:prstGeom>
-          <a:solidFill>
-            <a:srgbClr val="F6F7F8"/>
-          </a:solidFill>
-          <a:ln/>
-        </p:spPr>
-      </p:sp>
-      <p:sp>
-        <p:nvSpPr>
-          <p:cNvPr id="16" name="Shape 14"/>
-          <p:cNvSpPr/>
-          <p:nvPr/>
-        </p:nvSpPr>
-        <p:spPr>
-          <a:xfrm>
-            <a:off x="914400" y="5303520"/>
-            <a:ext cx="502920" cy="502920"/>
-          </a:xfrm>
-          <a:prstGeom prst="ellipse">
-            <a:avLst/>
-          </a:prstGeom>
-          <a:solidFill>
-            <a:srgbClr val="2E7D32"/>
-          </a:solidFill>
-          <a:ln/>
-        </p:spPr>
-      </p:sp>
-      <p:sp>
-        <p:nvSpPr>
-          <p:cNvPr id="17" name="Text 15"/>
-          <p:cNvSpPr/>
-          <p:nvPr/>
-        </p:nvSpPr>
-        <p:spPr>
-          <a:xfrm>
-            <a:off x="914400" y="5376672"/>
-            <a:ext cx="502920" cy="365760"/>
-          </a:xfrm>
-          <a:prstGeom prst="rect">
-            <a:avLst/>
-          </a:prstGeom>
-          <a:noFill/>
-          <a:ln/>
-        </p:spPr>
-        <p:txBody>
-          <a:bodyPr wrap="square" lIns="0" tIns="0" rIns="0" bIns="0" rtlCol="0" anchor="ctr"/>
-          <a:lstStyle/>
-          <a:p>
-            <a:pPr algn="ctr" indent="0" marL="0">
-              <a:buNone/>
-            </a:pPr>
-            <a:r>
-              <a:rPr lang="en-US" sz="1700" b="1" dirty="0">
-                <a:solidFill>
-                  <a:srgbClr val="FFFFFF"/>
-                </a:solidFill>
-                <a:latin typeface="Meiryo" pitchFamily="34" charset="0"/>
-                <a:ea typeface="Meiryo" pitchFamily="34" charset="-122"/>
-                <a:cs typeface="Meiryo" pitchFamily="34" charset="-120"/>
-              </a:rPr>
-              <a:t>3</a:t>
-            </a:r>
-            <a:endParaRPr lang="en-US" sz="1700" dirty="0"/>
-          </a:p>
-        </p:txBody>
-      </p:sp>
-      <p:sp>
-        <p:nvSpPr>
-          <p:cNvPr id="18" name="Text 16"/>
-          <p:cNvSpPr/>
-          <p:nvPr/>
-        </p:nvSpPr>
-        <p:spPr>
-          <a:xfrm>
-            <a:off x="1645920" y="5074920"/>
-            <a:ext cx="9509760" cy="365760"/>
-          </a:xfrm>
-          <a:prstGeom prst="rect">
-            <a:avLst/>
-          </a:prstGeom>
-          <a:noFill/>
-          <a:ln/>
-        </p:spPr>
-        <p:txBody>
-          <a:bodyPr wrap="square" lIns="0" tIns="0" rIns="0" bIns="0" rtlCol="0" anchor="ctr"/>
-          <a:lstStyle/>
-          <a:p>
-            <a:pPr indent="0" marL="0">
-              <a:buNone/>
-            </a:pPr>
-            <a:r>
-              <a:rPr lang="en-US" sz="1800" b="1" dirty="0">
-                <a:solidFill>
-                  <a:srgbClr val="264653"/>
-                </a:solidFill>
-                <a:latin typeface="Meiryo" pitchFamily="34" charset="0"/>
-                <a:ea typeface="Meiryo" pitchFamily="34" charset="-122"/>
-                <a:cs typeface="Meiryo" pitchFamily="34" charset="-120"/>
-              </a:rPr>
-              <a:t>大事なお知らせを一番上に</a:t>
-            </a:r>
-            <a:endParaRPr lang="en-US" sz="1800" dirty="0"/>
-          </a:p>
-        </p:txBody>
-      </p:sp>
-      <p:sp>
-        <p:nvSpPr>
-          <p:cNvPr id="19" name="Text 17"/>
-          <p:cNvSpPr/>
-          <p:nvPr/>
-        </p:nvSpPr>
-        <p:spPr>
-          <a:xfrm>
-            <a:off x="1645920" y="5513832"/>
-            <a:ext cx="9509760" cy="640080"/>
-          </a:xfrm>
-          <a:prstGeom prst="rect">
-            <a:avLst/>
-          </a:prstGeom>
-          <a:noFill/>
-          <a:ln/>
-        </p:spPr>
-        <p:txBody>
-          <a:bodyPr wrap="square" lIns="0" tIns="0" rIns="0" bIns="0" rtlCol="0" anchor="ctr"/>
-          <a:lstStyle/>
-          <a:p>
-            <a:pPr indent="0" marL="0">
-              <a:lnSpc>
-                <a:spcPts val="2000"/>
-              </a:lnSpc>
-              <a:buNone/>
-            </a:pPr>
-            <a:r>
-              <a:rPr lang="en-US" sz="1400" dirty="0">
-                <a:solidFill>
-                  <a:srgbClr val="5E7681"/>
-                </a:solidFill>
-                <a:latin typeface="Meiryo" pitchFamily="34" charset="0"/>
-                <a:ea typeface="Meiryo" pitchFamily="34" charset="-122"/>
-                <a:cs typeface="Meiryo" pitchFamily="34" charset="-120"/>
-              </a:rPr>
-              <a:t>右側「ステータスと公開状態」→「先頭に固定表示」に</a:t>
-            </a:r>
-            <a:endParaRPr lang="en-US" sz="1400" dirty="0"/>
-          </a:p>
-          <a:p>
-            <a:pPr indent="0" marL="0">
-              <a:lnSpc>
-                <a:spcPts val="2000"/>
-              </a:lnSpc>
-              <a:buNone/>
-            </a:pPr>
-            <a:r>
-              <a:rPr lang="en-US" sz="1400" dirty="0">
-                <a:solidFill>
-                  <a:srgbClr val="5E7681"/>
-                </a:solidFill>
-                <a:latin typeface="Meiryo" pitchFamily="34" charset="0"/>
-                <a:ea typeface="Meiryo" pitchFamily="34" charset="-122"/>
-                <a:cs typeface="Meiryo" pitchFamily="34" charset="-120"/>
-              </a:rPr>
-              <a:t>チェック。TOPと一覧の先頭に出て「重要」が付きます。</a:t>
-            </a:r>
-            <a:endParaRPr lang="en-US" sz="1400" dirty="0"/>
+              <a:rPr lang="en-US" sz="1300" b="1" dirty="0">
+                <a:solidFill>
+                  <a:srgbClr val="B85042"/>
+                </a:solidFill>
+                <a:latin typeface="Meiryo" pitchFamily="34" charset="0"/>
+                <a:ea typeface="Meiryo" pitchFamily="34" charset="-122"/>
+                <a:cs typeface="Meiryo" pitchFamily="34" charset="-120"/>
+              </a:rPr>
+              <a:t>一覧のどこにも出てきません。</a:t>
+            </a:r>
+            <a:endParaRPr lang="en-US" sz="1300" dirty="0"/>
           </a:p>
         </p:txBody>
       </p:sp>
@@ -13552,7 +14413,7 @@
                 <a:ea typeface="Meiryo" pitchFamily="34" charset="-122"/>
                 <a:cs typeface="Meiryo" pitchFamily="34" charset="-120"/>
               </a:rPr>
-              <a:t>【道A】コメントを承認する・返信する</a:t>
+              <a:t>【道A】記事を書くときの注意</a:t>
             </a:r>
             <a:endParaRPr lang="en-US" sz="3200" dirty="0"/>
           </a:p>
@@ -13591,7 +14452,7 @@
                 <a:ea typeface="Meiryo" pitchFamily="34" charset="-122"/>
                 <a:cs typeface="Meiryo" pitchFamily="34" charset="-120"/>
               </a:rPr>
-              <a:t>コメント</a:t>
+              <a:t>つまずきやすい3点</a:t>
             </a:r>
             <a:endParaRPr lang="en-US" sz="1500" dirty="0"/>
           </a:p>
@@ -13636,189 +14497,136 @@
           </a:p>
         </p:txBody>
       </p:sp>
-      <p:pic>
-        <p:nvPicPr>
-          <p:cNvPr id="5" name="Image 0" descr="/sessions/compassionate-sweet-heisenberg/mnt/dev-aspath-life-main/_wp移行素材/★引継ぎ資料/画像/03_コメント.jpg">    </p:cNvPr>
-          <p:cNvPicPr>
-            <a:picLocks noChangeAspect="1"/>
-          </p:cNvPicPr>
-          <p:nvPr/>
-        </p:nvPicPr>
-        <p:blipFill>
-          <a:blip r:embed="rId1"/>
-          <a:stretch>
-            <a:fillRect/>
-          </a:stretch>
-        </p:blipFill>
-        <p:spPr>
-          <a:xfrm>
-            <a:off x="640080" y="1691640"/>
-            <a:ext cx="6766560" cy="3296972"/>
-          </a:xfrm>
-          <a:prstGeom prst="rect">
-            <a:avLst/>
-          </a:prstGeom>
-        </p:spPr>
-      </p:pic>
-      <p:sp>
-        <p:nvSpPr>
-          <p:cNvPr id="6" name="Text 3"/>
-          <p:cNvSpPr/>
-          <p:nvPr/>
-        </p:nvSpPr>
-        <p:spPr>
-          <a:xfrm>
-            <a:off x="7772400" y="1783080"/>
-            <a:ext cx="3749040" cy="2011680"/>
-          </a:xfrm>
-          <a:prstGeom prst="rect">
-            <a:avLst/>
-          </a:prstGeom>
-          <a:noFill/>
-          <a:ln/>
-        </p:spPr>
-        <p:txBody>
-          <a:bodyPr wrap="square" lIns="0" tIns="0" rIns="0" bIns="0" rtlCol="0" anchor="ctr"/>
-          <a:lstStyle/>
-          <a:p>
-            <a:pPr marL="342900" indent="-342900">
-              <a:spcAft>
-                <a:spcPts val="1000"/>
-              </a:spcAft>
-              <a:buSzPct val="100000"/>
-              <a:buChar char="•"/>
-            </a:pPr>
-            <a:r>
-              <a:rPr lang="en-US" sz="1500" dirty="0">
-                <a:solidFill>
-                  <a:srgbClr val="1E2D34"/>
-                </a:solidFill>
-                <a:latin typeface="Meiryo" pitchFamily="34" charset="0"/>
-                <a:ea typeface="Meiryo" pitchFamily="34" charset="-122"/>
-                <a:cs typeface="Meiryo" pitchFamily="34" charset="-120"/>
-              </a:rPr>
-              <a:t>「承認待ち」の数字をクリック</a:t>
-            </a:r>
-            <a:endParaRPr lang="en-US" sz="1500" dirty="0"/>
-          </a:p>
-          <a:p>
-            <a:pPr marL="342900" indent="-342900">
-              <a:spcAft>
-                <a:spcPts val="1000"/>
-              </a:spcAft>
-              <a:buSzPct val="100000"/>
-              <a:buChar char="•"/>
-            </a:pPr>
-            <a:r>
-              <a:rPr lang="en-US" sz="1500" dirty="0">
-                <a:solidFill>
-                  <a:srgbClr val="1E2D34"/>
-                </a:solidFill>
-                <a:latin typeface="Meiryo" pitchFamily="34" charset="0"/>
-                <a:ea typeface="Meiryo" pitchFamily="34" charset="-122"/>
-                <a:cs typeface="Meiryo" pitchFamily="34" charset="-120"/>
-              </a:rPr>
-              <a:t>内容を読む</a:t>
-            </a:r>
-            <a:endParaRPr lang="en-US" sz="1500" dirty="0"/>
-          </a:p>
-          <a:p>
-            <a:pPr marL="342900" indent="-342900">
-              <a:spcAft>
-                <a:spcPts val="1000"/>
-              </a:spcAft>
-              <a:buSzPct val="100000"/>
-              <a:buChar char="•"/>
-            </a:pPr>
-            <a:r>
-              <a:rPr lang="en-US" sz="1500" dirty="0">
-                <a:solidFill>
-                  <a:srgbClr val="1E2D34"/>
-                </a:solidFill>
-                <a:latin typeface="Meiryo" pitchFamily="34" charset="0"/>
-                <a:ea typeface="Meiryo" pitchFamily="34" charset="-122"/>
-                <a:cs typeface="Meiryo" pitchFamily="34" charset="-120"/>
-              </a:rPr>
-              <a:t>問題なければ【承認】</a:t>
-            </a:r>
-            <a:endParaRPr lang="en-US" sz="1500" dirty="0"/>
-          </a:p>
-          <a:p>
-            <a:pPr marL="342900" indent="-342900">
-              <a:spcAft>
-                <a:spcPts val="1000"/>
-              </a:spcAft>
-              <a:buSzPct val="100000"/>
-              <a:buChar char="•"/>
-            </a:pPr>
-            <a:r>
-              <a:rPr lang="en-US" sz="1500" dirty="0">
-                <a:solidFill>
-                  <a:srgbClr val="1E2D34"/>
-                </a:solidFill>
-                <a:latin typeface="Meiryo" pitchFamily="34" charset="0"/>
-                <a:ea typeface="Meiryo" pitchFamily="34" charset="-122"/>
-                <a:cs typeface="Meiryo" pitchFamily="34" charset="-120"/>
-              </a:rPr>
-              <a:t>宣伝目的なら【スパム】</a:t>
-            </a:r>
-            <a:endParaRPr lang="en-US" sz="1500" dirty="0"/>
-          </a:p>
-          <a:p>
-            <a:pPr marL="342900" indent="-342900">
-              <a:spcAft>
-                <a:spcPts val="1000"/>
-              </a:spcAft>
-              <a:buSzPct val="100000"/>
-              <a:buChar char="•"/>
-            </a:pPr>
-            <a:r>
-              <a:rPr lang="en-US" sz="1500" dirty="0">
-                <a:solidFill>
-                  <a:srgbClr val="1E2D34"/>
-                </a:solidFill>
-                <a:latin typeface="Meiryo" pitchFamily="34" charset="0"/>
-                <a:ea typeface="Meiryo" pitchFamily="34" charset="-122"/>
-                <a:cs typeface="Meiryo" pitchFamily="34" charset="-120"/>
-              </a:rPr>
-              <a:t>返信は【返信】から</a:t>
-            </a:r>
-            <a:endParaRPr lang="en-US" sz="1500" dirty="0"/>
-          </a:p>
-        </p:txBody>
-      </p:sp>
-      <p:sp>
-        <p:nvSpPr>
-          <p:cNvPr id="7" name="Shape 4"/>
-          <p:cNvSpPr/>
-          <p:nvPr/>
-        </p:nvSpPr>
-        <p:spPr>
-          <a:xfrm>
-            <a:off x="7726680" y="3931920"/>
-            <a:ext cx="3840480" cy="1234440"/>
+      <p:sp>
+        <p:nvSpPr>
+          <p:cNvPr id="5" name="Shape 3"/>
+          <p:cNvSpPr/>
+          <p:nvPr/>
+        </p:nvSpPr>
+        <p:spPr>
+          <a:xfrm>
+            <a:off x="640080" y="1783080"/>
+            <a:ext cx="10881360" cy="1371600"/>
           </a:xfrm>
           <a:prstGeom prst="roundRect">
             <a:avLst>
-              <a:gd name="adj" fmla="val 7407"/>
+              <a:gd name="adj" fmla="val 8000"/>
             </a:avLst>
           </a:prstGeom>
           <a:solidFill>
-            <a:srgbClr val="EDF6EE"/>
+            <a:srgbClr val="F6F7F8"/>
           </a:solidFill>
           <a:ln/>
         </p:spPr>
       </p:sp>
       <p:sp>
         <p:nvSpPr>
-          <p:cNvPr id="8" name="Text 5"/>
-          <p:cNvSpPr/>
-          <p:nvPr/>
-        </p:nvSpPr>
-        <p:spPr>
-          <a:xfrm>
-            <a:off x="7955280" y="4114800"/>
-            <a:ext cx="3474720" cy="868680"/>
+          <p:cNvPr id="6" name="Shape 4"/>
+          <p:cNvSpPr/>
+          <p:nvPr/>
+        </p:nvSpPr>
+        <p:spPr>
+          <a:xfrm>
+            <a:off x="914400" y="2194560"/>
+            <a:ext cx="502920" cy="502920"/>
+          </a:xfrm>
+          <a:prstGeom prst="ellipse">
+            <a:avLst/>
+          </a:prstGeom>
+          <a:solidFill>
+            <a:srgbClr val="2E7D32"/>
+          </a:solidFill>
+          <a:ln/>
+        </p:spPr>
+      </p:sp>
+      <p:sp>
+        <p:nvSpPr>
+          <p:cNvPr id="7" name="Text 5"/>
+          <p:cNvSpPr/>
+          <p:nvPr/>
+        </p:nvSpPr>
+        <p:spPr>
+          <a:xfrm>
+            <a:off x="914400" y="2267712"/>
+            <a:ext cx="502920" cy="365760"/>
+          </a:xfrm>
+          <a:prstGeom prst="rect">
+            <a:avLst/>
+          </a:prstGeom>
+          <a:noFill/>
+          <a:ln/>
+        </p:spPr>
+        <p:txBody>
+          <a:bodyPr wrap="square" lIns="0" tIns="0" rIns="0" bIns="0" rtlCol="0" anchor="ctr"/>
+          <a:lstStyle/>
+          <a:p>
+            <a:pPr algn="ctr" indent="0" marL="0">
+              <a:buNone/>
+            </a:pPr>
+            <a:r>
+              <a:rPr lang="en-US" sz="1700" b="1" dirty="0">
+                <a:solidFill>
+                  <a:srgbClr val="FFFFFF"/>
+                </a:solidFill>
+                <a:latin typeface="Meiryo" pitchFamily="34" charset="0"/>
+                <a:ea typeface="Meiryo" pitchFamily="34" charset="-122"/>
+                <a:cs typeface="Meiryo" pitchFamily="34" charset="-120"/>
+              </a:rPr>
+              <a:t>1</a:t>
+            </a:r>
+            <a:endParaRPr lang="en-US" sz="1700" dirty="0"/>
+          </a:p>
+        </p:txBody>
+      </p:sp>
+      <p:sp>
+        <p:nvSpPr>
+          <p:cNvPr id="8" name="Text 6"/>
+          <p:cNvSpPr/>
+          <p:nvPr/>
+        </p:nvSpPr>
+        <p:spPr>
+          <a:xfrm>
+            <a:off x="1645920" y="1965960"/>
+            <a:ext cx="9509760" cy="365760"/>
+          </a:xfrm>
+          <a:prstGeom prst="rect">
+            <a:avLst/>
+          </a:prstGeom>
+          <a:noFill/>
+          <a:ln/>
+        </p:spPr>
+        <p:txBody>
+          <a:bodyPr wrap="square" lIns="0" tIns="0" rIns="0" bIns="0" rtlCol="0" anchor="ctr"/>
+          <a:lstStyle/>
+          <a:p>
+            <a:pPr indent="0" marL="0">
+              <a:buNone/>
+            </a:pPr>
+            <a:r>
+              <a:rPr lang="en-US" sz="1800" b="1" dirty="0">
+                <a:solidFill>
+                  <a:srgbClr val="264653"/>
+                </a:solidFill>
+                <a:latin typeface="Meiryo" pitchFamily="34" charset="0"/>
+                <a:ea typeface="Meiryo" pitchFamily="34" charset="-122"/>
+                <a:cs typeface="Meiryo" pitchFamily="34" charset="-120"/>
+              </a:rPr>
+              <a:t>カテゴリーは必ず選ぶ</a:t>
+            </a:r>
+            <a:endParaRPr lang="en-US" sz="1800" dirty="0"/>
+          </a:p>
+        </p:txBody>
+      </p:sp>
+      <p:sp>
+        <p:nvSpPr>
+          <p:cNvPr id="9" name="Text 7"/>
+          <p:cNvSpPr/>
+          <p:nvPr/>
+        </p:nvSpPr>
+        <p:spPr>
+          <a:xfrm>
+            <a:off x="1645920" y="2404872"/>
+            <a:ext cx="9509760" cy="640080"/>
           </a:xfrm>
           <a:prstGeom prst="rect">
             <a:avLst/>
@@ -13837,15 +14645,15 @@
               <a:buNone/>
             </a:pPr>
             <a:r>
-              <a:rPr lang="en-US" sz="1400" b="1" dirty="0">
-                <a:solidFill>
-                  <a:srgbClr val="2E7D32"/>
-                </a:solidFill>
-                <a:latin typeface="Meiryo" pitchFamily="34" charset="0"/>
-                <a:ea typeface="Meiryo" pitchFamily="34" charset="-122"/>
-                <a:cs typeface="Meiryo" pitchFamily="34" charset="-120"/>
-              </a:rPr>
-              <a:t>山口様の返信は承認なしで</a:t>
+              <a:rPr lang="en-US" sz="1400" dirty="0">
+                <a:solidFill>
+                  <a:srgbClr val="5E7681"/>
+                </a:solidFill>
+                <a:latin typeface="Meiryo" pitchFamily="34" charset="0"/>
+                <a:ea typeface="Meiryo" pitchFamily="34" charset="-122"/>
+                <a:cs typeface="Meiryo" pitchFamily="34" charset="-120"/>
+              </a:rPr>
+              <a:t>「コラム」＝読みもの／「お知らせ」＝告知。</a:t>
             </a:r>
             <a:endParaRPr lang="en-US" sz="1400" dirty="0"/>
           </a:p>
@@ -13857,15 +14665,15 @@
               <a:buNone/>
             </a:pPr>
             <a:r>
-              <a:rPr lang="en-US" sz="1400" b="1" dirty="0">
-                <a:solidFill>
-                  <a:srgbClr val="2E7D32"/>
-                </a:solidFill>
-                <a:latin typeface="Meiryo" pitchFamily="34" charset="0"/>
-                <a:ea typeface="Meiryo" pitchFamily="34" charset="-122"/>
-                <a:cs typeface="Meiryo" pitchFamily="34" charset="-120"/>
-              </a:rPr>
-              <a:t>すぐ公開されます。</a:t>
+              <a:rPr lang="en-US" sz="1400" dirty="0">
+                <a:solidFill>
+                  <a:srgbClr val="5E7681"/>
+                </a:solidFill>
+                <a:latin typeface="Meiryo" pitchFamily="34" charset="0"/>
+                <a:ea typeface="Meiryo" pitchFamily="34" charset="-122"/>
+                <a:cs typeface="Meiryo" pitchFamily="34" charset="-120"/>
+              </a:rPr>
+              <a:t>未選択だと一覧に出ません。</a:t>
             </a:r>
             <a:endParaRPr lang="en-US" sz="1400" dirty="0"/>
           </a:p>
@@ -13873,36 +14681,134 @@
       </p:sp>
       <p:sp>
         <p:nvSpPr>
-          <p:cNvPr id="9" name="Shape 6"/>
-          <p:cNvSpPr/>
-          <p:nvPr/>
-        </p:nvSpPr>
-        <p:spPr>
-          <a:xfrm>
-            <a:off x="7726680" y="5257800"/>
-            <a:ext cx="3840480" cy="914400"/>
+          <p:cNvPr id="10" name="Shape 8"/>
+          <p:cNvSpPr/>
+          <p:nvPr/>
+        </p:nvSpPr>
+        <p:spPr>
+          <a:xfrm>
+            <a:off x="640080" y="3337560"/>
+            <a:ext cx="10881360" cy="1371600"/>
           </a:xfrm>
           <a:prstGeom prst="roundRect">
             <a:avLst>
-              <a:gd name="adj" fmla="val 10000"/>
+              <a:gd name="adj" fmla="val 8000"/>
             </a:avLst>
           </a:prstGeom>
           <a:solidFill>
-            <a:srgbClr val="FFF4EA"/>
+            <a:srgbClr val="F6F7F8"/>
           </a:solidFill>
           <a:ln/>
         </p:spPr>
       </p:sp>
       <p:sp>
         <p:nvSpPr>
-          <p:cNvPr id="10" name="Text 7"/>
-          <p:cNvSpPr/>
-          <p:nvPr/>
-        </p:nvSpPr>
-        <p:spPr>
-          <a:xfrm>
-            <a:off x="7955280" y="5394960"/>
-            <a:ext cx="3474720" cy="731520"/>
+          <p:cNvPr id="11" name="Shape 9"/>
+          <p:cNvSpPr/>
+          <p:nvPr/>
+        </p:nvSpPr>
+        <p:spPr>
+          <a:xfrm>
+            <a:off x="914400" y="3749040"/>
+            <a:ext cx="502920" cy="502920"/>
+          </a:xfrm>
+          <a:prstGeom prst="ellipse">
+            <a:avLst/>
+          </a:prstGeom>
+          <a:solidFill>
+            <a:srgbClr val="2E7D32"/>
+          </a:solidFill>
+          <a:ln/>
+        </p:spPr>
+      </p:sp>
+      <p:sp>
+        <p:nvSpPr>
+          <p:cNvPr id="12" name="Text 10"/>
+          <p:cNvSpPr/>
+          <p:nvPr/>
+        </p:nvSpPr>
+        <p:spPr>
+          <a:xfrm>
+            <a:off x="914400" y="3822192"/>
+            <a:ext cx="502920" cy="365760"/>
+          </a:xfrm>
+          <a:prstGeom prst="rect">
+            <a:avLst/>
+          </a:prstGeom>
+          <a:noFill/>
+          <a:ln/>
+        </p:spPr>
+        <p:txBody>
+          <a:bodyPr wrap="square" lIns="0" tIns="0" rIns="0" bIns="0" rtlCol="0" anchor="ctr"/>
+          <a:lstStyle/>
+          <a:p>
+            <a:pPr algn="ctr" indent="0" marL="0">
+              <a:buNone/>
+            </a:pPr>
+            <a:r>
+              <a:rPr lang="en-US" sz="1700" b="1" dirty="0">
+                <a:solidFill>
+                  <a:srgbClr val="FFFFFF"/>
+                </a:solidFill>
+                <a:latin typeface="Meiryo" pitchFamily="34" charset="0"/>
+                <a:ea typeface="Meiryo" pitchFamily="34" charset="-122"/>
+                <a:cs typeface="Meiryo" pitchFamily="34" charset="-120"/>
+              </a:rPr>
+              <a:t>2</a:t>
+            </a:r>
+            <a:endParaRPr lang="en-US" sz="1700" dirty="0"/>
+          </a:p>
+        </p:txBody>
+      </p:sp>
+      <p:sp>
+        <p:nvSpPr>
+          <p:cNvPr id="13" name="Text 11"/>
+          <p:cNvSpPr/>
+          <p:nvPr/>
+        </p:nvSpPr>
+        <p:spPr>
+          <a:xfrm>
+            <a:off x="1645920" y="3520440"/>
+            <a:ext cx="9509760" cy="365760"/>
+          </a:xfrm>
+          <a:prstGeom prst="rect">
+            <a:avLst/>
+          </a:prstGeom>
+          <a:noFill/>
+          <a:ln/>
+        </p:spPr>
+        <p:txBody>
+          <a:bodyPr wrap="square" lIns="0" tIns="0" rIns="0" bIns="0" rtlCol="0" anchor="ctr"/>
+          <a:lstStyle/>
+          <a:p>
+            <a:pPr indent="0" marL="0">
+              <a:buNone/>
+            </a:pPr>
+            <a:r>
+              <a:rPr lang="en-US" sz="1800" b="1" dirty="0">
+                <a:solidFill>
+                  <a:srgbClr val="264653"/>
+                </a:solidFill>
+                <a:latin typeface="Meiryo" pitchFamily="34" charset="0"/>
+                <a:ea typeface="Meiryo" pitchFamily="34" charset="-122"/>
+                <a:cs typeface="Meiryo" pitchFamily="34" charset="-120"/>
+              </a:rPr>
+              <a:t>「コードを編集」と出ていたら</a:t>
+            </a:r>
+            <a:endParaRPr lang="en-US" sz="1800" dirty="0"/>
+          </a:p>
+        </p:txBody>
+      </p:sp>
+      <p:sp>
+        <p:nvSpPr>
+          <p:cNvPr id="14" name="Text 12"/>
+          <p:cNvSpPr/>
+          <p:nvPr/>
+        </p:nvSpPr>
+        <p:spPr>
+          <a:xfrm>
+            <a:off x="1645920" y="3959352"/>
+            <a:ext cx="9509760" cy="640080"/>
           </a:xfrm>
           <a:prstGeom prst="rect">
             <a:avLst/>
@@ -13916,42 +14822,224 @@
           <a:p>
             <a:pPr indent="0" marL="0">
               <a:lnSpc>
-                <a:spcPts val="1900"/>
+                <a:spcPts val="2000"/>
               </a:lnSpc>
               <a:buNone/>
             </a:pPr>
             <a:r>
-              <a:rPr lang="en-US" sz="1300" dirty="0">
-                <a:solidFill>
-                  <a:srgbClr val="B85042"/>
-                </a:solidFill>
-                <a:latin typeface="Meiryo" pitchFamily="34" charset="0"/>
-                <a:ea typeface="Meiryo" pitchFamily="34" charset="-122"/>
-                <a:cs typeface="Meiryo" pitchFamily="34" charset="-120"/>
-              </a:rPr>
-              <a:t>いただいた質問は、</a:t>
-            </a:r>
-            <a:endParaRPr lang="en-US" sz="1300" dirty="0"/>
+              <a:rPr lang="en-US" sz="1400" dirty="0">
+                <a:solidFill>
+                  <a:srgbClr val="5E7681"/>
+                </a:solidFill>
+                <a:latin typeface="Meiryo" pitchFamily="34" charset="0"/>
+                <a:ea typeface="Meiryo" pitchFamily="34" charset="-122"/>
+                <a:cs typeface="Meiryo" pitchFamily="34" charset="-120"/>
+              </a:rPr>
+              <a:t>右上の「コードエディターを終了」を押してから書く。</a:t>
+            </a:r>
+            <a:endParaRPr lang="en-US" sz="1400" dirty="0"/>
           </a:p>
           <a:p>
             <a:pPr indent="0" marL="0">
               <a:lnSpc>
-                <a:spcPts val="1900"/>
+                <a:spcPts val="2000"/>
               </a:lnSpc>
               <a:buNone/>
             </a:pPr>
             <a:r>
-              <a:rPr lang="en-US" sz="1300" dirty="0">
-                <a:solidFill>
-                  <a:srgbClr val="B85042"/>
-                </a:solidFill>
-                <a:latin typeface="Meiryo" pitchFamily="34" charset="0"/>
-                <a:ea typeface="Meiryo" pitchFamily="34" charset="-122"/>
-                <a:cs typeface="Meiryo" pitchFamily="34" charset="-120"/>
-              </a:rPr>
-              <a:t>次の記事のネタになります。</a:t>
-            </a:r>
-            <a:endParaRPr lang="en-US" sz="1300" dirty="0"/>
+              <a:rPr lang="en-US" sz="1400" dirty="0">
+                <a:solidFill>
+                  <a:srgbClr val="5E7681"/>
+                </a:solidFill>
+                <a:latin typeface="Meiryo" pitchFamily="34" charset="0"/>
+                <a:ea typeface="Meiryo" pitchFamily="34" charset="-122"/>
+                <a:cs typeface="Meiryo" pitchFamily="34" charset="-120"/>
+              </a:rPr>
+              <a:t>そのまま書くと表示が崩れます。</a:t>
+            </a:r>
+            <a:endParaRPr lang="en-US" sz="1400" dirty="0"/>
+          </a:p>
+        </p:txBody>
+      </p:sp>
+      <p:sp>
+        <p:nvSpPr>
+          <p:cNvPr id="15" name="Shape 13"/>
+          <p:cNvSpPr/>
+          <p:nvPr/>
+        </p:nvSpPr>
+        <p:spPr>
+          <a:xfrm>
+            <a:off x="640080" y="4892040"/>
+            <a:ext cx="10881360" cy="1371600"/>
+          </a:xfrm>
+          <a:prstGeom prst="roundRect">
+            <a:avLst>
+              <a:gd name="adj" fmla="val 8000"/>
+            </a:avLst>
+          </a:prstGeom>
+          <a:solidFill>
+            <a:srgbClr val="F6F7F8"/>
+          </a:solidFill>
+          <a:ln/>
+        </p:spPr>
+      </p:sp>
+      <p:sp>
+        <p:nvSpPr>
+          <p:cNvPr id="16" name="Shape 14"/>
+          <p:cNvSpPr/>
+          <p:nvPr/>
+        </p:nvSpPr>
+        <p:spPr>
+          <a:xfrm>
+            <a:off x="914400" y="5303520"/>
+            <a:ext cx="502920" cy="502920"/>
+          </a:xfrm>
+          <a:prstGeom prst="ellipse">
+            <a:avLst/>
+          </a:prstGeom>
+          <a:solidFill>
+            <a:srgbClr val="2E7D32"/>
+          </a:solidFill>
+          <a:ln/>
+        </p:spPr>
+      </p:sp>
+      <p:sp>
+        <p:nvSpPr>
+          <p:cNvPr id="17" name="Text 15"/>
+          <p:cNvSpPr/>
+          <p:nvPr/>
+        </p:nvSpPr>
+        <p:spPr>
+          <a:xfrm>
+            <a:off x="914400" y="5376672"/>
+            <a:ext cx="502920" cy="365760"/>
+          </a:xfrm>
+          <a:prstGeom prst="rect">
+            <a:avLst/>
+          </a:prstGeom>
+          <a:noFill/>
+          <a:ln/>
+        </p:spPr>
+        <p:txBody>
+          <a:bodyPr wrap="square" lIns="0" tIns="0" rIns="0" bIns="0" rtlCol="0" anchor="ctr"/>
+          <a:lstStyle/>
+          <a:p>
+            <a:pPr algn="ctr" indent="0" marL="0">
+              <a:buNone/>
+            </a:pPr>
+            <a:r>
+              <a:rPr lang="en-US" sz="1700" b="1" dirty="0">
+                <a:solidFill>
+                  <a:srgbClr val="FFFFFF"/>
+                </a:solidFill>
+                <a:latin typeface="Meiryo" pitchFamily="34" charset="0"/>
+                <a:ea typeface="Meiryo" pitchFamily="34" charset="-122"/>
+                <a:cs typeface="Meiryo" pitchFamily="34" charset="-120"/>
+              </a:rPr>
+              <a:t>3</a:t>
+            </a:r>
+            <a:endParaRPr lang="en-US" sz="1700" dirty="0"/>
+          </a:p>
+        </p:txBody>
+      </p:sp>
+      <p:sp>
+        <p:nvSpPr>
+          <p:cNvPr id="18" name="Text 16"/>
+          <p:cNvSpPr/>
+          <p:nvPr/>
+        </p:nvSpPr>
+        <p:spPr>
+          <a:xfrm>
+            <a:off x="1645920" y="5074920"/>
+            <a:ext cx="9509760" cy="365760"/>
+          </a:xfrm>
+          <a:prstGeom prst="rect">
+            <a:avLst/>
+          </a:prstGeom>
+          <a:noFill/>
+          <a:ln/>
+        </p:spPr>
+        <p:txBody>
+          <a:bodyPr wrap="square" lIns="0" tIns="0" rIns="0" bIns="0" rtlCol="0" anchor="ctr"/>
+          <a:lstStyle/>
+          <a:p>
+            <a:pPr indent="0" marL="0">
+              <a:buNone/>
+            </a:pPr>
+            <a:r>
+              <a:rPr lang="en-US" sz="1800" b="1" dirty="0">
+                <a:solidFill>
+                  <a:srgbClr val="264653"/>
+                </a:solidFill>
+                <a:latin typeface="Meiryo" pitchFamily="34" charset="0"/>
+                <a:ea typeface="Meiryo" pitchFamily="34" charset="-122"/>
+                <a:cs typeface="Meiryo" pitchFamily="34" charset="-120"/>
+              </a:rPr>
+              <a:t>大事なお知らせを一番上に</a:t>
+            </a:r>
+            <a:endParaRPr lang="en-US" sz="1800" dirty="0"/>
+          </a:p>
+        </p:txBody>
+      </p:sp>
+      <p:sp>
+        <p:nvSpPr>
+          <p:cNvPr id="19" name="Text 17"/>
+          <p:cNvSpPr/>
+          <p:nvPr/>
+        </p:nvSpPr>
+        <p:spPr>
+          <a:xfrm>
+            <a:off x="1645920" y="5513832"/>
+            <a:ext cx="9509760" cy="640080"/>
+          </a:xfrm>
+          <a:prstGeom prst="rect">
+            <a:avLst/>
+          </a:prstGeom>
+          <a:noFill/>
+          <a:ln/>
+        </p:spPr>
+        <p:txBody>
+          <a:bodyPr wrap="square" lIns="0" tIns="0" rIns="0" bIns="0" rtlCol="0" anchor="ctr"/>
+          <a:lstStyle/>
+          <a:p>
+            <a:pPr indent="0" marL="0">
+              <a:lnSpc>
+                <a:spcPts val="2000"/>
+              </a:lnSpc>
+              <a:buNone/>
+            </a:pPr>
+            <a:r>
+              <a:rPr lang="en-US" sz="1400" dirty="0">
+                <a:solidFill>
+                  <a:srgbClr val="5E7681"/>
+                </a:solidFill>
+                <a:latin typeface="Meiryo" pitchFamily="34" charset="0"/>
+                <a:ea typeface="Meiryo" pitchFamily="34" charset="-122"/>
+                <a:cs typeface="Meiryo" pitchFamily="34" charset="-120"/>
+              </a:rPr>
+              <a:t>右側「ステータスと公開状態」→「先頭に固定表示」に</a:t>
+            </a:r>
+            <a:endParaRPr lang="en-US" sz="1400" dirty="0"/>
+          </a:p>
+          <a:p>
+            <a:pPr indent="0" marL="0">
+              <a:lnSpc>
+                <a:spcPts val="2000"/>
+              </a:lnSpc>
+              <a:buNone/>
+            </a:pPr>
+            <a:r>
+              <a:rPr lang="en-US" sz="1400" dirty="0">
+                <a:solidFill>
+                  <a:srgbClr val="5E7681"/>
+                </a:solidFill>
+                <a:latin typeface="Meiryo" pitchFamily="34" charset="0"/>
+                <a:ea typeface="Meiryo" pitchFamily="34" charset="-122"/>
+                <a:cs typeface="Meiryo" pitchFamily="34" charset="-120"/>
+              </a:rPr>
+              <a:t>チェック。TOPと一覧の先頭に出て「重要」が付きます。</a:t>
+            </a:r>
+            <a:endParaRPr lang="en-US" sz="1400" dirty="0"/>
           </a:p>
         </p:txBody>
       </p:sp>
@@ -14020,7 +15108,7 @@
                 <a:ea typeface="Meiryo" pitchFamily="34" charset="-122"/>
                 <a:cs typeface="Meiryo" pitchFamily="34" charset="-120"/>
               </a:rPr>
-              <a:t>【道A】初回体験の申込を見る</a:t>
+              <a:t>【道A】コメントを承認する・返信する</a:t>
             </a:r>
             <a:endParaRPr lang="en-US" sz="3200" dirty="0"/>
           </a:p>
@@ -14059,7 +15147,7 @@
                 <a:ea typeface="Meiryo" pitchFamily="34" charset="-122"/>
                 <a:cs typeface="Meiryo" pitchFamily="34" charset="-120"/>
               </a:rPr>
-              <a:t>初回体験の申込</a:t>
+              <a:t>コメント</a:t>
             </a:r>
             <a:endParaRPr lang="en-US" sz="1500" dirty="0"/>
           </a:p>
@@ -14106,7 +15194,7 @@
       </p:sp>
       <p:pic>
         <p:nvPicPr>
-          <p:cNvPr id="5" name="Image 0" descr="/sessions/compassionate-sweet-heisenberg/mnt/dev-aspath-life-main/_wp移行素材/★引継ぎ資料/画像/04_初回体験の申込.jpg">    </p:cNvPr>
+          <p:cNvPr id="5" name="Image 0" descr="/sessions/compassionate-sweet-heisenberg/mnt/dev-aspath-life-main/_wp移行素材/★引継ぎ資料/画像/03_コメント.jpg">    </p:cNvPr>
           <p:cNvPicPr>
             <a:picLocks noChangeAspect="1"/>
           </p:cNvPicPr>
@@ -14136,8 +15224,8 @@
         </p:nvSpPr>
         <p:spPr>
           <a:xfrm>
-            <a:off x="7772400" y="1737360"/>
-            <a:ext cx="3840480" cy="365760"/>
+            <a:off x="7772400" y="1783080"/>
+            <a:ext cx="3749040" cy="2011680"/>
           </a:xfrm>
           <a:prstGeom prst="rect">
             <a:avLst/>
@@ -14149,21 +15237,109 @@
           <a:bodyPr wrap="square" lIns="0" tIns="0" rIns="0" bIns="0" rtlCol="0" anchor="ctr"/>
           <a:lstStyle/>
           <a:p>
-            <a:pPr indent="0" marL="0">
-              <a:buNone/>
-            </a:pPr>
-            <a:r>
-              <a:rPr lang="en-US" sz="1600" b="1" dirty="0">
-                <a:solidFill>
-                  <a:srgbClr val="264653"/>
-                </a:solidFill>
-                <a:latin typeface="Meiryo" pitchFamily="34" charset="0"/>
-                <a:ea typeface="Meiryo" pitchFamily="34" charset="-122"/>
-                <a:cs typeface="Meiryo" pitchFamily="34" charset="-120"/>
-              </a:rPr>
-              <a:t>申込があると同時に2つ起こります</a:t>
-            </a:r>
-            <a:endParaRPr lang="en-US" sz="1600" dirty="0"/>
+            <a:pPr marL="342900" indent="-342900">
+              <a:spcAft>
+                <a:spcPts val="1000"/>
+              </a:spcAft>
+              <a:buSzPct val="100000"/>
+              <a:buChar char="•"/>
+            </a:pPr>
+            <a:r>
+              <a:rPr lang="en-US" sz="1500" dirty="0">
+                <a:solidFill>
+                  <a:srgbClr val="1E2D34"/>
+                </a:solidFill>
+                <a:latin typeface="Meiryo" pitchFamily="34" charset="0"/>
+                <a:ea typeface="Meiryo" pitchFamily="34" charset="-122"/>
+                <a:cs typeface="Meiryo" pitchFamily="34" charset="-120"/>
+              </a:rPr>
+              <a:t>「承認待ち」の数字をクリック</a:t>
+            </a:r>
+            <a:endParaRPr lang="en-US" sz="1500" dirty="0"/>
+          </a:p>
+          <a:p>
+            <a:pPr marL="342900" indent="-342900">
+              <a:spcAft>
+                <a:spcPts val="1000"/>
+              </a:spcAft>
+              <a:buSzPct val="100000"/>
+              <a:buChar char="•"/>
+            </a:pPr>
+            <a:r>
+              <a:rPr lang="en-US" sz="1500" dirty="0">
+                <a:solidFill>
+                  <a:srgbClr val="1E2D34"/>
+                </a:solidFill>
+                <a:latin typeface="Meiryo" pitchFamily="34" charset="0"/>
+                <a:ea typeface="Meiryo" pitchFamily="34" charset="-122"/>
+                <a:cs typeface="Meiryo" pitchFamily="34" charset="-120"/>
+              </a:rPr>
+              <a:t>内容を読む</a:t>
+            </a:r>
+            <a:endParaRPr lang="en-US" sz="1500" dirty="0"/>
+          </a:p>
+          <a:p>
+            <a:pPr marL="342900" indent="-342900">
+              <a:spcAft>
+                <a:spcPts val="1000"/>
+              </a:spcAft>
+              <a:buSzPct val="100000"/>
+              <a:buChar char="•"/>
+            </a:pPr>
+            <a:r>
+              <a:rPr lang="en-US" sz="1500" dirty="0">
+                <a:solidFill>
+                  <a:srgbClr val="1E2D34"/>
+                </a:solidFill>
+                <a:latin typeface="Meiryo" pitchFamily="34" charset="0"/>
+                <a:ea typeface="Meiryo" pitchFamily="34" charset="-122"/>
+                <a:cs typeface="Meiryo" pitchFamily="34" charset="-120"/>
+              </a:rPr>
+              <a:t>問題なければ【承認】</a:t>
+            </a:r>
+            <a:endParaRPr lang="en-US" sz="1500" dirty="0"/>
+          </a:p>
+          <a:p>
+            <a:pPr marL="342900" indent="-342900">
+              <a:spcAft>
+                <a:spcPts val="1000"/>
+              </a:spcAft>
+              <a:buSzPct val="100000"/>
+              <a:buChar char="•"/>
+            </a:pPr>
+            <a:r>
+              <a:rPr lang="en-US" sz="1500" dirty="0">
+                <a:solidFill>
+                  <a:srgbClr val="1E2D34"/>
+                </a:solidFill>
+                <a:latin typeface="Meiryo" pitchFamily="34" charset="0"/>
+                <a:ea typeface="Meiryo" pitchFamily="34" charset="-122"/>
+                <a:cs typeface="Meiryo" pitchFamily="34" charset="-120"/>
+              </a:rPr>
+              <a:t>宣伝目的なら【スパム】</a:t>
+            </a:r>
+            <a:endParaRPr lang="en-US" sz="1500" dirty="0"/>
+          </a:p>
+          <a:p>
+            <a:pPr marL="342900" indent="-342900">
+              <a:spcAft>
+                <a:spcPts val="1000"/>
+              </a:spcAft>
+              <a:buSzPct val="100000"/>
+              <a:buChar char="•"/>
+            </a:pPr>
+            <a:r>
+              <a:rPr lang="en-US" sz="1500" dirty="0">
+                <a:solidFill>
+                  <a:srgbClr val="1E2D34"/>
+                </a:solidFill>
+                <a:latin typeface="Meiryo" pitchFamily="34" charset="0"/>
+                <a:ea typeface="Meiryo" pitchFamily="34" charset="-122"/>
+                <a:cs typeface="Meiryo" pitchFamily="34" charset="-120"/>
+              </a:rPr>
+              <a:t>返信は【返信】から</a:t>
+            </a:r>
+            <a:endParaRPr lang="en-US" sz="1500" dirty="0"/>
           </a:p>
         </p:txBody>
       </p:sp>
@@ -14175,16 +15351,16 @@
         </p:nvSpPr>
         <p:spPr>
           <a:xfrm>
-            <a:off x="7726680" y="2240280"/>
-            <a:ext cx="3840480" cy="868680"/>
+            <a:off x="7726680" y="3931920"/>
+            <a:ext cx="3840480" cy="1234440"/>
           </a:xfrm>
           <a:prstGeom prst="roundRect">
             <a:avLst>
-              <a:gd name="adj" fmla="val 10526"/>
+              <a:gd name="adj" fmla="val 7407"/>
             </a:avLst>
           </a:prstGeom>
           <a:solidFill>
-            <a:srgbClr val="F6F7F8"/>
+            <a:srgbClr val="EDF6EE"/>
           </a:solidFill>
           <a:ln/>
         </p:spPr>
@@ -14197,8 +15373,8 @@
         </p:nvSpPr>
         <p:spPr>
           <a:xfrm>
-            <a:off x="7955280" y="2377440"/>
-            <a:ext cx="3566160" cy="685800"/>
+            <a:off x="7955280" y="4114800"/>
+            <a:ext cx="3474720" cy="868680"/>
           </a:xfrm>
           <a:prstGeom prst="rect">
             <a:avLst/>
@@ -14217,15 +15393,15 @@
               <a:buNone/>
             </a:pPr>
             <a:r>
-              <a:rPr lang="en-US" sz="1400" dirty="0">
-                <a:solidFill>
-                  <a:srgbClr val="1E2D34"/>
-                </a:solidFill>
-                <a:latin typeface="Meiryo" pitchFamily="34" charset="0"/>
-                <a:ea typeface="Meiryo" pitchFamily="34" charset="-122"/>
-                <a:cs typeface="Meiryo" pitchFamily="34" charset="-120"/>
-              </a:rPr>
-              <a:t>① aspathlife@gmail.com に</a:t>
+              <a:rPr lang="en-US" sz="1400" b="1" dirty="0">
+                <a:solidFill>
+                  <a:srgbClr val="2E7D32"/>
+                </a:solidFill>
+                <a:latin typeface="Meiryo" pitchFamily="34" charset="0"/>
+                <a:ea typeface="Meiryo" pitchFamily="34" charset="-122"/>
+                <a:cs typeface="Meiryo" pitchFamily="34" charset="-120"/>
+              </a:rPr>
+              <a:t>山口様の返信は承認なしで</a:t>
             </a:r>
             <a:endParaRPr lang="en-US" sz="1400" dirty="0"/>
           </a:p>
@@ -14237,15 +15413,15 @@
               <a:buNone/>
             </a:pPr>
             <a:r>
-              <a:rPr lang="en-US" sz="1400" dirty="0">
-                <a:solidFill>
-                  <a:srgbClr val="1E2D34"/>
-                </a:solidFill>
-                <a:latin typeface="Meiryo" pitchFamily="34" charset="0"/>
-                <a:ea typeface="Meiryo" pitchFamily="34" charset="-122"/>
-                <a:cs typeface="Meiryo" pitchFamily="34" charset="-120"/>
-              </a:rPr>
-              <a:t>　 通知メールが届く</a:t>
+              <a:rPr lang="en-US" sz="1400" b="1" dirty="0">
+                <a:solidFill>
+                  <a:srgbClr val="2E7D32"/>
+                </a:solidFill>
+                <a:latin typeface="Meiryo" pitchFamily="34" charset="0"/>
+                <a:ea typeface="Meiryo" pitchFamily="34" charset="-122"/>
+                <a:cs typeface="Meiryo" pitchFamily="34" charset="-120"/>
+              </a:rPr>
+              <a:t>すぐ公開されます。</a:t>
             </a:r>
             <a:endParaRPr lang="en-US" sz="1400" dirty="0"/>
           </a:p>
@@ -14259,16 +15435,16 @@
         </p:nvSpPr>
         <p:spPr>
           <a:xfrm>
-            <a:off x="7726680" y="3200400"/>
-            <a:ext cx="3840480" cy="868680"/>
+            <a:off x="7726680" y="5257800"/>
+            <a:ext cx="3840480" cy="914400"/>
           </a:xfrm>
           <a:prstGeom prst="roundRect">
             <a:avLst>
-              <a:gd name="adj" fmla="val 10526"/>
+              <a:gd name="adj" fmla="val 10000"/>
             </a:avLst>
           </a:prstGeom>
           <a:solidFill>
-            <a:srgbClr val="F6F7F8"/>
+            <a:srgbClr val="FFF4EA"/>
           </a:solidFill>
           <a:ln/>
         </p:spPr>
@@ -14281,151 +15457,8 @@
         </p:nvSpPr>
         <p:spPr>
           <a:xfrm>
-            <a:off x="7955280" y="3474720"/>
-            <a:ext cx="3566160" cy="365760"/>
-          </a:xfrm>
-          <a:prstGeom prst="rect">
-            <a:avLst/>
-          </a:prstGeom>
-          <a:noFill/>
-          <a:ln/>
-        </p:spPr>
-        <p:txBody>
-          <a:bodyPr wrap="square" lIns="0" tIns="0" rIns="0" bIns="0" rtlCol="0" anchor="ctr"/>
-          <a:lstStyle/>
-          <a:p>
-            <a:pPr indent="0" marL="0">
-              <a:buNone/>
-            </a:pPr>
-            <a:r>
-              <a:rPr lang="en-US" sz="1400" dirty="0">
-                <a:solidFill>
-                  <a:srgbClr val="1E2D34"/>
-                </a:solidFill>
-                <a:latin typeface="Meiryo" pitchFamily="34" charset="0"/>
-                <a:ea typeface="Meiryo" pitchFamily="34" charset="-122"/>
-                <a:cs typeface="Meiryo" pitchFamily="34" charset="-120"/>
-              </a:rPr>
-              <a:t>② この画面に記録が残る</a:t>
-            </a:r>
-            <a:endParaRPr lang="en-US" sz="1400" dirty="0"/>
-          </a:p>
-        </p:txBody>
-      </p:sp>
-      <p:sp>
-        <p:nvSpPr>
-          <p:cNvPr id="11" name="Shape 8"/>
-          <p:cNvSpPr/>
-          <p:nvPr/>
-        </p:nvSpPr>
-        <p:spPr>
-          <a:xfrm>
-            <a:off x="7726680" y="4206240"/>
-            <a:ext cx="3840480" cy="1188720"/>
-          </a:xfrm>
-          <a:prstGeom prst="roundRect">
-            <a:avLst>
-              <a:gd name="adj" fmla="val 7692"/>
-            </a:avLst>
-          </a:prstGeom>
-          <a:solidFill>
-            <a:srgbClr val="EDF6EE"/>
-          </a:solidFill>
-          <a:ln/>
-        </p:spPr>
-      </p:sp>
-      <p:sp>
-        <p:nvSpPr>
-          <p:cNvPr id="12" name="Text 9"/>
-          <p:cNvSpPr/>
-          <p:nvPr/>
-        </p:nvSpPr>
-        <p:spPr>
-          <a:xfrm>
-            <a:off x="7955280" y="4343400"/>
-            <a:ext cx="3566160" cy="1005840"/>
-          </a:xfrm>
-          <a:prstGeom prst="rect">
-            <a:avLst/>
-          </a:prstGeom>
-          <a:noFill/>
-          <a:ln/>
-        </p:spPr>
-        <p:txBody>
-          <a:bodyPr wrap="square" lIns="0" tIns="0" rIns="0" bIns="0" rtlCol="0" anchor="ctr"/>
-          <a:lstStyle/>
-          <a:p>
-            <a:pPr indent="0" marL="0">
-              <a:lnSpc>
-                <a:spcPts val="2000"/>
-              </a:lnSpc>
-              <a:buNone/>
-            </a:pPr>
-            <a:r>
-              <a:rPr lang="en-US" sz="1400" b="1" dirty="0">
-                <a:solidFill>
-                  <a:srgbClr val="2E7D32"/>
-                </a:solidFill>
-                <a:latin typeface="Meiryo" pitchFamily="34" charset="0"/>
-                <a:ea typeface="Meiryo" pitchFamily="34" charset="-122"/>
-                <a:cs typeface="Meiryo" pitchFamily="34" charset="-120"/>
-              </a:rPr>
-              <a:t>メールが届かなくても</a:t>
-            </a:r>
-            <a:endParaRPr lang="en-US" sz="1400" dirty="0"/>
-          </a:p>
-          <a:p>
-            <a:pPr indent="0" marL="0">
-              <a:lnSpc>
-                <a:spcPts val="2000"/>
-              </a:lnSpc>
-              <a:buNone/>
-            </a:pPr>
-            <a:r>
-              <a:rPr lang="en-US" sz="1400" b="1" dirty="0">
-                <a:solidFill>
-                  <a:srgbClr val="2E7D32"/>
-                </a:solidFill>
-                <a:latin typeface="Meiryo" pitchFamily="34" charset="0"/>
-                <a:ea typeface="Meiryo" pitchFamily="34" charset="-122"/>
-                <a:cs typeface="Meiryo" pitchFamily="34" charset="-120"/>
-              </a:rPr>
-              <a:t>記録は残ります。</a:t>
-            </a:r>
-            <a:endParaRPr lang="en-US" sz="1400" dirty="0"/>
-          </a:p>
-          <a:p>
-            <a:pPr indent="0" marL="0">
-              <a:lnSpc>
-                <a:spcPts val="2000"/>
-              </a:lnSpc>
-              <a:buNone/>
-            </a:pPr>
-            <a:r>
-              <a:rPr lang="en-US" sz="1400" b="1" dirty="0">
-                <a:solidFill>
-                  <a:srgbClr val="2E7D32"/>
-                </a:solidFill>
-                <a:latin typeface="Meiryo" pitchFamily="34" charset="0"/>
-                <a:ea typeface="Meiryo" pitchFamily="34" charset="-122"/>
-                <a:cs typeface="Meiryo" pitchFamily="34" charset="-120"/>
-              </a:rPr>
-              <a:t>見落としても大丈夫です。</a:t>
-            </a:r>
-            <a:endParaRPr lang="en-US" sz="1400" dirty="0"/>
-          </a:p>
-        </p:txBody>
-      </p:sp>
-      <p:sp>
-        <p:nvSpPr>
-          <p:cNvPr id="13" name="Text 10"/>
-          <p:cNvSpPr/>
-          <p:nvPr/>
-        </p:nvSpPr>
-        <p:spPr>
-          <a:xfrm>
-            <a:off x="7772400" y="5532120"/>
-            <a:ext cx="3840480" cy="548640"/>
+            <a:off x="7955280" y="5394960"/>
+            <a:ext cx="3474720" cy="731520"/>
           </a:xfrm>
           <a:prstGeom prst="rect">
             <a:avLst/>
@@ -14446,13 +15479,33 @@
             <a:r>
               <a:rPr lang="en-US" sz="1300" dirty="0">
                 <a:solidFill>
-                  <a:srgbClr val="5E7681"/>
-                </a:solidFill>
-                <a:latin typeface="Meiryo" pitchFamily="34" charset="0"/>
-                <a:ea typeface="Meiryo" pitchFamily="34" charset="-122"/>
-                <a:cs typeface="Meiryo" pitchFamily="34" charset="-120"/>
-              </a:rPr>
-              <a:t>返信は通知メールにそのまま返信すれば届きます。</a:t>
+                  <a:srgbClr val="B85042"/>
+                </a:solidFill>
+                <a:latin typeface="Meiryo" pitchFamily="34" charset="0"/>
+                <a:ea typeface="Meiryo" pitchFamily="34" charset="-122"/>
+                <a:cs typeface="Meiryo" pitchFamily="34" charset="-120"/>
+              </a:rPr>
+              <a:t>いただいた質問は、</a:t>
+            </a:r>
+            <a:endParaRPr lang="en-US" sz="1300" dirty="0"/>
+          </a:p>
+          <a:p>
+            <a:pPr indent="0" marL="0">
+              <a:lnSpc>
+                <a:spcPts val="1900"/>
+              </a:lnSpc>
+              <a:buNone/>
+            </a:pPr>
+            <a:r>
+              <a:rPr lang="en-US" sz="1300" dirty="0">
+                <a:solidFill>
+                  <a:srgbClr val="B85042"/>
+                </a:solidFill>
+                <a:latin typeface="Meiryo" pitchFamily="34" charset="0"/>
+                <a:ea typeface="Meiryo" pitchFamily="34" charset="-122"/>
+                <a:cs typeface="Meiryo" pitchFamily="34" charset="-120"/>
+              </a:rPr>
+              <a:t>次の記事のネタになります。</a:t>
             </a:r>
             <a:endParaRPr lang="en-US" sz="1300" dirty="0"/>
           </a:p>
@@ -14523,7 +15576,7 @@
                 <a:ea typeface="Meiryo" pitchFamily="34" charset="-122"/>
                 <a:cs typeface="Meiryo" pitchFamily="34" charset="-120"/>
               </a:rPr>
-              <a:t>【道B】固定ページを直すときの流れ</a:t>
+              <a:t>【道A】初回体験の申込を見る</a:t>
             </a:r>
             <a:endParaRPr lang="en-US" sz="3200" dirty="0"/>
           </a:p>
@@ -14562,7 +15615,7 @@
                 <a:ea typeface="Meiryo" pitchFamily="34" charset="-122"/>
                 <a:cs typeface="Meiryo" pitchFamily="34" charset="-120"/>
               </a:rPr>
-              <a:t>「ASPATHについて」を例に</a:t>
+              <a:t>初回体験の申込</a:t>
             </a:r>
             <a:endParaRPr lang="en-US" sz="1500" dirty="0"/>
           </a:p>
@@ -14609,7 +15662,7 @@
       </p:sp>
       <p:pic>
         <p:nvPicPr>
-          <p:cNvPr id="5" name="Image 0" descr="/sessions/compassionate-sweet-heisenberg/mnt/dev-aspath-life-main/_wp移行素材/★引継ぎ資料/画像/07_固定ページの流れ.png">    </p:cNvPr>
+          <p:cNvPr id="5" name="Image 0" descr="/sessions/compassionate-sweet-heisenberg/mnt/dev-aspath-life-main/_wp移行素材/★引継ぎ資料/画像/04_初回体験の申込.jpg">    </p:cNvPr>
           <p:cNvPicPr>
             <a:picLocks noChangeAspect="1"/>
           </p:cNvPicPr>
@@ -14623,14 +15676,344 @@
         </p:blipFill>
         <p:spPr>
           <a:xfrm>
-            <a:off x="777240" y="1645920"/>
-            <a:ext cx="10607040" cy="5303520"/>
+            <a:off x="640080" y="1691640"/>
+            <a:ext cx="6766560" cy="3296972"/>
           </a:xfrm>
           <a:prstGeom prst="rect">
             <a:avLst/>
           </a:prstGeom>
         </p:spPr>
       </p:pic>
+      <p:sp>
+        <p:nvSpPr>
+          <p:cNvPr id="6" name="Text 3"/>
+          <p:cNvSpPr/>
+          <p:nvPr/>
+        </p:nvSpPr>
+        <p:spPr>
+          <a:xfrm>
+            <a:off x="7772400" y="1737360"/>
+            <a:ext cx="3840480" cy="365760"/>
+          </a:xfrm>
+          <a:prstGeom prst="rect">
+            <a:avLst/>
+          </a:prstGeom>
+          <a:noFill/>
+          <a:ln/>
+        </p:spPr>
+        <p:txBody>
+          <a:bodyPr wrap="square" lIns="0" tIns="0" rIns="0" bIns="0" rtlCol="0" anchor="ctr"/>
+          <a:lstStyle/>
+          <a:p>
+            <a:pPr indent="0" marL="0">
+              <a:buNone/>
+            </a:pPr>
+            <a:r>
+              <a:rPr lang="en-US" sz="1600" b="1" dirty="0">
+                <a:solidFill>
+                  <a:srgbClr val="264653"/>
+                </a:solidFill>
+                <a:latin typeface="Meiryo" pitchFamily="34" charset="0"/>
+                <a:ea typeface="Meiryo" pitchFamily="34" charset="-122"/>
+                <a:cs typeface="Meiryo" pitchFamily="34" charset="-120"/>
+              </a:rPr>
+              <a:t>申込があると同時に2つ起こります</a:t>
+            </a:r>
+            <a:endParaRPr lang="en-US" sz="1600" dirty="0"/>
+          </a:p>
+        </p:txBody>
+      </p:sp>
+      <p:sp>
+        <p:nvSpPr>
+          <p:cNvPr id="7" name="Shape 4"/>
+          <p:cNvSpPr/>
+          <p:nvPr/>
+        </p:nvSpPr>
+        <p:spPr>
+          <a:xfrm>
+            <a:off x="7726680" y="2240280"/>
+            <a:ext cx="3840480" cy="868680"/>
+          </a:xfrm>
+          <a:prstGeom prst="roundRect">
+            <a:avLst>
+              <a:gd name="adj" fmla="val 10526"/>
+            </a:avLst>
+          </a:prstGeom>
+          <a:solidFill>
+            <a:srgbClr val="F6F7F8"/>
+          </a:solidFill>
+          <a:ln/>
+        </p:spPr>
+      </p:sp>
+      <p:sp>
+        <p:nvSpPr>
+          <p:cNvPr id="8" name="Text 5"/>
+          <p:cNvSpPr/>
+          <p:nvPr/>
+        </p:nvSpPr>
+        <p:spPr>
+          <a:xfrm>
+            <a:off x="7955280" y="2377440"/>
+            <a:ext cx="3566160" cy="685800"/>
+          </a:xfrm>
+          <a:prstGeom prst="rect">
+            <a:avLst/>
+          </a:prstGeom>
+          <a:noFill/>
+          <a:ln/>
+        </p:spPr>
+        <p:txBody>
+          <a:bodyPr wrap="square" lIns="0" tIns="0" rIns="0" bIns="0" rtlCol="0" anchor="ctr"/>
+          <a:lstStyle/>
+          <a:p>
+            <a:pPr indent="0" marL="0">
+              <a:lnSpc>
+                <a:spcPts val="2000"/>
+              </a:lnSpc>
+              <a:buNone/>
+            </a:pPr>
+            <a:r>
+              <a:rPr lang="en-US" sz="1400" dirty="0">
+                <a:solidFill>
+                  <a:srgbClr val="1E2D34"/>
+                </a:solidFill>
+                <a:latin typeface="Meiryo" pitchFamily="34" charset="0"/>
+                <a:ea typeface="Meiryo" pitchFamily="34" charset="-122"/>
+                <a:cs typeface="Meiryo" pitchFamily="34" charset="-120"/>
+              </a:rPr>
+              <a:t>① aspathlife@gmail.com に</a:t>
+            </a:r>
+            <a:endParaRPr lang="en-US" sz="1400" dirty="0"/>
+          </a:p>
+          <a:p>
+            <a:pPr indent="0" marL="0">
+              <a:lnSpc>
+                <a:spcPts val="2000"/>
+              </a:lnSpc>
+              <a:buNone/>
+            </a:pPr>
+            <a:r>
+              <a:rPr lang="en-US" sz="1400" dirty="0">
+                <a:solidFill>
+                  <a:srgbClr val="1E2D34"/>
+                </a:solidFill>
+                <a:latin typeface="Meiryo" pitchFamily="34" charset="0"/>
+                <a:ea typeface="Meiryo" pitchFamily="34" charset="-122"/>
+                <a:cs typeface="Meiryo" pitchFamily="34" charset="-120"/>
+              </a:rPr>
+              <a:t>　 通知メールが届く</a:t>
+            </a:r>
+            <a:endParaRPr lang="en-US" sz="1400" dirty="0"/>
+          </a:p>
+        </p:txBody>
+      </p:sp>
+      <p:sp>
+        <p:nvSpPr>
+          <p:cNvPr id="9" name="Shape 6"/>
+          <p:cNvSpPr/>
+          <p:nvPr/>
+        </p:nvSpPr>
+        <p:spPr>
+          <a:xfrm>
+            <a:off x="7726680" y="3200400"/>
+            <a:ext cx="3840480" cy="868680"/>
+          </a:xfrm>
+          <a:prstGeom prst="roundRect">
+            <a:avLst>
+              <a:gd name="adj" fmla="val 10526"/>
+            </a:avLst>
+          </a:prstGeom>
+          <a:solidFill>
+            <a:srgbClr val="F6F7F8"/>
+          </a:solidFill>
+          <a:ln/>
+        </p:spPr>
+      </p:sp>
+      <p:sp>
+        <p:nvSpPr>
+          <p:cNvPr id="10" name="Text 7"/>
+          <p:cNvSpPr/>
+          <p:nvPr/>
+        </p:nvSpPr>
+        <p:spPr>
+          <a:xfrm>
+            <a:off x="7955280" y="3474720"/>
+            <a:ext cx="3566160" cy="365760"/>
+          </a:xfrm>
+          <a:prstGeom prst="rect">
+            <a:avLst/>
+          </a:prstGeom>
+          <a:noFill/>
+          <a:ln/>
+        </p:spPr>
+        <p:txBody>
+          <a:bodyPr wrap="square" lIns="0" tIns="0" rIns="0" bIns="0" rtlCol="0" anchor="ctr"/>
+          <a:lstStyle/>
+          <a:p>
+            <a:pPr indent="0" marL="0">
+              <a:buNone/>
+            </a:pPr>
+            <a:r>
+              <a:rPr lang="en-US" sz="1400" dirty="0">
+                <a:solidFill>
+                  <a:srgbClr val="1E2D34"/>
+                </a:solidFill>
+                <a:latin typeface="Meiryo" pitchFamily="34" charset="0"/>
+                <a:ea typeface="Meiryo" pitchFamily="34" charset="-122"/>
+                <a:cs typeface="Meiryo" pitchFamily="34" charset="-120"/>
+              </a:rPr>
+              <a:t>② この画面に記録が残る</a:t>
+            </a:r>
+            <a:endParaRPr lang="en-US" sz="1400" dirty="0"/>
+          </a:p>
+        </p:txBody>
+      </p:sp>
+      <p:sp>
+        <p:nvSpPr>
+          <p:cNvPr id="11" name="Shape 8"/>
+          <p:cNvSpPr/>
+          <p:nvPr/>
+        </p:nvSpPr>
+        <p:spPr>
+          <a:xfrm>
+            <a:off x="7726680" y="4206240"/>
+            <a:ext cx="3840480" cy="1188720"/>
+          </a:xfrm>
+          <a:prstGeom prst="roundRect">
+            <a:avLst>
+              <a:gd name="adj" fmla="val 7692"/>
+            </a:avLst>
+          </a:prstGeom>
+          <a:solidFill>
+            <a:srgbClr val="EDF6EE"/>
+          </a:solidFill>
+          <a:ln/>
+        </p:spPr>
+      </p:sp>
+      <p:sp>
+        <p:nvSpPr>
+          <p:cNvPr id="12" name="Text 9"/>
+          <p:cNvSpPr/>
+          <p:nvPr/>
+        </p:nvSpPr>
+        <p:spPr>
+          <a:xfrm>
+            <a:off x="7955280" y="4343400"/>
+            <a:ext cx="3566160" cy="1005840"/>
+          </a:xfrm>
+          <a:prstGeom prst="rect">
+            <a:avLst/>
+          </a:prstGeom>
+          <a:noFill/>
+          <a:ln/>
+        </p:spPr>
+        <p:txBody>
+          <a:bodyPr wrap="square" lIns="0" tIns="0" rIns="0" bIns="0" rtlCol="0" anchor="ctr"/>
+          <a:lstStyle/>
+          <a:p>
+            <a:pPr indent="0" marL="0">
+              <a:lnSpc>
+                <a:spcPts val="2000"/>
+              </a:lnSpc>
+              <a:buNone/>
+            </a:pPr>
+            <a:r>
+              <a:rPr lang="en-US" sz="1400" b="1" dirty="0">
+                <a:solidFill>
+                  <a:srgbClr val="2E7D32"/>
+                </a:solidFill>
+                <a:latin typeface="Meiryo" pitchFamily="34" charset="0"/>
+                <a:ea typeface="Meiryo" pitchFamily="34" charset="-122"/>
+                <a:cs typeface="Meiryo" pitchFamily="34" charset="-120"/>
+              </a:rPr>
+              <a:t>メールが届かなくても</a:t>
+            </a:r>
+            <a:endParaRPr lang="en-US" sz="1400" dirty="0"/>
+          </a:p>
+          <a:p>
+            <a:pPr indent="0" marL="0">
+              <a:lnSpc>
+                <a:spcPts val="2000"/>
+              </a:lnSpc>
+              <a:buNone/>
+            </a:pPr>
+            <a:r>
+              <a:rPr lang="en-US" sz="1400" b="1" dirty="0">
+                <a:solidFill>
+                  <a:srgbClr val="2E7D32"/>
+                </a:solidFill>
+                <a:latin typeface="Meiryo" pitchFamily="34" charset="0"/>
+                <a:ea typeface="Meiryo" pitchFamily="34" charset="-122"/>
+                <a:cs typeface="Meiryo" pitchFamily="34" charset="-120"/>
+              </a:rPr>
+              <a:t>記録は残ります。</a:t>
+            </a:r>
+            <a:endParaRPr lang="en-US" sz="1400" dirty="0"/>
+          </a:p>
+          <a:p>
+            <a:pPr indent="0" marL="0">
+              <a:lnSpc>
+                <a:spcPts val="2000"/>
+              </a:lnSpc>
+              <a:buNone/>
+            </a:pPr>
+            <a:r>
+              <a:rPr lang="en-US" sz="1400" b="1" dirty="0">
+                <a:solidFill>
+                  <a:srgbClr val="2E7D32"/>
+                </a:solidFill>
+                <a:latin typeface="Meiryo" pitchFamily="34" charset="0"/>
+                <a:ea typeface="Meiryo" pitchFamily="34" charset="-122"/>
+                <a:cs typeface="Meiryo" pitchFamily="34" charset="-120"/>
+              </a:rPr>
+              <a:t>見落としても大丈夫です。</a:t>
+            </a:r>
+            <a:endParaRPr lang="en-US" sz="1400" dirty="0"/>
+          </a:p>
+        </p:txBody>
+      </p:sp>
+      <p:sp>
+        <p:nvSpPr>
+          <p:cNvPr id="13" name="Text 10"/>
+          <p:cNvSpPr/>
+          <p:nvPr/>
+        </p:nvSpPr>
+        <p:spPr>
+          <a:xfrm>
+            <a:off x="7772400" y="5532120"/>
+            <a:ext cx="3840480" cy="548640"/>
+          </a:xfrm>
+          <a:prstGeom prst="rect">
+            <a:avLst/>
+          </a:prstGeom>
+          <a:noFill/>
+          <a:ln/>
+        </p:spPr>
+        <p:txBody>
+          <a:bodyPr wrap="square" lIns="0" tIns="0" rIns="0" bIns="0" rtlCol="0" anchor="ctr"/>
+          <a:lstStyle/>
+          <a:p>
+            <a:pPr indent="0" marL="0">
+              <a:lnSpc>
+                <a:spcPts val="1900"/>
+              </a:lnSpc>
+              <a:buNone/>
+            </a:pPr>
+            <a:r>
+              <a:rPr lang="en-US" sz="1300" dirty="0">
+                <a:solidFill>
+                  <a:srgbClr val="5E7681"/>
+                </a:solidFill>
+                <a:latin typeface="Meiryo" pitchFamily="34" charset="0"/>
+                <a:ea typeface="Meiryo" pitchFamily="34" charset="-122"/>
+                <a:cs typeface="Meiryo" pitchFamily="34" charset="-120"/>
+              </a:rPr>
+              <a:t>返信は通知メールにそのまま返信すれば届きます。</a:t>
+            </a:r>
+            <a:endParaRPr lang="en-US" sz="1300" dirty="0"/>
+          </a:p>
+        </p:txBody>
+      </p:sp>
     </p:spTree>
   </p:cSld>
   <p:clrMapOvr>

--- a/_wp移行素材/★引継ぎ資料/★サイト更新マニュアル.pptx
+++ b/_wp移行素材/★引継ぎ資料/★サイト更新マニュアル.pptx
@@ -1398,7 +1398,7 @@
           <a:p>
             <a:r>
               <a:rPr lang="en-US" dirty="0"/>
-              <a:t>5冊の役割分担。レクチャーでは基本編を使い、この資料は手元の参照用として渡す。</a:t>
+              <a:t>6冊の役割分担。レクチャーでは基本編を使い、応用編は必要になった章だけ開く使い方でよい。</a:t>
             </a:r>
             <a:endParaRPr lang="en-US" dirty="0"/>
           </a:p>
@@ -11864,7 +11864,7 @@
                 <a:ea typeface="Meiryo" pitchFamily="34" charset="-122"/>
                 <a:cs typeface="Meiryo" pitchFamily="34" charset="-120"/>
               </a:rPr>
-              <a:t>資料は5冊あります</a:t>
+              <a:t>資料は6冊あります</a:t>
             </a:r>
             <a:endParaRPr lang="en-US" sz="3200" dirty="0"/>
           </a:p>
@@ -11956,12 +11956,12 @@
         </p:nvSpPr>
         <p:spPr>
           <a:xfrm>
-            <a:off x="640080" y="1691640"/>
-            <a:ext cx="11064240" cy="841248"/>
+            <a:off x="640080" y="1645920"/>
+            <a:ext cx="11064240" cy="731520"/>
           </a:xfrm>
           <a:prstGeom prst="roundRect">
             <a:avLst>
-              <a:gd name="adj" fmla="val 10870"/>
+              <a:gd name="adj" fmla="val 12500"/>
             </a:avLst>
           </a:prstGeom>
           <a:solidFill>
@@ -11978,7 +11978,7 @@
         </p:nvSpPr>
         <p:spPr>
           <a:xfrm>
-            <a:off x="868680" y="1892808"/>
+            <a:off x="868680" y="1792224"/>
             <a:ext cx="1417320" cy="438912"/>
           </a:xfrm>
           <a:prstGeom prst="roundRect">
@@ -12000,7 +12000,7 @@
         </p:nvSpPr>
         <p:spPr>
           <a:xfrm>
-            <a:off x="868680" y="1892808"/>
+            <a:off x="868680" y="1792224"/>
             <a:ext cx="1417320" cy="438912"/>
           </a:xfrm>
           <a:prstGeom prst="rect">
@@ -12039,8 +12039,8 @@
         </p:nvSpPr>
         <p:spPr>
           <a:xfrm>
-            <a:off x="2468880" y="1801368"/>
-            <a:ext cx="4480560" cy="320040"/>
+            <a:off x="2468880" y="1847088"/>
+            <a:ext cx="4572000" cy="320040"/>
           </a:xfrm>
           <a:prstGeom prst="rect">
             <a:avLst/>
@@ -12056,7 +12056,7 @@
               <a:buNone/>
             </a:pPr>
             <a:r>
-              <a:rPr lang="en-US" sz="1350" b="1" dirty="0">
+              <a:rPr lang="en-US" sz="1300" b="1" dirty="0">
                 <a:solidFill>
                   <a:srgbClr val="264653"/>
                 </a:solidFill>
@@ -12066,7 +12066,7 @@
               </a:rPr>
               <a:t>★ASPATH_サイト運用マニュアル_基本編</a:t>
             </a:r>
-            <a:endParaRPr lang="en-US" sz="1350" dirty="0"/>
+            <a:endParaRPr lang="en-US" sz="1300" dirty="0"/>
           </a:p>
         </p:txBody>
       </p:sp>
@@ -12078,8 +12078,8 @@
         </p:nvSpPr>
         <p:spPr>
           <a:xfrm>
-            <a:off x="7132320" y="1764792"/>
-            <a:ext cx="4389120" cy="713232"/>
+            <a:off x="7223760" y="1865376"/>
+            <a:ext cx="4297680" cy="320040"/>
           </a:xfrm>
           <a:prstGeom prst="rect">
             <a:avLst/>
@@ -12092,9 +12092,6 @@
           <a:lstStyle/>
           <a:p>
             <a:pPr indent="0" marL="0">
-              <a:lnSpc>
-                <a:spcPts val="1500"/>
-              </a:lnSpc>
               <a:buNone/>
             </a:pPr>
             <a:r>
@@ -12106,30 +12103,10 @@
                 <a:ea typeface="Meiryo" pitchFamily="34" charset="-122"/>
                 <a:cs typeface="Meiryo" pitchFamily="34" charset="-120"/>
               </a:rPr>
-              <a:t>日々の更新。画面写真つき。</a:t>
+              <a:t>日々の更新。画面写真つき。まずこれ</a:t>
             </a:r>
             <a:endParaRPr lang="en-US" sz="1150" dirty="0"/>
           </a:p>
-          <a:p>
-            <a:pPr indent="0" marL="0">
-              <a:lnSpc>
-                <a:spcPts val="1500"/>
-              </a:lnSpc>
-              <a:buNone/>
-            </a:pPr>
-            <a:r>
-              <a:rPr lang="en-US" sz="1150" dirty="0">
-                <a:solidFill>
-                  <a:srgbClr val="5E7681"/>
-                </a:solidFill>
-                <a:latin typeface="Meiryo" pitchFamily="34" charset="0"/>
-                <a:ea typeface="Meiryo" pitchFamily="34" charset="-122"/>
-                <a:cs typeface="Meiryo" pitchFamily="34" charset="-120"/>
-              </a:rPr>
-              <a:t>まずこれ</a:t>
-            </a:r>
-            <a:endParaRPr lang="en-US" sz="1150" dirty="0"/>
-          </a:p>
         </p:txBody>
       </p:sp>
       <p:sp>
@@ -12140,12 +12117,12 @@
         </p:nvSpPr>
         <p:spPr>
           <a:xfrm>
-            <a:off x="640080" y="2624328"/>
-            <a:ext cx="11064240" cy="841248"/>
+            <a:off x="640080" y="2450592"/>
+            <a:ext cx="11064240" cy="731520"/>
           </a:xfrm>
           <a:prstGeom prst="roundRect">
             <a:avLst>
-              <a:gd name="adj" fmla="val 10870"/>
+              <a:gd name="adj" fmla="val 12500"/>
             </a:avLst>
           </a:prstGeom>
           <a:solidFill>
@@ -12162,7 +12139,7 @@
         </p:nvSpPr>
         <p:spPr>
           <a:xfrm>
-            <a:off x="868680" y="2825496"/>
+            <a:off x="868680" y="2596896"/>
             <a:ext cx="1417320" cy="438912"/>
           </a:xfrm>
           <a:prstGeom prst="roundRect">
@@ -12171,7 +12148,7 @@
             </a:avLst>
           </a:prstGeom>
           <a:solidFill>
-            <a:srgbClr val="264653"/>
+            <a:srgbClr val="C96A1E"/>
           </a:solidFill>
           <a:ln/>
         </p:spPr>
@@ -12184,7 +12161,7 @@
         </p:nvSpPr>
         <p:spPr>
           <a:xfrm>
-            <a:off x="868680" y="2825496"/>
+            <a:off x="868680" y="2596896"/>
             <a:ext cx="1417320" cy="438912"/>
           </a:xfrm>
           <a:prstGeom prst="rect">
@@ -12209,7 +12186,7 @@
                 <a:ea typeface="Meiryo" pitchFamily="34" charset="-122"/>
                 <a:cs typeface="Meiryo" pitchFamily="34" charset="-120"/>
               </a:rPr>
-              <a:t>この資料</a:t>
+              <a:t>応用編</a:t>
             </a:r>
             <a:endParaRPr lang="en-US" sz="1250" dirty="0"/>
           </a:p>
@@ -12223,8 +12200,8 @@
         </p:nvSpPr>
         <p:spPr>
           <a:xfrm>
-            <a:off x="2468880" y="2734056"/>
-            <a:ext cx="4480560" cy="320040"/>
+            <a:off x="2468880" y="2651760"/>
+            <a:ext cx="4572000" cy="320040"/>
           </a:xfrm>
           <a:prstGeom prst="rect">
             <a:avLst/>
@@ -12240,7 +12217,7 @@
               <a:buNone/>
             </a:pPr>
             <a:r>
-              <a:rPr lang="en-US" sz="1350" b="1" dirty="0">
+              <a:rPr lang="en-US" sz="1300" b="1" dirty="0">
                 <a:solidFill>
                   <a:srgbClr val="264653"/>
                 </a:solidFill>
@@ -12248,9 +12225,9 @@
                 <a:ea typeface="Meiryo" pitchFamily="34" charset="-122"/>
                 <a:cs typeface="Meiryo" pitchFamily="34" charset="-120"/>
               </a:rPr>
-              <a:t>ASPATH_サイト更新マニュアル</a:t>
-            </a:r>
-            <a:endParaRPr lang="en-US" sz="1350" dirty="0"/>
+              <a:t>★ASPATH_サイト運用マニュアル_応用編</a:t>
+            </a:r>
+            <a:endParaRPr lang="en-US" sz="1300" dirty="0"/>
           </a:p>
         </p:txBody>
       </p:sp>
@@ -12262,8 +12239,8 @@
         </p:nvSpPr>
         <p:spPr>
           <a:xfrm>
-            <a:off x="7132320" y="2697480"/>
-            <a:ext cx="4389120" cy="713232"/>
+            <a:off x="7223760" y="2670048"/>
+            <a:ext cx="4297680" cy="320040"/>
           </a:xfrm>
           <a:prstGeom prst="rect">
             <a:avLst/>
@@ -12276,9 +12253,6 @@
           <a:lstStyle/>
           <a:p>
             <a:pPr indent="0" marL="0">
-              <a:lnSpc>
-                <a:spcPts val="1500"/>
-              </a:lnSpc>
               <a:buNone/>
             </a:pPr>
             <a:r>
@@ -12290,30 +12264,10 @@
                 <a:ea typeface="Meiryo" pitchFamily="34" charset="-122"/>
                 <a:cs typeface="Meiryo" pitchFamily="34" charset="-120"/>
               </a:rPr>
-              <a:t>全体像と、PC作業の手順。</a:t>
+              <a:t>壊さない触り方・検索対策・AIの使い方</a:t>
             </a:r>
             <a:endParaRPr lang="en-US" sz="1150" dirty="0"/>
           </a:p>
-          <a:p>
-            <a:pPr indent="0" marL="0">
-              <a:lnSpc>
-                <a:spcPts val="1500"/>
-              </a:lnSpc>
-              <a:buNone/>
-            </a:pPr>
-            <a:r>
-              <a:rPr lang="en-US" sz="1150" dirty="0">
-                <a:solidFill>
-                  <a:srgbClr val="5E7681"/>
-                </a:solidFill>
-                <a:latin typeface="Meiryo" pitchFamily="34" charset="0"/>
-                <a:ea typeface="Meiryo" pitchFamily="34" charset="-122"/>
-                <a:cs typeface="Meiryo" pitchFamily="34" charset="-120"/>
-              </a:rPr>
-              <a:t>開発担当も見る</a:t>
-            </a:r>
-            <a:endParaRPr lang="en-US" sz="1150" dirty="0"/>
-          </a:p>
         </p:txBody>
       </p:sp>
       <p:sp>
@@ -12324,12 +12278,12 @@
         </p:nvSpPr>
         <p:spPr>
           <a:xfrm>
-            <a:off x="640080" y="3557016"/>
-            <a:ext cx="11064240" cy="841248"/>
+            <a:off x="640080" y="3255264"/>
+            <a:ext cx="11064240" cy="731520"/>
           </a:xfrm>
           <a:prstGeom prst="roundRect">
             <a:avLst>
-              <a:gd name="adj" fmla="val 10870"/>
+              <a:gd name="adj" fmla="val 12500"/>
             </a:avLst>
           </a:prstGeom>
           <a:solidFill>
@@ -12346,7 +12300,7 @@
         </p:nvSpPr>
         <p:spPr>
           <a:xfrm>
-            <a:off x="868680" y="3758184"/>
+            <a:off x="868680" y="3401568"/>
             <a:ext cx="1417320" cy="438912"/>
           </a:xfrm>
           <a:prstGeom prst="roundRect">
@@ -12355,7 +12309,7 @@
             </a:avLst>
           </a:prstGeom>
           <a:solidFill>
-            <a:srgbClr val="2E7D32"/>
+            <a:srgbClr val="264653"/>
           </a:solidFill>
           <a:ln/>
         </p:spPr>
@@ -12368,7 +12322,7 @@
         </p:nvSpPr>
         <p:spPr>
           <a:xfrm>
-            <a:off x="868680" y="3758184"/>
+            <a:off x="868680" y="3401568"/>
             <a:ext cx="1417320" cy="438912"/>
           </a:xfrm>
           <a:prstGeom prst="rect">
@@ -12393,7 +12347,7 @@
                 <a:ea typeface="Meiryo" pitchFamily="34" charset="-122"/>
                 <a:cs typeface="Meiryo" pitchFamily="34" charset="-120"/>
               </a:rPr>
-              <a:t>やさしい版</a:t>
+              <a:t>この資料</a:t>
             </a:r>
             <a:endParaRPr lang="en-US" sz="1250" dirty="0"/>
           </a:p>
@@ -12407,8 +12361,8 @@
         </p:nvSpPr>
         <p:spPr>
           <a:xfrm>
-            <a:off x="2468880" y="3666744"/>
-            <a:ext cx="4480560" cy="320040"/>
+            <a:off x="2468880" y="3456432"/>
+            <a:ext cx="4572000" cy="320040"/>
           </a:xfrm>
           <a:prstGeom prst="rect">
             <a:avLst/>
@@ -12424,7 +12378,7 @@
               <a:buNone/>
             </a:pPr>
             <a:r>
-              <a:rPr lang="en-US" sz="1350" b="1" dirty="0">
+              <a:rPr lang="en-US" sz="1300" b="1" dirty="0">
                 <a:solidFill>
                   <a:srgbClr val="264653"/>
                 </a:solidFill>
@@ -12432,9 +12386,9 @@
                 <a:ea typeface="Meiryo" pitchFamily="34" charset="-122"/>
                 <a:cs typeface="Meiryo" pitchFamily="34" charset="-120"/>
               </a:rPr>
-              <a:t>山口様向け_ページの直し方</a:t>
-            </a:r>
-            <a:endParaRPr lang="en-US" sz="1350" dirty="0"/>
+              <a:t>ASPATH_サイト更新マニュアル</a:t>
+            </a:r>
+            <a:endParaRPr lang="en-US" sz="1300" dirty="0"/>
           </a:p>
         </p:txBody>
       </p:sp>
@@ -12446,8 +12400,8 @@
         </p:nvSpPr>
         <p:spPr>
           <a:xfrm>
-            <a:off x="7132320" y="3630168"/>
-            <a:ext cx="4389120" cy="713232"/>
+            <a:off x="7223760" y="3474720"/>
+            <a:ext cx="4297680" cy="320040"/>
           </a:xfrm>
           <a:prstGeom prst="rect">
             <a:avLst/>
@@ -12460,9 +12414,6 @@
           <a:lstStyle/>
           <a:p>
             <a:pPr indent="0" marL="0">
-              <a:lnSpc>
-                <a:spcPts val="1500"/>
-              </a:lnSpc>
               <a:buNone/>
             </a:pPr>
             <a:r>
@@ -12474,30 +12425,10 @@
                 <a:ea typeface="Meiryo" pitchFamily="34" charset="-122"/>
                 <a:cs typeface="Meiryo" pitchFamily="34" charset="-120"/>
               </a:rPr>
-              <a:t>記事の書き方を、やさしく。</a:t>
+              <a:t>全体像と、PC作業の手順。開発担当も見る</a:t>
             </a:r>
             <a:endParaRPr lang="en-US" sz="1150" dirty="0"/>
           </a:p>
-          <a:p>
-            <a:pPr indent="0" marL="0">
-              <a:lnSpc>
-                <a:spcPts val="1500"/>
-              </a:lnSpc>
-              <a:buNone/>
-            </a:pPr>
-            <a:r>
-              <a:rPr lang="en-US" sz="1150" dirty="0">
-                <a:solidFill>
-                  <a:srgbClr val="5E7681"/>
-                </a:solidFill>
-                <a:latin typeface="Meiryo" pitchFamily="34" charset="0"/>
-                <a:ea typeface="Meiryo" pitchFamily="34" charset="-122"/>
-                <a:cs typeface="Meiryo" pitchFamily="34" charset="-120"/>
-              </a:rPr>
-              <a:t>連絡の文例つき</a:t>
-            </a:r>
-            <a:endParaRPr lang="en-US" sz="1150" dirty="0"/>
-          </a:p>
         </p:txBody>
       </p:sp>
       <p:sp>
@@ -12508,12 +12439,12 @@
         </p:nvSpPr>
         <p:spPr>
           <a:xfrm>
-            <a:off x="640080" y="4489704"/>
-            <a:ext cx="11064240" cy="841248"/>
+            <a:off x="640080" y="4059936"/>
+            <a:ext cx="11064240" cy="731520"/>
           </a:xfrm>
           <a:prstGeom prst="roundRect">
             <a:avLst>
-              <a:gd name="adj" fmla="val 10870"/>
+              <a:gd name="adj" fmla="val 12500"/>
             </a:avLst>
           </a:prstGeom>
           <a:solidFill>
@@ -12530,7 +12461,7 @@
         </p:nvSpPr>
         <p:spPr>
           <a:xfrm>
-            <a:off x="868680" y="4690872"/>
+            <a:off x="868680" y="4206240"/>
             <a:ext cx="1417320" cy="438912"/>
           </a:xfrm>
           <a:prstGeom prst="roundRect">
@@ -12539,7 +12470,7 @@
             </a:avLst>
           </a:prstGeom>
           <a:solidFill>
-            <a:srgbClr val="5E7681"/>
+            <a:srgbClr val="2E7D32"/>
           </a:solidFill>
           <a:ln/>
         </p:spPr>
@@ -12552,7 +12483,7 @@
         </p:nvSpPr>
         <p:spPr>
           <a:xfrm>
-            <a:off x="868680" y="4690872"/>
+            <a:off x="868680" y="4206240"/>
             <a:ext cx="1417320" cy="438912"/>
           </a:xfrm>
           <a:prstGeom prst="rect">
@@ -12577,7 +12508,7 @@
                 <a:ea typeface="Meiryo" pitchFamily="34" charset="-122"/>
                 <a:cs typeface="Meiryo" pitchFamily="34" charset="-120"/>
               </a:rPr>
-              <a:t>固定ページ</a:t>
+              <a:t>やさしい版</a:t>
             </a:r>
             <a:endParaRPr lang="en-US" sz="1250" dirty="0"/>
           </a:p>
@@ -12591,8 +12522,8 @@
         </p:nvSpPr>
         <p:spPr>
           <a:xfrm>
-            <a:off x="2468880" y="4599432"/>
-            <a:ext cx="4480560" cy="320040"/>
+            <a:off x="2468880" y="4261104"/>
+            <a:ext cx="4572000" cy="320040"/>
           </a:xfrm>
           <a:prstGeom prst="rect">
             <a:avLst/>
@@ -12608,7 +12539,7 @@
               <a:buNone/>
             </a:pPr>
             <a:r>
-              <a:rPr lang="en-US" sz="1350" b="1" dirty="0">
+              <a:rPr lang="en-US" sz="1300" b="1" dirty="0">
                 <a:solidFill>
                   <a:srgbClr val="264653"/>
                 </a:solidFill>
@@ -12616,9 +12547,9 @@
                 <a:ea typeface="Meiryo" pitchFamily="34" charset="-122"/>
                 <a:cs typeface="Meiryo" pitchFamily="34" charset="-120"/>
               </a:rPr>
-              <a:t>山口様向け_ASPATHについて_文章の直し方</a:t>
-            </a:r>
-            <a:endParaRPr lang="en-US" sz="1350" dirty="0"/>
+              <a:t>山口様向け_ページの直し方</a:t>
+            </a:r>
+            <a:endParaRPr lang="en-US" sz="1300" dirty="0"/>
           </a:p>
         </p:txBody>
       </p:sp>
@@ -12630,8 +12561,8 @@
         </p:nvSpPr>
         <p:spPr>
           <a:xfrm>
-            <a:off x="7132320" y="4562856"/>
-            <a:ext cx="4389120" cy="713232"/>
+            <a:off x="7223760" y="4279392"/>
+            <a:ext cx="4297680" cy="320040"/>
           </a:xfrm>
           <a:prstGeom prst="rect">
             <a:avLst/>
@@ -12644,9 +12575,6 @@
           <a:lstStyle/>
           <a:p>
             <a:pPr indent="0" marL="0">
-              <a:lnSpc>
-                <a:spcPts val="1500"/>
-              </a:lnSpc>
               <a:buNone/>
             </a:pPr>
             <a:r>
@@ -12658,30 +12586,10 @@
                 <a:ea typeface="Meiryo" pitchFamily="34" charset="-122"/>
                 <a:cs typeface="Meiryo" pitchFamily="34" charset="-120"/>
               </a:rPr>
-              <a:t>「ASPATHについて」だけの</a:t>
+              <a:t>記事の書き方を、やさしく。連絡の文例つき</a:t>
             </a:r>
             <a:endParaRPr lang="en-US" sz="1150" dirty="0"/>
           </a:p>
-          <a:p>
-            <a:pPr indent="0" marL="0">
-              <a:lnSpc>
-                <a:spcPts val="1500"/>
-              </a:lnSpc>
-              <a:buNone/>
-            </a:pPr>
-            <a:r>
-              <a:rPr lang="en-US" sz="1150" dirty="0">
-                <a:solidFill>
-                  <a:srgbClr val="5E7681"/>
-                </a:solidFill>
-                <a:latin typeface="Meiryo" pitchFamily="34" charset="0"/>
-                <a:ea typeface="Meiryo" pitchFamily="34" charset="-122"/>
-                <a:cs typeface="Meiryo" pitchFamily="34" charset="-120"/>
-              </a:rPr>
-              <a:t>専用手順</a:t>
-            </a:r>
-            <a:endParaRPr lang="en-US" sz="1150" dirty="0"/>
-          </a:p>
         </p:txBody>
       </p:sp>
       <p:sp>
@@ -12692,12 +12600,12 @@
         </p:nvSpPr>
         <p:spPr>
           <a:xfrm>
-            <a:off x="640080" y="5422392"/>
-            <a:ext cx="11064240" cy="841248"/>
+            <a:off x="640080" y="4864608"/>
+            <a:ext cx="11064240" cy="731520"/>
           </a:xfrm>
           <a:prstGeom prst="roundRect">
             <a:avLst>
-              <a:gd name="adj" fmla="val 10870"/>
+              <a:gd name="adj" fmla="val 12500"/>
             </a:avLst>
           </a:prstGeom>
           <a:solidFill>
@@ -12714,7 +12622,7 @@
         </p:nvSpPr>
         <p:spPr>
           <a:xfrm>
-            <a:off x="868680" y="5623560"/>
+            <a:off x="868680" y="5010912"/>
             <a:ext cx="1417320" cy="438912"/>
           </a:xfrm>
           <a:prstGeom prst="roundRect">
@@ -12736,7 +12644,7 @@
         </p:nvSpPr>
         <p:spPr>
           <a:xfrm>
-            <a:off x="868680" y="5623560"/>
+            <a:off x="868680" y="5010912"/>
             <a:ext cx="1417320" cy="438912"/>
           </a:xfrm>
           <a:prstGeom prst="rect">
@@ -12761,6 +12669,167 @@
                 <a:ea typeface="Meiryo" pitchFamily="34" charset="-122"/>
                 <a:cs typeface="Meiryo" pitchFamily="34" charset="-120"/>
               </a:rPr>
+              <a:t>固定ページ</a:t>
+            </a:r>
+            <a:endParaRPr lang="en-US" sz="1250" dirty="0"/>
+          </a:p>
+        </p:txBody>
+      </p:sp>
+      <p:sp>
+        <p:nvSpPr>
+          <p:cNvPr id="28" name="Text 26"/>
+          <p:cNvSpPr/>
+          <p:nvPr/>
+        </p:nvSpPr>
+        <p:spPr>
+          <a:xfrm>
+            <a:off x="2468880" y="5065776"/>
+            <a:ext cx="4572000" cy="320040"/>
+          </a:xfrm>
+          <a:prstGeom prst="rect">
+            <a:avLst/>
+          </a:prstGeom>
+          <a:noFill/>
+          <a:ln/>
+        </p:spPr>
+        <p:txBody>
+          <a:bodyPr wrap="square" lIns="0" tIns="0" rIns="0" bIns="0" rtlCol="0" anchor="ctr"/>
+          <a:lstStyle/>
+          <a:p>
+            <a:pPr indent="0" marL="0">
+              <a:buNone/>
+            </a:pPr>
+            <a:r>
+              <a:rPr lang="en-US" sz="1300" b="1" dirty="0">
+                <a:solidFill>
+                  <a:srgbClr val="264653"/>
+                </a:solidFill>
+                <a:latin typeface="Meiryo" pitchFamily="34" charset="0"/>
+                <a:ea typeface="Meiryo" pitchFamily="34" charset="-122"/>
+                <a:cs typeface="Meiryo" pitchFamily="34" charset="-120"/>
+              </a:rPr>
+              <a:t>山口様向け_ASPATHについて_文章の直し方</a:t>
+            </a:r>
+            <a:endParaRPr lang="en-US" sz="1300" dirty="0"/>
+          </a:p>
+        </p:txBody>
+      </p:sp>
+      <p:sp>
+        <p:nvSpPr>
+          <p:cNvPr id="29" name="Text 27"/>
+          <p:cNvSpPr/>
+          <p:nvPr/>
+        </p:nvSpPr>
+        <p:spPr>
+          <a:xfrm>
+            <a:off x="7223760" y="5084064"/>
+            <a:ext cx="4297680" cy="320040"/>
+          </a:xfrm>
+          <a:prstGeom prst="rect">
+            <a:avLst/>
+          </a:prstGeom>
+          <a:noFill/>
+          <a:ln/>
+        </p:spPr>
+        <p:txBody>
+          <a:bodyPr wrap="square" lIns="0" tIns="0" rIns="0" bIns="0" rtlCol="0" anchor="ctr"/>
+          <a:lstStyle/>
+          <a:p>
+            <a:pPr indent="0" marL="0">
+              <a:buNone/>
+            </a:pPr>
+            <a:r>
+              <a:rPr lang="en-US" sz="1150" dirty="0">
+                <a:solidFill>
+                  <a:srgbClr val="5E7681"/>
+                </a:solidFill>
+                <a:latin typeface="Meiryo" pitchFamily="34" charset="0"/>
+                <a:ea typeface="Meiryo" pitchFamily="34" charset="-122"/>
+                <a:cs typeface="Meiryo" pitchFamily="34" charset="-120"/>
+              </a:rPr>
+              <a:t>「ASPATHについて」だけの専用手順</a:t>
+            </a:r>
+            <a:endParaRPr lang="en-US" sz="1150" dirty="0"/>
+          </a:p>
+        </p:txBody>
+      </p:sp>
+      <p:sp>
+        <p:nvSpPr>
+          <p:cNvPr id="30" name="Shape 28"/>
+          <p:cNvSpPr/>
+          <p:nvPr/>
+        </p:nvSpPr>
+        <p:spPr>
+          <a:xfrm>
+            <a:off x="640080" y="5669280"/>
+            <a:ext cx="11064240" cy="731520"/>
+          </a:xfrm>
+          <a:prstGeom prst="roundRect">
+            <a:avLst>
+              <a:gd name="adj" fmla="val 12500"/>
+            </a:avLst>
+          </a:prstGeom>
+          <a:solidFill>
+            <a:srgbClr val="F6F7F8"/>
+          </a:solidFill>
+          <a:ln/>
+        </p:spPr>
+      </p:sp>
+      <p:sp>
+        <p:nvSpPr>
+          <p:cNvPr id="31" name="Shape 29"/>
+          <p:cNvSpPr/>
+          <p:nvPr/>
+        </p:nvSpPr>
+        <p:spPr>
+          <a:xfrm>
+            <a:off x="868680" y="5815584"/>
+            <a:ext cx="1417320" cy="438912"/>
+          </a:xfrm>
+          <a:prstGeom prst="roundRect">
+            <a:avLst>
+              <a:gd name="adj" fmla="val 50000"/>
+            </a:avLst>
+          </a:prstGeom>
+          <a:solidFill>
+            <a:srgbClr val="5E7681"/>
+          </a:solidFill>
+          <a:ln/>
+        </p:spPr>
+      </p:sp>
+      <p:sp>
+        <p:nvSpPr>
+          <p:cNvPr id="32" name="Text 30"/>
+          <p:cNvSpPr/>
+          <p:nvPr/>
+        </p:nvSpPr>
+        <p:spPr>
+          <a:xfrm>
+            <a:off x="868680" y="5815584"/>
+            <a:ext cx="1417320" cy="438912"/>
+          </a:xfrm>
+          <a:prstGeom prst="rect">
+            <a:avLst/>
+          </a:prstGeom>
+          <a:noFill/>
+          <a:ln/>
+        </p:spPr>
+        <p:txBody>
+          <a:bodyPr wrap="square" lIns="0" tIns="0" rIns="0" bIns="0" rtlCol="0" anchor="ctr"/>
+          <a:lstStyle/>
+          <a:p>
+            <a:pPr algn="ctr" indent="0" marL="0">
+              <a:buNone/>
+            </a:pPr>
+            <a:r>
+              <a:rPr lang="en-US" sz="1250" b="1" dirty="0">
+                <a:solidFill>
+                  <a:srgbClr val="FFFFFF"/>
+                </a:solidFill>
+                <a:latin typeface="Meiryo" pitchFamily="34" charset="0"/>
+                <a:ea typeface="Meiryo" pitchFamily="34" charset="-122"/>
+                <a:cs typeface="Meiryo" pitchFamily="34" charset="-120"/>
+              </a:rPr>
               <a:t>検索対策</a:t>
             </a:r>
             <a:endParaRPr lang="en-US" sz="1250" dirty="0"/>
@@ -12769,14 +12838,14 @@
       </p:sp>
       <p:sp>
         <p:nvSpPr>
-          <p:cNvPr id="28" name="Text 26"/>
-          <p:cNvSpPr/>
-          <p:nvPr/>
-        </p:nvSpPr>
-        <p:spPr>
-          <a:xfrm>
-            <a:off x="2468880" y="5532120"/>
-            <a:ext cx="4480560" cy="320040"/>
+          <p:cNvPr id="33" name="Text 31"/>
+          <p:cNvSpPr/>
+          <p:nvPr/>
+        </p:nvSpPr>
+        <p:spPr>
+          <a:xfrm>
+            <a:off x="2468880" y="5870448"/>
+            <a:ext cx="4572000" cy="320040"/>
           </a:xfrm>
           <a:prstGeom prst="rect">
             <a:avLst/>
@@ -12792,7 +12861,7 @@
               <a:buNone/>
             </a:pPr>
             <a:r>
-              <a:rPr lang="en-US" sz="1350" b="1" dirty="0">
+              <a:rPr lang="en-US" sz="1300" b="1" dirty="0">
                 <a:solidFill>
                   <a:srgbClr val="264653"/>
                 </a:solidFill>
@@ -12802,20 +12871,20 @@
               </a:rPr>
               <a:t>山口様向け_検索で見つけてもらう記事の書き方</a:t>
             </a:r>
-            <a:endParaRPr lang="en-US" sz="1350" dirty="0"/>
-          </a:p>
-        </p:txBody>
-      </p:sp>
-      <p:sp>
-        <p:nvSpPr>
-          <p:cNvPr id="29" name="Text 27"/>
-          <p:cNvSpPr/>
-          <p:nvPr/>
-        </p:nvSpPr>
-        <p:spPr>
-          <a:xfrm>
-            <a:off x="7132320" y="5495544"/>
-            <a:ext cx="4389120" cy="713232"/>
+            <a:endParaRPr lang="en-US" sz="1300" dirty="0"/>
+          </a:p>
+        </p:txBody>
+      </p:sp>
+      <p:sp>
+        <p:nvSpPr>
+          <p:cNvPr id="34" name="Text 32"/>
+          <p:cNvSpPr/>
+          <p:nvPr/>
+        </p:nvSpPr>
+        <p:spPr>
+          <a:xfrm>
+            <a:off x="7223760" y="5888736"/>
+            <a:ext cx="4297680" cy="320040"/>
           </a:xfrm>
           <a:prstGeom prst="rect">
             <a:avLst/>
@@ -12828,9 +12897,6 @@
           <a:lstStyle/>
           <a:p>
             <a:pPr indent="0" marL="0">
-              <a:lnSpc>
-                <a:spcPts val="1500"/>
-              </a:lnSpc>
               <a:buNone/>
             </a:pPr>
             <a:r>
@@ -12850,13 +12916,13 @@
       </p:sp>
       <p:sp>
         <p:nvSpPr>
-          <p:cNvPr id="30" name="Text 28"/>
-          <p:cNvSpPr/>
-          <p:nvPr/>
-        </p:nvSpPr>
-        <p:spPr>
-          <a:xfrm>
-            <a:off x="640080" y="6355080"/>
+          <p:cNvPr id="35" name="Text 33"/>
+          <p:cNvSpPr/>
+          <p:nvPr/>
+        </p:nvSpPr>
+        <p:spPr>
+          <a:xfrm>
+            <a:off x="640080" y="6400800"/>
             <a:ext cx="11064240" cy="320040"/>
           </a:xfrm>
           <a:prstGeom prst="rect">
@@ -12881,7 +12947,7 @@
                 <a:ea typeface="Meiryo" pitchFamily="34" charset="-122"/>
                 <a:cs typeface="Meiryo" pitchFamily="34" charset="-120"/>
               </a:rPr>
-              <a:t>内容が重なっている部分があります。迷ったら「基本編」→ この資料 の順に見てください。</a:t>
+              <a:t>★の2冊が本編です。内容が重なる部分もありますが、迷ったら「基本編」→「応用編」の順に見てください。</a:t>
             </a:r>
             <a:endParaRPr lang="en-US" sz="1200" dirty="0"/>
           </a:p>

--- a/_wp移行素材/★引継ぎ資料/★サイト更新マニュアル.pptx
+++ b/_wp移行素材/★引継ぎ資料/★サイト更新マニュアル.pptx
@@ -1398,7 +1398,7 @@
           <a:p>
             <a:r>
               <a:rPr lang="en-US" dirty="0"/>
-              <a:t>6冊の役割分担。レクチャーでは基本編を使い、応用編は必要になった章だけ開く使い方でよい。</a:t>
+              <a:t>8冊の役割分担。レクチャーでは基本編を使う。他は必要になったときに開く。</a:t>
             </a:r>
             <a:endParaRPr lang="en-US" dirty="0"/>
           </a:p>
@@ -11864,7 +11864,7 @@
                 <a:ea typeface="Meiryo" pitchFamily="34" charset="-122"/>
                 <a:cs typeface="Meiryo" pitchFamily="34" charset="-120"/>
               </a:rPr>
-              <a:t>資料は6冊あります</a:t>
+              <a:t>資料は8冊あります</a:t>
             </a:r>
             <a:endParaRPr lang="en-US" sz="3200" dirty="0"/>
           </a:p>
@@ -11956,12 +11956,12 @@
         </p:nvSpPr>
         <p:spPr>
           <a:xfrm>
-            <a:off x="640080" y="1645920"/>
-            <a:ext cx="11064240" cy="731520"/>
+            <a:off x="640080" y="1572768"/>
+            <a:ext cx="11064240" cy="566928"/>
           </a:xfrm>
           <a:prstGeom prst="roundRect">
             <a:avLst>
-              <a:gd name="adj" fmla="val 12500"/>
+              <a:gd name="adj" fmla="val 14516"/>
             </a:avLst>
           </a:prstGeom>
           <a:solidFill>
@@ -11978,8 +11978,8 @@
         </p:nvSpPr>
         <p:spPr>
           <a:xfrm>
-            <a:off x="868680" y="1792224"/>
-            <a:ext cx="1417320" cy="438912"/>
+            <a:off x="868680" y="1655064"/>
+            <a:ext cx="1463040" cy="402336"/>
           </a:xfrm>
           <a:prstGeom prst="roundRect">
             <a:avLst>
@@ -12000,8 +12000,8 @@
         </p:nvSpPr>
         <p:spPr>
           <a:xfrm>
-            <a:off x="868680" y="1792224"/>
-            <a:ext cx="1417320" cy="438912"/>
+            <a:off x="868680" y="1655064"/>
+            <a:ext cx="1463040" cy="402336"/>
           </a:xfrm>
           <a:prstGeom prst="rect">
             <a:avLst/>
@@ -12017,15 +12017,54 @@
               <a:buNone/>
             </a:pPr>
             <a:r>
+              <a:rPr lang="en-US" sz="1150" b="1" dirty="0">
+                <a:solidFill>
+                  <a:srgbClr val="FFFFFF"/>
+                </a:solidFill>
+                <a:latin typeface="Meiryo" pitchFamily="34" charset="0"/>
+                <a:ea typeface="Meiryo" pitchFamily="34" charset="-122"/>
+                <a:cs typeface="Meiryo" pitchFamily="34" charset="-120"/>
+              </a:rPr>
+              <a:t>基本編</a:t>
+            </a:r>
+            <a:endParaRPr lang="en-US" sz="1150" dirty="0"/>
+          </a:p>
+        </p:txBody>
+      </p:sp>
+      <p:sp>
+        <p:nvSpPr>
+          <p:cNvPr id="8" name="Text 6"/>
+          <p:cNvSpPr/>
+          <p:nvPr/>
+        </p:nvSpPr>
+        <p:spPr>
+          <a:xfrm>
+            <a:off x="2514600" y="1700784"/>
+            <a:ext cx="4663440" cy="310896"/>
+          </a:xfrm>
+          <a:prstGeom prst="rect">
+            <a:avLst/>
+          </a:prstGeom>
+          <a:noFill/>
+          <a:ln/>
+        </p:spPr>
+        <p:txBody>
+          <a:bodyPr wrap="square" lIns="0" tIns="0" rIns="0" bIns="0" rtlCol="0" anchor="ctr"/>
+          <a:lstStyle/>
+          <a:p>
+            <a:pPr indent="0" marL="0">
+              <a:buNone/>
+            </a:pPr>
+            <a:r>
               <a:rPr lang="en-US" sz="1250" b="1" dirty="0">
                 <a:solidFill>
-                  <a:srgbClr val="FFFFFF"/>
-                </a:solidFill>
-                <a:latin typeface="Meiryo" pitchFamily="34" charset="0"/>
-                <a:ea typeface="Meiryo" pitchFamily="34" charset="-122"/>
-                <a:cs typeface="Meiryo" pitchFamily="34" charset="-120"/>
-              </a:rPr>
-              <a:t>基本編</a:t>
+                  <a:srgbClr val="264653"/>
+                </a:solidFill>
+                <a:latin typeface="Meiryo" pitchFamily="34" charset="0"/>
+                <a:ea typeface="Meiryo" pitchFamily="34" charset="-122"/>
+                <a:cs typeface="Meiryo" pitchFamily="34" charset="-120"/>
+              </a:rPr>
+              <a:t>★ASPATH_サイト運用マニュアル_基本編</a:t>
             </a:r>
             <a:endParaRPr lang="en-US" sz="1250" dirty="0"/>
           </a:p>
@@ -12033,14 +12072,14 @@
       </p:sp>
       <p:sp>
         <p:nvSpPr>
-          <p:cNvPr id="8" name="Text 6"/>
-          <p:cNvSpPr/>
-          <p:nvPr/>
-        </p:nvSpPr>
-        <p:spPr>
-          <a:xfrm>
-            <a:off x="2468880" y="1847088"/>
-            <a:ext cx="4572000" cy="320040"/>
+          <p:cNvPr id="9" name="Text 7"/>
+          <p:cNvSpPr/>
+          <p:nvPr/>
+        </p:nvSpPr>
+        <p:spPr>
+          <a:xfrm>
+            <a:off x="7315200" y="1709928"/>
+            <a:ext cx="4206240" cy="310896"/>
           </a:xfrm>
           <a:prstGeom prst="rect">
             <a:avLst/>
@@ -12056,46 +12095,7 @@
               <a:buNone/>
             </a:pPr>
             <a:r>
-              <a:rPr lang="en-US" sz="1300" b="1" dirty="0">
-                <a:solidFill>
-                  <a:srgbClr val="264653"/>
-                </a:solidFill>
-                <a:latin typeface="Meiryo" pitchFamily="34" charset="0"/>
-                <a:ea typeface="Meiryo" pitchFamily="34" charset="-122"/>
-                <a:cs typeface="Meiryo" pitchFamily="34" charset="-120"/>
-              </a:rPr>
-              <a:t>★ASPATH_サイト運用マニュアル_基本編</a:t>
-            </a:r>
-            <a:endParaRPr lang="en-US" sz="1300" dirty="0"/>
-          </a:p>
-        </p:txBody>
-      </p:sp>
-      <p:sp>
-        <p:nvSpPr>
-          <p:cNvPr id="9" name="Text 7"/>
-          <p:cNvSpPr/>
-          <p:nvPr/>
-        </p:nvSpPr>
-        <p:spPr>
-          <a:xfrm>
-            <a:off x="7223760" y="1865376"/>
-            <a:ext cx="4297680" cy="320040"/>
-          </a:xfrm>
-          <a:prstGeom prst="rect">
-            <a:avLst/>
-          </a:prstGeom>
-          <a:noFill/>
-          <a:ln/>
-        </p:spPr>
-        <p:txBody>
-          <a:bodyPr wrap="square" lIns="0" tIns="0" rIns="0" bIns="0" rtlCol="0" anchor="ctr"/>
-          <a:lstStyle/>
-          <a:p>
-            <a:pPr indent="0" marL="0">
-              <a:buNone/>
-            </a:pPr>
-            <a:r>
-              <a:rPr lang="en-US" sz="1150" dirty="0">
+              <a:rPr lang="en-US" sz="1100" dirty="0">
                 <a:solidFill>
                   <a:srgbClr val="5E7681"/>
                 </a:solidFill>
@@ -12105,7 +12105,7 @@
               </a:rPr>
               <a:t>日々の更新。画面写真つき。まずこれ</a:t>
             </a:r>
-            <a:endParaRPr lang="en-US" sz="1150" dirty="0"/>
+            <a:endParaRPr lang="en-US" sz="1100" dirty="0"/>
           </a:p>
         </p:txBody>
       </p:sp>
@@ -12117,12 +12117,12 @@
         </p:nvSpPr>
         <p:spPr>
           <a:xfrm>
-            <a:off x="640080" y="2450592"/>
-            <a:ext cx="11064240" cy="731520"/>
+            <a:off x="640080" y="2194560"/>
+            <a:ext cx="11064240" cy="566928"/>
           </a:xfrm>
           <a:prstGeom prst="roundRect">
             <a:avLst>
-              <a:gd name="adj" fmla="val 12500"/>
+              <a:gd name="adj" fmla="val 14516"/>
             </a:avLst>
           </a:prstGeom>
           <a:solidFill>
@@ -12139,8 +12139,8 @@
         </p:nvSpPr>
         <p:spPr>
           <a:xfrm>
-            <a:off x="868680" y="2596896"/>
-            <a:ext cx="1417320" cy="438912"/>
+            <a:off x="868680" y="2276856"/>
+            <a:ext cx="1463040" cy="402336"/>
           </a:xfrm>
           <a:prstGeom prst="roundRect">
             <a:avLst>
@@ -12161,8 +12161,8 @@
         </p:nvSpPr>
         <p:spPr>
           <a:xfrm>
-            <a:off x="868680" y="2596896"/>
-            <a:ext cx="1417320" cy="438912"/>
+            <a:off x="868680" y="2276856"/>
+            <a:ext cx="1463040" cy="402336"/>
           </a:xfrm>
           <a:prstGeom prst="rect">
             <a:avLst/>
@@ -12178,15 +12178,54 @@
               <a:buNone/>
             </a:pPr>
             <a:r>
+              <a:rPr lang="en-US" sz="1150" b="1" dirty="0">
+                <a:solidFill>
+                  <a:srgbClr val="FFFFFF"/>
+                </a:solidFill>
+                <a:latin typeface="Meiryo" pitchFamily="34" charset="0"/>
+                <a:ea typeface="Meiryo" pitchFamily="34" charset="-122"/>
+                <a:cs typeface="Meiryo" pitchFamily="34" charset="-120"/>
+              </a:rPr>
+              <a:t>応用編</a:t>
+            </a:r>
+            <a:endParaRPr lang="en-US" sz="1150" dirty="0"/>
+          </a:p>
+        </p:txBody>
+      </p:sp>
+      <p:sp>
+        <p:nvSpPr>
+          <p:cNvPr id="13" name="Text 11"/>
+          <p:cNvSpPr/>
+          <p:nvPr/>
+        </p:nvSpPr>
+        <p:spPr>
+          <a:xfrm>
+            <a:off x="2514600" y="2322576"/>
+            <a:ext cx="4663440" cy="310896"/>
+          </a:xfrm>
+          <a:prstGeom prst="rect">
+            <a:avLst/>
+          </a:prstGeom>
+          <a:noFill/>
+          <a:ln/>
+        </p:spPr>
+        <p:txBody>
+          <a:bodyPr wrap="square" lIns="0" tIns="0" rIns="0" bIns="0" rtlCol="0" anchor="ctr"/>
+          <a:lstStyle/>
+          <a:p>
+            <a:pPr indent="0" marL="0">
+              <a:buNone/>
+            </a:pPr>
+            <a:r>
               <a:rPr lang="en-US" sz="1250" b="1" dirty="0">
                 <a:solidFill>
-                  <a:srgbClr val="FFFFFF"/>
-                </a:solidFill>
-                <a:latin typeface="Meiryo" pitchFamily="34" charset="0"/>
-                <a:ea typeface="Meiryo" pitchFamily="34" charset="-122"/>
-                <a:cs typeface="Meiryo" pitchFamily="34" charset="-120"/>
-              </a:rPr>
-              <a:t>応用編</a:t>
+                  <a:srgbClr val="264653"/>
+                </a:solidFill>
+                <a:latin typeface="Meiryo" pitchFamily="34" charset="0"/>
+                <a:ea typeface="Meiryo" pitchFamily="34" charset="-122"/>
+                <a:cs typeface="Meiryo" pitchFamily="34" charset="-120"/>
+              </a:rPr>
+              <a:t>★ASPATH_サイト運用マニュアル_応用編</a:t>
             </a:r>
             <a:endParaRPr lang="en-US" sz="1250" dirty="0"/>
           </a:p>
@@ -12194,14 +12233,14 @@
       </p:sp>
       <p:sp>
         <p:nvSpPr>
-          <p:cNvPr id="13" name="Text 11"/>
-          <p:cNvSpPr/>
-          <p:nvPr/>
-        </p:nvSpPr>
-        <p:spPr>
-          <a:xfrm>
-            <a:off x="2468880" y="2651760"/>
-            <a:ext cx="4572000" cy="320040"/>
+          <p:cNvPr id="14" name="Text 12"/>
+          <p:cNvSpPr/>
+          <p:nvPr/>
+        </p:nvSpPr>
+        <p:spPr>
+          <a:xfrm>
+            <a:off x="7315200" y="2331720"/>
+            <a:ext cx="4206240" cy="310896"/>
           </a:xfrm>
           <a:prstGeom prst="rect">
             <a:avLst/>
@@ -12217,46 +12256,7 @@
               <a:buNone/>
             </a:pPr>
             <a:r>
-              <a:rPr lang="en-US" sz="1300" b="1" dirty="0">
-                <a:solidFill>
-                  <a:srgbClr val="264653"/>
-                </a:solidFill>
-                <a:latin typeface="Meiryo" pitchFamily="34" charset="0"/>
-                <a:ea typeface="Meiryo" pitchFamily="34" charset="-122"/>
-                <a:cs typeface="Meiryo" pitchFamily="34" charset="-120"/>
-              </a:rPr>
-              <a:t>★ASPATH_サイト運用マニュアル_応用編</a:t>
-            </a:r>
-            <a:endParaRPr lang="en-US" sz="1300" dirty="0"/>
-          </a:p>
-        </p:txBody>
-      </p:sp>
-      <p:sp>
-        <p:nvSpPr>
-          <p:cNvPr id="14" name="Text 12"/>
-          <p:cNvSpPr/>
-          <p:nvPr/>
-        </p:nvSpPr>
-        <p:spPr>
-          <a:xfrm>
-            <a:off x="7223760" y="2670048"/>
-            <a:ext cx="4297680" cy="320040"/>
-          </a:xfrm>
-          <a:prstGeom prst="rect">
-            <a:avLst/>
-          </a:prstGeom>
-          <a:noFill/>
-          <a:ln/>
-        </p:spPr>
-        <p:txBody>
-          <a:bodyPr wrap="square" lIns="0" tIns="0" rIns="0" bIns="0" rtlCol="0" anchor="ctr"/>
-          <a:lstStyle/>
-          <a:p>
-            <a:pPr indent="0" marL="0">
-              <a:buNone/>
-            </a:pPr>
-            <a:r>
-              <a:rPr lang="en-US" sz="1150" dirty="0">
+              <a:rPr lang="en-US" sz="1100" dirty="0">
                 <a:solidFill>
                   <a:srgbClr val="5E7681"/>
                 </a:solidFill>
@@ -12264,9 +12264,9 @@
                 <a:ea typeface="Meiryo" pitchFamily="34" charset="-122"/>
                 <a:cs typeface="Meiryo" pitchFamily="34" charset="-120"/>
               </a:rPr>
-              <a:t>壊さない触り方・検索対策・AIの使い方</a:t>
-            </a:r>
-            <a:endParaRPr lang="en-US" sz="1150" dirty="0"/>
+              <a:t>壊さない触り方と、検索対策</a:t>
+            </a:r>
+            <a:endParaRPr lang="en-US" sz="1100" dirty="0"/>
           </a:p>
         </p:txBody>
       </p:sp>
@@ -12278,12 +12278,12 @@
         </p:nvSpPr>
         <p:spPr>
           <a:xfrm>
-            <a:off x="640080" y="3255264"/>
-            <a:ext cx="11064240" cy="731520"/>
+            <a:off x="640080" y="2816352"/>
+            <a:ext cx="11064240" cy="566928"/>
           </a:xfrm>
           <a:prstGeom prst="roundRect">
             <a:avLst>
-              <a:gd name="adj" fmla="val 12500"/>
+              <a:gd name="adj" fmla="val 14516"/>
             </a:avLst>
           </a:prstGeom>
           <a:solidFill>
@@ -12300,8 +12300,8 @@
         </p:nvSpPr>
         <p:spPr>
           <a:xfrm>
-            <a:off x="868680" y="3401568"/>
-            <a:ext cx="1417320" cy="438912"/>
+            <a:off x="868680" y="2898648"/>
+            <a:ext cx="1463040" cy="402336"/>
           </a:xfrm>
           <a:prstGeom prst="roundRect">
             <a:avLst>
@@ -12309,7 +12309,7 @@
             </a:avLst>
           </a:prstGeom>
           <a:solidFill>
-            <a:srgbClr val="264653"/>
+            <a:srgbClr val="B4453C"/>
           </a:solidFill>
           <a:ln/>
         </p:spPr>
@@ -12322,8 +12322,8 @@
         </p:nvSpPr>
         <p:spPr>
           <a:xfrm>
-            <a:off x="868680" y="3401568"/>
-            <a:ext cx="1417320" cy="438912"/>
+            <a:off x="868680" y="2898648"/>
+            <a:ext cx="1463040" cy="402336"/>
           </a:xfrm>
           <a:prstGeom prst="rect">
             <a:avLst/>
@@ -12339,15 +12339,54 @@
               <a:buNone/>
             </a:pPr>
             <a:r>
+              <a:rPr lang="en-US" sz="1150" b="1" dirty="0">
+                <a:solidFill>
+                  <a:srgbClr val="FFFFFF"/>
+                </a:solidFill>
+                <a:latin typeface="Meiryo" pitchFamily="34" charset="0"/>
+                <a:ea typeface="Meiryo" pitchFamily="34" charset="-122"/>
+                <a:cs typeface="Meiryo" pitchFamily="34" charset="-120"/>
+              </a:rPr>
+              <a:t>最応用編</a:t>
+            </a:r>
+            <a:endParaRPr lang="en-US" sz="1150" dirty="0"/>
+          </a:p>
+        </p:txBody>
+      </p:sp>
+      <p:sp>
+        <p:nvSpPr>
+          <p:cNvPr id="18" name="Text 16"/>
+          <p:cNvSpPr/>
+          <p:nvPr/>
+        </p:nvSpPr>
+        <p:spPr>
+          <a:xfrm>
+            <a:off x="2514600" y="2944368"/>
+            <a:ext cx="4663440" cy="310896"/>
+          </a:xfrm>
+          <a:prstGeom prst="rect">
+            <a:avLst/>
+          </a:prstGeom>
+          <a:noFill/>
+          <a:ln/>
+        </p:spPr>
+        <p:txBody>
+          <a:bodyPr wrap="square" lIns="0" tIns="0" rIns="0" bIns="0" rtlCol="0" anchor="ctr"/>
+          <a:lstStyle/>
+          <a:p>
+            <a:pPr indent="0" marL="0">
+              <a:buNone/>
+            </a:pPr>
+            <a:r>
               <a:rPr lang="en-US" sz="1250" b="1" dirty="0">
                 <a:solidFill>
-                  <a:srgbClr val="FFFFFF"/>
-                </a:solidFill>
-                <a:latin typeface="Meiryo" pitchFamily="34" charset="0"/>
-                <a:ea typeface="Meiryo" pitchFamily="34" charset="-122"/>
-                <a:cs typeface="Meiryo" pitchFamily="34" charset="-120"/>
-              </a:rPr>
-              <a:t>この資料</a:t>
+                  <a:srgbClr val="264653"/>
+                </a:solidFill>
+                <a:latin typeface="Meiryo" pitchFamily="34" charset="0"/>
+                <a:ea typeface="Meiryo" pitchFamily="34" charset="-122"/>
+                <a:cs typeface="Meiryo" pitchFamily="34" charset="-120"/>
+              </a:rPr>
+              <a:t>★ASPATH_サイト運用マニュアル_最応用編</a:t>
             </a:r>
             <a:endParaRPr lang="en-US" sz="1250" dirty="0"/>
           </a:p>
@@ -12355,14 +12394,14 @@
       </p:sp>
       <p:sp>
         <p:nvSpPr>
-          <p:cNvPr id="18" name="Text 16"/>
-          <p:cNvSpPr/>
-          <p:nvPr/>
-        </p:nvSpPr>
-        <p:spPr>
-          <a:xfrm>
-            <a:off x="2468880" y="3456432"/>
-            <a:ext cx="4572000" cy="320040"/>
+          <p:cNvPr id="19" name="Text 17"/>
+          <p:cNvSpPr/>
+          <p:nvPr/>
+        </p:nvSpPr>
+        <p:spPr>
+          <a:xfrm>
+            <a:off x="7315200" y="2953512"/>
+            <a:ext cx="4206240" cy="310896"/>
           </a:xfrm>
           <a:prstGeom prst="rect">
             <a:avLst/>
@@ -12378,46 +12417,7 @@
               <a:buNone/>
             </a:pPr>
             <a:r>
-              <a:rPr lang="en-US" sz="1300" b="1" dirty="0">
-                <a:solidFill>
-                  <a:srgbClr val="264653"/>
-                </a:solidFill>
-                <a:latin typeface="Meiryo" pitchFamily="34" charset="0"/>
-                <a:ea typeface="Meiryo" pitchFamily="34" charset="-122"/>
-                <a:cs typeface="Meiryo" pitchFamily="34" charset="-120"/>
-              </a:rPr>
-              <a:t>ASPATH_サイト更新マニュアル</a:t>
-            </a:r>
-            <a:endParaRPr lang="en-US" sz="1300" dirty="0"/>
-          </a:p>
-        </p:txBody>
-      </p:sp>
-      <p:sp>
-        <p:nvSpPr>
-          <p:cNvPr id="19" name="Text 17"/>
-          <p:cNvSpPr/>
-          <p:nvPr/>
-        </p:nvSpPr>
-        <p:spPr>
-          <a:xfrm>
-            <a:off x="7223760" y="3474720"/>
-            <a:ext cx="4297680" cy="320040"/>
-          </a:xfrm>
-          <a:prstGeom prst="rect">
-            <a:avLst/>
-          </a:prstGeom>
-          <a:noFill/>
-          <a:ln/>
-        </p:spPr>
-        <p:txBody>
-          <a:bodyPr wrap="square" lIns="0" tIns="0" rIns="0" bIns="0" rtlCol="0" anchor="ctr"/>
-          <a:lstStyle/>
-          <a:p>
-            <a:pPr indent="0" marL="0">
-              <a:buNone/>
-            </a:pPr>
-            <a:r>
-              <a:rPr lang="en-US" sz="1150" dirty="0">
+              <a:rPr lang="en-US" sz="1100" dirty="0">
                 <a:solidFill>
                   <a:srgbClr val="5E7681"/>
                 </a:solidFill>
@@ -12425,9 +12425,9 @@
                 <a:ea typeface="Meiryo" pitchFamily="34" charset="-122"/>
                 <a:cs typeface="Meiryo" pitchFamily="34" charset="-120"/>
               </a:rPr>
-              <a:t>全体像と、PC作業の手順。開発担当も見る</a:t>
-            </a:r>
-            <a:endParaRPr lang="en-US" sz="1150" dirty="0"/>
+              <a:t>公開後の点検と、直し方</a:t>
+            </a:r>
+            <a:endParaRPr lang="en-US" sz="1100" dirty="0"/>
           </a:p>
         </p:txBody>
       </p:sp>
@@ -12439,12 +12439,12 @@
         </p:nvSpPr>
         <p:spPr>
           <a:xfrm>
-            <a:off x="640080" y="4059936"/>
-            <a:ext cx="11064240" cy="731520"/>
+            <a:off x="640080" y="3438144"/>
+            <a:ext cx="11064240" cy="566928"/>
           </a:xfrm>
           <a:prstGeom prst="roundRect">
             <a:avLst>
-              <a:gd name="adj" fmla="val 12500"/>
+              <a:gd name="adj" fmla="val 14516"/>
             </a:avLst>
           </a:prstGeom>
           <a:solidFill>
@@ -12461,8 +12461,8 @@
         </p:nvSpPr>
         <p:spPr>
           <a:xfrm>
-            <a:off x="868680" y="4206240"/>
-            <a:ext cx="1417320" cy="438912"/>
+            <a:off x="868680" y="3520440"/>
+            <a:ext cx="1463040" cy="402336"/>
           </a:xfrm>
           <a:prstGeom prst="roundRect">
             <a:avLst>
@@ -12470,7 +12470,7 @@
             </a:avLst>
           </a:prstGeom>
           <a:solidFill>
-            <a:srgbClr val="2E7D32"/>
+            <a:srgbClr val="5B5391"/>
           </a:solidFill>
           <a:ln/>
         </p:spPr>
@@ -12483,8 +12483,8 @@
         </p:nvSpPr>
         <p:spPr>
           <a:xfrm>
-            <a:off x="868680" y="4206240"/>
-            <a:ext cx="1417320" cy="438912"/>
+            <a:off x="868680" y="3520440"/>
+            <a:ext cx="1463040" cy="402336"/>
           </a:xfrm>
           <a:prstGeom prst="rect">
             <a:avLst/>
@@ -12500,15 +12500,54 @@
               <a:buNone/>
             </a:pPr>
             <a:r>
+              <a:rPr lang="en-US" sz="1150" b="1" dirty="0">
+                <a:solidFill>
+                  <a:srgbClr val="FFFFFF"/>
+                </a:solidFill>
+                <a:latin typeface="Meiryo" pitchFamily="34" charset="0"/>
+                <a:ea typeface="Meiryo" pitchFamily="34" charset="-122"/>
+                <a:cs typeface="Meiryo" pitchFamily="34" charset="-120"/>
+              </a:rPr>
+              <a:t>AI活用編</a:t>
+            </a:r>
+            <a:endParaRPr lang="en-US" sz="1150" dirty="0"/>
+          </a:p>
+        </p:txBody>
+      </p:sp>
+      <p:sp>
+        <p:nvSpPr>
+          <p:cNvPr id="23" name="Text 21"/>
+          <p:cNvSpPr/>
+          <p:nvPr/>
+        </p:nvSpPr>
+        <p:spPr>
+          <a:xfrm>
+            <a:off x="2514600" y="3566160"/>
+            <a:ext cx="4663440" cy="310896"/>
+          </a:xfrm>
+          <a:prstGeom prst="rect">
+            <a:avLst/>
+          </a:prstGeom>
+          <a:noFill/>
+          <a:ln/>
+        </p:spPr>
+        <p:txBody>
+          <a:bodyPr wrap="square" lIns="0" tIns="0" rIns="0" bIns="0" rtlCol="0" anchor="ctr"/>
+          <a:lstStyle/>
+          <a:p>
+            <a:pPr indent="0" marL="0">
+              <a:buNone/>
+            </a:pPr>
+            <a:r>
               <a:rPr lang="en-US" sz="1250" b="1" dirty="0">
                 <a:solidFill>
-                  <a:srgbClr val="FFFFFF"/>
-                </a:solidFill>
-                <a:latin typeface="Meiryo" pitchFamily="34" charset="0"/>
-                <a:ea typeface="Meiryo" pitchFamily="34" charset="-122"/>
-                <a:cs typeface="Meiryo" pitchFamily="34" charset="-120"/>
-              </a:rPr>
-              <a:t>やさしい版</a:t>
+                  <a:srgbClr val="264653"/>
+                </a:solidFill>
+                <a:latin typeface="Meiryo" pitchFamily="34" charset="0"/>
+                <a:ea typeface="Meiryo" pitchFamily="34" charset="-122"/>
+                <a:cs typeface="Meiryo" pitchFamily="34" charset="-120"/>
+              </a:rPr>
+              <a:t>★ASPATH_サイト運用マニュアル_AI活用編</a:t>
             </a:r>
             <a:endParaRPr lang="en-US" sz="1250" dirty="0"/>
           </a:p>
@@ -12516,14 +12555,14 @@
       </p:sp>
       <p:sp>
         <p:nvSpPr>
-          <p:cNvPr id="23" name="Text 21"/>
-          <p:cNvSpPr/>
-          <p:nvPr/>
-        </p:nvSpPr>
-        <p:spPr>
-          <a:xfrm>
-            <a:off x="2468880" y="4261104"/>
-            <a:ext cx="4572000" cy="320040"/>
+          <p:cNvPr id="24" name="Text 22"/>
+          <p:cNvSpPr/>
+          <p:nvPr/>
+        </p:nvSpPr>
+        <p:spPr>
+          <a:xfrm>
+            <a:off x="7315200" y="3575304"/>
+            <a:ext cx="4206240" cy="310896"/>
           </a:xfrm>
           <a:prstGeom prst="rect">
             <a:avLst/>
@@ -12539,46 +12578,7 @@
               <a:buNone/>
             </a:pPr>
             <a:r>
-              <a:rPr lang="en-US" sz="1300" b="1" dirty="0">
-                <a:solidFill>
-                  <a:srgbClr val="264653"/>
-                </a:solidFill>
-                <a:latin typeface="Meiryo" pitchFamily="34" charset="0"/>
-                <a:ea typeface="Meiryo" pitchFamily="34" charset="-122"/>
-                <a:cs typeface="Meiryo" pitchFamily="34" charset="-120"/>
-              </a:rPr>
-              <a:t>山口様向け_ページの直し方</a:t>
-            </a:r>
-            <a:endParaRPr lang="en-US" sz="1300" dirty="0"/>
-          </a:p>
-        </p:txBody>
-      </p:sp>
-      <p:sp>
-        <p:nvSpPr>
-          <p:cNvPr id="24" name="Text 22"/>
-          <p:cNvSpPr/>
-          <p:nvPr/>
-        </p:nvSpPr>
-        <p:spPr>
-          <a:xfrm>
-            <a:off x="7223760" y="4279392"/>
-            <a:ext cx="4297680" cy="320040"/>
-          </a:xfrm>
-          <a:prstGeom prst="rect">
-            <a:avLst/>
-          </a:prstGeom>
-          <a:noFill/>
-          <a:ln/>
-        </p:spPr>
-        <p:txBody>
-          <a:bodyPr wrap="square" lIns="0" tIns="0" rIns="0" bIns="0" rtlCol="0" anchor="ctr"/>
-          <a:lstStyle/>
-          <a:p>
-            <a:pPr indent="0" marL="0">
-              <a:buNone/>
-            </a:pPr>
-            <a:r>
-              <a:rPr lang="en-US" sz="1150" dirty="0">
+              <a:rPr lang="en-US" sz="1100" dirty="0">
                 <a:solidFill>
                   <a:srgbClr val="5E7681"/>
                 </a:solidFill>
@@ -12586,9 +12586,9 @@
                 <a:ea typeface="Meiryo" pitchFamily="34" charset="-122"/>
                 <a:cs typeface="Meiryo" pitchFamily="34" charset="-120"/>
               </a:rPr>
-              <a:t>記事の書き方を、やさしく。連絡の文例つき</a:t>
-            </a:r>
-            <a:endParaRPr lang="en-US" sz="1150" dirty="0"/>
+              <a:t>そのまま使えるプロンプト8種</a:t>
+            </a:r>
+            <a:endParaRPr lang="en-US" sz="1100" dirty="0"/>
           </a:p>
         </p:txBody>
       </p:sp>
@@ -12600,12 +12600,12 @@
         </p:nvSpPr>
         <p:spPr>
           <a:xfrm>
-            <a:off x="640080" y="4864608"/>
-            <a:ext cx="11064240" cy="731520"/>
+            <a:off x="640080" y="4059936"/>
+            <a:ext cx="11064240" cy="566928"/>
           </a:xfrm>
           <a:prstGeom prst="roundRect">
             <a:avLst>
-              <a:gd name="adj" fmla="val 12500"/>
+              <a:gd name="adj" fmla="val 14516"/>
             </a:avLst>
           </a:prstGeom>
           <a:solidFill>
@@ -12622,8 +12622,8 @@
         </p:nvSpPr>
         <p:spPr>
           <a:xfrm>
-            <a:off x="868680" y="5010912"/>
-            <a:ext cx="1417320" cy="438912"/>
+            <a:off x="868680" y="4142232"/>
+            <a:ext cx="1463040" cy="402336"/>
           </a:xfrm>
           <a:prstGeom prst="roundRect">
             <a:avLst>
@@ -12631,7 +12631,7 @@
             </a:avLst>
           </a:prstGeom>
           <a:solidFill>
-            <a:srgbClr val="5E7681"/>
+            <a:srgbClr val="264653"/>
           </a:solidFill>
           <a:ln/>
         </p:spPr>
@@ -12644,8 +12644,8 @@
         </p:nvSpPr>
         <p:spPr>
           <a:xfrm>
-            <a:off x="868680" y="5010912"/>
-            <a:ext cx="1417320" cy="438912"/>
+            <a:off x="868680" y="4142232"/>
+            <a:ext cx="1463040" cy="402336"/>
           </a:xfrm>
           <a:prstGeom prst="rect">
             <a:avLst/>
@@ -12661,15 +12661,54 @@
               <a:buNone/>
             </a:pPr>
             <a:r>
+              <a:rPr lang="en-US" sz="1150" b="1" dirty="0">
+                <a:solidFill>
+                  <a:srgbClr val="FFFFFF"/>
+                </a:solidFill>
+                <a:latin typeface="Meiryo" pitchFamily="34" charset="0"/>
+                <a:ea typeface="Meiryo" pitchFamily="34" charset="-122"/>
+                <a:cs typeface="Meiryo" pitchFamily="34" charset="-120"/>
+              </a:rPr>
+              <a:t>この資料</a:t>
+            </a:r>
+            <a:endParaRPr lang="en-US" sz="1150" dirty="0"/>
+          </a:p>
+        </p:txBody>
+      </p:sp>
+      <p:sp>
+        <p:nvSpPr>
+          <p:cNvPr id="28" name="Text 26"/>
+          <p:cNvSpPr/>
+          <p:nvPr/>
+        </p:nvSpPr>
+        <p:spPr>
+          <a:xfrm>
+            <a:off x="2514600" y="4187952"/>
+            <a:ext cx="4663440" cy="310896"/>
+          </a:xfrm>
+          <a:prstGeom prst="rect">
+            <a:avLst/>
+          </a:prstGeom>
+          <a:noFill/>
+          <a:ln/>
+        </p:spPr>
+        <p:txBody>
+          <a:bodyPr wrap="square" lIns="0" tIns="0" rIns="0" bIns="0" rtlCol="0" anchor="ctr"/>
+          <a:lstStyle/>
+          <a:p>
+            <a:pPr indent="0" marL="0">
+              <a:buNone/>
+            </a:pPr>
+            <a:r>
               <a:rPr lang="en-US" sz="1250" b="1" dirty="0">
                 <a:solidFill>
-                  <a:srgbClr val="FFFFFF"/>
-                </a:solidFill>
-                <a:latin typeface="Meiryo" pitchFamily="34" charset="0"/>
-                <a:ea typeface="Meiryo" pitchFamily="34" charset="-122"/>
-                <a:cs typeface="Meiryo" pitchFamily="34" charset="-120"/>
-              </a:rPr>
-              <a:t>固定ページ</a:t>
+                  <a:srgbClr val="264653"/>
+                </a:solidFill>
+                <a:latin typeface="Meiryo" pitchFamily="34" charset="0"/>
+                <a:ea typeface="Meiryo" pitchFamily="34" charset="-122"/>
+                <a:cs typeface="Meiryo" pitchFamily="34" charset="-120"/>
+              </a:rPr>
+              <a:t>ASPATH_サイト更新マニュアル</a:t>
             </a:r>
             <a:endParaRPr lang="en-US" sz="1250" dirty="0"/>
           </a:p>
@@ -12677,14 +12716,14 @@
       </p:sp>
       <p:sp>
         <p:nvSpPr>
-          <p:cNvPr id="28" name="Text 26"/>
-          <p:cNvSpPr/>
-          <p:nvPr/>
-        </p:nvSpPr>
-        <p:spPr>
-          <a:xfrm>
-            <a:off x="2468880" y="5065776"/>
-            <a:ext cx="4572000" cy="320040"/>
+          <p:cNvPr id="29" name="Text 27"/>
+          <p:cNvSpPr/>
+          <p:nvPr/>
+        </p:nvSpPr>
+        <p:spPr>
+          <a:xfrm>
+            <a:off x="7315200" y="4197096"/>
+            <a:ext cx="4206240" cy="310896"/>
           </a:xfrm>
           <a:prstGeom prst="rect">
             <a:avLst/>
@@ -12700,46 +12739,7 @@
               <a:buNone/>
             </a:pPr>
             <a:r>
-              <a:rPr lang="en-US" sz="1300" b="1" dirty="0">
-                <a:solidFill>
-                  <a:srgbClr val="264653"/>
-                </a:solidFill>
-                <a:latin typeface="Meiryo" pitchFamily="34" charset="0"/>
-                <a:ea typeface="Meiryo" pitchFamily="34" charset="-122"/>
-                <a:cs typeface="Meiryo" pitchFamily="34" charset="-120"/>
-              </a:rPr>
-              <a:t>山口様向け_ASPATHについて_文章の直し方</a:t>
-            </a:r>
-            <a:endParaRPr lang="en-US" sz="1300" dirty="0"/>
-          </a:p>
-        </p:txBody>
-      </p:sp>
-      <p:sp>
-        <p:nvSpPr>
-          <p:cNvPr id="29" name="Text 27"/>
-          <p:cNvSpPr/>
-          <p:nvPr/>
-        </p:nvSpPr>
-        <p:spPr>
-          <a:xfrm>
-            <a:off x="7223760" y="5084064"/>
-            <a:ext cx="4297680" cy="320040"/>
-          </a:xfrm>
-          <a:prstGeom prst="rect">
-            <a:avLst/>
-          </a:prstGeom>
-          <a:noFill/>
-          <a:ln/>
-        </p:spPr>
-        <p:txBody>
-          <a:bodyPr wrap="square" lIns="0" tIns="0" rIns="0" bIns="0" rtlCol="0" anchor="ctr"/>
-          <a:lstStyle/>
-          <a:p>
-            <a:pPr indent="0" marL="0">
-              <a:buNone/>
-            </a:pPr>
-            <a:r>
-              <a:rPr lang="en-US" sz="1150" dirty="0">
+              <a:rPr lang="en-US" sz="1100" dirty="0">
                 <a:solidFill>
                   <a:srgbClr val="5E7681"/>
                 </a:solidFill>
@@ -12747,9 +12747,9 @@
                 <a:ea typeface="Meiryo" pitchFamily="34" charset="-122"/>
                 <a:cs typeface="Meiryo" pitchFamily="34" charset="-120"/>
               </a:rPr>
-              <a:t>「ASPATHについて」だけの専用手順</a:t>
-            </a:r>
-            <a:endParaRPr lang="en-US" sz="1150" dirty="0"/>
+              <a:t>全体像と、PC作業の手順。開発担当も見る</a:t>
+            </a:r>
+            <a:endParaRPr lang="en-US" sz="1100" dirty="0"/>
           </a:p>
         </p:txBody>
       </p:sp>
@@ -12761,12 +12761,12 @@
         </p:nvSpPr>
         <p:spPr>
           <a:xfrm>
-            <a:off x="640080" y="5669280"/>
-            <a:ext cx="11064240" cy="731520"/>
+            <a:off x="640080" y="4681728"/>
+            <a:ext cx="11064240" cy="566928"/>
           </a:xfrm>
           <a:prstGeom prst="roundRect">
             <a:avLst>
-              <a:gd name="adj" fmla="val 12500"/>
+              <a:gd name="adj" fmla="val 14516"/>
             </a:avLst>
           </a:prstGeom>
           <a:solidFill>
@@ -12783,8 +12783,8 @@
         </p:nvSpPr>
         <p:spPr>
           <a:xfrm>
-            <a:off x="868680" y="5815584"/>
-            <a:ext cx="1417320" cy="438912"/>
+            <a:off x="868680" y="4764024"/>
+            <a:ext cx="1463040" cy="402336"/>
           </a:xfrm>
           <a:prstGeom prst="roundRect">
             <a:avLst>
@@ -12792,6 +12792,167 @@
             </a:avLst>
           </a:prstGeom>
           <a:solidFill>
+            <a:srgbClr val="2E7D32"/>
+          </a:solidFill>
+          <a:ln/>
+        </p:spPr>
+      </p:sp>
+      <p:sp>
+        <p:nvSpPr>
+          <p:cNvPr id="32" name="Text 30"/>
+          <p:cNvSpPr/>
+          <p:nvPr/>
+        </p:nvSpPr>
+        <p:spPr>
+          <a:xfrm>
+            <a:off x="868680" y="4764024"/>
+            <a:ext cx="1463040" cy="402336"/>
+          </a:xfrm>
+          <a:prstGeom prst="rect">
+            <a:avLst/>
+          </a:prstGeom>
+          <a:noFill/>
+          <a:ln/>
+        </p:spPr>
+        <p:txBody>
+          <a:bodyPr wrap="square" lIns="0" tIns="0" rIns="0" bIns="0" rtlCol="0" anchor="ctr"/>
+          <a:lstStyle/>
+          <a:p>
+            <a:pPr algn="ctr" indent="0" marL="0">
+              <a:buNone/>
+            </a:pPr>
+            <a:r>
+              <a:rPr lang="en-US" sz="1150" b="1" dirty="0">
+                <a:solidFill>
+                  <a:srgbClr val="FFFFFF"/>
+                </a:solidFill>
+                <a:latin typeface="Meiryo" pitchFamily="34" charset="0"/>
+                <a:ea typeface="Meiryo" pitchFamily="34" charset="-122"/>
+                <a:cs typeface="Meiryo" pitchFamily="34" charset="-120"/>
+              </a:rPr>
+              <a:t>やさしい版</a:t>
+            </a:r>
+            <a:endParaRPr lang="en-US" sz="1150" dirty="0"/>
+          </a:p>
+        </p:txBody>
+      </p:sp>
+      <p:sp>
+        <p:nvSpPr>
+          <p:cNvPr id="33" name="Text 31"/>
+          <p:cNvSpPr/>
+          <p:nvPr/>
+        </p:nvSpPr>
+        <p:spPr>
+          <a:xfrm>
+            <a:off x="2514600" y="4809744"/>
+            <a:ext cx="4663440" cy="310896"/>
+          </a:xfrm>
+          <a:prstGeom prst="rect">
+            <a:avLst/>
+          </a:prstGeom>
+          <a:noFill/>
+          <a:ln/>
+        </p:spPr>
+        <p:txBody>
+          <a:bodyPr wrap="square" lIns="0" tIns="0" rIns="0" bIns="0" rtlCol="0" anchor="ctr"/>
+          <a:lstStyle/>
+          <a:p>
+            <a:pPr indent="0" marL="0">
+              <a:buNone/>
+            </a:pPr>
+            <a:r>
+              <a:rPr lang="en-US" sz="1250" b="1" dirty="0">
+                <a:solidFill>
+                  <a:srgbClr val="264653"/>
+                </a:solidFill>
+                <a:latin typeface="Meiryo" pitchFamily="34" charset="0"/>
+                <a:ea typeface="Meiryo" pitchFamily="34" charset="-122"/>
+                <a:cs typeface="Meiryo" pitchFamily="34" charset="-120"/>
+              </a:rPr>
+              <a:t>山口様向け_ページの直し方</a:t>
+            </a:r>
+            <a:endParaRPr lang="en-US" sz="1250" dirty="0"/>
+          </a:p>
+        </p:txBody>
+      </p:sp>
+      <p:sp>
+        <p:nvSpPr>
+          <p:cNvPr id="34" name="Text 32"/>
+          <p:cNvSpPr/>
+          <p:nvPr/>
+        </p:nvSpPr>
+        <p:spPr>
+          <a:xfrm>
+            <a:off x="7315200" y="4818888"/>
+            <a:ext cx="4206240" cy="310896"/>
+          </a:xfrm>
+          <a:prstGeom prst="rect">
+            <a:avLst/>
+          </a:prstGeom>
+          <a:noFill/>
+          <a:ln/>
+        </p:spPr>
+        <p:txBody>
+          <a:bodyPr wrap="square" lIns="0" tIns="0" rIns="0" bIns="0" rtlCol="0" anchor="ctr"/>
+          <a:lstStyle/>
+          <a:p>
+            <a:pPr indent="0" marL="0">
+              <a:buNone/>
+            </a:pPr>
+            <a:r>
+              <a:rPr lang="en-US" sz="1100" dirty="0">
+                <a:solidFill>
+                  <a:srgbClr val="5E7681"/>
+                </a:solidFill>
+                <a:latin typeface="Meiryo" pitchFamily="34" charset="0"/>
+                <a:ea typeface="Meiryo" pitchFamily="34" charset="-122"/>
+                <a:cs typeface="Meiryo" pitchFamily="34" charset="-120"/>
+              </a:rPr>
+              <a:t>記事の書き方を、やさしく。連絡の文例つき</a:t>
+            </a:r>
+            <a:endParaRPr lang="en-US" sz="1100" dirty="0"/>
+          </a:p>
+        </p:txBody>
+      </p:sp>
+      <p:sp>
+        <p:nvSpPr>
+          <p:cNvPr id="35" name="Shape 33"/>
+          <p:cNvSpPr/>
+          <p:nvPr/>
+        </p:nvSpPr>
+        <p:spPr>
+          <a:xfrm>
+            <a:off x="640080" y="5303520"/>
+            <a:ext cx="11064240" cy="566928"/>
+          </a:xfrm>
+          <a:prstGeom prst="roundRect">
+            <a:avLst>
+              <a:gd name="adj" fmla="val 14516"/>
+            </a:avLst>
+          </a:prstGeom>
+          <a:solidFill>
+            <a:srgbClr val="F6F7F8"/>
+          </a:solidFill>
+          <a:ln/>
+        </p:spPr>
+      </p:sp>
+      <p:sp>
+        <p:nvSpPr>
+          <p:cNvPr id="36" name="Shape 34"/>
+          <p:cNvSpPr/>
+          <p:nvPr/>
+        </p:nvSpPr>
+        <p:spPr>
+          <a:xfrm>
+            <a:off x="868680" y="5385816"/>
+            <a:ext cx="1463040" cy="402336"/>
+          </a:xfrm>
+          <a:prstGeom prst="roundRect">
+            <a:avLst>
+              <a:gd name="adj" fmla="val 50000"/>
+            </a:avLst>
+          </a:prstGeom>
+          <a:solidFill>
             <a:srgbClr val="5E7681"/>
           </a:solidFill>
           <a:ln/>
@@ -12799,14 +12960,14 @@
       </p:sp>
       <p:sp>
         <p:nvSpPr>
-          <p:cNvPr id="32" name="Text 30"/>
-          <p:cNvSpPr/>
-          <p:nvPr/>
-        </p:nvSpPr>
-        <p:spPr>
-          <a:xfrm>
-            <a:off x="868680" y="5815584"/>
-            <a:ext cx="1417320" cy="438912"/>
+          <p:cNvPr id="37" name="Text 35"/>
+          <p:cNvSpPr/>
+          <p:nvPr/>
+        </p:nvSpPr>
+        <p:spPr>
+          <a:xfrm>
+            <a:off x="868680" y="5385816"/>
+            <a:ext cx="1463040" cy="402336"/>
           </a:xfrm>
           <a:prstGeom prst="rect">
             <a:avLst/>
@@ -12822,8 +12983,169 @@
               <a:buNone/>
             </a:pPr>
             <a:r>
+              <a:rPr lang="en-US" sz="1150" b="1" dirty="0">
+                <a:solidFill>
+                  <a:srgbClr val="FFFFFF"/>
+                </a:solidFill>
+                <a:latin typeface="Meiryo" pitchFamily="34" charset="0"/>
+                <a:ea typeface="Meiryo" pitchFamily="34" charset="-122"/>
+                <a:cs typeface="Meiryo" pitchFamily="34" charset="-120"/>
+              </a:rPr>
+              <a:t>固定ページ</a:t>
+            </a:r>
+            <a:endParaRPr lang="en-US" sz="1150" dirty="0"/>
+          </a:p>
+        </p:txBody>
+      </p:sp>
+      <p:sp>
+        <p:nvSpPr>
+          <p:cNvPr id="38" name="Text 36"/>
+          <p:cNvSpPr/>
+          <p:nvPr/>
+        </p:nvSpPr>
+        <p:spPr>
+          <a:xfrm>
+            <a:off x="2514600" y="5431536"/>
+            <a:ext cx="4663440" cy="310896"/>
+          </a:xfrm>
+          <a:prstGeom prst="rect">
+            <a:avLst/>
+          </a:prstGeom>
+          <a:noFill/>
+          <a:ln/>
+        </p:spPr>
+        <p:txBody>
+          <a:bodyPr wrap="square" lIns="0" tIns="0" rIns="0" bIns="0" rtlCol="0" anchor="ctr"/>
+          <a:lstStyle/>
+          <a:p>
+            <a:pPr indent="0" marL="0">
+              <a:buNone/>
+            </a:pPr>
+            <a:r>
               <a:rPr lang="en-US" sz="1250" b="1" dirty="0">
                 <a:solidFill>
+                  <a:srgbClr val="264653"/>
+                </a:solidFill>
+                <a:latin typeface="Meiryo" pitchFamily="34" charset="0"/>
+                <a:ea typeface="Meiryo" pitchFamily="34" charset="-122"/>
+                <a:cs typeface="Meiryo" pitchFamily="34" charset="-120"/>
+              </a:rPr>
+              <a:t>山口様向け_ASPATHについて_文章の直し方</a:t>
+            </a:r>
+            <a:endParaRPr lang="en-US" sz="1250" dirty="0"/>
+          </a:p>
+        </p:txBody>
+      </p:sp>
+      <p:sp>
+        <p:nvSpPr>
+          <p:cNvPr id="39" name="Text 37"/>
+          <p:cNvSpPr/>
+          <p:nvPr/>
+        </p:nvSpPr>
+        <p:spPr>
+          <a:xfrm>
+            <a:off x="7315200" y="5440680"/>
+            <a:ext cx="4206240" cy="310896"/>
+          </a:xfrm>
+          <a:prstGeom prst="rect">
+            <a:avLst/>
+          </a:prstGeom>
+          <a:noFill/>
+          <a:ln/>
+        </p:spPr>
+        <p:txBody>
+          <a:bodyPr wrap="square" lIns="0" tIns="0" rIns="0" bIns="0" rtlCol="0" anchor="ctr"/>
+          <a:lstStyle/>
+          <a:p>
+            <a:pPr indent="0" marL="0">
+              <a:buNone/>
+            </a:pPr>
+            <a:r>
+              <a:rPr lang="en-US" sz="1100" dirty="0">
+                <a:solidFill>
+                  <a:srgbClr val="5E7681"/>
+                </a:solidFill>
+                <a:latin typeface="Meiryo" pitchFamily="34" charset="0"/>
+                <a:ea typeface="Meiryo" pitchFamily="34" charset="-122"/>
+                <a:cs typeface="Meiryo" pitchFamily="34" charset="-120"/>
+              </a:rPr>
+              <a:t>「ASPATHについて」だけの専用手順</a:t>
+            </a:r>
+            <a:endParaRPr lang="en-US" sz="1100" dirty="0"/>
+          </a:p>
+        </p:txBody>
+      </p:sp>
+      <p:sp>
+        <p:nvSpPr>
+          <p:cNvPr id="40" name="Shape 38"/>
+          <p:cNvSpPr/>
+          <p:nvPr/>
+        </p:nvSpPr>
+        <p:spPr>
+          <a:xfrm>
+            <a:off x="640080" y="5925312"/>
+            <a:ext cx="11064240" cy="566928"/>
+          </a:xfrm>
+          <a:prstGeom prst="roundRect">
+            <a:avLst>
+              <a:gd name="adj" fmla="val 14516"/>
+            </a:avLst>
+          </a:prstGeom>
+          <a:solidFill>
+            <a:srgbClr val="F6F7F8"/>
+          </a:solidFill>
+          <a:ln/>
+        </p:spPr>
+      </p:sp>
+      <p:sp>
+        <p:nvSpPr>
+          <p:cNvPr id="41" name="Shape 39"/>
+          <p:cNvSpPr/>
+          <p:nvPr/>
+        </p:nvSpPr>
+        <p:spPr>
+          <a:xfrm>
+            <a:off x="868680" y="6007608"/>
+            <a:ext cx="1463040" cy="402336"/>
+          </a:xfrm>
+          <a:prstGeom prst="roundRect">
+            <a:avLst>
+              <a:gd name="adj" fmla="val 50000"/>
+            </a:avLst>
+          </a:prstGeom>
+          <a:solidFill>
+            <a:srgbClr val="5E7681"/>
+          </a:solidFill>
+          <a:ln/>
+        </p:spPr>
+      </p:sp>
+      <p:sp>
+        <p:nvSpPr>
+          <p:cNvPr id="42" name="Text 40"/>
+          <p:cNvSpPr/>
+          <p:nvPr/>
+        </p:nvSpPr>
+        <p:spPr>
+          <a:xfrm>
+            <a:off x="868680" y="6007608"/>
+            <a:ext cx="1463040" cy="402336"/>
+          </a:xfrm>
+          <a:prstGeom prst="rect">
+            <a:avLst/>
+          </a:prstGeom>
+          <a:noFill/>
+          <a:ln/>
+        </p:spPr>
+        <p:txBody>
+          <a:bodyPr wrap="square" lIns="0" tIns="0" rIns="0" bIns="0" rtlCol="0" anchor="ctr"/>
+          <a:lstStyle/>
+          <a:p>
+            <a:pPr algn="ctr" indent="0" marL="0">
+              <a:buNone/>
+            </a:pPr>
+            <a:r>
+              <a:rPr lang="en-US" sz="1150" b="1" dirty="0">
+                <a:solidFill>
                   <a:srgbClr val="FFFFFF"/>
                 </a:solidFill>
                 <a:latin typeface="Meiryo" pitchFamily="34" charset="0"/>
@@ -12832,20 +13154,59 @@
               </a:rPr>
               <a:t>検索対策</a:t>
             </a:r>
+            <a:endParaRPr lang="en-US" sz="1150" dirty="0"/>
+          </a:p>
+        </p:txBody>
+      </p:sp>
+      <p:sp>
+        <p:nvSpPr>
+          <p:cNvPr id="43" name="Text 41"/>
+          <p:cNvSpPr/>
+          <p:nvPr/>
+        </p:nvSpPr>
+        <p:spPr>
+          <a:xfrm>
+            <a:off x="2514600" y="6053328"/>
+            <a:ext cx="4663440" cy="310896"/>
+          </a:xfrm>
+          <a:prstGeom prst="rect">
+            <a:avLst/>
+          </a:prstGeom>
+          <a:noFill/>
+          <a:ln/>
+        </p:spPr>
+        <p:txBody>
+          <a:bodyPr wrap="square" lIns="0" tIns="0" rIns="0" bIns="0" rtlCol="0" anchor="ctr"/>
+          <a:lstStyle/>
+          <a:p>
+            <a:pPr indent="0" marL="0">
+              <a:buNone/>
+            </a:pPr>
+            <a:r>
+              <a:rPr lang="en-US" sz="1250" b="1" dirty="0">
+                <a:solidFill>
+                  <a:srgbClr val="264653"/>
+                </a:solidFill>
+                <a:latin typeface="Meiryo" pitchFamily="34" charset="0"/>
+                <a:ea typeface="Meiryo" pitchFamily="34" charset="-122"/>
+                <a:cs typeface="Meiryo" pitchFamily="34" charset="-120"/>
+              </a:rPr>
+              <a:t>山口様向け_検索で見つけてもらう記事の書き方</a:t>
+            </a:r>
             <a:endParaRPr lang="en-US" sz="1250" dirty="0"/>
           </a:p>
         </p:txBody>
       </p:sp>
       <p:sp>
         <p:nvSpPr>
-          <p:cNvPr id="33" name="Text 31"/>
-          <p:cNvSpPr/>
-          <p:nvPr/>
-        </p:nvSpPr>
-        <p:spPr>
-          <a:xfrm>
-            <a:off x="2468880" y="5870448"/>
-            <a:ext cx="4572000" cy="320040"/>
+          <p:cNvPr id="44" name="Text 42"/>
+          <p:cNvSpPr/>
+          <p:nvPr/>
+        </p:nvSpPr>
+        <p:spPr>
+          <a:xfrm>
+            <a:off x="7315200" y="6062472"/>
+            <a:ext cx="4206240" cy="310896"/>
           </a:xfrm>
           <a:prstGeom prst="rect">
             <a:avLst/>
@@ -12861,30 +13222,30 @@
               <a:buNone/>
             </a:pPr>
             <a:r>
-              <a:rPr lang="en-US" sz="1300" b="1" dirty="0">
-                <a:solidFill>
-                  <a:srgbClr val="264653"/>
-                </a:solidFill>
-                <a:latin typeface="Meiryo" pitchFamily="34" charset="0"/>
-                <a:ea typeface="Meiryo" pitchFamily="34" charset="-122"/>
-                <a:cs typeface="Meiryo" pitchFamily="34" charset="-120"/>
-              </a:rPr>
-              <a:t>山口様向け_検索で見つけてもらう記事の書き方</a:t>
-            </a:r>
-            <a:endParaRPr lang="en-US" sz="1300" dirty="0"/>
-          </a:p>
-        </p:txBody>
-      </p:sp>
-      <p:sp>
-        <p:nvSpPr>
-          <p:cNvPr id="34" name="Text 32"/>
-          <p:cNvSpPr/>
-          <p:nvPr/>
-        </p:nvSpPr>
-        <p:spPr>
-          <a:xfrm>
-            <a:off x="7223760" y="5888736"/>
-            <a:ext cx="4297680" cy="320040"/>
+              <a:rPr lang="en-US" sz="1100" dirty="0">
+                <a:solidFill>
+                  <a:srgbClr val="5E7681"/>
+                </a:solidFill>
+                <a:latin typeface="Meiryo" pitchFamily="34" charset="0"/>
+                <a:ea typeface="Meiryo" pitchFamily="34" charset="-122"/>
+                <a:cs typeface="Meiryo" pitchFamily="34" charset="-120"/>
+              </a:rPr>
+              <a:t>記事の題名の付け方</a:t>
+            </a:r>
+            <a:endParaRPr lang="en-US" sz="1100" dirty="0"/>
+          </a:p>
+        </p:txBody>
+      </p:sp>
+      <p:sp>
+        <p:nvSpPr>
+          <p:cNvPr id="45" name="Text 43"/>
+          <p:cNvSpPr/>
+          <p:nvPr/>
+        </p:nvSpPr>
+        <p:spPr>
+          <a:xfrm>
+            <a:off x="640080" y="6419088"/>
+            <a:ext cx="11064240" cy="320040"/>
           </a:xfrm>
           <a:prstGeom prst="rect">
             <a:avLst/>
@@ -12908,48 +13269,9 @@
                 <a:ea typeface="Meiryo" pitchFamily="34" charset="-122"/>
                 <a:cs typeface="Meiryo" pitchFamily="34" charset="-120"/>
               </a:rPr>
-              <a:t>記事の題名の付け方</a:t>
+              <a:t>★の4冊が本編です。まず「基本編」。困ったときに応用編、月1回の点検に最応用編、記事づくりにAI活用編。</a:t>
             </a:r>
             <a:endParaRPr lang="en-US" sz="1150" dirty="0"/>
-          </a:p>
-        </p:txBody>
-      </p:sp>
-      <p:sp>
-        <p:nvSpPr>
-          <p:cNvPr id="35" name="Text 33"/>
-          <p:cNvSpPr/>
-          <p:nvPr/>
-        </p:nvSpPr>
-        <p:spPr>
-          <a:xfrm>
-            <a:off x="640080" y="6400800"/>
-            <a:ext cx="11064240" cy="320040"/>
-          </a:xfrm>
-          <a:prstGeom prst="rect">
-            <a:avLst/>
-          </a:prstGeom>
-          <a:noFill/>
-          <a:ln/>
-        </p:spPr>
-        <p:txBody>
-          <a:bodyPr wrap="square" lIns="0" tIns="0" rIns="0" bIns="0" rtlCol="0" anchor="ctr"/>
-          <a:lstStyle/>
-          <a:p>
-            <a:pPr indent="0" marL="0">
-              <a:buNone/>
-            </a:pPr>
-            <a:r>
-              <a:rPr lang="en-US" sz="1200" dirty="0">
-                <a:solidFill>
-                  <a:srgbClr val="5E7681"/>
-                </a:solidFill>
-                <a:latin typeface="Meiryo" pitchFamily="34" charset="0"/>
-                <a:ea typeface="Meiryo" pitchFamily="34" charset="-122"/>
-                <a:cs typeface="Meiryo" pitchFamily="34" charset="-120"/>
-              </a:rPr>
-              <a:t>★の2冊が本編です。内容が重なる部分もありますが、迷ったら「基本編」→「応用編」の順に見てください。</a:t>
-            </a:r>
-            <a:endParaRPr lang="en-US" sz="1200" dirty="0"/>
           </a:p>
         </p:txBody>
       </p:sp>

--- a/_wp移行素材/★引継ぎ資料/★サイト更新マニュアル.pptx
+++ b/_wp移行素材/★引継ぎ資料/★サイト更新マニュアル.pptx
@@ -2281,7 +2281,7 @@
     <p:bg>
       <p:bgPr>
         <a:solidFill>
-          <a:srgbClr val="264653"/>
+          <a:srgbClr val="F4E9D8"/>
         </a:solidFill>
       </p:bgPr>
     </p:bg>
@@ -2301,14 +2301,78 @@
       </p:grpSpPr>
       <p:sp>
         <p:nvSpPr>
-          <p:cNvPr id="2" name="Text 0"/>
-          <p:cNvSpPr/>
-          <p:nvPr/>
-        </p:nvSpPr>
-        <p:spPr>
-          <a:xfrm>
-            <a:off x="914400" y="2103120"/>
-            <a:ext cx="10332720" cy="914400"/>
+          <p:cNvPr id="2" name="Shape 0"/>
+          <p:cNvSpPr/>
+          <p:nvPr/>
+        </p:nvSpPr>
+        <p:spPr>
+          <a:xfrm>
+            <a:off x="0" y="0"/>
+            <a:ext cx="12198096" cy="146304"/>
+          </a:xfrm>
+          <a:prstGeom prst="rect">
+            <a:avLst/>
+          </a:prstGeom>
+          <a:solidFill>
+            <a:srgbClr val="264653"/>
+          </a:solidFill>
+          <a:ln/>
+        </p:spPr>
+      </p:sp>
+      <p:sp>
+        <p:nvSpPr>
+          <p:cNvPr id="3" name="Shape 1"/>
+          <p:cNvSpPr/>
+          <p:nvPr/>
+        </p:nvSpPr>
+        <p:spPr>
+          <a:xfrm>
+            <a:off x="0" y="6711696"/>
+            <a:ext cx="12198096" cy="146304"/>
+          </a:xfrm>
+          <a:prstGeom prst="rect">
+            <a:avLst/>
+          </a:prstGeom>
+          <a:solidFill>
+            <a:srgbClr val="F4A261"/>
+          </a:solidFill>
+          <a:ln/>
+        </p:spPr>
+      </p:sp>
+      <p:pic>
+        <p:nvPicPr>
+          <p:cNvPr id="4" name="Image 0" descr="/sessions/compassionate-sweet-heisenberg/mnt/dev-aspath-life-main/tools/assets/logo-deck.png">    </p:cNvPr>
+          <p:cNvPicPr>
+            <a:picLocks noChangeAspect="1"/>
+          </p:cNvPicPr>
+          <p:nvPr/>
+        </p:nvPicPr>
+        <p:blipFill>
+          <a:blip r:embed="rId1"/>
+          <a:stretch>
+            <a:fillRect/>
+          </a:stretch>
+        </p:blipFill>
+        <p:spPr>
+          <a:xfrm>
+            <a:off x="1051560" y="1874520"/>
+            <a:ext cx="2320246" cy="2834640"/>
+          </a:xfrm>
+          <a:prstGeom prst="rect">
+            <a:avLst/>
+          </a:prstGeom>
+        </p:spPr>
+      </p:pic>
+      <p:sp>
+        <p:nvSpPr>
+          <p:cNvPr id="5" name="Text 2"/>
+          <p:cNvSpPr txBox="1"/>
+          <p:nvPr/>
+        </p:nvSpPr>
+        <p:spPr>
+          <a:xfrm>
+            <a:off x="4892040" y="1572768"/>
+            <a:ext cx="6675120" cy="384048"/>
           </a:xfrm>
           <a:prstGeom prst="rect">
             <a:avLst/>
@@ -2324,46 +2388,7 @@
               <a:buNone/>
             </a:pPr>
             <a:r>
-              <a:rPr lang="en-US" sz="4400" b="1" dirty="0">
-                <a:solidFill>
-                  <a:srgbClr val="FFFFFF"/>
-                </a:solidFill>
-                <a:latin typeface="Meiryo" pitchFamily="34" charset="0"/>
-                <a:ea typeface="Meiryo" pitchFamily="34" charset="-122"/>
-                <a:cs typeface="Meiryo" pitchFamily="34" charset="-120"/>
-              </a:rPr>
-              <a:t>ASPATH サイト更新マニュアル</a:t>
-            </a:r>
-            <a:endParaRPr lang="en-US" sz="4400" dirty="0"/>
-          </a:p>
-        </p:txBody>
-      </p:sp>
-      <p:sp>
-        <p:nvSpPr>
-          <p:cNvPr id="3" name="Text 1"/>
-          <p:cNvSpPr/>
-          <p:nvPr/>
-        </p:nvSpPr>
-        <p:spPr>
-          <a:xfrm>
-            <a:off x="960120" y="3200400"/>
-            <a:ext cx="10058400" cy="457200"/>
-          </a:xfrm>
-          <a:prstGeom prst="rect">
-            <a:avLst/>
-          </a:prstGeom>
-          <a:noFill/>
-          <a:ln/>
-        </p:spPr>
-        <p:txBody>
-          <a:bodyPr wrap="square" lIns="0" tIns="0" rIns="0" bIns="0" rtlCol="0" anchor="ctr"/>
-          <a:lstStyle/>
-          <a:p>
-            <a:pPr indent="0" marL="0">
-              <a:buNone/>
-            </a:pPr>
-            <a:r>
-              <a:rPr lang="en-US" sz="2000" dirty="0">
+              <a:rPr lang="en-US" sz="1500" b="1" spc="600" kern="0" dirty="0">
                 <a:solidFill>
                   <a:srgbClr val="F4A261"/>
                 </a:solidFill>
@@ -2371,44 +2396,22 @@
                 <a:ea typeface="Meiryo" pitchFamily="34" charset="-122"/>
                 <a:cs typeface="Meiryo" pitchFamily="34" charset="-120"/>
               </a:rPr>
-              <a:t>引継ぎ資料　／　2026年8月23日</a:t>
-            </a:r>
-            <a:endParaRPr lang="en-US" sz="2000" dirty="0"/>
-          </a:p>
-        </p:txBody>
-      </p:sp>
-      <p:sp>
-        <p:nvSpPr>
-          <p:cNvPr id="4" name="Shape 2"/>
-          <p:cNvSpPr/>
-          <p:nvPr/>
-        </p:nvSpPr>
-        <p:spPr>
-          <a:xfrm>
-            <a:off x="914400" y="4114800"/>
-            <a:ext cx="5852160" cy="1371600"/>
-          </a:xfrm>
-          <a:prstGeom prst="roundRect">
-            <a:avLst>
-              <a:gd name="adj" fmla="val 8000"/>
-            </a:avLst>
-          </a:prstGeom>
-          <a:solidFill>
-            <a:srgbClr val="32596B"/>
-          </a:solidFill>
-          <a:ln/>
-        </p:spPr>
-      </p:sp>
-      <p:sp>
-        <p:nvSpPr>
-          <p:cNvPr id="5" name="Text 3"/>
-          <p:cNvSpPr/>
-          <p:nvPr/>
-        </p:nvSpPr>
-        <p:spPr>
-          <a:xfrm>
-            <a:off x="1188720" y="4315968"/>
-            <a:ext cx="5394960" cy="1005840"/>
+              <a:t>ASPATH</a:t>
+            </a:r>
+            <a:endParaRPr lang="en-US" sz="1500" dirty="0"/>
+          </a:p>
+        </p:txBody>
+      </p:sp>
+      <p:sp>
+        <p:nvSpPr>
+          <p:cNvPr id="6" name="Text 3"/>
+          <p:cNvSpPr txBox="1"/>
+          <p:nvPr/>
+        </p:nvSpPr>
+        <p:spPr>
+          <a:xfrm>
+            <a:off x="4892040" y="1993392"/>
+            <a:ext cx="6675120" cy="914400"/>
           </a:xfrm>
           <a:prstGeom prst="rect">
             <a:avLst/>
@@ -2422,42 +2425,221 @@
           <a:p>
             <a:pPr indent="0" marL="0">
               <a:lnSpc>
-                <a:spcPts val="2200"/>
+                <a:spcPct val="120000"/>
               </a:lnSpc>
               <a:buNone/>
             </a:pPr>
             <a:r>
-              <a:rPr lang="en-US" sz="1400" dirty="0">
-                <a:solidFill>
-                  <a:srgbClr val="DCE7EA"/>
-                </a:solidFill>
-                <a:latin typeface="Meiryo" pitchFamily="34" charset="0"/>
-                <a:ea typeface="Meiryo" pitchFamily="34" charset="-122"/>
-                <a:cs typeface="Meiryo" pitchFamily="34" charset="-120"/>
-              </a:rPr>
-              <a:t>この資料は「追記しながら育てる」前提で作っています。</a:t>
-            </a:r>
-            <a:endParaRPr lang="en-US" sz="1400" dirty="0"/>
-          </a:p>
+              <a:rPr lang="en-US" sz="3600" b="1" dirty="0">
+                <a:solidFill>
+                  <a:srgbClr val="264653"/>
+                </a:solidFill>
+                <a:latin typeface="Meiryo" pitchFamily="34" charset="0"/>
+                <a:ea typeface="Meiryo" pitchFamily="34" charset="-122"/>
+                <a:cs typeface="Meiryo" pitchFamily="34" charset="-120"/>
+              </a:rPr>
+              <a:t>サイト更新マニュアル</a:t>
+            </a:r>
+            <a:endParaRPr lang="en-US" sz="3600" dirty="0"/>
+          </a:p>
+        </p:txBody>
+      </p:sp>
+      <p:sp>
+        <p:nvSpPr>
+          <p:cNvPr id="7" name="Text 4"/>
+          <p:cNvSpPr txBox="1"/>
+          <p:nvPr/>
+        </p:nvSpPr>
+        <p:spPr>
+          <a:xfrm>
+            <a:off x="4892040" y="2962656"/>
+            <a:ext cx="6675120" cy="548640"/>
+          </a:xfrm>
+          <a:prstGeom prst="rect">
+            <a:avLst/>
+          </a:prstGeom>
+          <a:noFill/>
+          <a:ln/>
+        </p:spPr>
+        <p:txBody>
+          <a:bodyPr wrap="square" lIns="0" tIns="0" rIns="0" bIns="0" rtlCol="0" anchor="ctr"/>
+          <a:lstStyle/>
           <a:p>
             <a:pPr indent="0" marL="0">
               <a:lnSpc>
-                <a:spcPts val="2200"/>
+                <a:spcPct val="130000"/>
               </a:lnSpc>
               <a:buNone/>
             </a:pPr>
             <a:r>
-              <a:rPr lang="en-US" sz="1400" dirty="0">
-                <a:solidFill>
-                  <a:srgbClr val="DCE7EA"/>
-                </a:solidFill>
-                <a:latin typeface="Meiryo" pitchFamily="34" charset="0"/>
-                <a:ea typeface="Meiryo" pitchFamily="34" charset="-122"/>
-                <a:cs typeface="Meiryo" pitchFamily="34" charset="-120"/>
-              </a:rPr>
-              <a:t>新しい作業を覚えたら、その日のうちに書き足してください。</a:t>
-            </a:r>
-            <a:endParaRPr lang="en-US" sz="1400" dirty="0"/>
+              <a:rPr lang="en-US" sz="1500" dirty="0">
+                <a:solidFill>
+                  <a:srgbClr val="52707A"/>
+                </a:solidFill>
+                <a:latin typeface="Meiryo" pitchFamily="34" charset="0"/>
+                <a:ea typeface="Meiryo" pitchFamily="34" charset="-122"/>
+                <a:cs typeface="Meiryo" pitchFamily="34" charset="-120"/>
+              </a:rPr>
+              <a:t>引継ぎ資料</a:t>
+            </a:r>
+            <a:endParaRPr lang="en-US" sz="1500" dirty="0"/>
+          </a:p>
+          <a:p>
+            <a:pPr indent="0" marL="0">
+              <a:lnSpc>
+                <a:spcPct val="130000"/>
+              </a:lnSpc>
+              <a:buNone/>
+            </a:pPr>
+            <a:r>
+              <a:rPr lang="en-US" sz="1500" dirty="0">
+                <a:solidFill>
+                  <a:srgbClr val="52707A"/>
+                </a:solidFill>
+                <a:latin typeface="Meiryo" pitchFamily="34" charset="0"/>
+                <a:ea typeface="Meiryo" pitchFamily="34" charset="-122"/>
+                <a:cs typeface="Meiryo" pitchFamily="34" charset="-120"/>
+              </a:rPr>
+              <a:t>この資料は「追記しながら育てる」前提で作っています。新しい作業を覚えたら、その日のうちに書き足してください。</a:t>
+            </a:r>
+            <a:endParaRPr lang="en-US" sz="1500" dirty="0"/>
+          </a:p>
+        </p:txBody>
+      </p:sp>
+      <p:sp>
+        <p:nvSpPr>
+          <p:cNvPr id="8" name="Shape 5"/>
+          <p:cNvSpPr/>
+          <p:nvPr/>
+        </p:nvSpPr>
+        <p:spPr>
+          <a:xfrm>
+            <a:off x="4892040" y="4736592"/>
+            <a:ext cx="1828800" cy="18288"/>
+          </a:xfrm>
+          <a:prstGeom prst="rect">
+            <a:avLst/>
+          </a:prstGeom>
+          <a:solidFill>
+            <a:srgbClr val="F4A261"/>
+          </a:solidFill>
+          <a:ln/>
+        </p:spPr>
+      </p:sp>
+      <p:sp>
+        <p:nvSpPr>
+          <p:cNvPr id="9" name="Text 6"/>
+          <p:cNvSpPr txBox="1"/>
+          <p:nvPr/>
+        </p:nvSpPr>
+        <p:spPr>
+          <a:xfrm>
+            <a:off x="4892040" y="4864608"/>
+            <a:ext cx="6675120" cy="292608"/>
+          </a:xfrm>
+          <a:prstGeom prst="rect">
+            <a:avLst/>
+          </a:prstGeom>
+          <a:noFill/>
+          <a:ln/>
+        </p:spPr>
+        <p:txBody>
+          <a:bodyPr wrap="square" lIns="0" tIns="0" rIns="0" bIns="0" rtlCol="0" anchor="ctr"/>
+          <a:lstStyle/>
+          <a:p>
+            <a:pPr indent="0" marL="0">
+              <a:buNone/>
+            </a:pPr>
+            <a:r>
+              <a:rPr lang="en-US" sz="1250" b="1" dirty="0">
+                <a:solidFill>
+                  <a:srgbClr val="264653"/>
+                </a:solidFill>
+                <a:latin typeface="Meiryo" pitchFamily="34" charset="0"/>
+                <a:ea typeface="Meiryo" pitchFamily="34" charset="-122"/>
+                <a:cs typeface="Meiryo" pitchFamily="34" charset="-120"/>
+              </a:rPr>
+              <a:t>鹿児島のパーキンソン病専門トレーニングスタジオ</a:t>
+            </a:r>
+            <a:endParaRPr lang="en-US" sz="1250" dirty="0"/>
+          </a:p>
+        </p:txBody>
+      </p:sp>
+      <p:sp>
+        <p:nvSpPr>
+          <p:cNvPr id="10" name="Text 7"/>
+          <p:cNvSpPr txBox="1"/>
+          <p:nvPr/>
+        </p:nvSpPr>
+        <p:spPr>
+          <a:xfrm>
+            <a:off x="4892040" y="5193792"/>
+            <a:ext cx="6675120" cy="274320"/>
+          </a:xfrm>
+          <a:prstGeom prst="rect">
+            <a:avLst/>
+          </a:prstGeom>
+          <a:noFill/>
+          <a:ln/>
+        </p:spPr>
+        <p:txBody>
+          <a:bodyPr wrap="square" lIns="0" tIns="0" rIns="0" bIns="0" rtlCol="0" anchor="ctr"/>
+          <a:lstStyle/>
+          <a:p>
+            <a:pPr indent="0" marL="0">
+              <a:buNone/>
+            </a:pPr>
+            <a:r>
+              <a:rPr lang="en-US" sz="1150" dirty="0">
+                <a:solidFill>
+                  <a:srgbClr val="52707A"/>
+                </a:solidFill>
+                <a:latin typeface="Meiryo" pitchFamily="34" charset="0"/>
+                <a:ea typeface="Meiryo" pitchFamily="34" charset="-122"/>
+                <a:cs typeface="Meiryo" pitchFamily="34" charset="-120"/>
+              </a:rPr>
+              <a:t>動くことを楽しむ。明日につながる。</a:t>
+            </a:r>
+            <a:endParaRPr lang="en-US" sz="1150" dirty="0"/>
+          </a:p>
+        </p:txBody>
+      </p:sp>
+      <p:sp>
+        <p:nvSpPr>
+          <p:cNvPr id="11" name="Text 8"/>
+          <p:cNvSpPr txBox="1"/>
+          <p:nvPr/>
+        </p:nvSpPr>
+        <p:spPr>
+          <a:xfrm>
+            <a:off x="4892040" y="5596128"/>
+            <a:ext cx="6675120" cy="274320"/>
+          </a:xfrm>
+          <a:prstGeom prst="rect">
+            <a:avLst/>
+          </a:prstGeom>
+          <a:noFill/>
+          <a:ln/>
+        </p:spPr>
+        <p:txBody>
+          <a:bodyPr wrap="square" lIns="0" tIns="0" rIns="0" bIns="0" rtlCol="0" anchor="ctr"/>
+          <a:lstStyle/>
+          <a:p>
+            <a:pPr indent="0" marL="0">
+              <a:buNone/>
+            </a:pPr>
+            <a:r>
+              <a:rPr lang="en-US" sz="1050" dirty="0">
+                <a:solidFill>
+                  <a:srgbClr val="8A9CA2"/>
+                </a:solidFill>
+                <a:latin typeface="Meiryo" pitchFamily="34" charset="0"/>
+                <a:ea typeface="Meiryo" pitchFamily="34" charset="-122"/>
+                <a:cs typeface="Meiryo" pitchFamily="34" charset="-120"/>
+              </a:rPr>
+              <a:t>aspath-life.com　／　2026年8月23日　ASPATH 様　ご納品資料</a:t>
+            </a:r>
+            <a:endParaRPr lang="en-US" sz="1050" dirty="0"/>
           </a:p>
         </p:txBody>
       </p:sp>
@@ -2493,126 +2675,9 @@
           <a:chExt cx="0" cy="0"/>
         </a:xfrm>
       </p:grpSpPr>
-      <p:sp>
-        <p:nvSpPr>
-          <p:cNvPr id="2" name="Text 0"/>
-          <p:cNvSpPr/>
-          <p:nvPr/>
-        </p:nvSpPr>
-        <p:spPr>
-          <a:xfrm>
-            <a:off x="548640" y="320040"/>
-            <a:ext cx="10424160" cy="685800"/>
-          </a:xfrm>
-          <a:prstGeom prst="rect">
-            <a:avLst/>
-          </a:prstGeom>
-          <a:noFill/>
-          <a:ln/>
-        </p:spPr>
-        <p:txBody>
-          <a:bodyPr wrap="square" lIns="0" tIns="0" rIns="0" bIns="0" rtlCol="0" anchor="ctr"/>
-          <a:lstStyle/>
-          <a:p>
-            <a:pPr indent="0" marL="0">
-              <a:buNone/>
-            </a:pPr>
-            <a:r>
-              <a:rPr lang="en-US" sz="3200" b="1" dirty="0">
-                <a:solidFill>
-                  <a:srgbClr val="264653"/>
-                </a:solidFill>
-                <a:latin typeface="Meiryo" pitchFamily="34" charset="0"/>
-                <a:ea typeface="Meiryo" pitchFamily="34" charset="-122"/>
-                <a:cs typeface="Meiryo" pitchFamily="34" charset="-120"/>
-              </a:rPr>
-              <a:t>【道B】固定ページを直すときの流れ</a:t>
-            </a:r>
-            <a:endParaRPr lang="en-US" sz="3200" dirty="0"/>
-          </a:p>
-        </p:txBody>
-      </p:sp>
-      <p:sp>
-        <p:nvSpPr>
-          <p:cNvPr id="3" name="Text 1"/>
-          <p:cNvSpPr/>
-          <p:nvPr/>
-        </p:nvSpPr>
-        <p:spPr>
-          <a:xfrm>
-            <a:off x="566928" y="1024128"/>
-            <a:ext cx="10424160" cy="365760"/>
-          </a:xfrm>
-          <a:prstGeom prst="rect">
-            <a:avLst/>
-          </a:prstGeom>
-          <a:noFill/>
-          <a:ln/>
-        </p:spPr>
-        <p:txBody>
-          <a:bodyPr wrap="square" lIns="0" tIns="0" rIns="0" bIns="0" rtlCol="0" anchor="ctr"/>
-          <a:lstStyle/>
-          <a:p>
-            <a:pPr indent="0" marL="0">
-              <a:buNone/>
-            </a:pPr>
-            <a:r>
-              <a:rPr lang="en-US" sz="1500" dirty="0">
-                <a:solidFill>
-                  <a:srgbClr val="5E7681"/>
-                </a:solidFill>
-                <a:latin typeface="Meiryo" pitchFamily="34" charset="0"/>
-                <a:ea typeface="Meiryo" pitchFamily="34" charset="-122"/>
-                <a:cs typeface="Meiryo" pitchFamily="34" charset="-120"/>
-              </a:rPr>
-              <a:t>「ASPATHについて」を例に</a:t>
-            </a:r>
-            <a:endParaRPr lang="en-US" sz="1500" dirty="0"/>
-          </a:p>
-        </p:txBody>
-      </p:sp>
-      <p:sp>
-        <p:nvSpPr>
-          <p:cNvPr id="4" name="Text 2"/>
-          <p:cNvSpPr/>
-          <p:nvPr/>
-        </p:nvSpPr>
-        <p:spPr>
-          <a:xfrm>
-            <a:off x="11338560" y="6263640"/>
-            <a:ext cx="457200" cy="274320"/>
-          </a:xfrm>
-          <a:prstGeom prst="rect">
-            <a:avLst/>
-          </a:prstGeom>
-          <a:noFill/>
-          <a:ln/>
-        </p:spPr>
-        <p:txBody>
-          <a:bodyPr wrap="square" lIns="0" tIns="0" rIns="0" bIns="0" rtlCol="0" anchor="ctr"/>
-          <a:lstStyle/>
-          <a:p>
-            <a:pPr algn="r" indent="0" marL="0">
-              <a:buNone/>
-            </a:pPr>
-            <a:r>
-              <a:rPr lang="en-US" sz="1100" dirty="0">
-                <a:solidFill>
-                  <a:srgbClr val="A8B4B8"/>
-                </a:solidFill>
-                <a:latin typeface="Meiryo" pitchFamily="34" charset="0"/>
-                <a:ea typeface="Meiryo" pitchFamily="34" charset="-122"/>
-                <a:cs typeface="Meiryo" pitchFamily="34" charset="-120"/>
-              </a:rPr>
-              <a:t>9</a:t>
-            </a:r>
-            <a:endParaRPr lang="en-US" sz="1100" dirty="0"/>
-          </a:p>
-        </p:txBody>
-      </p:sp>
       <p:pic>
         <p:nvPicPr>
-          <p:cNvPr id="5" name="Image 0" descr="/sessions/compassionate-sweet-heisenberg/mnt/dev-aspath-life-main/_wp移行素材/★引継ぎ資料/画像/07_固定ページの流れ.png">    </p:cNvPr>
+          <p:cNvPr id="2" name="Image 0" descr="/sessions/compassionate-sweet-heisenberg/mnt/dev-aspath-life-main/tools/assets/logo-deck.png">    </p:cNvPr>
           <p:cNvPicPr>
             <a:picLocks noChangeAspect="1"/>
           </p:cNvPicPr>
@@ -2620,6 +2685,186 @@
         </p:nvPicPr>
         <p:blipFill>
           <a:blip r:embed="rId1"/>
+          <a:stretch>
+            <a:fillRect/>
+          </a:stretch>
+        </p:blipFill>
+        <p:spPr>
+          <a:xfrm>
+            <a:off x="11458173" y="109728"/>
+            <a:ext cx="209571" cy="256032"/>
+          </a:xfrm>
+          <a:prstGeom prst="rect">
+            <a:avLst/>
+          </a:prstGeom>
+        </p:spPr>
+      </p:pic>
+      <p:sp>
+        <p:nvSpPr>
+          <p:cNvPr id="3" name="Text 0"/>
+          <p:cNvSpPr txBox="1"/>
+          <p:nvPr/>
+        </p:nvSpPr>
+        <p:spPr>
+          <a:xfrm>
+            <a:off x="8623533" y="128016"/>
+            <a:ext cx="2743200" cy="237744"/>
+          </a:xfrm>
+          <a:prstGeom prst="rect">
+            <a:avLst/>
+          </a:prstGeom>
+          <a:noFill/>
+          <a:ln/>
+        </p:spPr>
+        <p:txBody>
+          <a:bodyPr wrap="square" lIns="0" tIns="0" rIns="0" bIns="0" rtlCol="0" anchor="ctr"/>
+          <a:lstStyle/>
+          <a:p>
+            <a:pPr algn="r" indent="0" marL="0">
+              <a:buNone/>
+            </a:pPr>
+            <a:r>
+              <a:rPr lang="en-US" sz="750" dirty="0">
+                <a:solidFill>
+                  <a:srgbClr val="97A9AF"/>
+                </a:solidFill>
+                <a:latin typeface="Meiryo" pitchFamily="34" charset="0"/>
+                <a:ea typeface="Meiryo" pitchFamily="34" charset="-122"/>
+                <a:cs typeface="Meiryo" pitchFamily="34" charset="-120"/>
+              </a:rPr>
+              <a:t>鹿児島のパーキンソン病専門トレーニングスタジオ</a:t>
+            </a:r>
+            <a:endParaRPr lang="en-US" sz="750" dirty="0"/>
+          </a:p>
+        </p:txBody>
+      </p:sp>
+      <p:sp>
+        <p:nvSpPr>
+          <p:cNvPr id="4" name="Text 1"/>
+          <p:cNvSpPr/>
+          <p:nvPr/>
+        </p:nvSpPr>
+        <p:spPr>
+          <a:xfrm>
+            <a:off x="548640" y="320040"/>
+            <a:ext cx="10424160" cy="685800"/>
+          </a:xfrm>
+          <a:prstGeom prst="rect">
+            <a:avLst/>
+          </a:prstGeom>
+          <a:noFill/>
+          <a:ln/>
+        </p:spPr>
+        <p:txBody>
+          <a:bodyPr wrap="square" lIns="0" tIns="0" rIns="0" bIns="0" rtlCol="0" anchor="ctr"/>
+          <a:lstStyle/>
+          <a:p>
+            <a:pPr indent="0" marL="0">
+              <a:buNone/>
+            </a:pPr>
+            <a:r>
+              <a:rPr lang="en-US" sz="3200" b="1" dirty="0">
+                <a:solidFill>
+                  <a:srgbClr val="264653"/>
+                </a:solidFill>
+                <a:latin typeface="Meiryo" pitchFamily="34" charset="0"/>
+                <a:ea typeface="Meiryo" pitchFamily="34" charset="-122"/>
+                <a:cs typeface="Meiryo" pitchFamily="34" charset="-120"/>
+              </a:rPr>
+              <a:t>【道B】固定ページを直すときの流れ</a:t>
+            </a:r>
+            <a:endParaRPr lang="en-US" sz="3200" dirty="0"/>
+          </a:p>
+        </p:txBody>
+      </p:sp>
+      <p:sp>
+        <p:nvSpPr>
+          <p:cNvPr id="5" name="Text 2"/>
+          <p:cNvSpPr/>
+          <p:nvPr/>
+        </p:nvSpPr>
+        <p:spPr>
+          <a:xfrm>
+            <a:off x="566928" y="1024128"/>
+            <a:ext cx="10424160" cy="365760"/>
+          </a:xfrm>
+          <a:prstGeom prst="rect">
+            <a:avLst/>
+          </a:prstGeom>
+          <a:noFill/>
+          <a:ln/>
+        </p:spPr>
+        <p:txBody>
+          <a:bodyPr wrap="square" lIns="0" tIns="0" rIns="0" bIns="0" rtlCol="0" anchor="ctr"/>
+          <a:lstStyle/>
+          <a:p>
+            <a:pPr indent="0" marL="0">
+              <a:buNone/>
+            </a:pPr>
+            <a:r>
+              <a:rPr lang="en-US" sz="1500" dirty="0">
+                <a:solidFill>
+                  <a:srgbClr val="5E7681"/>
+                </a:solidFill>
+                <a:latin typeface="Meiryo" pitchFamily="34" charset="0"/>
+                <a:ea typeface="Meiryo" pitchFamily="34" charset="-122"/>
+                <a:cs typeface="Meiryo" pitchFamily="34" charset="-120"/>
+              </a:rPr>
+              <a:t>「ASPATHについて」を例に</a:t>
+            </a:r>
+            <a:endParaRPr lang="en-US" sz="1500" dirty="0"/>
+          </a:p>
+        </p:txBody>
+      </p:sp>
+      <p:sp>
+        <p:nvSpPr>
+          <p:cNvPr id="6" name="Text 3"/>
+          <p:cNvSpPr/>
+          <p:nvPr/>
+        </p:nvSpPr>
+        <p:spPr>
+          <a:xfrm>
+            <a:off x="11338560" y="6263640"/>
+            <a:ext cx="457200" cy="274320"/>
+          </a:xfrm>
+          <a:prstGeom prst="rect">
+            <a:avLst/>
+          </a:prstGeom>
+          <a:noFill/>
+          <a:ln/>
+        </p:spPr>
+        <p:txBody>
+          <a:bodyPr wrap="square" lIns="0" tIns="0" rIns="0" bIns="0" rtlCol="0" anchor="ctr"/>
+          <a:lstStyle/>
+          <a:p>
+            <a:pPr algn="r" indent="0" marL="0">
+              <a:buNone/>
+            </a:pPr>
+            <a:r>
+              <a:rPr lang="en-US" sz="1100" dirty="0">
+                <a:solidFill>
+                  <a:srgbClr val="A8B4B8"/>
+                </a:solidFill>
+                <a:latin typeface="Meiryo" pitchFamily="34" charset="0"/>
+                <a:ea typeface="Meiryo" pitchFamily="34" charset="-122"/>
+                <a:cs typeface="Meiryo" pitchFamily="34" charset="-120"/>
+              </a:rPr>
+              <a:t>9</a:t>
+            </a:r>
+            <a:endParaRPr lang="en-US" sz="1100" dirty="0"/>
+          </a:p>
+        </p:txBody>
+      </p:sp>
+      <p:pic>
+        <p:nvPicPr>
+          <p:cNvPr id="7" name="Image 1" descr="/sessions/compassionate-sweet-heisenberg/mnt/dev-aspath-life-main/_wp移行素材/★引継ぎ資料/画像/07_固定ページの流れ.png">    </p:cNvPr>
+          <p:cNvPicPr>
+            <a:picLocks noChangeAspect="1"/>
+          </p:cNvPicPr>
+          <p:nvPr/>
+        </p:nvPicPr>
+        <p:blipFill>
+          <a:blip r:embed="rId2"/>
           <a:stretch>
             <a:fillRect/>
           </a:stretch>
@@ -2666,9 +2911,72 @@
           <a:chExt cx="0" cy="0"/>
         </a:xfrm>
       </p:grpSpPr>
-      <p:sp>
-        <p:nvSpPr>
-          <p:cNvPr id="2" name="Text 0"/>
+      <p:pic>
+        <p:nvPicPr>
+          <p:cNvPr id="2" name="Image 0" descr="/sessions/compassionate-sweet-heisenberg/mnt/dev-aspath-life-main/tools/assets/logo-deck.png">    </p:cNvPr>
+          <p:cNvPicPr>
+            <a:picLocks noChangeAspect="1"/>
+          </p:cNvPicPr>
+          <p:nvPr/>
+        </p:nvPicPr>
+        <p:blipFill>
+          <a:blip r:embed="rId1"/>
+          <a:stretch>
+            <a:fillRect/>
+          </a:stretch>
+        </p:blipFill>
+        <p:spPr>
+          <a:xfrm>
+            <a:off x="11458173" y="109728"/>
+            <a:ext cx="209571" cy="256032"/>
+          </a:xfrm>
+          <a:prstGeom prst="rect">
+            <a:avLst/>
+          </a:prstGeom>
+        </p:spPr>
+      </p:pic>
+      <p:sp>
+        <p:nvSpPr>
+          <p:cNvPr id="3" name="Text 0"/>
+          <p:cNvSpPr txBox="1"/>
+          <p:nvPr/>
+        </p:nvSpPr>
+        <p:spPr>
+          <a:xfrm>
+            <a:off x="8623533" y="128016"/>
+            <a:ext cx="2743200" cy="237744"/>
+          </a:xfrm>
+          <a:prstGeom prst="rect">
+            <a:avLst/>
+          </a:prstGeom>
+          <a:noFill/>
+          <a:ln/>
+        </p:spPr>
+        <p:txBody>
+          <a:bodyPr wrap="square" lIns="0" tIns="0" rIns="0" bIns="0" rtlCol="0" anchor="ctr"/>
+          <a:lstStyle/>
+          <a:p>
+            <a:pPr algn="r" indent="0" marL="0">
+              <a:buNone/>
+            </a:pPr>
+            <a:r>
+              <a:rPr lang="en-US" sz="750" dirty="0">
+                <a:solidFill>
+                  <a:srgbClr val="97A9AF"/>
+                </a:solidFill>
+                <a:latin typeface="Meiryo" pitchFamily="34" charset="0"/>
+                <a:ea typeface="Meiryo" pitchFamily="34" charset="-122"/>
+                <a:cs typeface="Meiryo" pitchFamily="34" charset="-120"/>
+              </a:rPr>
+              <a:t>鹿児島のパーキンソン病専門トレーニングスタジオ</a:t>
+            </a:r>
+            <a:endParaRPr lang="en-US" sz="750" dirty="0"/>
+          </a:p>
+        </p:txBody>
+      </p:sp>
+      <p:sp>
+        <p:nvSpPr>
+          <p:cNvPr id="4" name="Text 1"/>
           <p:cNvSpPr/>
           <p:nvPr/>
         </p:nvSpPr>
@@ -2707,7 +3015,7 @@
       </p:sp>
       <p:sp>
         <p:nvSpPr>
-          <p:cNvPr id="3" name="Text 1"/>
+          <p:cNvPr id="5" name="Text 2"/>
           <p:cNvSpPr/>
           <p:nvPr/>
         </p:nvSpPr>
@@ -2746,7 +3054,7 @@
       </p:sp>
       <p:sp>
         <p:nvSpPr>
-          <p:cNvPr id="4" name="Text 2"/>
+          <p:cNvPr id="6" name="Text 3"/>
           <p:cNvSpPr/>
           <p:nvPr/>
         </p:nvSpPr>
@@ -5524,9 +5832,72 @@
           <a:chExt cx="0" cy="0"/>
         </a:xfrm>
       </p:grpSpPr>
-      <p:sp>
-        <p:nvSpPr>
-          <p:cNvPr id="2" name="Text 0"/>
+      <p:pic>
+        <p:nvPicPr>
+          <p:cNvPr id="2" name="Image 0" descr="/sessions/compassionate-sweet-heisenberg/mnt/dev-aspath-life-main/tools/assets/logo-deck.png">    </p:cNvPr>
+          <p:cNvPicPr>
+            <a:picLocks noChangeAspect="1"/>
+          </p:cNvPicPr>
+          <p:nvPr/>
+        </p:nvPicPr>
+        <p:blipFill>
+          <a:blip r:embed="rId1"/>
+          <a:stretch>
+            <a:fillRect/>
+          </a:stretch>
+        </p:blipFill>
+        <p:spPr>
+          <a:xfrm>
+            <a:off x="11458173" y="109728"/>
+            <a:ext cx="209571" cy="256032"/>
+          </a:xfrm>
+          <a:prstGeom prst="rect">
+            <a:avLst/>
+          </a:prstGeom>
+        </p:spPr>
+      </p:pic>
+      <p:sp>
+        <p:nvSpPr>
+          <p:cNvPr id="3" name="Text 0"/>
+          <p:cNvSpPr txBox="1"/>
+          <p:nvPr/>
+        </p:nvSpPr>
+        <p:spPr>
+          <a:xfrm>
+            <a:off x="8623533" y="128016"/>
+            <a:ext cx="2743200" cy="237744"/>
+          </a:xfrm>
+          <a:prstGeom prst="rect">
+            <a:avLst/>
+          </a:prstGeom>
+          <a:noFill/>
+          <a:ln/>
+        </p:spPr>
+        <p:txBody>
+          <a:bodyPr wrap="square" lIns="0" tIns="0" rIns="0" bIns="0" rtlCol="0" anchor="ctr"/>
+          <a:lstStyle/>
+          <a:p>
+            <a:pPr algn="r" indent="0" marL="0">
+              <a:buNone/>
+            </a:pPr>
+            <a:r>
+              <a:rPr lang="en-US" sz="750" dirty="0">
+                <a:solidFill>
+                  <a:srgbClr val="97A9AF"/>
+                </a:solidFill>
+                <a:latin typeface="Meiryo" pitchFamily="34" charset="0"/>
+                <a:ea typeface="Meiryo" pitchFamily="34" charset="-122"/>
+                <a:cs typeface="Meiryo" pitchFamily="34" charset="-120"/>
+              </a:rPr>
+              <a:t>鹿児島のパーキンソン病専門トレーニングスタジオ</a:t>
+            </a:r>
+            <a:endParaRPr lang="en-US" sz="750" dirty="0"/>
+          </a:p>
+        </p:txBody>
+      </p:sp>
+      <p:sp>
+        <p:nvSpPr>
+          <p:cNvPr id="4" name="Text 1"/>
           <p:cNvSpPr/>
           <p:nvPr/>
         </p:nvSpPr>
@@ -5565,7 +5936,7 @@
       </p:sp>
       <p:sp>
         <p:nvSpPr>
-          <p:cNvPr id="3" name="Text 1"/>
+          <p:cNvPr id="5" name="Text 2"/>
           <p:cNvSpPr/>
           <p:nvPr/>
         </p:nvSpPr>
@@ -5604,7 +5975,7 @@
       </p:sp>
       <p:sp>
         <p:nvSpPr>
-          <p:cNvPr id="4" name="Text 2"/>
+          <p:cNvPr id="6" name="Text 3"/>
           <p:cNvSpPr/>
           <p:nvPr/>
         </p:nvSpPr>
@@ -5643,7 +6014,7 @@
       </p:sp>
       <p:sp>
         <p:nvSpPr>
-          <p:cNvPr id="5" name="Text 3"/>
+          <p:cNvPr id="7" name="Text 4"/>
           <p:cNvSpPr/>
           <p:nvPr/>
         </p:nvSpPr>
@@ -5682,7 +6053,7 @@
       </p:sp>
       <p:sp>
         <p:nvSpPr>
-          <p:cNvPr id="6" name="Text 4"/>
+          <p:cNvPr id="8" name="Text 5"/>
           <p:cNvSpPr/>
           <p:nvPr/>
         </p:nvSpPr>
@@ -5721,7 +6092,7 @@
       </p:sp>
       <p:sp>
         <p:nvSpPr>
-          <p:cNvPr id="7" name="Text 5"/>
+          <p:cNvPr id="9" name="Text 6"/>
           <p:cNvSpPr/>
           <p:nvPr/>
         </p:nvSpPr>
@@ -5760,7 +6131,7 @@
       </p:sp>
       <p:sp>
         <p:nvSpPr>
-          <p:cNvPr id="8" name="Text 6"/>
+          <p:cNvPr id="10" name="Text 7"/>
           <p:cNvSpPr/>
           <p:nvPr/>
         </p:nvSpPr>
@@ -5799,7 +6170,7 @@
       </p:sp>
       <p:sp>
         <p:nvSpPr>
-          <p:cNvPr id="9" name="Text 7"/>
+          <p:cNvPr id="11" name="Text 8"/>
           <p:cNvSpPr/>
           <p:nvPr/>
         </p:nvSpPr>
@@ -5838,7 +6209,7 @@
       </p:sp>
       <p:sp>
         <p:nvSpPr>
-          <p:cNvPr id="10" name="Text 8"/>
+          <p:cNvPr id="12" name="Text 9"/>
           <p:cNvSpPr/>
           <p:nvPr/>
         </p:nvSpPr>
@@ -5877,7 +6248,7 @@
       </p:sp>
       <p:sp>
         <p:nvSpPr>
-          <p:cNvPr id="11" name="Text 9"/>
+          <p:cNvPr id="13" name="Text 10"/>
           <p:cNvSpPr/>
           <p:nvPr/>
         </p:nvSpPr>
@@ -5916,7 +6287,7 @@
       </p:sp>
       <p:sp>
         <p:nvSpPr>
-          <p:cNvPr id="12" name="Text 10"/>
+          <p:cNvPr id="14" name="Text 11"/>
           <p:cNvSpPr/>
           <p:nvPr/>
         </p:nvSpPr>
@@ -5955,7 +6326,7 @@
       </p:sp>
       <p:sp>
         <p:nvSpPr>
-          <p:cNvPr id="13" name="Text 11"/>
+          <p:cNvPr id="15" name="Text 12"/>
           <p:cNvSpPr/>
           <p:nvPr/>
         </p:nvSpPr>
@@ -5994,7 +6365,7 @@
       </p:sp>
       <p:sp>
         <p:nvSpPr>
-          <p:cNvPr id="14" name="Text 12"/>
+          <p:cNvPr id="16" name="Text 13"/>
           <p:cNvSpPr/>
           <p:nvPr/>
         </p:nvSpPr>
@@ -6033,7 +6404,7 @@
       </p:sp>
       <p:sp>
         <p:nvSpPr>
-          <p:cNvPr id="15" name="Text 13"/>
+          <p:cNvPr id="17" name="Text 14"/>
           <p:cNvSpPr/>
           <p:nvPr/>
         </p:nvSpPr>
@@ -6072,7 +6443,7 @@
       </p:sp>
       <p:sp>
         <p:nvSpPr>
-          <p:cNvPr id="16" name="Text 14"/>
+          <p:cNvPr id="18" name="Text 15"/>
           <p:cNvSpPr/>
           <p:nvPr/>
         </p:nvSpPr>
@@ -6111,7 +6482,7 @@
       </p:sp>
       <p:sp>
         <p:nvSpPr>
-          <p:cNvPr id="17" name="Text 15"/>
+          <p:cNvPr id="19" name="Text 16"/>
           <p:cNvSpPr/>
           <p:nvPr/>
         </p:nvSpPr>
@@ -6150,7 +6521,7 @@
       </p:sp>
       <p:sp>
         <p:nvSpPr>
-          <p:cNvPr id="18" name="Text 16"/>
+          <p:cNvPr id="20" name="Text 17"/>
           <p:cNvSpPr/>
           <p:nvPr/>
         </p:nvSpPr>
@@ -6189,7 +6560,7 @@
       </p:sp>
       <p:sp>
         <p:nvSpPr>
-          <p:cNvPr id="19" name="Text 17"/>
+          <p:cNvPr id="21" name="Text 18"/>
           <p:cNvSpPr/>
           <p:nvPr/>
         </p:nvSpPr>
@@ -6228,7 +6599,7 @@
       </p:sp>
       <p:sp>
         <p:nvSpPr>
-          <p:cNvPr id="20" name="Text 18"/>
+          <p:cNvPr id="22" name="Text 19"/>
           <p:cNvSpPr/>
           <p:nvPr/>
         </p:nvSpPr>
@@ -6267,7 +6638,7 @@
       </p:sp>
       <p:sp>
         <p:nvSpPr>
-          <p:cNvPr id="21" name="Text 19"/>
+          <p:cNvPr id="23" name="Text 20"/>
           <p:cNvSpPr/>
           <p:nvPr/>
         </p:nvSpPr>
@@ -6306,7 +6677,7 @@
       </p:sp>
       <p:sp>
         <p:nvSpPr>
-          <p:cNvPr id="22" name="Text 20"/>
+          <p:cNvPr id="24" name="Text 21"/>
           <p:cNvSpPr/>
           <p:nvPr/>
         </p:nvSpPr>
@@ -6345,7 +6716,7 @@
       </p:sp>
       <p:sp>
         <p:nvSpPr>
-          <p:cNvPr id="23" name="Shape 21"/>
+          <p:cNvPr id="25" name="Shape 22"/>
           <p:cNvSpPr/>
           <p:nvPr/>
         </p:nvSpPr>
@@ -6395,9 +6766,72 @@
           <a:chExt cx="0" cy="0"/>
         </a:xfrm>
       </p:grpSpPr>
-      <p:sp>
-        <p:nvSpPr>
-          <p:cNvPr id="2" name="Text 0"/>
+      <p:pic>
+        <p:nvPicPr>
+          <p:cNvPr id="2" name="Image 0" descr="/sessions/compassionate-sweet-heisenberg/mnt/dev-aspath-life-main/tools/assets/logo-deck.png">    </p:cNvPr>
+          <p:cNvPicPr>
+            <a:picLocks noChangeAspect="1"/>
+          </p:cNvPicPr>
+          <p:nvPr/>
+        </p:nvPicPr>
+        <p:blipFill>
+          <a:blip r:embed="rId1"/>
+          <a:stretch>
+            <a:fillRect/>
+          </a:stretch>
+        </p:blipFill>
+        <p:spPr>
+          <a:xfrm>
+            <a:off x="11458173" y="109728"/>
+            <a:ext cx="209571" cy="256032"/>
+          </a:xfrm>
+          <a:prstGeom prst="rect">
+            <a:avLst/>
+          </a:prstGeom>
+        </p:spPr>
+      </p:pic>
+      <p:sp>
+        <p:nvSpPr>
+          <p:cNvPr id="3" name="Text 0"/>
+          <p:cNvSpPr txBox="1"/>
+          <p:nvPr/>
+        </p:nvSpPr>
+        <p:spPr>
+          <a:xfrm>
+            <a:off x="8623533" y="128016"/>
+            <a:ext cx="2743200" cy="237744"/>
+          </a:xfrm>
+          <a:prstGeom prst="rect">
+            <a:avLst/>
+          </a:prstGeom>
+          <a:noFill/>
+          <a:ln/>
+        </p:spPr>
+        <p:txBody>
+          <a:bodyPr wrap="square" lIns="0" tIns="0" rIns="0" bIns="0" rtlCol="0" anchor="ctr"/>
+          <a:lstStyle/>
+          <a:p>
+            <a:pPr algn="r" indent="0" marL="0">
+              <a:buNone/>
+            </a:pPr>
+            <a:r>
+              <a:rPr lang="en-US" sz="750" dirty="0">
+                <a:solidFill>
+                  <a:srgbClr val="97A9AF"/>
+                </a:solidFill>
+                <a:latin typeface="Meiryo" pitchFamily="34" charset="0"/>
+                <a:ea typeface="Meiryo" pitchFamily="34" charset="-122"/>
+                <a:cs typeface="Meiryo" pitchFamily="34" charset="-120"/>
+              </a:rPr>
+              <a:t>鹿児島のパーキンソン病専門トレーニングスタジオ</a:t>
+            </a:r>
+            <a:endParaRPr lang="en-US" sz="750" dirty="0"/>
+          </a:p>
+        </p:txBody>
+      </p:sp>
+      <p:sp>
+        <p:nvSpPr>
+          <p:cNvPr id="4" name="Text 1"/>
           <p:cNvSpPr/>
           <p:nvPr/>
         </p:nvSpPr>
@@ -6436,7 +6870,7 @@
       </p:sp>
       <p:sp>
         <p:nvSpPr>
-          <p:cNvPr id="3" name="Text 1"/>
+          <p:cNvPr id="5" name="Text 2"/>
           <p:cNvSpPr/>
           <p:nvPr/>
         </p:nvSpPr>
@@ -6475,7 +6909,7 @@
       </p:sp>
       <p:sp>
         <p:nvSpPr>
-          <p:cNvPr id="4" name="Text 2"/>
+          <p:cNvPr id="6" name="Text 3"/>
           <p:cNvSpPr/>
           <p:nvPr/>
         </p:nvSpPr>
@@ -6514,7 +6948,7 @@
       </p:sp>
       <p:sp>
         <p:nvSpPr>
-          <p:cNvPr id="5" name="Shape 3"/>
+          <p:cNvPr id="7" name="Shape 4"/>
           <p:cNvSpPr/>
           <p:nvPr/>
         </p:nvSpPr>
@@ -6536,7 +6970,7 @@
       </p:sp>
       <p:sp>
         <p:nvSpPr>
-          <p:cNvPr id="6" name="Text 4"/>
+          <p:cNvPr id="8" name="Text 5"/>
           <p:cNvSpPr/>
           <p:nvPr/>
         </p:nvSpPr>
@@ -6575,7 +7009,7 @@
       </p:sp>
       <p:sp>
         <p:nvSpPr>
-          <p:cNvPr id="7" name="Text 5"/>
+          <p:cNvPr id="9" name="Text 6"/>
           <p:cNvSpPr/>
           <p:nvPr/>
         </p:nvSpPr>
@@ -6617,7 +7051,7 @@
       </p:sp>
       <p:sp>
         <p:nvSpPr>
-          <p:cNvPr id="8" name="Shape 6"/>
+          <p:cNvPr id="10" name="Shape 7"/>
           <p:cNvSpPr/>
           <p:nvPr/>
         </p:nvSpPr>
@@ -6639,7 +7073,7 @@
       </p:sp>
       <p:sp>
         <p:nvSpPr>
-          <p:cNvPr id="9" name="Text 7"/>
+          <p:cNvPr id="11" name="Text 8"/>
           <p:cNvSpPr/>
           <p:nvPr/>
         </p:nvSpPr>
@@ -6678,7 +7112,7 @@
       </p:sp>
       <p:sp>
         <p:nvSpPr>
-          <p:cNvPr id="10" name="Text 8"/>
+          <p:cNvPr id="12" name="Text 9"/>
           <p:cNvSpPr/>
           <p:nvPr/>
         </p:nvSpPr>
@@ -6809,7 +7243,7 @@
       </p:sp>
       <p:sp>
         <p:nvSpPr>
-          <p:cNvPr id="11" name="Shape 9"/>
+          <p:cNvPr id="13" name="Shape 10"/>
           <p:cNvSpPr/>
           <p:nvPr/>
         </p:nvSpPr>
@@ -6831,7 +7265,7 @@
       </p:sp>
       <p:sp>
         <p:nvSpPr>
-          <p:cNvPr id="12" name="Text 10"/>
+          <p:cNvPr id="14" name="Text 11"/>
           <p:cNvSpPr/>
           <p:nvPr/>
         </p:nvSpPr>
@@ -6870,7 +7304,7 @@
       </p:sp>
       <p:sp>
         <p:nvSpPr>
-          <p:cNvPr id="13" name="Text 11"/>
+          <p:cNvPr id="15" name="Text 12"/>
           <p:cNvSpPr/>
           <p:nvPr/>
         </p:nvSpPr>
@@ -7011,126 +7445,9 @@
           <a:chExt cx="0" cy="0"/>
         </a:xfrm>
       </p:grpSpPr>
-      <p:sp>
-        <p:nvSpPr>
-          <p:cNvPr id="2" name="Text 0"/>
-          <p:cNvSpPr/>
-          <p:nvPr/>
-        </p:nvSpPr>
-        <p:spPr>
-          <a:xfrm>
-            <a:off x="548640" y="320040"/>
-            <a:ext cx="10424160" cy="685800"/>
-          </a:xfrm>
-          <a:prstGeom prst="rect">
-            <a:avLst/>
-          </a:prstGeom>
-          <a:noFill/>
-          <a:ln/>
-        </p:spPr>
-        <p:txBody>
-          <a:bodyPr wrap="square" lIns="0" tIns="0" rIns="0" bIns="0" rtlCol="0" anchor="ctr"/>
-          <a:lstStyle/>
-          <a:p>
-            <a:pPr indent="0" marL="0">
-              <a:buNone/>
-            </a:pPr>
-            <a:r>
-              <a:rPr lang="en-US" sz="3200" b="1" dirty="0">
-                <a:solidFill>
-                  <a:srgbClr val="264653"/>
-                </a:solidFill>
-                <a:latin typeface="Meiryo" pitchFamily="34" charset="0"/>
-                <a:ea typeface="Meiryo" pitchFamily="34" charset="-122"/>
-                <a:cs typeface="Meiryo" pitchFamily="34" charset="-120"/>
-              </a:rPr>
-              <a:t>【道B】テーマをアップロードする</a:t>
-            </a:r>
-            <a:endParaRPr lang="en-US" sz="3200" dirty="0"/>
-          </a:p>
-        </p:txBody>
-      </p:sp>
-      <p:sp>
-        <p:nvSpPr>
-          <p:cNvPr id="3" name="Text 1"/>
-          <p:cNvSpPr/>
-          <p:nvPr/>
-        </p:nvSpPr>
-        <p:spPr>
-          <a:xfrm>
-            <a:off x="566928" y="1024128"/>
-            <a:ext cx="10424160" cy="365760"/>
-          </a:xfrm>
-          <a:prstGeom prst="rect">
-            <a:avLst/>
-          </a:prstGeom>
-          <a:noFill/>
-          <a:ln/>
-        </p:spPr>
-        <p:txBody>
-          <a:bodyPr wrap="square" lIns="0" tIns="0" rIns="0" bIns="0" rtlCol="0" anchor="ctr"/>
-          <a:lstStyle/>
-          <a:p>
-            <a:pPr indent="0" marL="0">
-              <a:buNone/>
-            </a:pPr>
-            <a:r>
-              <a:rPr lang="en-US" sz="1500" dirty="0">
-                <a:solidFill>
-                  <a:srgbClr val="5E7681"/>
-                </a:solidFill>
-                <a:latin typeface="Meiryo" pitchFamily="34" charset="0"/>
-                <a:ea typeface="Meiryo" pitchFamily="34" charset="-122"/>
-                <a:cs typeface="Meiryo" pitchFamily="34" charset="-120"/>
-              </a:rPr>
-              <a:t>外観 → テーマ → 新規追加 → テーマのアップロード</a:t>
-            </a:r>
-            <a:endParaRPr lang="en-US" sz="1500" dirty="0"/>
-          </a:p>
-        </p:txBody>
-      </p:sp>
-      <p:sp>
-        <p:nvSpPr>
-          <p:cNvPr id="4" name="Text 2"/>
-          <p:cNvSpPr/>
-          <p:nvPr/>
-        </p:nvSpPr>
-        <p:spPr>
-          <a:xfrm>
-            <a:off x="11338560" y="6263640"/>
-            <a:ext cx="457200" cy="274320"/>
-          </a:xfrm>
-          <a:prstGeom prst="rect">
-            <a:avLst/>
-          </a:prstGeom>
-          <a:noFill/>
-          <a:ln/>
-        </p:spPr>
-        <p:txBody>
-          <a:bodyPr wrap="square" lIns="0" tIns="0" rIns="0" bIns="0" rtlCol="0" anchor="ctr"/>
-          <a:lstStyle/>
-          <a:p>
-            <a:pPr algn="r" indent="0" marL="0">
-              <a:buNone/>
-            </a:pPr>
-            <a:r>
-              <a:rPr lang="en-US" sz="1100" dirty="0">
-                <a:solidFill>
-                  <a:srgbClr val="A8B4B8"/>
-                </a:solidFill>
-                <a:latin typeface="Meiryo" pitchFamily="34" charset="0"/>
-                <a:ea typeface="Meiryo" pitchFamily="34" charset="-122"/>
-                <a:cs typeface="Meiryo" pitchFamily="34" charset="-120"/>
-              </a:rPr>
-              <a:t>13</a:t>
-            </a:r>
-            <a:endParaRPr lang="en-US" sz="1100" dirty="0"/>
-          </a:p>
-        </p:txBody>
-      </p:sp>
       <p:pic>
         <p:nvPicPr>
-          <p:cNvPr id="5" name="Image 0" descr="/sessions/compassionate-sweet-heisenberg/mnt/dev-aspath-life-main/_wp移行素材/★引継ぎ資料/画像/05_テーマのアップロード.jpg">    </p:cNvPr>
+          <p:cNvPr id="2" name="Image 0" descr="/sessions/compassionate-sweet-heisenberg/mnt/dev-aspath-life-main/tools/assets/logo-deck.png">    </p:cNvPr>
           <p:cNvPicPr>
             <a:picLocks noChangeAspect="1"/>
           </p:cNvPicPr>
@@ -7144,6 +7461,186 @@
         </p:blipFill>
         <p:spPr>
           <a:xfrm>
+            <a:off x="11458173" y="109728"/>
+            <a:ext cx="209571" cy="256032"/>
+          </a:xfrm>
+          <a:prstGeom prst="rect">
+            <a:avLst/>
+          </a:prstGeom>
+        </p:spPr>
+      </p:pic>
+      <p:sp>
+        <p:nvSpPr>
+          <p:cNvPr id="3" name="Text 0"/>
+          <p:cNvSpPr txBox="1"/>
+          <p:nvPr/>
+        </p:nvSpPr>
+        <p:spPr>
+          <a:xfrm>
+            <a:off x="8623533" y="128016"/>
+            <a:ext cx="2743200" cy="237744"/>
+          </a:xfrm>
+          <a:prstGeom prst="rect">
+            <a:avLst/>
+          </a:prstGeom>
+          <a:noFill/>
+          <a:ln/>
+        </p:spPr>
+        <p:txBody>
+          <a:bodyPr wrap="square" lIns="0" tIns="0" rIns="0" bIns="0" rtlCol="0" anchor="ctr"/>
+          <a:lstStyle/>
+          <a:p>
+            <a:pPr algn="r" indent="0" marL="0">
+              <a:buNone/>
+            </a:pPr>
+            <a:r>
+              <a:rPr lang="en-US" sz="750" dirty="0">
+                <a:solidFill>
+                  <a:srgbClr val="97A9AF"/>
+                </a:solidFill>
+                <a:latin typeface="Meiryo" pitchFamily="34" charset="0"/>
+                <a:ea typeface="Meiryo" pitchFamily="34" charset="-122"/>
+                <a:cs typeface="Meiryo" pitchFamily="34" charset="-120"/>
+              </a:rPr>
+              <a:t>鹿児島のパーキンソン病専門トレーニングスタジオ</a:t>
+            </a:r>
+            <a:endParaRPr lang="en-US" sz="750" dirty="0"/>
+          </a:p>
+        </p:txBody>
+      </p:sp>
+      <p:sp>
+        <p:nvSpPr>
+          <p:cNvPr id="4" name="Text 1"/>
+          <p:cNvSpPr/>
+          <p:nvPr/>
+        </p:nvSpPr>
+        <p:spPr>
+          <a:xfrm>
+            <a:off x="548640" y="320040"/>
+            <a:ext cx="10424160" cy="685800"/>
+          </a:xfrm>
+          <a:prstGeom prst="rect">
+            <a:avLst/>
+          </a:prstGeom>
+          <a:noFill/>
+          <a:ln/>
+        </p:spPr>
+        <p:txBody>
+          <a:bodyPr wrap="square" lIns="0" tIns="0" rIns="0" bIns="0" rtlCol="0" anchor="ctr"/>
+          <a:lstStyle/>
+          <a:p>
+            <a:pPr indent="0" marL="0">
+              <a:buNone/>
+            </a:pPr>
+            <a:r>
+              <a:rPr lang="en-US" sz="3200" b="1" dirty="0">
+                <a:solidFill>
+                  <a:srgbClr val="264653"/>
+                </a:solidFill>
+                <a:latin typeface="Meiryo" pitchFamily="34" charset="0"/>
+                <a:ea typeface="Meiryo" pitchFamily="34" charset="-122"/>
+                <a:cs typeface="Meiryo" pitchFamily="34" charset="-120"/>
+              </a:rPr>
+              <a:t>【道B】テーマをアップロードする</a:t>
+            </a:r>
+            <a:endParaRPr lang="en-US" sz="3200" dirty="0"/>
+          </a:p>
+        </p:txBody>
+      </p:sp>
+      <p:sp>
+        <p:nvSpPr>
+          <p:cNvPr id="5" name="Text 2"/>
+          <p:cNvSpPr/>
+          <p:nvPr/>
+        </p:nvSpPr>
+        <p:spPr>
+          <a:xfrm>
+            <a:off x="566928" y="1024128"/>
+            <a:ext cx="10424160" cy="365760"/>
+          </a:xfrm>
+          <a:prstGeom prst="rect">
+            <a:avLst/>
+          </a:prstGeom>
+          <a:noFill/>
+          <a:ln/>
+        </p:spPr>
+        <p:txBody>
+          <a:bodyPr wrap="square" lIns="0" tIns="0" rIns="0" bIns="0" rtlCol="0" anchor="ctr"/>
+          <a:lstStyle/>
+          <a:p>
+            <a:pPr indent="0" marL="0">
+              <a:buNone/>
+            </a:pPr>
+            <a:r>
+              <a:rPr lang="en-US" sz="1500" dirty="0">
+                <a:solidFill>
+                  <a:srgbClr val="5E7681"/>
+                </a:solidFill>
+                <a:latin typeface="Meiryo" pitchFamily="34" charset="0"/>
+                <a:ea typeface="Meiryo" pitchFamily="34" charset="-122"/>
+                <a:cs typeface="Meiryo" pitchFamily="34" charset="-120"/>
+              </a:rPr>
+              <a:t>外観 → テーマ → 新規追加 → テーマのアップロード</a:t>
+            </a:r>
+            <a:endParaRPr lang="en-US" sz="1500" dirty="0"/>
+          </a:p>
+        </p:txBody>
+      </p:sp>
+      <p:sp>
+        <p:nvSpPr>
+          <p:cNvPr id="6" name="Text 3"/>
+          <p:cNvSpPr/>
+          <p:nvPr/>
+        </p:nvSpPr>
+        <p:spPr>
+          <a:xfrm>
+            <a:off x="11338560" y="6263640"/>
+            <a:ext cx="457200" cy="274320"/>
+          </a:xfrm>
+          <a:prstGeom prst="rect">
+            <a:avLst/>
+          </a:prstGeom>
+          <a:noFill/>
+          <a:ln/>
+        </p:spPr>
+        <p:txBody>
+          <a:bodyPr wrap="square" lIns="0" tIns="0" rIns="0" bIns="0" rtlCol="0" anchor="ctr"/>
+          <a:lstStyle/>
+          <a:p>
+            <a:pPr algn="r" indent="0" marL="0">
+              <a:buNone/>
+            </a:pPr>
+            <a:r>
+              <a:rPr lang="en-US" sz="1100" dirty="0">
+                <a:solidFill>
+                  <a:srgbClr val="A8B4B8"/>
+                </a:solidFill>
+                <a:latin typeface="Meiryo" pitchFamily="34" charset="0"/>
+                <a:ea typeface="Meiryo" pitchFamily="34" charset="-122"/>
+                <a:cs typeface="Meiryo" pitchFamily="34" charset="-120"/>
+              </a:rPr>
+              <a:t>13</a:t>
+            </a:r>
+            <a:endParaRPr lang="en-US" sz="1100" dirty="0"/>
+          </a:p>
+        </p:txBody>
+      </p:sp>
+      <p:pic>
+        <p:nvPicPr>
+          <p:cNvPr id="7" name="Image 1" descr="/sessions/compassionate-sweet-heisenberg/mnt/dev-aspath-life-main/_wp移行素材/★引継ぎ資料/画像/05_テーマのアップロード.jpg">    </p:cNvPr>
+          <p:cNvPicPr>
+            <a:picLocks noChangeAspect="1"/>
+          </p:cNvPicPr>
+          <p:nvPr/>
+        </p:nvPicPr>
+        <p:blipFill>
+          <a:blip r:embed="rId2"/>
+          <a:stretch>
+            <a:fillRect/>
+          </a:stretch>
+        </p:blipFill>
+        <p:spPr>
+          <a:xfrm>
             <a:off x="640080" y="1691640"/>
             <a:ext cx="6766560" cy="3296972"/>
           </a:xfrm>
@@ -7154,7 +7651,7 @@
       </p:pic>
       <p:sp>
         <p:nvSpPr>
-          <p:cNvPr id="6" name="Text 3"/>
+          <p:cNvPr id="8" name="Text 4"/>
           <p:cNvSpPr/>
           <p:nvPr/>
         </p:nvSpPr>
@@ -7216,7 +7713,7 @@
       </p:sp>
       <p:sp>
         <p:nvSpPr>
-          <p:cNvPr id="7" name="Shape 4"/>
+          <p:cNvPr id="9" name="Shape 5"/>
           <p:cNvSpPr/>
           <p:nvPr/>
         </p:nvSpPr>
@@ -7238,7 +7735,7 @@
       </p:sp>
       <p:sp>
         <p:nvSpPr>
-          <p:cNvPr id="8" name="Text 5"/>
+          <p:cNvPr id="10" name="Text 6"/>
           <p:cNvSpPr/>
           <p:nvPr/>
         </p:nvSpPr>
@@ -7300,7 +7797,7 @@
       </p:sp>
       <p:sp>
         <p:nvSpPr>
-          <p:cNvPr id="9" name="Shape 6"/>
+          <p:cNvPr id="11" name="Shape 7"/>
           <p:cNvSpPr/>
           <p:nvPr/>
         </p:nvSpPr>
@@ -7322,7 +7819,7 @@
       </p:sp>
       <p:sp>
         <p:nvSpPr>
-          <p:cNvPr id="10" name="Text 7"/>
+          <p:cNvPr id="12" name="Text 8"/>
           <p:cNvSpPr/>
           <p:nvPr/>
         </p:nvSpPr>
@@ -7424,7 +7921,7 @@
       </p:sp>
       <p:sp>
         <p:nvSpPr>
-          <p:cNvPr id="11" name="Text 8"/>
+          <p:cNvPr id="13" name="Text 9"/>
           <p:cNvSpPr/>
           <p:nvPr/>
         </p:nvSpPr>
@@ -7516,126 +8013,9 @@
           <a:chExt cx="0" cy="0"/>
         </a:xfrm>
       </p:grpSpPr>
-      <p:sp>
-        <p:nvSpPr>
-          <p:cNvPr id="2" name="Text 0"/>
-          <p:cNvSpPr/>
-          <p:nvPr/>
-        </p:nvSpPr>
-        <p:spPr>
-          <a:xfrm>
-            <a:off x="548640" y="320040"/>
-            <a:ext cx="10424160" cy="685800"/>
-          </a:xfrm>
-          <a:prstGeom prst="rect">
-            <a:avLst/>
-          </a:prstGeom>
-          <a:noFill/>
-          <a:ln/>
-        </p:spPr>
-        <p:txBody>
-          <a:bodyPr wrap="square" lIns="0" tIns="0" rIns="0" bIns="0" rtlCol="0" anchor="ctr"/>
-          <a:lstStyle/>
-          <a:p>
-            <a:pPr indent="0" marL="0">
-              <a:buNone/>
-            </a:pPr>
-            <a:r>
-              <a:rPr lang="en-US" sz="3200" b="1" dirty="0">
-                <a:solidFill>
-                  <a:srgbClr val="264653"/>
-                </a:solidFill>
-                <a:latin typeface="Meiryo" pitchFamily="34" charset="0"/>
-                <a:ea typeface="Meiryo" pitchFamily="34" charset="-122"/>
-                <a:cs typeface="Meiryo" pitchFamily="34" charset="-120"/>
-              </a:rPr>
-              <a:t>【道B】最後に必ずキャッシュを消す</a:t>
-            </a:r>
-            <a:endParaRPr lang="en-US" sz="3200" dirty="0"/>
-          </a:p>
-        </p:txBody>
-      </p:sp>
-      <p:sp>
-        <p:nvSpPr>
-          <p:cNvPr id="3" name="Text 1"/>
-          <p:cNvSpPr/>
-          <p:nvPr/>
-        </p:nvSpPr>
-        <p:spPr>
-          <a:xfrm>
-            <a:off x="566928" y="1024128"/>
-            <a:ext cx="10424160" cy="365760"/>
-          </a:xfrm>
-          <a:prstGeom prst="rect">
-            <a:avLst/>
-          </a:prstGeom>
-          <a:noFill/>
-          <a:ln/>
-        </p:spPr>
-        <p:txBody>
-          <a:bodyPr wrap="square" lIns="0" tIns="0" rIns="0" bIns="0" rtlCol="0" anchor="ctr"/>
-          <a:lstStyle/>
-          <a:p>
-            <a:pPr indent="0" marL="0">
-              <a:buNone/>
-            </a:pPr>
-            <a:r>
-              <a:rPr lang="en-US" sz="1500" dirty="0">
-                <a:solidFill>
-                  <a:srgbClr val="5E7681"/>
-                </a:solidFill>
-                <a:latin typeface="Meiryo" pitchFamily="34" charset="0"/>
-                <a:ea typeface="Meiryo" pitchFamily="34" charset="-122"/>
-                <a:cs typeface="Meiryo" pitchFamily="34" charset="-120"/>
-              </a:rPr>
-              <a:t>これを忘れると「直したのに変わらない」になります</a:t>
-            </a:r>
-            <a:endParaRPr lang="en-US" sz="1500" dirty="0"/>
-          </a:p>
-        </p:txBody>
-      </p:sp>
-      <p:sp>
-        <p:nvSpPr>
-          <p:cNvPr id="4" name="Text 2"/>
-          <p:cNvSpPr/>
-          <p:nvPr/>
-        </p:nvSpPr>
-        <p:spPr>
-          <a:xfrm>
-            <a:off x="11338560" y="6263640"/>
-            <a:ext cx="457200" cy="274320"/>
-          </a:xfrm>
-          <a:prstGeom prst="rect">
-            <a:avLst/>
-          </a:prstGeom>
-          <a:noFill/>
-          <a:ln/>
-        </p:spPr>
-        <p:txBody>
-          <a:bodyPr wrap="square" lIns="0" tIns="0" rIns="0" bIns="0" rtlCol="0" anchor="ctr"/>
-          <a:lstStyle/>
-          <a:p>
-            <a:pPr algn="r" indent="0" marL="0">
-              <a:buNone/>
-            </a:pPr>
-            <a:r>
-              <a:rPr lang="en-US" sz="1100" dirty="0">
-                <a:solidFill>
-                  <a:srgbClr val="A8B4B8"/>
-                </a:solidFill>
-                <a:latin typeface="Meiryo" pitchFamily="34" charset="0"/>
-                <a:ea typeface="Meiryo" pitchFamily="34" charset="-122"/>
-                <a:cs typeface="Meiryo" pitchFamily="34" charset="-120"/>
-              </a:rPr>
-              <a:t>14</a:t>
-            </a:r>
-            <a:endParaRPr lang="en-US" sz="1100" dirty="0"/>
-          </a:p>
-        </p:txBody>
-      </p:sp>
       <p:pic>
         <p:nvPicPr>
-          <p:cNvPr id="5" name="Image 0" descr="/sessions/compassionate-sweet-heisenberg/mnt/dev-aspath-life-main/_wp移行素材/★引継ぎ資料/画像/06_キャッシュ削除.jpg">    </p:cNvPr>
+          <p:cNvPr id="2" name="Image 0" descr="/sessions/compassionate-sweet-heisenberg/mnt/dev-aspath-life-main/tools/assets/logo-deck.png">    </p:cNvPr>
           <p:cNvPicPr>
             <a:picLocks noChangeAspect="1"/>
           </p:cNvPicPr>
@@ -7649,6 +8029,186 @@
         </p:blipFill>
         <p:spPr>
           <a:xfrm>
+            <a:off x="11458173" y="109728"/>
+            <a:ext cx="209571" cy="256032"/>
+          </a:xfrm>
+          <a:prstGeom prst="rect">
+            <a:avLst/>
+          </a:prstGeom>
+        </p:spPr>
+      </p:pic>
+      <p:sp>
+        <p:nvSpPr>
+          <p:cNvPr id="3" name="Text 0"/>
+          <p:cNvSpPr txBox="1"/>
+          <p:nvPr/>
+        </p:nvSpPr>
+        <p:spPr>
+          <a:xfrm>
+            <a:off x="8623533" y="128016"/>
+            <a:ext cx="2743200" cy="237744"/>
+          </a:xfrm>
+          <a:prstGeom prst="rect">
+            <a:avLst/>
+          </a:prstGeom>
+          <a:noFill/>
+          <a:ln/>
+        </p:spPr>
+        <p:txBody>
+          <a:bodyPr wrap="square" lIns="0" tIns="0" rIns="0" bIns="0" rtlCol="0" anchor="ctr"/>
+          <a:lstStyle/>
+          <a:p>
+            <a:pPr algn="r" indent="0" marL="0">
+              <a:buNone/>
+            </a:pPr>
+            <a:r>
+              <a:rPr lang="en-US" sz="750" dirty="0">
+                <a:solidFill>
+                  <a:srgbClr val="97A9AF"/>
+                </a:solidFill>
+                <a:latin typeface="Meiryo" pitchFamily="34" charset="0"/>
+                <a:ea typeface="Meiryo" pitchFamily="34" charset="-122"/>
+                <a:cs typeface="Meiryo" pitchFamily="34" charset="-120"/>
+              </a:rPr>
+              <a:t>鹿児島のパーキンソン病専門トレーニングスタジオ</a:t>
+            </a:r>
+            <a:endParaRPr lang="en-US" sz="750" dirty="0"/>
+          </a:p>
+        </p:txBody>
+      </p:sp>
+      <p:sp>
+        <p:nvSpPr>
+          <p:cNvPr id="4" name="Text 1"/>
+          <p:cNvSpPr/>
+          <p:nvPr/>
+        </p:nvSpPr>
+        <p:spPr>
+          <a:xfrm>
+            <a:off x="548640" y="320040"/>
+            <a:ext cx="10424160" cy="685800"/>
+          </a:xfrm>
+          <a:prstGeom prst="rect">
+            <a:avLst/>
+          </a:prstGeom>
+          <a:noFill/>
+          <a:ln/>
+        </p:spPr>
+        <p:txBody>
+          <a:bodyPr wrap="square" lIns="0" tIns="0" rIns="0" bIns="0" rtlCol="0" anchor="ctr"/>
+          <a:lstStyle/>
+          <a:p>
+            <a:pPr indent="0" marL="0">
+              <a:buNone/>
+            </a:pPr>
+            <a:r>
+              <a:rPr lang="en-US" sz="3200" b="1" dirty="0">
+                <a:solidFill>
+                  <a:srgbClr val="264653"/>
+                </a:solidFill>
+                <a:latin typeface="Meiryo" pitchFamily="34" charset="0"/>
+                <a:ea typeface="Meiryo" pitchFamily="34" charset="-122"/>
+                <a:cs typeface="Meiryo" pitchFamily="34" charset="-120"/>
+              </a:rPr>
+              <a:t>【道B】最後に必ずキャッシュを消す</a:t>
+            </a:r>
+            <a:endParaRPr lang="en-US" sz="3200" dirty="0"/>
+          </a:p>
+        </p:txBody>
+      </p:sp>
+      <p:sp>
+        <p:nvSpPr>
+          <p:cNvPr id="5" name="Text 2"/>
+          <p:cNvSpPr/>
+          <p:nvPr/>
+        </p:nvSpPr>
+        <p:spPr>
+          <a:xfrm>
+            <a:off x="566928" y="1024128"/>
+            <a:ext cx="10424160" cy="365760"/>
+          </a:xfrm>
+          <a:prstGeom prst="rect">
+            <a:avLst/>
+          </a:prstGeom>
+          <a:noFill/>
+          <a:ln/>
+        </p:spPr>
+        <p:txBody>
+          <a:bodyPr wrap="square" lIns="0" tIns="0" rIns="0" bIns="0" rtlCol="0" anchor="ctr"/>
+          <a:lstStyle/>
+          <a:p>
+            <a:pPr indent="0" marL="0">
+              <a:buNone/>
+            </a:pPr>
+            <a:r>
+              <a:rPr lang="en-US" sz="1500" dirty="0">
+                <a:solidFill>
+                  <a:srgbClr val="5E7681"/>
+                </a:solidFill>
+                <a:latin typeface="Meiryo" pitchFamily="34" charset="0"/>
+                <a:ea typeface="Meiryo" pitchFamily="34" charset="-122"/>
+                <a:cs typeface="Meiryo" pitchFamily="34" charset="-120"/>
+              </a:rPr>
+              <a:t>これを忘れると「直したのに変わらない」になります</a:t>
+            </a:r>
+            <a:endParaRPr lang="en-US" sz="1500" dirty="0"/>
+          </a:p>
+        </p:txBody>
+      </p:sp>
+      <p:sp>
+        <p:nvSpPr>
+          <p:cNvPr id="6" name="Text 3"/>
+          <p:cNvSpPr/>
+          <p:nvPr/>
+        </p:nvSpPr>
+        <p:spPr>
+          <a:xfrm>
+            <a:off x="11338560" y="6263640"/>
+            <a:ext cx="457200" cy="274320"/>
+          </a:xfrm>
+          <a:prstGeom prst="rect">
+            <a:avLst/>
+          </a:prstGeom>
+          <a:noFill/>
+          <a:ln/>
+        </p:spPr>
+        <p:txBody>
+          <a:bodyPr wrap="square" lIns="0" tIns="0" rIns="0" bIns="0" rtlCol="0" anchor="ctr"/>
+          <a:lstStyle/>
+          <a:p>
+            <a:pPr algn="r" indent="0" marL="0">
+              <a:buNone/>
+            </a:pPr>
+            <a:r>
+              <a:rPr lang="en-US" sz="1100" dirty="0">
+                <a:solidFill>
+                  <a:srgbClr val="A8B4B8"/>
+                </a:solidFill>
+                <a:latin typeface="Meiryo" pitchFamily="34" charset="0"/>
+                <a:ea typeface="Meiryo" pitchFamily="34" charset="-122"/>
+                <a:cs typeface="Meiryo" pitchFamily="34" charset="-120"/>
+              </a:rPr>
+              <a:t>14</a:t>
+            </a:r>
+            <a:endParaRPr lang="en-US" sz="1100" dirty="0"/>
+          </a:p>
+        </p:txBody>
+      </p:sp>
+      <p:pic>
+        <p:nvPicPr>
+          <p:cNvPr id="7" name="Image 1" descr="/sessions/compassionate-sweet-heisenberg/mnt/dev-aspath-life-main/_wp移行素材/★引継ぎ資料/画像/06_キャッシュ削除.jpg">    </p:cNvPr>
+          <p:cNvPicPr>
+            <a:picLocks noChangeAspect="1"/>
+          </p:cNvPicPr>
+          <p:nvPr/>
+        </p:nvPicPr>
+        <p:blipFill>
+          <a:blip r:embed="rId2"/>
+          <a:stretch>
+            <a:fillRect/>
+          </a:stretch>
+        </p:blipFill>
+        <p:spPr>
+          <a:xfrm>
             <a:off x="640080" y="1691640"/>
             <a:ext cx="6766560" cy="3296972"/>
           </a:xfrm>
@@ -7659,7 +8219,7 @@
       </p:pic>
       <p:sp>
         <p:nvSpPr>
-          <p:cNvPr id="6" name="Text 3"/>
+          <p:cNvPr id="8" name="Text 4"/>
           <p:cNvSpPr/>
           <p:nvPr/>
         </p:nvSpPr>
@@ -7744,7 +8304,7 @@
       </p:sp>
       <p:sp>
         <p:nvSpPr>
-          <p:cNvPr id="7" name="Shape 4"/>
+          <p:cNvPr id="9" name="Shape 5"/>
           <p:cNvSpPr/>
           <p:nvPr/>
         </p:nvSpPr>
@@ -7766,7 +8326,7 @@
       </p:sp>
       <p:sp>
         <p:nvSpPr>
-          <p:cNvPr id="8" name="Text 5"/>
+          <p:cNvPr id="10" name="Text 6"/>
           <p:cNvSpPr/>
           <p:nvPr/>
         </p:nvSpPr>
@@ -7805,7 +8365,7 @@
       </p:sp>
       <p:sp>
         <p:nvSpPr>
-          <p:cNvPr id="9" name="Text 6"/>
+          <p:cNvPr id="11" name="Text 7"/>
           <p:cNvSpPr/>
           <p:nvPr/>
         </p:nvSpPr>
@@ -7917,9 +8477,72 @@
           <a:chExt cx="0" cy="0"/>
         </a:xfrm>
       </p:grpSpPr>
-      <p:sp>
-        <p:nvSpPr>
-          <p:cNvPr id="2" name="Text 0"/>
+      <p:pic>
+        <p:nvPicPr>
+          <p:cNvPr id="2" name="Image 0" descr="/sessions/compassionate-sweet-heisenberg/mnt/dev-aspath-life-main/tools/assets/logo-deck.png">    </p:cNvPr>
+          <p:cNvPicPr>
+            <a:picLocks noChangeAspect="1"/>
+          </p:cNvPicPr>
+          <p:nvPr/>
+        </p:nvPicPr>
+        <p:blipFill>
+          <a:blip r:embed="rId1"/>
+          <a:stretch>
+            <a:fillRect/>
+          </a:stretch>
+        </p:blipFill>
+        <p:spPr>
+          <a:xfrm>
+            <a:off x="11458173" y="109728"/>
+            <a:ext cx="209571" cy="256032"/>
+          </a:xfrm>
+          <a:prstGeom prst="rect">
+            <a:avLst/>
+          </a:prstGeom>
+        </p:spPr>
+      </p:pic>
+      <p:sp>
+        <p:nvSpPr>
+          <p:cNvPr id="3" name="Text 0"/>
+          <p:cNvSpPr txBox="1"/>
+          <p:nvPr/>
+        </p:nvSpPr>
+        <p:spPr>
+          <a:xfrm>
+            <a:off x="8623533" y="128016"/>
+            <a:ext cx="2743200" cy="237744"/>
+          </a:xfrm>
+          <a:prstGeom prst="rect">
+            <a:avLst/>
+          </a:prstGeom>
+          <a:noFill/>
+          <a:ln/>
+        </p:spPr>
+        <p:txBody>
+          <a:bodyPr wrap="square" lIns="0" tIns="0" rIns="0" bIns="0" rtlCol="0" anchor="ctr"/>
+          <a:lstStyle/>
+          <a:p>
+            <a:pPr algn="r" indent="0" marL="0">
+              <a:buNone/>
+            </a:pPr>
+            <a:r>
+              <a:rPr lang="en-US" sz="750" dirty="0">
+                <a:solidFill>
+                  <a:srgbClr val="97A9AF"/>
+                </a:solidFill>
+                <a:latin typeface="Meiryo" pitchFamily="34" charset="0"/>
+                <a:ea typeface="Meiryo" pitchFamily="34" charset="-122"/>
+                <a:cs typeface="Meiryo" pitchFamily="34" charset="-120"/>
+              </a:rPr>
+              <a:t>鹿児島のパーキンソン病専門トレーニングスタジオ</a:t>
+            </a:r>
+            <a:endParaRPr lang="en-US" sz="750" dirty="0"/>
+          </a:p>
+        </p:txBody>
+      </p:sp>
+      <p:sp>
+        <p:nvSpPr>
+          <p:cNvPr id="4" name="Text 1"/>
           <p:cNvSpPr/>
           <p:nvPr/>
         </p:nvSpPr>
@@ -7958,7 +8581,7 @@
       </p:sp>
       <p:sp>
         <p:nvSpPr>
-          <p:cNvPr id="3" name="Text 1"/>
+          <p:cNvPr id="5" name="Text 2"/>
           <p:cNvSpPr/>
           <p:nvPr/>
         </p:nvSpPr>
@@ -7997,7 +8620,7 @@
       </p:sp>
       <p:sp>
         <p:nvSpPr>
-          <p:cNvPr id="4" name="Text 2"/>
+          <p:cNvPr id="6" name="Text 3"/>
           <p:cNvSpPr/>
           <p:nvPr/>
         </p:nvSpPr>
@@ -9715,7 +10338,7 @@
       </p:graphicFrame>
       <p:sp>
         <p:nvSpPr>
-          <p:cNvPr id="6" name="Shape 3"/>
+          <p:cNvPr id="8" name="Shape 4"/>
           <p:cNvSpPr/>
           <p:nvPr/>
         </p:nvSpPr>
@@ -9737,7 +10360,7 @@
       </p:sp>
       <p:sp>
         <p:nvSpPr>
-          <p:cNvPr id="7" name="Text 4"/>
+          <p:cNvPr id="9" name="Text 5"/>
           <p:cNvSpPr/>
           <p:nvPr/>
         </p:nvSpPr>
@@ -9806,9 +10429,72 @@
           <a:chExt cx="0" cy="0"/>
         </a:xfrm>
       </p:grpSpPr>
-      <p:sp>
-        <p:nvSpPr>
-          <p:cNvPr id="2" name="Text 0"/>
+      <p:pic>
+        <p:nvPicPr>
+          <p:cNvPr id="2" name="Image 0" descr="/sessions/compassionate-sweet-heisenberg/mnt/dev-aspath-life-main/tools/assets/logo-deck-white.png">    </p:cNvPr>
+          <p:cNvPicPr>
+            <a:picLocks noChangeAspect="1"/>
+          </p:cNvPicPr>
+          <p:nvPr/>
+        </p:nvPicPr>
+        <p:blipFill>
+          <a:blip r:embed="rId1"/>
+          <a:stretch>
+            <a:fillRect/>
+          </a:stretch>
+        </p:blipFill>
+        <p:spPr>
+          <a:xfrm>
+            <a:off x="11458173" y="109728"/>
+            <a:ext cx="209571" cy="256032"/>
+          </a:xfrm>
+          <a:prstGeom prst="rect">
+            <a:avLst/>
+          </a:prstGeom>
+        </p:spPr>
+      </p:pic>
+      <p:sp>
+        <p:nvSpPr>
+          <p:cNvPr id="3" name="Text 0"/>
+          <p:cNvSpPr txBox="1"/>
+          <p:nvPr/>
+        </p:nvSpPr>
+        <p:spPr>
+          <a:xfrm>
+            <a:off x="8623533" y="128016"/>
+            <a:ext cx="2743200" cy="237744"/>
+          </a:xfrm>
+          <a:prstGeom prst="rect">
+            <a:avLst/>
+          </a:prstGeom>
+          <a:noFill/>
+          <a:ln/>
+        </p:spPr>
+        <p:txBody>
+          <a:bodyPr wrap="square" lIns="0" tIns="0" rIns="0" bIns="0" rtlCol="0" anchor="ctr"/>
+          <a:lstStyle/>
+          <a:p>
+            <a:pPr algn="r" indent="0" marL="0">
+              <a:buNone/>
+            </a:pPr>
+            <a:r>
+              <a:rPr lang="en-US" sz="750" dirty="0">
+                <a:solidFill>
+                  <a:srgbClr val="9FBAC1"/>
+                </a:solidFill>
+                <a:latin typeface="Meiryo" pitchFamily="34" charset="0"/>
+                <a:ea typeface="Meiryo" pitchFamily="34" charset="-122"/>
+                <a:cs typeface="Meiryo" pitchFamily="34" charset="-120"/>
+              </a:rPr>
+              <a:t>鹿児島のパーキンソン病専門トレーニングスタジオ</a:t>
+            </a:r>
+            <a:endParaRPr lang="en-US" sz="750" dirty="0"/>
+          </a:p>
+        </p:txBody>
+      </p:sp>
+      <p:sp>
+        <p:nvSpPr>
+          <p:cNvPr id="4" name="Text 1"/>
           <p:cNvSpPr/>
           <p:nvPr/>
         </p:nvSpPr>
@@ -9847,7 +10533,7 @@
       </p:sp>
       <p:sp>
         <p:nvSpPr>
-          <p:cNvPr id="3" name="Text 1"/>
+          <p:cNvPr id="5" name="Text 2"/>
           <p:cNvSpPr/>
           <p:nvPr/>
         </p:nvSpPr>
@@ -9886,7 +10572,7 @@
       </p:sp>
       <p:sp>
         <p:nvSpPr>
-          <p:cNvPr id="4" name="Text 2"/>
+          <p:cNvPr id="6" name="Text 3"/>
           <p:cNvSpPr/>
           <p:nvPr/>
         </p:nvSpPr>
@@ -9925,7 +10611,7 @@
       </p:sp>
       <p:sp>
         <p:nvSpPr>
-          <p:cNvPr id="5" name="Shape 3"/>
+          <p:cNvPr id="7" name="Shape 4"/>
           <p:cNvSpPr/>
           <p:nvPr/>
         </p:nvSpPr>
@@ -9947,7 +10633,7 @@
       </p:sp>
       <p:sp>
         <p:nvSpPr>
-          <p:cNvPr id="6" name="Text 4"/>
+          <p:cNvPr id="8" name="Text 5"/>
           <p:cNvSpPr/>
           <p:nvPr/>
         </p:nvSpPr>
@@ -9986,7 +10672,7 @@
       </p:sp>
       <p:sp>
         <p:nvSpPr>
-          <p:cNvPr id="7" name="Text 5"/>
+          <p:cNvPr id="9" name="Text 6"/>
           <p:cNvSpPr/>
           <p:nvPr/>
         </p:nvSpPr>
@@ -10071,7 +10757,7 @@
       </p:sp>
       <p:sp>
         <p:nvSpPr>
-          <p:cNvPr id="8" name="Shape 6"/>
+          <p:cNvPr id="10" name="Shape 7"/>
           <p:cNvSpPr/>
           <p:nvPr/>
         </p:nvSpPr>
@@ -10093,7 +10779,7 @@
       </p:sp>
       <p:sp>
         <p:nvSpPr>
-          <p:cNvPr id="9" name="Text 7"/>
+          <p:cNvPr id="11" name="Text 8"/>
           <p:cNvSpPr/>
           <p:nvPr/>
         </p:nvSpPr>
@@ -10132,7 +10818,7 @@
       </p:sp>
       <p:sp>
         <p:nvSpPr>
-          <p:cNvPr id="10" name="Text 8"/>
+          <p:cNvPr id="12" name="Text 9"/>
           <p:cNvSpPr/>
           <p:nvPr/>
         </p:nvSpPr>
@@ -10214,7 +10900,7 @@
       </p:sp>
       <p:sp>
         <p:nvSpPr>
-          <p:cNvPr id="11" name="Text 9"/>
+          <p:cNvPr id="13" name="Text 10"/>
           <p:cNvSpPr/>
           <p:nvPr/>
         </p:nvSpPr>
@@ -10253,7 +10939,7 @@
       </p:sp>
       <p:sp>
         <p:nvSpPr>
-          <p:cNvPr id="12" name="Text 10"/>
+          <p:cNvPr id="14" name="Text 11"/>
           <p:cNvSpPr/>
           <p:nvPr/>
         </p:nvSpPr>
@@ -10410,9 +11096,72 @@
           <a:chExt cx="0" cy="0"/>
         </a:xfrm>
       </p:grpSpPr>
-      <p:sp>
-        <p:nvSpPr>
-          <p:cNvPr id="2" name="Text 0"/>
+      <p:pic>
+        <p:nvPicPr>
+          <p:cNvPr id="2" name="Image 0" descr="/sessions/compassionate-sweet-heisenberg/mnt/dev-aspath-life-main/tools/assets/logo-deck.png">    </p:cNvPr>
+          <p:cNvPicPr>
+            <a:picLocks noChangeAspect="1"/>
+          </p:cNvPicPr>
+          <p:nvPr/>
+        </p:nvPicPr>
+        <p:blipFill>
+          <a:blip r:embed="rId1"/>
+          <a:stretch>
+            <a:fillRect/>
+          </a:stretch>
+        </p:blipFill>
+        <p:spPr>
+          <a:xfrm>
+            <a:off x="11458173" y="109728"/>
+            <a:ext cx="209571" cy="256032"/>
+          </a:xfrm>
+          <a:prstGeom prst="rect">
+            <a:avLst/>
+          </a:prstGeom>
+        </p:spPr>
+      </p:pic>
+      <p:sp>
+        <p:nvSpPr>
+          <p:cNvPr id="3" name="Text 0"/>
+          <p:cNvSpPr txBox="1"/>
+          <p:nvPr/>
+        </p:nvSpPr>
+        <p:spPr>
+          <a:xfrm>
+            <a:off x="8623533" y="128016"/>
+            <a:ext cx="2743200" cy="237744"/>
+          </a:xfrm>
+          <a:prstGeom prst="rect">
+            <a:avLst/>
+          </a:prstGeom>
+          <a:noFill/>
+          <a:ln/>
+        </p:spPr>
+        <p:txBody>
+          <a:bodyPr wrap="square" lIns="0" tIns="0" rIns="0" bIns="0" rtlCol="0" anchor="ctr"/>
+          <a:lstStyle/>
+          <a:p>
+            <a:pPr algn="r" indent="0" marL="0">
+              <a:buNone/>
+            </a:pPr>
+            <a:r>
+              <a:rPr lang="en-US" sz="750" dirty="0">
+                <a:solidFill>
+                  <a:srgbClr val="97A9AF"/>
+                </a:solidFill>
+                <a:latin typeface="Meiryo" pitchFamily="34" charset="0"/>
+                <a:ea typeface="Meiryo" pitchFamily="34" charset="-122"/>
+                <a:cs typeface="Meiryo" pitchFamily="34" charset="-120"/>
+              </a:rPr>
+              <a:t>鹿児島のパーキンソン病専門トレーニングスタジオ</a:t>
+            </a:r>
+            <a:endParaRPr lang="en-US" sz="750" dirty="0"/>
+          </a:p>
+        </p:txBody>
+      </p:sp>
+      <p:sp>
+        <p:nvSpPr>
+          <p:cNvPr id="4" name="Text 1"/>
           <p:cNvSpPr/>
           <p:nvPr/>
         </p:nvSpPr>
@@ -10451,7 +11200,7 @@
       </p:sp>
       <p:sp>
         <p:nvSpPr>
-          <p:cNvPr id="3" name="Text 1"/>
+          <p:cNvPr id="5" name="Text 2"/>
           <p:cNvSpPr/>
           <p:nvPr/>
         </p:nvSpPr>
@@ -10490,7 +11239,7 @@
       </p:sp>
       <p:sp>
         <p:nvSpPr>
-          <p:cNvPr id="4" name="Text 2"/>
+          <p:cNvPr id="6" name="Text 3"/>
           <p:cNvSpPr/>
           <p:nvPr/>
         </p:nvSpPr>
@@ -10529,7 +11278,7 @@
       </p:sp>
       <p:sp>
         <p:nvSpPr>
-          <p:cNvPr id="5" name="Shape 3"/>
+          <p:cNvPr id="7" name="Shape 4"/>
           <p:cNvSpPr/>
           <p:nvPr/>
         </p:nvSpPr>
@@ -10551,7 +11300,7 @@
       </p:sp>
       <p:sp>
         <p:nvSpPr>
-          <p:cNvPr id="6" name="Shape 4"/>
+          <p:cNvPr id="8" name="Shape 5"/>
           <p:cNvSpPr/>
           <p:nvPr/>
         </p:nvSpPr>
@@ -10571,7 +11320,7 @@
       </p:sp>
       <p:sp>
         <p:nvSpPr>
-          <p:cNvPr id="7" name="Text 5"/>
+          <p:cNvPr id="9" name="Text 6"/>
           <p:cNvSpPr/>
           <p:nvPr/>
         </p:nvSpPr>
@@ -10610,7 +11359,7 @@
       </p:sp>
       <p:sp>
         <p:nvSpPr>
-          <p:cNvPr id="8" name="Text 6"/>
+          <p:cNvPr id="10" name="Text 7"/>
           <p:cNvSpPr/>
           <p:nvPr/>
         </p:nvSpPr>
@@ -10649,7 +11398,7 @@
       </p:sp>
       <p:sp>
         <p:nvSpPr>
-          <p:cNvPr id="9" name="Text 7"/>
+          <p:cNvPr id="11" name="Text 8"/>
           <p:cNvSpPr/>
           <p:nvPr/>
         </p:nvSpPr>
@@ -10688,7 +11437,7 @@
       </p:sp>
       <p:sp>
         <p:nvSpPr>
-          <p:cNvPr id="10" name="Shape 8"/>
+          <p:cNvPr id="12" name="Shape 9"/>
           <p:cNvSpPr/>
           <p:nvPr/>
         </p:nvSpPr>
@@ -10710,7 +11459,7 @@
       </p:sp>
       <p:sp>
         <p:nvSpPr>
-          <p:cNvPr id="11" name="Shape 9"/>
+          <p:cNvPr id="13" name="Shape 10"/>
           <p:cNvSpPr/>
           <p:nvPr/>
         </p:nvSpPr>
@@ -10730,7 +11479,7 @@
       </p:sp>
       <p:sp>
         <p:nvSpPr>
-          <p:cNvPr id="12" name="Text 10"/>
+          <p:cNvPr id="14" name="Text 11"/>
           <p:cNvSpPr/>
           <p:nvPr/>
         </p:nvSpPr>
@@ -10769,7 +11518,7 @@
       </p:sp>
       <p:sp>
         <p:nvSpPr>
-          <p:cNvPr id="13" name="Text 11"/>
+          <p:cNvPr id="15" name="Text 12"/>
           <p:cNvSpPr/>
           <p:nvPr/>
         </p:nvSpPr>
@@ -10808,7 +11557,7 @@
       </p:sp>
       <p:sp>
         <p:nvSpPr>
-          <p:cNvPr id="14" name="Text 12"/>
+          <p:cNvPr id="16" name="Text 13"/>
           <p:cNvSpPr/>
           <p:nvPr/>
         </p:nvSpPr>
@@ -10847,7 +11596,7 @@
       </p:sp>
       <p:sp>
         <p:nvSpPr>
-          <p:cNvPr id="15" name="Shape 13"/>
+          <p:cNvPr id="17" name="Shape 14"/>
           <p:cNvSpPr/>
           <p:nvPr/>
         </p:nvSpPr>
@@ -10869,7 +11618,7 @@
       </p:sp>
       <p:sp>
         <p:nvSpPr>
-          <p:cNvPr id="16" name="Shape 14"/>
+          <p:cNvPr id="18" name="Shape 15"/>
           <p:cNvSpPr/>
           <p:nvPr/>
         </p:nvSpPr>
@@ -10889,7 +11638,7 @@
       </p:sp>
       <p:sp>
         <p:nvSpPr>
-          <p:cNvPr id="17" name="Text 15"/>
+          <p:cNvPr id="19" name="Text 16"/>
           <p:cNvSpPr/>
           <p:nvPr/>
         </p:nvSpPr>
@@ -10928,7 +11677,7 @@
       </p:sp>
       <p:sp>
         <p:nvSpPr>
-          <p:cNvPr id="18" name="Text 16"/>
+          <p:cNvPr id="20" name="Text 17"/>
           <p:cNvSpPr/>
           <p:nvPr/>
         </p:nvSpPr>
@@ -10967,7 +11716,7 @@
       </p:sp>
       <p:sp>
         <p:nvSpPr>
-          <p:cNvPr id="19" name="Text 17"/>
+          <p:cNvPr id="21" name="Text 18"/>
           <p:cNvSpPr/>
           <p:nvPr/>
         </p:nvSpPr>
@@ -11006,7 +11755,7 @@
       </p:sp>
       <p:sp>
         <p:nvSpPr>
-          <p:cNvPr id="20" name="Shape 18"/>
+          <p:cNvPr id="22" name="Shape 19"/>
           <p:cNvSpPr/>
           <p:nvPr/>
         </p:nvSpPr>
@@ -11028,7 +11777,7 @@
       </p:sp>
       <p:sp>
         <p:nvSpPr>
-          <p:cNvPr id="21" name="Shape 19"/>
+          <p:cNvPr id="23" name="Shape 20"/>
           <p:cNvSpPr/>
           <p:nvPr/>
         </p:nvSpPr>
@@ -11048,7 +11797,7 @@
       </p:sp>
       <p:sp>
         <p:nvSpPr>
-          <p:cNvPr id="22" name="Text 20"/>
+          <p:cNvPr id="24" name="Text 21"/>
           <p:cNvSpPr/>
           <p:nvPr/>
         </p:nvSpPr>
@@ -11087,7 +11836,7 @@
       </p:sp>
       <p:sp>
         <p:nvSpPr>
-          <p:cNvPr id="23" name="Text 21"/>
+          <p:cNvPr id="25" name="Text 22"/>
           <p:cNvSpPr/>
           <p:nvPr/>
         </p:nvSpPr>
@@ -11126,7 +11875,7 @@
       </p:sp>
       <p:sp>
         <p:nvSpPr>
-          <p:cNvPr id="24" name="Text 22"/>
+          <p:cNvPr id="26" name="Text 23"/>
           <p:cNvSpPr/>
           <p:nvPr/>
         </p:nvSpPr>
@@ -11165,7 +11914,7 @@
       </p:sp>
       <p:sp>
         <p:nvSpPr>
-          <p:cNvPr id="25" name="Shape 23"/>
+          <p:cNvPr id="27" name="Shape 24"/>
           <p:cNvSpPr/>
           <p:nvPr/>
         </p:nvSpPr>
@@ -11187,7 +11936,7 @@
       </p:sp>
       <p:sp>
         <p:nvSpPr>
-          <p:cNvPr id="26" name="Shape 24"/>
+          <p:cNvPr id="28" name="Shape 25"/>
           <p:cNvSpPr/>
           <p:nvPr/>
         </p:nvSpPr>
@@ -11207,7 +11956,7 @@
       </p:sp>
       <p:sp>
         <p:nvSpPr>
-          <p:cNvPr id="27" name="Text 25"/>
+          <p:cNvPr id="29" name="Text 26"/>
           <p:cNvSpPr/>
           <p:nvPr/>
         </p:nvSpPr>
@@ -11246,7 +11995,7 @@
       </p:sp>
       <p:sp>
         <p:nvSpPr>
-          <p:cNvPr id="28" name="Text 26"/>
+          <p:cNvPr id="30" name="Text 27"/>
           <p:cNvSpPr/>
           <p:nvPr/>
         </p:nvSpPr>
@@ -11285,7 +12034,7 @@
       </p:sp>
       <p:sp>
         <p:nvSpPr>
-          <p:cNvPr id="29" name="Text 27"/>
+          <p:cNvPr id="31" name="Text 28"/>
           <p:cNvSpPr/>
           <p:nvPr/>
         </p:nvSpPr>
@@ -11324,7 +12073,7 @@
       </p:sp>
       <p:sp>
         <p:nvSpPr>
-          <p:cNvPr id="30" name="Shape 28"/>
+          <p:cNvPr id="32" name="Shape 29"/>
           <p:cNvSpPr/>
           <p:nvPr/>
         </p:nvSpPr>
@@ -11346,7 +12095,7 @@
       </p:sp>
       <p:sp>
         <p:nvSpPr>
-          <p:cNvPr id="31" name="Shape 29"/>
+          <p:cNvPr id="33" name="Shape 30"/>
           <p:cNvSpPr/>
           <p:nvPr/>
         </p:nvSpPr>
@@ -11366,7 +12115,7 @@
       </p:sp>
       <p:sp>
         <p:nvSpPr>
-          <p:cNvPr id="32" name="Text 30"/>
+          <p:cNvPr id="34" name="Text 31"/>
           <p:cNvSpPr/>
           <p:nvPr/>
         </p:nvSpPr>
@@ -11405,7 +12154,7 @@
       </p:sp>
       <p:sp>
         <p:nvSpPr>
-          <p:cNvPr id="33" name="Text 31"/>
+          <p:cNvPr id="35" name="Text 32"/>
           <p:cNvSpPr/>
           <p:nvPr/>
         </p:nvSpPr>
@@ -11444,7 +12193,7 @@
       </p:sp>
       <p:sp>
         <p:nvSpPr>
-          <p:cNvPr id="34" name="Text 32"/>
+          <p:cNvPr id="36" name="Text 33"/>
           <p:cNvSpPr/>
           <p:nvPr/>
         </p:nvSpPr>
@@ -11483,7 +12232,7 @@
       </p:sp>
       <p:sp>
         <p:nvSpPr>
-          <p:cNvPr id="35" name="Shape 33"/>
+          <p:cNvPr id="37" name="Shape 34"/>
           <p:cNvSpPr/>
           <p:nvPr/>
         </p:nvSpPr>
@@ -11505,7 +12254,7 @@
       </p:sp>
       <p:sp>
         <p:nvSpPr>
-          <p:cNvPr id="36" name="Shape 34"/>
+          <p:cNvPr id="38" name="Shape 35"/>
           <p:cNvSpPr/>
           <p:nvPr/>
         </p:nvSpPr>
@@ -11525,7 +12274,7 @@
       </p:sp>
       <p:sp>
         <p:nvSpPr>
-          <p:cNvPr id="37" name="Text 35"/>
+          <p:cNvPr id="39" name="Text 36"/>
           <p:cNvSpPr/>
           <p:nvPr/>
         </p:nvSpPr>
@@ -11564,7 +12313,7 @@
       </p:sp>
       <p:sp>
         <p:nvSpPr>
-          <p:cNvPr id="38" name="Text 36"/>
+          <p:cNvPr id="40" name="Text 37"/>
           <p:cNvSpPr/>
           <p:nvPr/>
         </p:nvSpPr>
@@ -11603,7 +12352,7 @@
       </p:sp>
       <p:sp>
         <p:nvSpPr>
-          <p:cNvPr id="39" name="Text 37"/>
+          <p:cNvPr id="41" name="Text 38"/>
           <p:cNvSpPr/>
           <p:nvPr/>
         </p:nvSpPr>
@@ -11642,7 +12391,7 @@
       </p:sp>
       <p:sp>
         <p:nvSpPr>
-          <p:cNvPr id="40" name="Shape 38"/>
+          <p:cNvPr id="42" name="Shape 39"/>
           <p:cNvSpPr/>
           <p:nvPr/>
         </p:nvSpPr>
@@ -11664,7 +12413,7 @@
       </p:sp>
       <p:sp>
         <p:nvSpPr>
-          <p:cNvPr id="41" name="Shape 39"/>
+          <p:cNvPr id="43" name="Shape 40"/>
           <p:cNvSpPr/>
           <p:nvPr/>
         </p:nvSpPr>
@@ -11684,7 +12433,7 @@
       </p:sp>
       <p:sp>
         <p:nvSpPr>
-          <p:cNvPr id="42" name="Text 40"/>
+          <p:cNvPr id="44" name="Text 41"/>
           <p:cNvSpPr/>
           <p:nvPr/>
         </p:nvSpPr>
@@ -11723,7 +12472,7 @@
       </p:sp>
       <p:sp>
         <p:nvSpPr>
-          <p:cNvPr id="43" name="Text 41"/>
+          <p:cNvPr id="45" name="Text 42"/>
           <p:cNvSpPr/>
           <p:nvPr/>
         </p:nvSpPr>
@@ -11762,7 +12511,7 @@
       </p:sp>
       <p:sp>
         <p:nvSpPr>
-          <p:cNvPr id="44" name="Text 42"/>
+          <p:cNvPr id="46" name="Text 43"/>
           <p:cNvSpPr/>
           <p:nvPr/>
         </p:nvSpPr>
@@ -11831,9 +12580,72 @@
           <a:chExt cx="0" cy="0"/>
         </a:xfrm>
       </p:grpSpPr>
-      <p:sp>
-        <p:nvSpPr>
-          <p:cNvPr id="2" name="Text 0"/>
+      <p:pic>
+        <p:nvPicPr>
+          <p:cNvPr id="2" name="Image 0" descr="/sessions/compassionate-sweet-heisenberg/mnt/dev-aspath-life-main/tools/assets/logo-deck.png">    </p:cNvPr>
+          <p:cNvPicPr>
+            <a:picLocks noChangeAspect="1"/>
+          </p:cNvPicPr>
+          <p:nvPr/>
+        </p:nvPicPr>
+        <p:blipFill>
+          <a:blip r:embed="rId1"/>
+          <a:stretch>
+            <a:fillRect/>
+          </a:stretch>
+        </p:blipFill>
+        <p:spPr>
+          <a:xfrm>
+            <a:off x="11458173" y="109728"/>
+            <a:ext cx="209571" cy="256032"/>
+          </a:xfrm>
+          <a:prstGeom prst="rect">
+            <a:avLst/>
+          </a:prstGeom>
+        </p:spPr>
+      </p:pic>
+      <p:sp>
+        <p:nvSpPr>
+          <p:cNvPr id="3" name="Text 0"/>
+          <p:cNvSpPr txBox="1"/>
+          <p:nvPr/>
+        </p:nvSpPr>
+        <p:spPr>
+          <a:xfrm>
+            <a:off x="8623533" y="128016"/>
+            <a:ext cx="2743200" cy="237744"/>
+          </a:xfrm>
+          <a:prstGeom prst="rect">
+            <a:avLst/>
+          </a:prstGeom>
+          <a:noFill/>
+          <a:ln/>
+        </p:spPr>
+        <p:txBody>
+          <a:bodyPr wrap="square" lIns="0" tIns="0" rIns="0" bIns="0" rtlCol="0" anchor="ctr"/>
+          <a:lstStyle/>
+          <a:p>
+            <a:pPr algn="r" indent="0" marL="0">
+              <a:buNone/>
+            </a:pPr>
+            <a:r>
+              <a:rPr lang="en-US" sz="750" dirty="0">
+                <a:solidFill>
+                  <a:srgbClr val="97A9AF"/>
+                </a:solidFill>
+                <a:latin typeface="Meiryo" pitchFamily="34" charset="0"/>
+                <a:ea typeface="Meiryo" pitchFamily="34" charset="-122"/>
+                <a:cs typeface="Meiryo" pitchFamily="34" charset="-120"/>
+              </a:rPr>
+              <a:t>鹿児島のパーキンソン病専門トレーニングスタジオ</a:t>
+            </a:r>
+            <a:endParaRPr lang="en-US" sz="750" dirty="0"/>
+          </a:p>
+        </p:txBody>
+      </p:sp>
+      <p:sp>
+        <p:nvSpPr>
+          <p:cNvPr id="4" name="Text 1"/>
           <p:cNvSpPr/>
           <p:nvPr/>
         </p:nvSpPr>
@@ -11872,7 +12684,7 @@
       </p:sp>
       <p:sp>
         <p:nvSpPr>
-          <p:cNvPr id="3" name="Text 1"/>
+          <p:cNvPr id="5" name="Text 2"/>
           <p:cNvSpPr/>
           <p:nvPr/>
         </p:nvSpPr>
@@ -11911,7 +12723,7 @@
       </p:sp>
       <p:sp>
         <p:nvSpPr>
-          <p:cNvPr id="4" name="Text 2"/>
+          <p:cNvPr id="6" name="Text 3"/>
           <p:cNvSpPr/>
           <p:nvPr/>
         </p:nvSpPr>
@@ -11950,7 +12762,7 @@
       </p:sp>
       <p:sp>
         <p:nvSpPr>
-          <p:cNvPr id="5" name="Shape 3"/>
+          <p:cNvPr id="7" name="Shape 4"/>
           <p:cNvSpPr/>
           <p:nvPr/>
         </p:nvSpPr>
@@ -11972,7 +12784,7 @@
       </p:sp>
       <p:sp>
         <p:nvSpPr>
-          <p:cNvPr id="6" name="Shape 4"/>
+          <p:cNvPr id="8" name="Shape 5"/>
           <p:cNvSpPr/>
           <p:nvPr/>
         </p:nvSpPr>
@@ -11994,7 +12806,7 @@
       </p:sp>
       <p:sp>
         <p:nvSpPr>
-          <p:cNvPr id="7" name="Text 5"/>
+          <p:cNvPr id="9" name="Text 6"/>
           <p:cNvSpPr/>
           <p:nvPr/>
         </p:nvSpPr>
@@ -12033,7 +12845,7 @@
       </p:sp>
       <p:sp>
         <p:nvSpPr>
-          <p:cNvPr id="8" name="Text 6"/>
+          <p:cNvPr id="10" name="Text 7"/>
           <p:cNvSpPr/>
           <p:nvPr/>
         </p:nvSpPr>
@@ -12072,7 +12884,7 @@
       </p:sp>
       <p:sp>
         <p:nvSpPr>
-          <p:cNvPr id="9" name="Text 7"/>
+          <p:cNvPr id="11" name="Text 8"/>
           <p:cNvSpPr/>
           <p:nvPr/>
         </p:nvSpPr>
@@ -12111,7 +12923,7 @@
       </p:sp>
       <p:sp>
         <p:nvSpPr>
-          <p:cNvPr id="10" name="Shape 8"/>
+          <p:cNvPr id="12" name="Shape 9"/>
           <p:cNvSpPr/>
           <p:nvPr/>
         </p:nvSpPr>
@@ -12133,7 +12945,7 @@
       </p:sp>
       <p:sp>
         <p:nvSpPr>
-          <p:cNvPr id="11" name="Shape 9"/>
+          <p:cNvPr id="13" name="Shape 10"/>
           <p:cNvSpPr/>
           <p:nvPr/>
         </p:nvSpPr>
@@ -12155,7 +12967,7 @@
       </p:sp>
       <p:sp>
         <p:nvSpPr>
-          <p:cNvPr id="12" name="Text 10"/>
+          <p:cNvPr id="14" name="Text 11"/>
           <p:cNvSpPr/>
           <p:nvPr/>
         </p:nvSpPr>
@@ -12194,7 +13006,7 @@
       </p:sp>
       <p:sp>
         <p:nvSpPr>
-          <p:cNvPr id="13" name="Text 11"/>
+          <p:cNvPr id="15" name="Text 12"/>
           <p:cNvSpPr/>
           <p:nvPr/>
         </p:nvSpPr>
@@ -12233,7 +13045,7 @@
       </p:sp>
       <p:sp>
         <p:nvSpPr>
-          <p:cNvPr id="14" name="Text 12"/>
+          <p:cNvPr id="16" name="Text 13"/>
           <p:cNvSpPr/>
           <p:nvPr/>
         </p:nvSpPr>
@@ -12272,7 +13084,7 @@
       </p:sp>
       <p:sp>
         <p:nvSpPr>
-          <p:cNvPr id="15" name="Shape 13"/>
+          <p:cNvPr id="17" name="Shape 14"/>
           <p:cNvSpPr/>
           <p:nvPr/>
         </p:nvSpPr>
@@ -12294,7 +13106,7 @@
       </p:sp>
       <p:sp>
         <p:nvSpPr>
-          <p:cNvPr id="16" name="Shape 14"/>
+          <p:cNvPr id="18" name="Shape 15"/>
           <p:cNvSpPr/>
           <p:nvPr/>
         </p:nvSpPr>
@@ -12316,7 +13128,7 @@
       </p:sp>
       <p:sp>
         <p:nvSpPr>
-          <p:cNvPr id="17" name="Text 15"/>
+          <p:cNvPr id="19" name="Text 16"/>
           <p:cNvSpPr/>
           <p:nvPr/>
         </p:nvSpPr>
@@ -12355,7 +13167,7 @@
       </p:sp>
       <p:sp>
         <p:nvSpPr>
-          <p:cNvPr id="18" name="Text 16"/>
+          <p:cNvPr id="20" name="Text 17"/>
           <p:cNvSpPr/>
           <p:nvPr/>
         </p:nvSpPr>
@@ -12394,7 +13206,7 @@
       </p:sp>
       <p:sp>
         <p:nvSpPr>
-          <p:cNvPr id="19" name="Text 17"/>
+          <p:cNvPr id="21" name="Text 18"/>
           <p:cNvSpPr/>
           <p:nvPr/>
         </p:nvSpPr>
@@ -12433,7 +13245,7 @@
       </p:sp>
       <p:sp>
         <p:nvSpPr>
-          <p:cNvPr id="20" name="Shape 18"/>
+          <p:cNvPr id="22" name="Shape 19"/>
           <p:cNvSpPr/>
           <p:nvPr/>
         </p:nvSpPr>
@@ -12455,7 +13267,7 @@
       </p:sp>
       <p:sp>
         <p:nvSpPr>
-          <p:cNvPr id="21" name="Shape 19"/>
+          <p:cNvPr id="23" name="Shape 20"/>
           <p:cNvSpPr/>
           <p:nvPr/>
         </p:nvSpPr>
@@ -12477,7 +13289,7 @@
       </p:sp>
       <p:sp>
         <p:nvSpPr>
-          <p:cNvPr id="22" name="Text 20"/>
+          <p:cNvPr id="24" name="Text 21"/>
           <p:cNvSpPr/>
           <p:nvPr/>
         </p:nvSpPr>
@@ -12516,7 +13328,7 @@
       </p:sp>
       <p:sp>
         <p:nvSpPr>
-          <p:cNvPr id="23" name="Text 21"/>
+          <p:cNvPr id="25" name="Text 22"/>
           <p:cNvSpPr/>
           <p:nvPr/>
         </p:nvSpPr>
@@ -12555,7 +13367,7 @@
       </p:sp>
       <p:sp>
         <p:nvSpPr>
-          <p:cNvPr id="24" name="Text 22"/>
+          <p:cNvPr id="26" name="Text 23"/>
           <p:cNvSpPr/>
           <p:nvPr/>
         </p:nvSpPr>
@@ -12594,7 +13406,7 @@
       </p:sp>
       <p:sp>
         <p:nvSpPr>
-          <p:cNvPr id="25" name="Shape 23"/>
+          <p:cNvPr id="27" name="Shape 24"/>
           <p:cNvSpPr/>
           <p:nvPr/>
         </p:nvSpPr>
@@ -12616,7 +13428,7 @@
       </p:sp>
       <p:sp>
         <p:nvSpPr>
-          <p:cNvPr id="26" name="Shape 24"/>
+          <p:cNvPr id="28" name="Shape 25"/>
           <p:cNvSpPr/>
           <p:nvPr/>
         </p:nvSpPr>
@@ -12638,7 +13450,7 @@
       </p:sp>
       <p:sp>
         <p:nvSpPr>
-          <p:cNvPr id="27" name="Text 25"/>
+          <p:cNvPr id="29" name="Text 26"/>
           <p:cNvSpPr/>
           <p:nvPr/>
         </p:nvSpPr>
@@ -12677,7 +13489,7 @@
       </p:sp>
       <p:sp>
         <p:nvSpPr>
-          <p:cNvPr id="28" name="Text 26"/>
+          <p:cNvPr id="30" name="Text 27"/>
           <p:cNvSpPr/>
           <p:nvPr/>
         </p:nvSpPr>
@@ -12716,7 +13528,7 @@
       </p:sp>
       <p:sp>
         <p:nvSpPr>
-          <p:cNvPr id="29" name="Text 27"/>
+          <p:cNvPr id="31" name="Text 28"/>
           <p:cNvSpPr/>
           <p:nvPr/>
         </p:nvSpPr>
@@ -12755,7 +13567,7 @@
       </p:sp>
       <p:sp>
         <p:nvSpPr>
-          <p:cNvPr id="30" name="Shape 28"/>
+          <p:cNvPr id="32" name="Shape 29"/>
           <p:cNvSpPr/>
           <p:nvPr/>
         </p:nvSpPr>
@@ -12777,7 +13589,7 @@
       </p:sp>
       <p:sp>
         <p:nvSpPr>
-          <p:cNvPr id="31" name="Shape 29"/>
+          <p:cNvPr id="33" name="Shape 30"/>
           <p:cNvSpPr/>
           <p:nvPr/>
         </p:nvSpPr>
@@ -12799,7 +13611,7 @@
       </p:sp>
       <p:sp>
         <p:nvSpPr>
-          <p:cNvPr id="32" name="Text 30"/>
+          <p:cNvPr id="34" name="Text 31"/>
           <p:cNvSpPr/>
           <p:nvPr/>
         </p:nvSpPr>
@@ -12838,7 +13650,7 @@
       </p:sp>
       <p:sp>
         <p:nvSpPr>
-          <p:cNvPr id="33" name="Text 31"/>
+          <p:cNvPr id="35" name="Text 32"/>
           <p:cNvSpPr/>
           <p:nvPr/>
         </p:nvSpPr>
@@ -12877,7 +13689,7 @@
       </p:sp>
       <p:sp>
         <p:nvSpPr>
-          <p:cNvPr id="34" name="Text 32"/>
+          <p:cNvPr id="36" name="Text 33"/>
           <p:cNvSpPr/>
           <p:nvPr/>
         </p:nvSpPr>
@@ -12916,7 +13728,7 @@
       </p:sp>
       <p:sp>
         <p:nvSpPr>
-          <p:cNvPr id="35" name="Shape 33"/>
+          <p:cNvPr id="37" name="Shape 34"/>
           <p:cNvSpPr/>
           <p:nvPr/>
         </p:nvSpPr>
@@ -12938,7 +13750,7 @@
       </p:sp>
       <p:sp>
         <p:nvSpPr>
-          <p:cNvPr id="36" name="Shape 34"/>
+          <p:cNvPr id="38" name="Shape 35"/>
           <p:cNvSpPr/>
           <p:nvPr/>
         </p:nvSpPr>
@@ -12960,7 +13772,7 @@
       </p:sp>
       <p:sp>
         <p:nvSpPr>
-          <p:cNvPr id="37" name="Text 35"/>
+          <p:cNvPr id="39" name="Text 36"/>
           <p:cNvSpPr/>
           <p:nvPr/>
         </p:nvSpPr>
@@ -12999,7 +13811,7 @@
       </p:sp>
       <p:sp>
         <p:nvSpPr>
-          <p:cNvPr id="38" name="Text 36"/>
+          <p:cNvPr id="40" name="Text 37"/>
           <p:cNvSpPr/>
           <p:nvPr/>
         </p:nvSpPr>
@@ -13038,7 +13850,7 @@
       </p:sp>
       <p:sp>
         <p:nvSpPr>
-          <p:cNvPr id="39" name="Text 37"/>
+          <p:cNvPr id="41" name="Text 38"/>
           <p:cNvSpPr/>
           <p:nvPr/>
         </p:nvSpPr>
@@ -13077,7 +13889,7 @@
       </p:sp>
       <p:sp>
         <p:nvSpPr>
-          <p:cNvPr id="40" name="Shape 38"/>
+          <p:cNvPr id="42" name="Shape 39"/>
           <p:cNvSpPr/>
           <p:nvPr/>
         </p:nvSpPr>
@@ -13099,7 +13911,7 @@
       </p:sp>
       <p:sp>
         <p:nvSpPr>
-          <p:cNvPr id="41" name="Shape 39"/>
+          <p:cNvPr id="43" name="Shape 40"/>
           <p:cNvSpPr/>
           <p:nvPr/>
         </p:nvSpPr>
@@ -13121,7 +13933,7 @@
       </p:sp>
       <p:sp>
         <p:nvSpPr>
-          <p:cNvPr id="42" name="Text 40"/>
+          <p:cNvPr id="44" name="Text 41"/>
           <p:cNvSpPr/>
           <p:nvPr/>
         </p:nvSpPr>
@@ -13160,7 +13972,7 @@
       </p:sp>
       <p:sp>
         <p:nvSpPr>
-          <p:cNvPr id="43" name="Text 41"/>
+          <p:cNvPr id="45" name="Text 42"/>
           <p:cNvSpPr/>
           <p:nvPr/>
         </p:nvSpPr>
@@ -13199,7 +14011,7 @@
       </p:sp>
       <p:sp>
         <p:nvSpPr>
-          <p:cNvPr id="44" name="Text 42"/>
+          <p:cNvPr id="46" name="Text 43"/>
           <p:cNvSpPr/>
           <p:nvPr/>
         </p:nvSpPr>
@@ -13238,7 +14050,7 @@
       </p:sp>
       <p:sp>
         <p:nvSpPr>
-          <p:cNvPr id="45" name="Text 43"/>
+          <p:cNvPr id="47" name="Text 44"/>
           <p:cNvSpPr/>
           <p:nvPr/>
         </p:nvSpPr>
@@ -13307,126 +14119,9 @@
           <a:chExt cx="0" cy="0"/>
         </a:xfrm>
       </p:grpSpPr>
-      <p:sp>
-        <p:nvSpPr>
-          <p:cNvPr id="2" name="Text 0"/>
-          <p:cNvSpPr/>
-          <p:nvPr/>
-        </p:nvSpPr>
-        <p:spPr>
-          <a:xfrm>
-            <a:off x="548640" y="320040"/>
-            <a:ext cx="10424160" cy="685800"/>
-          </a:xfrm>
-          <a:prstGeom prst="rect">
-            <a:avLst/>
-          </a:prstGeom>
-          <a:noFill/>
-          <a:ln/>
-        </p:spPr>
-        <p:txBody>
-          <a:bodyPr wrap="square" lIns="0" tIns="0" rIns="0" bIns="0" rtlCol="0" anchor="ctr"/>
-          <a:lstStyle/>
-          <a:p>
-            <a:pPr indent="0" marL="0">
-              <a:buNone/>
-            </a:pPr>
-            <a:r>
-              <a:rPr lang="en-US" sz="3200" b="1" dirty="0">
-                <a:solidFill>
-                  <a:srgbClr val="264653"/>
-                </a:solidFill>
-                <a:latin typeface="Meiryo" pitchFamily="34" charset="0"/>
-                <a:ea typeface="Meiryo" pitchFamily="34" charset="-122"/>
-                <a:cs typeface="Meiryo" pitchFamily="34" charset="-120"/>
-              </a:rPr>
-              <a:t>更新には「2つの道」があります</a:t>
-            </a:r>
-            <a:endParaRPr lang="en-US" sz="3200" dirty="0"/>
-          </a:p>
-        </p:txBody>
-      </p:sp>
-      <p:sp>
-        <p:nvSpPr>
-          <p:cNvPr id="3" name="Text 1"/>
-          <p:cNvSpPr/>
-          <p:nvPr/>
-        </p:nvSpPr>
-        <p:spPr>
-          <a:xfrm>
-            <a:off x="566928" y="1024128"/>
-            <a:ext cx="10424160" cy="365760"/>
-          </a:xfrm>
-          <a:prstGeom prst="rect">
-            <a:avLst/>
-          </a:prstGeom>
-          <a:noFill/>
-          <a:ln/>
-        </p:spPr>
-        <p:txBody>
-          <a:bodyPr wrap="square" lIns="0" tIns="0" rIns="0" bIns="0" rtlCol="0" anchor="ctr"/>
-          <a:lstStyle/>
-          <a:p>
-            <a:pPr indent="0" marL="0">
-              <a:buNone/>
-            </a:pPr>
-            <a:r>
-              <a:rPr lang="en-US" sz="1500" dirty="0">
-                <a:solidFill>
-                  <a:srgbClr val="5E7681"/>
-                </a:solidFill>
-                <a:latin typeface="Meiryo" pitchFamily="34" charset="0"/>
-                <a:ea typeface="Meiryo" pitchFamily="34" charset="-122"/>
-                <a:cs typeface="Meiryo" pitchFamily="34" charset="-120"/>
-              </a:rPr>
-              <a:t>どちらの道かを最初に見分けることが、いちばん大事です</a:t>
-            </a:r>
-            <a:endParaRPr lang="en-US" sz="1500" dirty="0"/>
-          </a:p>
-        </p:txBody>
-      </p:sp>
-      <p:sp>
-        <p:nvSpPr>
-          <p:cNvPr id="4" name="Text 2"/>
-          <p:cNvSpPr/>
-          <p:nvPr/>
-        </p:nvSpPr>
-        <p:spPr>
-          <a:xfrm>
-            <a:off x="11338560" y="6263640"/>
-            <a:ext cx="457200" cy="274320"/>
-          </a:xfrm>
-          <a:prstGeom prst="rect">
-            <a:avLst/>
-          </a:prstGeom>
-          <a:noFill/>
-          <a:ln/>
-        </p:spPr>
-        <p:txBody>
-          <a:bodyPr wrap="square" lIns="0" tIns="0" rIns="0" bIns="0" rtlCol="0" anchor="ctr"/>
-          <a:lstStyle/>
-          <a:p>
-            <a:pPr algn="r" indent="0" marL="0">
-              <a:buNone/>
-            </a:pPr>
-            <a:r>
-              <a:rPr lang="en-US" sz="1100" dirty="0">
-                <a:solidFill>
-                  <a:srgbClr val="A8B4B8"/>
-                </a:solidFill>
-                <a:latin typeface="Meiryo" pitchFamily="34" charset="0"/>
-                <a:ea typeface="Meiryo" pitchFamily="34" charset="-122"/>
-                <a:cs typeface="Meiryo" pitchFamily="34" charset="-120"/>
-              </a:rPr>
-              <a:t>3</a:t>
-            </a:r>
-            <a:endParaRPr lang="en-US" sz="1100" dirty="0"/>
-          </a:p>
-        </p:txBody>
-      </p:sp>
       <p:pic>
         <p:nvPicPr>
-          <p:cNvPr id="5" name="Image 0" descr="/sessions/compassionate-sweet-heisenberg/mnt/dev-aspath-life-main/_wp移行素材/★引継ぎ資料/画像/00_ふたつの道.png">    </p:cNvPr>
+          <p:cNvPr id="2" name="Image 0" descr="/sessions/compassionate-sweet-heisenberg/mnt/dev-aspath-life-main/tools/assets/logo-deck.png">    </p:cNvPr>
           <p:cNvPicPr>
             <a:picLocks noChangeAspect="1"/>
           </p:cNvPicPr>
@@ -13434,6 +14129,186 @@
         </p:nvPicPr>
         <p:blipFill>
           <a:blip r:embed="rId1"/>
+          <a:stretch>
+            <a:fillRect/>
+          </a:stretch>
+        </p:blipFill>
+        <p:spPr>
+          <a:xfrm>
+            <a:off x="11458173" y="109728"/>
+            <a:ext cx="209571" cy="256032"/>
+          </a:xfrm>
+          <a:prstGeom prst="rect">
+            <a:avLst/>
+          </a:prstGeom>
+        </p:spPr>
+      </p:pic>
+      <p:sp>
+        <p:nvSpPr>
+          <p:cNvPr id="3" name="Text 0"/>
+          <p:cNvSpPr txBox="1"/>
+          <p:nvPr/>
+        </p:nvSpPr>
+        <p:spPr>
+          <a:xfrm>
+            <a:off x="8623533" y="128016"/>
+            <a:ext cx="2743200" cy="237744"/>
+          </a:xfrm>
+          <a:prstGeom prst="rect">
+            <a:avLst/>
+          </a:prstGeom>
+          <a:noFill/>
+          <a:ln/>
+        </p:spPr>
+        <p:txBody>
+          <a:bodyPr wrap="square" lIns="0" tIns="0" rIns="0" bIns="0" rtlCol="0" anchor="ctr"/>
+          <a:lstStyle/>
+          <a:p>
+            <a:pPr algn="r" indent="0" marL="0">
+              <a:buNone/>
+            </a:pPr>
+            <a:r>
+              <a:rPr lang="en-US" sz="750" dirty="0">
+                <a:solidFill>
+                  <a:srgbClr val="97A9AF"/>
+                </a:solidFill>
+                <a:latin typeface="Meiryo" pitchFamily="34" charset="0"/>
+                <a:ea typeface="Meiryo" pitchFamily="34" charset="-122"/>
+                <a:cs typeface="Meiryo" pitchFamily="34" charset="-120"/>
+              </a:rPr>
+              <a:t>鹿児島のパーキンソン病専門トレーニングスタジオ</a:t>
+            </a:r>
+            <a:endParaRPr lang="en-US" sz="750" dirty="0"/>
+          </a:p>
+        </p:txBody>
+      </p:sp>
+      <p:sp>
+        <p:nvSpPr>
+          <p:cNvPr id="4" name="Text 1"/>
+          <p:cNvSpPr/>
+          <p:nvPr/>
+        </p:nvSpPr>
+        <p:spPr>
+          <a:xfrm>
+            <a:off x="548640" y="320040"/>
+            <a:ext cx="10424160" cy="685800"/>
+          </a:xfrm>
+          <a:prstGeom prst="rect">
+            <a:avLst/>
+          </a:prstGeom>
+          <a:noFill/>
+          <a:ln/>
+        </p:spPr>
+        <p:txBody>
+          <a:bodyPr wrap="square" lIns="0" tIns="0" rIns="0" bIns="0" rtlCol="0" anchor="ctr"/>
+          <a:lstStyle/>
+          <a:p>
+            <a:pPr indent="0" marL="0">
+              <a:buNone/>
+            </a:pPr>
+            <a:r>
+              <a:rPr lang="en-US" sz="3200" b="1" dirty="0">
+                <a:solidFill>
+                  <a:srgbClr val="264653"/>
+                </a:solidFill>
+                <a:latin typeface="Meiryo" pitchFamily="34" charset="0"/>
+                <a:ea typeface="Meiryo" pitchFamily="34" charset="-122"/>
+                <a:cs typeface="Meiryo" pitchFamily="34" charset="-120"/>
+              </a:rPr>
+              <a:t>更新には「2つの道」があります</a:t>
+            </a:r>
+            <a:endParaRPr lang="en-US" sz="3200" dirty="0"/>
+          </a:p>
+        </p:txBody>
+      </p:sp>
+      <p:sp>
+        <p:nvSpPr>
+          <p:cNvPr id="5" name="Text 2"/>
+          <p:cNvSpPr/>
+          <p:nvPr/>
+        </p:nvSpPr>
+        <p:spPr>
+          <a:xfrm>
+            <a:off x="566928" y="1024128"/>
+            <a:ext cx="10424160" cy="365760"/>
+          </a:xfrm>
+          <a:prstGeom prst="rect">
+            <a:avLst/>
+          </a:prstGeom>
+          <a:noFill/>
+          <a:ln/>
+        </p:spPr>
+        <p:txBody>
+          <a:bodyPr wrap="square" lIns="0" tIns="0" rIns="0" bIns="0" rtlCol="0" anchor="ctr"/>
+          <a:lstStyle/>
+          <a:p>
+            <a:pPr indent="0" marL="0">
+              <a:buNone/>
+            </a:pPr>
+            <a:r>
+              <a:rPr lang="en-US" sz="1500" dirty="0">
+                <a:solidFill>
+                  <a:srgbClr val="5E7681"/>
+                </a:solidFill>
+                <a:latin typeface="Meiryo" pitchFamily="34" charset="0"/>
+                <a:ea typeface="Meiryo" pitchFamily="34" charset="-122"/>
+                <a:cs typeface="Meiryo" pitchFamily="34" charset="-120"/>
+              </a:rPr>
+              <a:t>どちらの道かを最初に見分けることが、いちばん大事です</a:t>
+            </a:r>
+            <a:endParaRPr lang="en-US" sz="1500" dirty="0"/>
+          </a:p>
+        </p:txBody>
+      </p:sp>
+      <p:sp>
+        <p:nvSpPr>
+          <p:cNvPr id="6" name="Text 3"/>
+          <p:cNvSpPr/>
+          <p:nvPr/>
+        </p:nvSpPr>
+        <p:spPr>
+          <a:xfrm>
+            <a:off x="11338560" y="6263640"/>
+            <a:ext cx="457200" cy="274320"/>
+          </a:xfrm>
+          <a:prstGeom prst="rect">
+            <a:avLst/>
+          </a:prstGeom>
+          <a:noFill/>
+          <a:ln/>
+        </p:spPr>
+        <p:txBody>
+          <a:bodyPr wrap="square" lIns="0" tIns="0" rIns="0" bIns="0" rtlCol="0" anchor="ctr"/>
+          <a:lstStyle/>
+          <a:p>
+            <a:pPr algn="r" indent="0" marL="0">
+              <a:buNone/>
+            </a:pPr>
+            <a:r>
+              <a:rPr lang="en-US" sz="1100" dirty="0">
+                <a:solidFill>
+                  <a:srgbClr val="A8B4B8"/>
+                </a:solidFill>
+                <a:latin typeface="Meiryo" pitchFamily="34" charset="0"/>
+                <a:ea typeface="Meiryo" pitchFamily="34" charset="-122"/>
+                <a:cs typeface="Meiryo" pitchFamily="34" charset="-120"/>
+              </a:rPr>
+              <a:t>3</a:t>
+            </a:r>
+            <a:endParaRPr lang="en-US" sz="1100" dirty="0"/>
+          </a:p>
+        </p:txBody>
+      </p:sp>
+      <p:pic>
+        <p:nvPicPr>
+          <p:cNvPr id="7" name="Image 1" descr="/sessions/compassionate-sweet-heisenberg/mnt/dev-aspath-life-main/_wp移行素材/★引継ぎ資料/画像/00_ふたつの道.png">    </p:cNvPr>
+          <p:cNvPicPr>
+            <a:picLocks noChangeAspect="1"/>
+          </p:cNvPicPr>
+          <p:nvPr/>
+        </p:nvPicPr>
+        <p:blipFill>
+          <a:blip r:embed="rId2"/>
           <a:stretch>
             <a:fillRect/>
           </a:stretch>
@@ -13480,9 +14355,72 @@
           <a:chExt cx="0" cy="0"/>
         </a:xfrm>
       </p:grpSpPr>
-      <p:sp>
-        <p:nvSpPr>
-          <p:cNvPr id="2" name="Text 0"/>
+      <p:pic>
+        <p:nvPicPr>
+          <p:cNvPr id="2" name="Image 0" descr="/sessions/compassionate-sweet-heisenberg/mnt/dev-aspath-life-main/tools/assets/logo-deck.png">    </p:cNvPr>
+          <p:cNvPicPr>
+            <a:picLocks noChangeAspect="1"/>
+          </p:cNvPicPr>
+          <p:nvPr/>
+        </p:nvPicPr>
+        <p:blipFill>
+          <a:blip r:embed="rId1"/>
+          <a:stretch>
+            <a:fillRect/>
+          </a:stretch>
+        </p:blipFill>
+        <p:spPr>
+          <a:xfrm>
+            <a:off x="11458173" y="109728"/>
+            <a:ext cx="209571" cy="256032"/>
+          </a:xfrm>
+          <a:prstGeom prst="rect">
+            <a:avLst/>
+          </a:prstGeom>
+        </p:spPr>
+      </p:pic>
+      <p:sp>
+        <p:nvSpPr>
+          <p:cNvPr id="3" name="Text 0"/>
+          <p:cNvSpPr txBox="1"/>
+          <p:nvPr/>
+        </p:nvSpPr>
+        <p:spPr>
+          <a:xfrm>
+            <a:off x="8623533" y="128016"/>
+            <a:ext cx="2743200" cy="237744"/>
+          </a:xfrm>
+          <a:prstGeom prst="rect">
+            <a:avLst/>
+          </a:prstGeom>
+          <a:noFill/>
+          <a:ln/>
+        </p:spPr>
+        <p:txBody>
+          <a:bodyPr wrap="square" lIns="0" tIns="0" rIns="0" bIns="0" rtlCol="0" anchor="ctr"/>
+          <a:lstStyle/>
+          <a:p>
+            <a:pPr algn="r" indent="0" marL="0">
+              <a:buNone/>
+            </a:pPr>
+            <a:r>
+              <a:rPr lang="en-US" sz="750" dirty="0">
+                <a:solidFill>
+                  <a:srgbClr val="97A9AF"/>
+                </a:solidFill>
+                <a:latin typeface="Meiryo" pitchFamily="34" charset="0"/>
+                <a:ea typeface="Meiryo" pitchFamily="34" charset="-122"/>
+                <a:cs typeface="Meiryo" pitchFamily="34" charset="-120"/>
+              </a:rPr>
+              <a:t>鹿児島のパーキンソン病専門トレーニングスタジオ</a:t>
+            </a:r>
+            <a:endParaRPr lang="en-US" sz="750" dirty="0"/>
+          </a:p>
+        </p:txBody>
+      </p:sp>
+      <p:sp>
+        <p:nvSpPr>
+          <p:cNvPr id="4" name="Text 1"/>
           <p:cNvSpPr/>
           <p:nvPr/>
         </p:nvSpPr>
@@ -13521,7 +14459,7 @@
       </p:sp>
       <p:sp>
         <p:nvSpPr>
-          <p:cNvPr id="3" name="Text 1"/>
+          <p:cNvPr id="5" name="Text 2"/>
           <p:cNvSpPr/>
           <p:nvPr/>
         </p:nvSpPr>
@@ -13560,7 +14498,7 @@
       </p:sp>
       <p:sp>
         <p:nvSpPr>
-          <p:cNvPr id="4" name="Text 2"/>
+          <p:cNvPr id="6" name="Text 3"/>
           <p:cNvSpPr/>
           <p:nvPr/>
         </p:nvSpPr>
@@ -13599,7 +14537,7 @@
       </p:sp>
       <p:sp>
         <p:nvSpPr>
-          <p:cNvPr id="5" name="Shape 3"/>
+          <p:cNvPr id="7" name="Shape 4"/>
           <p:cNvSpPr/>
           <p:nvPr/>
         </p:nvSpPr>
@@ -13621,7 +14559,7 @@
       </p:sp>
       <p:sp>
         <p:nvSpPr>
-          <p:cNvPr id="6" name="Text 4"/>
+          <p:cNvPr id="8" name="Text 5"/>
           <p:cNvSpPr/>
           <p:nvPr/>
         </p:nvSpPr>
@@ -13660,7 +14598,7 @@
       </p:sp>
       <p:sp>
         <p:nvSpPr>
-          <p:cNvPr id="7" name="Text 5"/>
+          <p:cNvPr id="9" name="Text 6"/>
           <p:cNvSpPr/>
           <p:nvPr/>
         </p:nvSpPr>
@@ -13745,7 +14683,7 @@
       </p:sp>
       <p:sp>
         <p:nvSpPr>
-          <p:cNvPr id="8" name="Shape 6"/>
+          <p:cNvPr id="10" name="Shape 7"/>
           <p:cNvSpPr/>
           <p:nvPr/>
         </p:nvSpPr>
@@ -13767,7 +14705,7 @@
       </p:sp>
       <p:sp>
         <p:nvSpPr>
-          <p:cNvPr id="9" name="Text 7"/>
+          <p:cNvPr id="11" name="Text 8"/>
           <p:cNvSpPr/>
           <p:nvPr/>
         </p:nvSpPr>
@@ -13806,7 +14744,7 @@
       </p:sp>
       <p:sp>
         <p:nvSpPr>
-          <p:cNvPr id="10" name="Text 8"/>
+          <p:cNvPr id="12" name="Text 9"/>
           <p:cNvSpPr/>
           <p:nvPr/>
         </p:nvSpPr>
@@ -13891,7 +14829,7 @@
       </p:sp>
       <p:sp>
         <p:nvSpPr>
-          <p:cNvPr id="11" name="Shape 9"/>
+          <p:cNvPr id="13" name="Shape 10"/>
           <p:cNvSpPr/>
           <p:nvPr/>
         </p:nvSpPr>
@@ -13913,7 +14851,7 @@
       </p:sp>
       <p:sp>
         <p:nvSpPr>
-          <p:cNvPr id="12" name="Text 10"/>
+          <p:cNvPr id="14" name="Text 11"/>
           <p:cNvSpPr/>
           <p:nvPr/>
         </p:nvSpPr>
@@ -13952,7 +14890,7 @@
       </p:sp>
       <p:sp>
         <p:nvSpPr>
-          <p:cNvPr id="13" name="Text 11"/>
+          <p:cNvPr id="15" name="Text 12"/>
           <p:cNvSpPr/>
           <p:nvPr/>
         </p:nvSpPr>
@@ -14021,126 +14959,9 @@
           <a:chExt cx="0" cy="0"/>
         </a:xfrm>
       </p:grpSpPr>
-      <p:sp>
-        <p:nvSpPr>
-          <p:cNvPr id="2" name="Text 0"/>
-          <p:cNvSpPr/>
-          <p:nvPr/>
-        </p:nvSpPr>
-        <p:spPr>
-          <a:xfrm>
-            <a:off x="548640" y="320040"/>
-            <a:ext cx="10424160" cy="685800"/>
-          </a:xfrm>
-          <a:prstGeom prst="rect">
-            <a:avLst/>
-          </a:prstGeom>
-          <a:noFill/>
-          <a:ln/>
-        </p:spPr>
-        <p:txBody>
-          <a:bodyPr wrap="square" lIns="0" tIns="0" rIns="0" bIns="0" rtlCol="0" anchor="ctr"/>
-          <a:lstStyle/>
-          <a:p>
-            <a:pPr indent="0" marL="0">
-              <a:buNone/>
-            </a:pPr>
-            <a:r>
-              <a:rPr lang="en-US" sz="3200" b="1" dirty="0">
-                <a:solidFill>
-                  <a:srgbClr val="264653"/>
-                </a:solidFill>
-                <a:latin typeface="Meiryo" pitchFamily="34" charset="0"/>
-                <a:ea typeface="Meiryo" pitchFamily="34" charset="-122"/>
-                <a:cs typeface="Meiryo" pitchFamily="34" charset="-120"/>
-              </a:rPr>
-              <a:t>【道A】記事を書く（コラム・お知らせ）</a:t>
-            </a:r>
-            <a:endParaRPr lang="en-US" sz="3200" dirty="0"/>
-          </a:p>
-        </p:txBody>
-      </p:sp>
-      <p:sp>
-        <p:nvSpPr>
-          <p:cNvPr id="3" name="Text 1"/>
-          <p:cNvSpPr/>
-          <p:nvPr/>
-        </p:nvSpPr>
-        <p:spPr>
-          <a:xfrm>
-            <a:off x="566928" y="1024128"/>
-            <a:ext cx="10424160" cy="365760"/>
-          </a:xfrm>
-          <a:prstGeom prst="rect">
-            <a:avLst/>
-          </a:prstGeom>
-          <a:noFill/>
-          <a:ln/>
-        </p:spPr>
-        <p:txBody>
-          <a:bodyPr wrap="square" lIns="0" tIns="0" rIns="0" bIns="0" rtlCol="0" anchor="ctr"/>
-          <a:lstStyle/>
-          <a:p>
-            <a:pPr indent="0" marL="0">
-              <a:buNone/>
-            </a:pPr>
-            <a:r>
-              <a:rPr lang="en-US" sz="1500" dirty="0">
-                <a:solidFill>
-                  <a:srgbClr val="5E7681"/>
-                </a:solidFill>
-                <a:latin typeface="Meiryo" pitchFamily="34" charset="0"/>
-                <a:ea typeface="Meiryo" pitchFamily="34" charset="-122"/>
-                <a:cs typeface="Meiryo" pitchFamily="34" charset="-120"/>
-              </a:rPr>
-              <a:t>投稿 → 投稿を追加</a:t>
-            </a:r>
-            <a:endParaRPr lang="en-US" sz="1500" dirty="0"/>
-          </a:p>
-        </p:txBody>
-      </p:sp>
-      <p:sp>
-        <p:nvSpPr>
-          <p:cNvPr id="4" name="Text 2"/>
-          <p:cNvSpPr/>
-          <p:nvPr/>
-        </p:nvSpPr>
-        <p:spPr>
-          <a:xfrm>
-            <a:off x="11338560" y="6263640"/>
-            <a:ext cx="457200" cy="274320"/>
-          </a:xfrm>
-          <a:prstGeom prst="rect">
-            <a:avLst/>
-          </a:prstGeom>
-          <a:noFill/>
-          <a:ln/>
-        </p:spPr>
-        <p:txBody>
-          <a:bodyPr wrap="square" lIns="0" tIns="0" rIns="0" bIns="0" rtlCol="0" anchor="ctr"/>
-          <a:lstStyle/>
-          <a:p>
-            <a:pPr algn="r" indent="0" marL="0">
-              <a:buNone/>
-            </a:pPr>
-            <a:r>
-              <a:rPr lang="en-US" sz="1100" dirty="0">
-                <a:solidFill>
-                  <a:srgbClr val="A8B4B8"/>
-                </a:solidFill>
-                <a:latin typeface="Meiryo" pitchFamily="34" charset="0"/>
-                <a:ea typeface="Meiryo" pitchFamily="34" charset="-122"/>
-                <a:cs typeface="Meiryo" pitchFamily="34" charset="-120"/>
-              </a:rPr>
-              <a:t>5</a:t>
-            </a:r>
-            <a:endParaRPr lang="en-US" sz="1100" dirty="0"/>
-          </a:p>
-        </p:txBody>
-      </p:sp>
       <p:pic>
         <p:nvPicPr>
-          <p:cNvPr id="5" name="Image 0" descr="/sessions/compassionate-sweet-heisenberg/mnt/dev-aspath-life-main/_wp移行素材/★引継ぎ資料/画像/02_投稿を追加.jpg">    </p:cNvPr>
+          <p:cNvPr id="2" name="Image 0" descr="/sessions/compassionate-sweet-heisenberg/mnt/dev-aspath-life-main/tools/assets/logo-deck.png">    </p:cNvPr>
           <p:cNvPicPr>
             <a:picLocks noChangeAspect="1"/>
           </p:cNvPicPr>
@@ -14154,6 +14975,186 @@
         </p:blipFill>
         <p:spPr>
           <a:xfrm>
+            <a:off x="11458173" y="109728"/>
+            <a:ext cx="209571" cy="256032"/>
+          </a:xfrm>
+          <a:prstGeom prst="rect">
+            <a:avLst/>
+          </a:prstGeom>
+        </p:spPr>
+      </p:pic>
+      <p:sp>
+        <p:nvSpPr>
+          <p:cNvPr id="3" name="Text 0"/>
+          <p:cNvSpPr txBox="1"/>
+          <p:nvPr/>
+        </p:nvSpPr>
+        <p:spPr>
+          <a:xfrm>
+            <a:off x="8623533" y="128016"/>
+            <a:ext cx="2743200" cy="237744"/>
+          </a:xfrm>
+          <a:prstGeom prst="rect">
+            <a:avLst/>
+          </a:prstGeom>
+          <a:noFill/>
+          <a:ln/>
+        </p:spPr>
+        <p:txBody>
+          <a:bodyPr wrap="square" lIns="0" tIns="0" rIns="0" bIns="0" rtlCol="0" anchor="ctr"/>
+          <a:lstStyle/>
+          <a:p>
+            <a:pPr algn="r" indent="0" marL="0">
+              <a:buNone/>
+            </a:pPr>
+            <a:r>
+              <a:rPr lang="en-US" sz="750" dirty="0">
+                <a:solidFill>
+                  <a:srgbClr val="97A9AF"/>
+                </a:solidFill>
+                <a:latin typeface="Meiryo" pitchFamily="34" charset="0"/>
+                <a:ea typeface="Meiryo" pitchFamily="34" charset="-122"/>
+                <a:cs typeface="Meiryo" pitchFamily="34" charset="-120"/>
+              </a:rPr>
+              <a:t>鹿児島のパーキンソン病専門トレーニングスタジオ</a:t>
+            </a:r>
+            <a:endParaRPr lang="en-US" sz="750" dirty="0"/>
+          </a:p>
+        </p:txBody>
+      </p:sp>
+      <p:sp>
+        <p:nvSpPr>
+          <p:cNvPr id="4" name="Text 1"/>
+          <p:cNvSpPr/>
+          <p:nvPr/>
+        </p:nvSpPr>
+        <p:spPr>
+          <a:xfrm>
+            <a:off x="548640" y="320040"/>
+            <a:ext cx="10424160" cy="685800"/>
+          </a:xfrm>
+          <a:prstGeom prst="rect">
+            <a:avLst/>
+          </a:prstGeom>
+          <a:noFill/>
+          <a:ln/>
+        </p:spPr>
+        <p:txBody>
+          <a:bodyPr wrap="square" lIns="0" tIns="0" rIns="0" bIns="0" rtlCol="0" anchor="ctr"/>
+          <a:lstStyle/>
+          <a:p>
+            <a:pPr indent="0" marL="0">
+              <a:buNone/>
+            </a:pPr>
+            <a:r>
+              <a:rPr lang="en-US" sz="3200" b="1" dirty="0">
+                <a:solidFill>
+                  <a:srgbClr val="264653"/>
+                </a:solidFill>
+                <a:latin typeface="Meiryo" pitchFamily="34" charset="0"/>
+                <a:ea typeface="Meiryo" pitchFamily="34" charset="-122"/>
+                <a:cs typeface="Meiryo" pitchFamily="34" charset="-120"/>
+              </a:rPr>
+              <a:t>【道A】記事を書く（コラム・お知らせ）</a:t>
+            </a:r>
+            <a:endParaRPr lang="en-US" sz="3200" dirty="0"/>
+          </a:p>
+        </p:txBody>
+      </p:sp>
+      <p:sp>
+        <p:nvSpPr>
+          <p:cNvPr id="5" name="Text 2"/>
+          <p:cNvSpPr/>
+          <p:nvPr/>
+        </p:nvSpPr>
+        <p:spPr>
+          <a:xfrm>
+            <a:off x="566928" y="1024128"/>
+            <a:ext cx="10424160" cy="365760"/>
+          </a:xfrm>
+          <a:prstGeom prst="rect">
+            <a:avLst/>
+          </a:prstGeom>
+          <a:noFill/>
+          <a:ln/>
+        </p:spPr>
+        <p:txBody>
+          <a:bodyPr wrap="square" lIns="0" tIns="0" rIns="0" bIns="0" rtlCol="0" anchor="ctr"/>
+          <a:lstStyle/>
+          <a:p>
+            <a:pPr indent="0" marL="0">
+              <a:buNone/>
+            </a:pPr>
+            <a:r>
+              <a:rPr lang="en-US" sz="1500" dirty="0">
+                <a:solidFill>
+                  <a:srgbClr val="5E7681"/>
+                </a:solidFill>
+                <a:latin typeface="Meiryo" pitchFamily="34" charset="0"/>
+                <a:ea typeface="Meiryo" pitchFamily="34" charset="-122"/>
+                <a:cs typeface="Meiryo" pitchFamily="34" charset="-120"/>
+              </a:rPr>
+              <a:t>投稿 → 投稿を追加</a:t>
+            </a:r>
+            <a:endParaRPr lang="en-US" sz="1500" dirty="0"/>
+          </a:p>
+        </p:txBody>
+      </p:sp>
+      <p:sp>
+        <p:nvSpPr>
+          <p:cNvPr id="6" name="Text 3"/>
+          <p:cNvSpPr/>
+          <p:nvPr/>
+        </p:nvSpPr>
+        <p:spPr>
+          <a:xfrm>
+            <a:off x="11338560" y="6263640"/>
+            <a:ext cx="457200" cy="274320"/>
+          </a:xfrm>
+          <a:prstGeom prst="rect">
+            <a:avLst/>
+          </a:prstGeom>
+          <a:noFill/>
+          <a:ln/>
+        </p:spPr>
+        <p:txBody>
+          <a:bodyPr wrap="square" lIns="0" tIns="0" rIns="0" bIns="0" rtlCol="0" anchor="ctr"/>
+          <a:lstStyle/>
+          <a:p>
+            <a:pPr algn="r" indent="0" marL="0">
+              <a:buNone/>
+            </a:pPr>
+            <a:r>
+              <a:rPr lang="en-US" sz="1100" dirty="0">
+                <a:solidFill>
+                  <a:srgbClr val="A8B4B8"/>
+                </a:solidFill>
+                <a:latin typeface="Meiryo" pitchFamily="34" charset="0"/>
+                <a:ea typeface="Meiryo" pitchFamily="34" charset="-122"/>
+                <a:cs typeface="Meiryo" pitchFamily="34" charset="-120"/>
+              </a:rPr>
+              <a:t>5</a:t>
+            </a:r>
+            <a:endParaRPr lang="en-US" sz="1100" dirty="0"/>
+          </a:p>
+        </p:txBody>
+      </p:sp>
+      <p:pic>
+        <p:nvPicPr>
+          <p:cNvPr id="7" name="Image 1" descr="/sessions/compassionate-sweet-heisenberg/mnt/dev-aspath-life-main/_wp移行素材/★引継ぎ資料/画像/02_投稿を追加.jpg">    </p:cNvPr>
+          <p:cNvPicPr>
+            <a:picLocks noChangeAspect="1"/>
+          </p:cNvPicPr>
+          <p:nvPr/>
+        </p:nvPicPr>
+        <p:blipFill>
+          <a:blip r:embed="rId2"/>
+          <a:stretch>
+            <a:fillRect/>
+          </a:stretch>
+        </p:blipFill>
+        <p:spPr>
+          <a:xfrm>
             <a:off x="640080" y="1691640"/>
             <a:ext cx="6766560" cy="3296972"/>
           </a:xfrm>
@@ -14164,7 +15165,7 @@
       </p:pic>
       <p:sp>
         <p:nvSpPr>
-          <p:cNvPr id="6" name="Shape 3"/>
+          <p:cNvPr id="8" name="Shape 4"/>
           <p:cNvSpPr/>
           <p:nvPr/>
         </p:nvSpPr>
@@ -14184,7 +15185,7 @@
       </p:sp>
       <p:sp>
         <p:nvSpPr>
-          <p:cNvPr id="7" name="Text 4"/>
+          <p:cNvPr id="9" name="Text 5"/>
           <p:cNvSpPr/>
           <p:nvPr/>
         </p:nvSpPr>
@@ -14223,7 +15224,7 @@
       </p:sp>
       <p:sp>
         <p:nvSpPr>
-          <p:cNvPr id="8" name="Text 5"/>
+          <p:cNvPr id="10" name="Text 6"/>
           <p:cNvSpPr/>
           <p:nvPr/>
         </p:nvSpPr>
@@ -14262,7 +15263,7 @@
       </p:sp>
       <p:sp>
         <p:nvSpPr>
-          <p:cNvPr id="9" name="Shape 6"/>
+          <p:cNvPr id="11" name="Shape 7"/>
           <p:cNvSpPr/>
           <p:nvPr/>
         </p:nvSpPr>
@@ -14282,7 +15283,7 @@
       </p:sp>
       <p:sp>
         <p:nvSpPr>
-          <p:cNvPr id="10" name="Text 7"/>
+          <p:cNvPr id="12" name="Text 8"/>
           <p:cNvSpPr/>
           <p:nvPr/>
         </p:nvSpPr>
@@ -14321,7 +15322,7 @@
       </p:sp>
       <p:sp>
         <p:nvSpPr>
-          <p:cNvPr id="11" name="Text 8"/>
+          <p:cNvPr id="13" name="Text 9"/>
           <p:cNvSpPr/>
           <p:nvPr/>
         </p:nvSpPr>
@@ -14360,7 +15361,7 @@
       </p:sp>
       <p:sp>
         <p:nvSpPr>
-          <p:cNvPr id="12" name="Shape 9"/>
+          <p:cNvPr id="14" name="Shape 10"/>
           <p:cNvSpPr/>
           <p:nvPr/>
         </p:nvSpPr>
@@ -14380,7 +15381,7 @@
       </p:sp>
       <p:sp>
         <p:nvSpPr>
-          <p:cNvPr id="13" name="Text 10"/>
+          <p:cNvPr id="15" name="Text 11"/>
           <p:cNvSpPr/>
           <p:nvPr/>
         </p:nvSpPr>
@@ -14419,7 +15420,7 @@
       </p:sp>
       <p:sp>
         <p:nvSpPr>
-          <p:cNvPr id="14" name="Text 11"/>
+          <p:cNvPr id="16" name="Text 12"/>
           <p:cNvSpPr/>
           <p:nvPr/>
         </p:nvSpPr>
@@ -14458,7 +15459,7 @@
       </p:sp>
       <p:sp>
         <p:nvSpPr>
-          <p:cNvPr id="15" name="Shape 12"/>
+          <p:cNvPr id="17" name="Shape 13"/>
           <p:cNvSpPr/>
           <p:nvPr/>
         </p:nvSpPr>
@@ -14478,7 +15479,7 @@
       </p:sp>
       <p:sp>
         <p:nvSpPr>
-          <p:cNvPr id="16" name="Text 13"/>
+          <p:cNvPr id="18" name="Text 14"/>
           <p:cNvSpPr/>
           <p:nvPr/>
         </p:nvSpPr>
@@ -14517,7 +15518,7 @@
       </p:sp>
       <p:sp>
         <p:nvSpPr>
-          <p:cNvPr id="17" name="Text 14"/>
+          <p:cNvPr id="19" name="Text 15"/>
           <p:cNvSpPr/>
           <p:nvPr/>
         </p:nvSpPr>
@@ -14556,7 +15557,7 @@
       </p:sp>
       <p:sp>
         <p:nvSpPr>
-          <p:cNvPr id="18" name="Shape 15"/>
+          <p:cNvPr id="20" name="Shape 16"/>
           <p:cNvSpPr/>
           <p:nvPr/>
         </p:nvSpPr>
@@ -14576,7 +15577,7 @@
       </p:sp>
       <p:sp>
         <p:nvSpPr>
-          <p:cNvPr id="19" name="Text 16"/>
+          <p:cNvPr id="21" name="Text 17"/>
           <p:cNvSpPr/>
           <p:nvPr/>
         </p:nvSpPr>
@@ -14615,7 +15616,7 @@
       </p:sp>
       <p:sp>
         <p:nvSpPr>
-          <p:cNvPr id="20" name="Text 17"/>
+          <p:cNvPr id="22" name="Text 18"/>
           <p:cNvSpPr/>
           <p:nvPr/>
         </p:nvSpPr>
@@ -14654,7 +15655,7 @@
       </p:sp>
       <p:sp>
         <p:nvSpPr>
-          <p:cNvPr id="21" name="Shape 18"/>
+          <p:cNvPr id="23" name="Shape 19"/>
           <p:cNvSpPr/>
           <p:nvPr/>
         </p:nvSpPr>
@@ -14676,7 +15677,7 @@
       </p:sp>
       <p:sp>
         <p:nvSpPr>
-          <p:cNvPr id="22" name="Text 19"/>
+          <p:cNvPr id="24" name="Text 20"/>
           <p:cNvSpPr/>
           <p:nvPr/>
         </p:nvSpPr>
@@ -14768,9 +15769,72 @@
           <a:chExt cx="0" cy="0"/>
         </a:xfrm>
       </p:grpSpPr>
-      <p:sp>
-        <p:nvSpPr>
-          <p:cNvPr id="2" name="Text 0"/>
+      <p:pic>
+        <p:nvPicPr>
+          <p:cNvPr id="2" name="Image 0" descr="/sessions/compassionate-sweet-heisenberg/mnt/dev-aspath-life-main/tools/assets/logo-deck.png">    </p:cNvPr>
+          <p:cNvPicPr>
+            <a:picLocks noChangeAspect="1"/>
+          </p:cNvPicPr>
+          <p:nvPr/>
+        </p:nvPicPr>
+        <p:blipFill>
+          <a:blip r:embed="rId1"/>
+          <a:stretch>
+            <a:fillRect/>
+          </a:stretch>
+        </p:blipFill>
+        <p:spPr>
+          <a:xfrm>
+            <a:off x="11458173" y="109728"/>
+            <a:ext cx="209571" cy="256032"/>
+          </a:xfrm>
+          <a:prstGeom prst="rect">
+            <a:avLst/>
+          </a:prstGeom>
+        </p:spPr>
+      </p:pic>
+      <p:sp>
+        <p:nvSpPr>
+          <p:cNvPr id="3" name="Text 0"/>
+          <p:cNvSpPr txBox="1"/>
+          <p:nvPr/>
+        </p:nvSpPr>
+        <p:spPr>
+          <a:xfrm>
+            <a:off x="8623533" y="128016"/>
+            <a:ext cx="2743200" cy="237744"/>
+          </a:xfrm>
+          <a:prstGeom prst="rect">
+            <a:avLst/>
+          </a:prstGeom>
+          <a:noFill/>
+          <a:ln/>
+        </p:spPr>
+        <p:txBody>
+          <a:bodyPr wrap="square" lIns="0" tIns="0" rIns="0" bIns="0" rtlCol="0" anchor="ctr"/>
+          <a:lstStyle/>
+          <a:p>
+            <a:pPr algn="r" indent="0" marL="0">
+              <a:buNone/>
+            </a:pPr>
+            <a:r>
+              <a:rPr lang="en-US" sz="750" dirty="0">
+                <a:solidFill>
+                  <a:srgbClr val="97A9AF"/>
+                </a:solidFill>
+                <a:latin typeface="Meiryo" pitchFamily="34" charset="0"/>
+                <a:ea typeface="Meiryo" pitchFamily="34" charset="-122"/>
+                <a:cs typeface="Meiryo" pitchFamily="34" charset="-120"/>
+              </a:rPr>
+              <a:t>鹿児島のパーキンソン病専門トレーニングスタジオ</a:t>
+            </a:r>
+            <a:endParaRPr lang="en-US" sz="750" dirty="0"/>
+          </a:p>
+        </p:txBody>
+      </p:sp>
+      <p:sp>
+        <p:nvSpPr>
+          <p:cNvPr id="4" name="Text 1"/>
           <p:cNvSpPr/>
           <p:nvPr/>
         </p:nvSpPr>
@@ -14809,7 +15873,7 @@
       </p:sp>
       <p:sp>
         <p:nvSpPr>
-          <p:cNvPr id="3" name="Text 1"/>
+          <p:cNvPr id="5" name="Text 2"/>
           <p:cNvSpPr/>
           <p:nvPr/>
         </p:nvSpPr>
@@ -14848,7 +15912,7 @@
       </p:sp>
       <p:sp>
         <p:nvSpPr>
-          <p:cNvPr id="4" name="Text 2"/>
+          <p:cNvPr id="6" name="Text 3"/>
           <p:cNvSpPr/>
           <p:nvPr/>
         </p:nvSpPr>
@@ -14887,7 +15951,7 @@
       </p:sp>
       <p:sp>
         <p:nvSpPr>
-          <p:cNvPr id="5" name="Shape 3"/>
+          <p:cNvPr id="7" name="Shape 4"/>
           <p:cNvSpPr/>
           <p:nvPr/>
         </p:nvSpPr>
@@ -14909,7 +15973,7 @@
       </p:sp>
       <p:sp>
         <p:nvSpPr>
-          <p:cNvPr id="6" name="Shape 4"/>
+          <p:cNvPr id="8" name="Shape 5"/>
           <p:cNvSpPr/>
           <p:nvPr/>
         </p:nvSpPr>
@@ -14929,7 +15993,7 @@
       </p:sp>
       <p:sp>
         <p:nvSpPr>
-          <p:cNvPr id="7" name="Text 5"/>
+          <p:cNvPr id="9" name="Text 6"/>
           <p:cNvSpPr/>
           <p:nvPr/>
         </p:nvSpPr>
@@ -14968,7 +16032,7 @@
       </p:sp>
       <p:sp>
         <p:nvSpPr>
-          <p:cNvPr id="8" name="Text 6"/>
+          <p:cNvPr id="10" name="Text 7"/>
           <p:cNvSpPr/>
           <p:nvPr/>
         </p:nvSpPr>
@@ -15007,7 +16071,7 @@
       </p:sp>
       <p:sp>
         <p:nvSpPr>
-          <p:cNvPr id="9" name="Text 7"/>
+          <p:cNvPr id="11" name="Text 8"/>
           <p:cNvSpPr/>
           <p:nvPr/>
         </p:nvSpPr>
@@ -15069,7 +16133,7 @@
       </p:sp>
       <p:sp>
         <p:nvSpPr>
-          <p:cNvPr id="10" name="Shape 8"/>
+          <p:cNvPr id="12" name="Shape 9"/>
           <p:cNvSpPr/>
           <p:nvPr/>
         </p:nvSpPr>
@@ -15091,7 +16155,7 @@
       </p:sp>
       <p:sp>
         <p:nvSpPr>
-          <p:cNvPr id="11" name="Shape 9"/>
+          <p:cNvPr id="13" name="Shape 10"/>
           <p:cNvSpPr/>
           <p:nvPr/>
         </p:nvSpPr>
@@ -15111,7 +16175,7 @@
       </p:sp>
       <p:sp>
         <p:nvSpPr>
-          <p:cNvPr id="12" name="Text 10"/>
+          <p:cNvPr id="14" name="Text 11"/>
           <p:cNvSpPr/>
           <p:nvPr/>
         </p:nvSpPr>
@@ -15150,7 +16214,7 @@
       </p:sp>
       <p:sp>
         <p:nvSpPr>
-          <p:cNvPr id="13" name="Text 11"/>
+          <p:cNvPr id="15" name="Text 12"/>
           <p:cNvSpPr/>
           <p:nvPr/>
         </p:nvSpPr>
@@ -15189,7 +16253,7 @@
       </p:sp>
       <p:sp>
         <p:nvSpPr>
-          <p:cNvPr id="14" name="Text 12"/>
+          <p:cNvPr id="16" name="Text 13"/>
           <p:cNvSpPr/>
           <p:nvPr/>
         </p:nvSpPr>
@@ -15251,7 +16315,7 @@
       </p:sp>
       <p:sp>
         <p:nvSpPr>
-          <p:cNvPr id="15" name="Shape 13"/>
+          <p:cNvPr id="17" name="Shape 14"/>
           <p:cNvSpPr/>
           <p:nvPr/>
         </p:nvSpPr>
@@ -15273,7 +16337,7 @@
       </p:sp>
       <p:sp>
         <p:nvSpPr>
-          <p:cNvPr id="16" name="Shape 14"/>
+          <p:cNvPr id="18" name="Shape 15"/>
           <p:cNvSpPr/>
           <p:nvPr/>
         </p:nvSpPr>
@@ -15293,7 +16357,7 @@
       </p:sp>
       <p:sp>
         <p:nvSpPr>
-          <p:cNvPr id="17" name="Text 15"/>
+          <p:cNvPr id="19" name="Text 16"/>
           <p:cNvSpPr/>
           <p:nvPr/>
         </p:nvSpPr>
@@ -15332,7 +16396,7 @@
       </p:sp>
       <p:sp>
         <p:nvSpPr>
-          <p:cNvPr id="18" name="Text 16"/>
+          <p:cNvPr id="20" name="Text 17"/>
           <p:cNvSpPr/>
           <p:nvPr/>
         </p:nvSpPr>
@@ -15371,7 +16435,7 @@
       </p:sp>
       <p:sp>
         <p:nvSpPr>
-          <p:cNvPr id="19" name="Text 17"/>
+          <p:cNvPr id="21" name="Text 18"/>
           <p:cNvSpPr/>
           <p:nvPr/>
         </p:nvSpPr>
@@ -15463,126 +16527,9 @@
           <a:chExt cx="0" cy="0"/>
         </a:xfrm>
       </p:grpSpPr>
-      <p:sp>
-        <p:nvSpPr>
-          <p:cNvPr id="2" name="Text 0"/>
-          <p:cNvSpPr/>
-          <p:nvPr/>
-        </p:nvSpPr>
-        <p:spPr>
-          <a:xfrm>
-            <a:off x="548640" y="320040"/>
-            <a:ext cx="10424160" cy="685800"/>
-          </a:xfrm>
-          <a:prstGeom prst="rect">
-            <a:avLst/>
-          </a:prstGeom>
-          <a:noFill/>
-          <a:ln/>
-        </p:spPr>
-        <p:txBody>
-          <a:bodyPr wrap="square" lIns="0" tIns="0" rIns="0" bIns="0" rtlCol="0" anchor="ctr"/>
-          <a:lstStyle/>
-          <a:p>
-            <a:pPr indent="0" marL="0">
-              <a:buNone/>
-            </a:pPr>
-            <a:r>
-              <a:rPr lang="en-US" sz="3200" b="1" dirty="0">
-                <a:solidFill>
-                  <a:srgbClr val="264653"/>
-                </a:solidFill>
-                <a:latin typeface="Meiryo" pitchFamily="34" charset="0"/>
-                <a:ea typeface="Meiryo" pitchFamily="34" charset="-122"/>
-                <a:cs typeface="Meiryo" pitchFamily="34" charset="-120"/>
-              </a:rPr>
-              <a:t>【道A】コメントを承認する・返信する</a:t>
-            </a:r>
-            <a:endParaRPr lang="en-US" sz="3200" dirty="0"/>
-          </a:p>
-        </p:txBody>
-      </p:sp>
-      <p:sp>
-        <p:nvSpPr>
-          <p:cNvPr id="3" name="Text 1"/>
-          <p:cNvSpPr/>
-          <p:nvPr/>
-        </p:nvSpPr>
-        <p:spPr>
-          <a:xfrm>
-            <a:off x="566928" y="1024128"/>
-            <a:ext cx="10424160" cy="365760"/>
-          </a:xfrm>
-          <a:prstGeom prst="rect">
-            <a:avLst/>
-          </a:prstGeom>
-          <a:noFill/>
-          <a:ln/>
-        </p:spPr>
-        <p:txBody>
-          <a:bodyPr wrap="square" lIns="0" tIns="0" rIns="0" bIns="0" rtlCol="0" anchor="ctr"/>
-          <a:lstStyle/>
-          <a:p>
-            <a:pPr indent="0" marL="0">
-              <a:buNone/>
-            </a:pPr>
-            <a:r>
-              <a:rPr lang="en-US" sz="1500" dirty="0">
-                <a:solidFill>
-                  <a:srgbClr val="5E7681"/>
-                </a:solidFill>
-                <a:latin typeface="Meiryo" pitchFamily="34" charset="0"/>
-                <a:ea typeface="Meiryo" pitchFamily="34" charset="-122"/>
-                <a:cs typeface="Meiryo" pitchFamily="34" charset="-120"/>
-              </a:rPr>
-              <a:t>コメント</a:t>
-            </a:r>
-            <a:endParaRPr lang="en-US" sz="1500" dirty="0"/>
-          </a:p>
-        </p:txBody>
-      </p:sp>
-      <p:sp>
-        <p:nvSpPr>
-          <p:cNvPr id="4" name="Text 2"/>
-          <p:cNvSpPr/>
-          <p:nvPr/>
-        </p:nvSpPr>
-        <p:spPr>
-          <a:xfrm>
-            <a:off x="11338560" y="6263640"/>
-            <a:ext cx="457200" cy="274320"/>
-          </a:xfrm>
-          <a:prstGeom prst="rect">
-            <a:avLst/>
-          </a:prstGeom>
-          <a:noFill/>
-          <a:ln/>
-        </p:spPr>
-        <p:txBody>
-          <a:bodyPr wrap="square" lIns="0" tIns="0" rIns="0" bIns="0" rtlCol="0" anchor="ctr"/>
-          <a:lstStyle/>
-          <a:p>
-            <a:pPr algn="r" indent="0" marL="0">
-              <a:buNone/>
-            </a:pPr>
-            <a:r>
-              <a:rPr lang="en-US" sz="1100" dirty="0">
-                <a:solidFill>
-                  <a:srgbClr val="A8B4B8"/>
-                </a:solidFill>
-                <a:latin typeface="Meiryo" pitchFamily="34" charset="0"/>
-                <a:ea typeface="Meiryo" pitchFamily="34" charset="-122"/>
-                <a:cs typeface="Meiryo" pitchFamily="34" charset="-120"/>
-              </a:rPr>
-              <a:t>7</a:t>
-            </a:r>
-            <a:endParaRPr lang="en-US" sz="1100" dirty="0"/>
-          </a:p>
-        </p:txBody>
-      </p:sp>
       <p:pic>
         <p:nvPicPr>
-          <p:cNvPr id="5" name="Image 0" descr="/sessions/compassionate-sweet-heisenberg/mnt/dev-aspath-life-main/_wp移行素材/★引継ぎ資料/画像/03_コメント.jpg">    </p:cNvPr>
+          <p:cNvPr id="2" name="Image 0" descr="/sessions/compassionate-sweet-heisenberg/mnt/dev-aspath-life-main/tools/assets/logo-deck.png">    </p:cNvPr>
           <p:cNvPicPr>
             <a:picLocks noChangeAspect="1"/>
           </p:cNvPicPr>
@@ -15596,6 +16543,186 @@
         </p:blipFill>
         <p:spPr>
           <a:xfrm>
+            <a:off x="11458173" y="109728"/>
+            <a:ext cx="209571" cy="256032"/>
+          </a:xfrm>
+          <a:prstGeom prst="rect">
+            <a:avLst/>
+          </a:prstGeom>
+        </p:spPr>
+      </p:pic>
+      <p:sp>
+        <p:nvSpPr>
+          <p:cNvPr id="3" name="Text 0"/>
+          <p:cNvSpPr txBox="1"/>
+          <p:nvPr/>
+        </p:nvSpPr>
+        <p:spPr>
+          <a:xfrm>
+            <a:off x="8623533" y="128016"/>
+            <a:ext cx="2743200" cy="237744"/>
+          </a:xfrm>
+          <a:prstGeom prst="rect">
+            <a:avLst/>
+          </a:prstGeom>
+          <a:noFill/>
+          <a:ln/>
+        </p:spPr>
+        <p:txBody>
+          <a:bodyPr wrap="square" lIns="0" tIns="0" rIns="0" bIns="0" rtlCol="0" anchor="ctr"/>
+          <a:lstStyle/>
+          <a:p>
+            <a:pPr algn="r" indent="0" marL="0">
+              <a:buNone/>
+            </a:pPr>
+            <a:r>
+              <a:rPr lang="en-US" sz="750" dirty="0">
+                <a:solidFill>
+                  <a:srgbClr val="97A9AF"/>
+                </a:solidFill>
+                <a:latin typeface="Meiryo" pitchFamily="34" charset="0"/>
+                <a:ea typeface="Meiryo" pitchFamily="34" charset="-122"/>
+                <a:cs typeface="Meiryo" pitchFamily="34" charset="-120"/>
+              </a:rPr>
+              <a:t>鹿児島のパーキンソン病専門トレーニングスタジオ</a:t>
+            </a:r>
+            <a:endParaRPr lang="en-US" sz="750" dirty="0"/>
+          </a:p>
+        </p:txBody>
+      </p:sp>
+      <p:sp>
+        <p:nvSpPr>
+          <p:cNvPr id="4" name="Text 1"/>
+          <p:cNvSpPr/>
+          <p:nvPr/>
+        </p:nvSpPr>
+        <p:spPr>
+          <a:xfrm>
+            <a:off x="548640" y="320040"/>
+            <a:ext cx="10424160" cy="685800"/>
+          </a:xfrm>
+          <a:prstGeom prst="rect">
+            <a:avLst/>
+          </a:prstGeom>
+          <a:noFill/>
+          <a:ln/>
+        </p:spPr>
+        <p:txBody>
+          <a:bodyPr wrap="square" lIns="0" tIns="0" rIns="0" bIns="0" rtlCol="0" anchor="ctr"/>
+          <a:lstStyle/>
+          <a:p>
+            <a:pPr indent="0" marL="0">
+              <a:buNone/>
+            </a:pPr>
+            <a:r>
+              <a:rPr lang="en-US" sz="3200" b="1" dirty="0">
+                <a:solidFill>
+                  <a:srgbClr val="264653"/>
+                </a:solidFill>
+                <a:latin typeface="Meiryo" pitchFamily="34" charset="0"/>
+                <a:ea typeface="Meiryo" pitchFamily="34" charset="-122"/>
+                <a:cs typeface="Meiryo" pitchFamily="34" charset="-120"/>
+              </a:rPr>
+              <a:t>【道A】コメントを承認する・返信する</a:t>
+            </a:r>
+            <a:endParaRPr lang="en-US" sz="3200" dirty="0"/>
+          </a:p>
+        </p:txBody>
+      </p:sp>
+      <p:sp>
+        <p:nvSpPr>
+          <p:cNvPr id="5" name="Text 2"/>
+          <p:cNvSpPr/>
+          <p:nvPr/>
+        </p:nvSpPr>
+        <p:spPr>
+          <a:xfrm>
+            <a:off x="566928" y="1024128"/>
+            <a:ext cx="10424160" cy="365760"/>
+          </a:xfrm>
+          <a:prstGeom prst="rect">
+            <a:avLst/>
+          </a:prstGeom>
+          <a:noFill/>
+          <a:ln/>
+        </p:spPr>
+        <p:txBody>
+          <a:bodyPr wrap="square" lIns="0" tIns="0" rIns="0" bIns="0" rtlCol="0" anchor="ctr"/>
+          <a:lstStyle/>
+          <a:p>
+            <a:pPr indent="0" marL="0">
+              <a:buNone/>
+            </a:pPr>
+            <a:r>
+              <a:rPr lang="en-US" sz="1500" dirty="0">
+                <a:solidFill>
+                  <a:srgbClr val="5E7681"/>
+                </a:solidFill>
+                <a:latin typeface="Meiryo" pitchFamily="34" charset="0"/>
+                <a:ea typeface="Meiryo" pitchFamily="34" charset="-122"/>
+                <a:cs typeface="Meiryo" pitchFamily="34" charset="-120"/>
+              </a:rPr>
+              <a:t>コメント</a:t>
+            </a:r>
+            <a:endParaRPr lang="en-US" sz="1500" dirty="0"/>
+          </a:p>
+        </p:txBody>
+      </p:sp>
+      <p:sp>
+        <p:nvSpPr>
+          <p:cNvPr id="6" name="Text 3"/>
+          <p:cNvSpPr/>
+          <p:nvPr/>
+        </p:nvSpPr>
+        <p:spPr>
+          <a:xfrm>
+            <a:off x="11338560" y="6263640"/>
+            <a:ext cx="457200" cy="274320"/>
+          </a:xfrm>
+          <a:prstGeom prst="rect">
+            <a:avLst/>
+          </a:prstGeom>
+          <a:noFill/>
+          <a:ln/>
+        </p:spPr>
+        <p:txBody>
+          <a:bodyPr wrap="square" lIns="0" tIns="0" rIns="0" bIns="0" rtlCol="0" anchor="ctr"/>
+          <a:lstStyle/>
+          <a:p>
+            <a:pPr algn="r" indent="0" marL="0">
+              <a:buNone/>
+            </a:pPr>
+            <a:r>
+              <a:rPr lang="en-US" sz="1100" dirty="0">
+                <a:solidFill>
+                  <a:srgbClr val="A8B4B8"/>
+                </a:solidFill>
+                <a:latin typeface="Meiryo" pitchFamily="34" charset="0"/>
+                <a:ea typeface="Meiryo" pitchFamily="34" charset="-122"/>
+                <a:cs typeface="Meiryo" pitchFamily="34" charset="-120"/>
+              </a:rPr>
+              <a:t>7</a:t>
+            </a:r>
+            <a:endParaRPr lang="en-US" sz="1100" dirty="0"/>
+          </a:p>
+        </p:txBody>
+      </p:sp>
+      <p:pic>
+        <p:nvPicPr>
+          <p:cNvPr id="7" name="Image 1" descr="/sessions/compassionate-sweet-heisenberg/mnt/dev-aspath-life-main/_wp移行素材/★引継ぎ資料/画像/03_コメント.jpg">    </p:cNvPr>
+          <p:cNvPicPr>
+            <a:picLocks noChangeAspect="1"/>
+          </p:cNvPicPr>
+          <p:nvPr/>
+        </p:nvPicPr>
+        <p:blipFill>
+          <a:blip r:embed="rId2"/>
+          <a:stretch>
+            <a:fillRect/>
+          </a:stretch>
+        </p:blipFill>
+        <p:spPr>
+          <a:xfrm>
             <a:off x="640080" y="1691640"/>
             <a:ext cx="6766560" cy="3296972"/>
           </a:xfrm>
@@ -15606,7 +16733,7 @@
       </p:pic>
       <p:sp>
         <p:nvSpPr>
-          <p:cNvPr id="6" name="Text 3"/>
+          <p:cNvPr id="8" name="Text 4"/>
           <p:cNvSpPr/>
           <p:nvPr/>
         </p:nvSpPr>
@@ -15733,7 +16860,7 @@
       </p:sp>
       <p:sp>
         <p:nvSpPr>
-          <p:cNvPr id="7" name="Shape 4"/>
+          <p:cNvPr id="9" name="Shape 5"/>
           <p:cNvSpPr/>
           <p:nvPr/>
         </p:nvSpPr>
@@ -15755,7 +16882,7 @@
       </p:sp>
       <p:sp>
         <p:nvSpPr>
-          <p:cNvPr id="8" name="Text 5"/>
+          <p:cNvPr id="10" name="Text 6"/>
           <p:cNvSpPr/>
           <p:nvPr/>
         </p:nvSpPr>
@@ -15817,7 +16944,7 @@
       </p:sp>
       <p:sp>
         <p:nvSpPr>
-          <p:cNvPr id="9" name="Shape 6"/>
+          <p:cNvPr id="11" name="Shape 7"/>
           <p:cNvSpPr/>
           <p:nvPr/>
         </p:nvSpPr>
@@ -15839,7 +16966,7 @@
       </p:sp>
       <p:sp>
         <p:nvSpPr>
-          <p:cNvPr id="10" name="Text 7"/>
+          <p:cNvPr id="12" name="Text 8"/>
           <p:cNvSpPr/>
           <p:nvPr/>
         </p:nvSpPr>
@@ -15931,126 +17058,9 @@
           <a:chExt cx="0" cy="0"/>
         </a:xfrm>
       </p:grpSpPr>
-      <p:sp>
-        <p:nvSpPr>
-          <p:cNvPr id="2" name="Text 0"/>
-          <p:cNvSpPr/>
-          <p:nvPr/>
-        </p:nvSpPr>
-        <p:spPr>
-          <a:xfrm>
-            <a:off x="548640" y="320040"/>
-            <a:ext cx="10424160" cy="685800"/>
-          </a:xfrm>
-          <a:prstGeom prst="rect">
-            <a:avLst/>
-          </a:prstGeom>
-          <a:noFill/>
-          <a:ln/>
-        </p:spPr>
-        <p:txBody>
-          <a:bodyPr wrap="square" lIns="0" tIns="0" rIns="0" bIns="0" rtlCol="0" anchor="ctr"/>
-          <a:lstStyle/>
-          <a:p>
-            <a:pPr indent="0" marL="0">
-              <a:buNone/>
-            </a:pPr>
-            <a:r>
-              <a:rPr lang="en-US" sz="3200" b="1" dirty="0">
-                <a:solidFill>
-                  <a:srgbClr val="264653"/>
-                </a:solidFill>
-                <a:latin typeface="Meiryo" pitchFamily="34" charset="0"/>
-                <a:ea typeface="Meiryo" pitchFamily="34" charset="-122"/>
-                <a:cs typeface="Meiryo" pitchFamily="34" charset="-120"/>
-              </a:rPr>
-              <a:t>【道A】初回体験の申込を見る</a:t>
-            </a:r>
-            <a:endParaRPr lang="en-US" sz="3200" dirty="0"/>
-          </a:p>
-        </p:txBody>
-      </p:sp>
-      <p:sp>
-        <p:nvSpPr>
-          <p:cNvPr id="3" name="Text 1"/>
-          <p:cNvSpPr/>
-          <p:nvPr/>
-        </p:nvSpPr>
-        <p:spPr>
-          <a:xfrm>
-            <a:off x="566928" y="1024128"/>
-            <a:ext cx="10424160" cy="365760"/>
-          </a:xfrm>
-          <a:prstGeom prst="rect">
-            <a:avLst/>
-          </a:prstGeom>
-          <a:noFill/>
-          <a:ln/>
-        </p:spPr>
-        <p:txBody>
-          <a:bodyPr wrap="square" lIns="0" tIns="0" rIns="0" bIns="0" rtlCol="0" anchor="ctr"/>
-          <a:lstStyle/>
-          <a:p>
-            <a:pPr indent="0" marL="0">
-              <a:buNone/>
-            </a:pPr>
-            <a:r>
-              <a:rPr lang="en-US" sz="1500" dirty="0">
-                <a:solidFill>
-                  <a:srgbClr val="5E7681"/>
-                </a:solidFill>
-                <a:latin typeface="Meiryo" pitchFamily="34" charset="0"/>
-                <a:ea typeface="Meiryo" pitchFamily="34" charset="-122"/>
-                <a:cs typeface="Meiryo" pitchFamily="34" charset="-120"/>
-              </a:rPr>
-              <a:t>初回体験の申込</a:t>
-            </a:r>
-            <a:endParaRPr lang="en-US" sz="1500" dirty="0"/>
-          </a:p>
-        </p:txBody>
-      </p:sp>
-      <p:sp>
-        <p:nvSpPr>
-          <p:cNvPr id="4" name="Text 2"/>
-          <p:cNvSpPr/>
-          <p:nvPr/>
-        </p:nvSpPr>
-        <p:spPr>
-          <a:xfrm>
-            <a:off x="11338560" y="6263640"/>
-            <a:ext cx="457200" cy="274320"/>
-          </a:xfrm>
-          <a:prstGeom prst="rect">
-            <a:avLst/>
-          </a:prstGeom>
-          <a:noFill/>
-          <a:ln/>
-        </p:spPr>
-        <p:txBody>
-          <a:bodyPr wrap="square" lIns="0" tIns="0" rIns="0" bIns="0" rtlCol="0" anchor="ctr"/>
-          <a:lstStyle/>
-          <a:p>
-            <a:pPr algn="r" indent="0" marL="0">
-              <a:buNone/>
-            </a:pPr>
-            <a:r>
-              <a:rPr lang="en-US" sz="1100" dirty="0">
-                <a:solidFill>
-                  <a:srgbClr val="A8B4B8"/>
-                </a:solidFill>
-                <a:latin typeface="Meiryo" pitchFamily="34" charset="0"/>
-                <a:ea typeface="Meiryo" pitchFamily="34" charset="-122"/>
-                <a:cs typeface="Meiryo" pitchFamily="34" charset="-120"/>
-              </a:rPr>
-              <a:t>8</a:t>
-            </a:r>
-            <a:endParaRPr lang="en-US" sz="1100" dirty="0"/>
-          </a:p>
-        </p:txBody>
-      </p:sp>
       <p:pic>
         <p:nvPicPr>
-          <p:cNvPr id="5" name="Image 0" descr="/sessions/compassionate-sweet-heisenberg/mnt/dev-aspath-life-main/_wp移行素材/★引継ぎ資料/画像/04_初回体験の申込.jpg">    </p:cNvPr>
+          <p:cNvPr id="2" name="Image 0" descr="/sessions/compassionate-sweet-heisenberg/mnt/dev-aspath-life-main/tools/assets/logo-deck.png">    </p:cNvPr>
           <p:cNvPicPr>
             <a:picLocks noChangeAspect="1"/>
           </p:cNvPicPr>
@@ -16064,6 +17074,186 @@
         </p:blipFill>
         <p:spPr>
           <a:xfrm>
+            <a:off x="11458173" y="109728"/>
+            <a:ext cx="209571" cy="256032"/>
+          </a:xfrm>
+          <a:prstGeom prst="rect">
+            <a:avLst/>
+          </a:prstGeom>
+        </p:spPr>
+      </p:pic>
+      <p:sp>
+        <p:nvSpPr>
+          <p:cNvPr id="3" name="Text 0"/>
+          <p:cNvSpPr txBox="1"/>
+          <p:nvPr/>
+        </p:nvSpPr>
+        <p:spPr>
+          <a:xfrm>
+            <a:off x="8623533" y="128016"/>
+            <a:ext cx="2743200" cy="237744"/>
+          </a:xfrm>
+          <a:prstGeom prst="rect">
+            <a:avLst/>
+          </a:prstGeom>
+          <a:noFill/>
+          <a:ln/>
+        </p:spPr>
+        <p:txBody>
+          <a:bodyPr wrap="square" lIns="0" tIns="0" rIns="0" bIns="0" rtlCol="0" anchor="ctr"/>
+          <a:lstStyle/>
+          <a:p>
+            <a:pPr algn="r" indent="0" marL="0">
+              <a:buNone/>
+            </a:pPr>
+            <a:r>
+              <a:rPr lang="en-US" sz="750" dirty="0">
+                <a:solidFill>
+                  <a:srgbClr val="97A9AF"/>
+                </a:solidFill>
+                <a:latin typeface="Meiryo" pitchFamily="34" charset="0"/>
+                <a:ea typeface="Meiryo" pitchFamily="34" charset="-122"/>
+                <a:cs typeface="Meiryo" pitchFamily="34" charset="-120"/>
+              </a:rPr>
+              <a:t>鹿児島のパーキンソン病専門トレーニングスタジオ</a:t>
+            </a:r>
+            <a:endParaRPr lang="en-US" sz="750" dirty="0"/>
+          </a:p>
+        </p:txBody>
+      </p:sp>
+      <p:sp>
+        <p:nvSpPr>
+          <p:cNvPr id="4" name="Text 1"/>
+          <p:cNvSpPr/>
+          <p:nvPr/>
+        </p:nvSpPr>
+        <p:spPr>
+          <a:xfrm>
+            <a:off x="548640" y="320040"/>
+            <a:ext cx="10424160" cy="685800"/>
+          </a:xfrm>
+          <a:prstGeom prst="rect">
+            <a:avLst/>
+          </a:prstGeom>
+          <a:noFill/>
+          <a:ln/>
+        </p:spPr>
+        <p:txBody>
+          <a:bodyPr wrap="square" lIns="0" tIns="0" rIns="0" bIns="0" rtlCol="0" anchor="ctr"/>
+          <a:lstStyle/>
+          <a:p>
+            <a:pPr indent="0" marL="0">
+              <a:buNone/>
+            </a:pPr>
+            <a:r>
+              <a:rPr lang="en-US" sz="3200" b="1" dirty="0">
+                <a:solidFill>
+                  <a:srgbClr val="264653"/>
+                </a:solidFill>
+                <a:latin typeface="Meiryo" pitchFamily="34" charset="0"/>
+                <a:ea typeface="Meiryo" pitchFamily="34" charset="-122"/>
+                <a:cs typeface="Meiryo" pitchFamily="34" charset="-120"/>
+              </a:rPr>
+              <a:t>【道A】初回体験の申込を見る</a:t>
+            </a:r>
+            <a:endParaRPr lang="en-US" sz="3200" dirty="0"/>
+          </a:p>
+        </p:txBody>
+      </p:sp>
+      <p:sp>
+        <p:nvSpPr>
+          <p:cNvPr id="5" name="Text 2"/>
+          <p:cNvSpPr/>
+          <p:nvPr/>
+        </p:nvSpPr>
+        <p:spPr>
+          <a:xfrm>
+            <a:off x="566928" y="1024128"/>
+            <a:ext cx="10424160" cy="365760"/>
+          </a:xfrm>
+          <a:prstGeom prst="rect">
+            <a:avLst/>
+          </a:prstGeom>
+          <a:noFill/>
+          <a:ln/>
+        </p:spPr>
+        <p:txBody>
+          <a:bodyPr wrap="square" lIns="0" tIns="0" rIns="0" bIns="0" rtlCol="0" anchor="ctr"/>
+          <a:lstStyle/>
+          <a:p>
+            <a:pPr indent="0" marL="0">
+              <a:buNone/>
+            </a:pPr>
+            <a:r>
+              <a:rPr lang="en-US" sz="1500" dirty="0">
+                <a:solidFill>
+                  <a:srgbClr val="5E7681"/>
+                </a:solidFill>
+                <a:latin typeface="Meiryo" pitchFamily="34" charset="0"/>
+                <a:ea typeface="Meiryo" pitchFamily="34" charset="-122"/>
+                <a:cs typeface="Meiryo" pitchFamily="34" charset="-120"/>
+              </a:rPr>
+              <a:t>初回体験の申込</a:t>
+            </a:r>
+            <a:endParaRPr lang="en-US" sz="1500" dirty="0"/>
+          </a:p>
+        </p:txBody>
+      </p:sp>
+      <p:sp>
+        <p:nvSpPr>
+          <p:cNvPr id="6" name="Text 3"/>
+          <p:cNvSpPr/>
+          <p:nvPr/>
+        </p:nvSpPr>
+        <p:spPr>
+          <a:xfrm>
+            <a:off x="11338560" y="6263640"/>
+            <a:ext cx="457200" cy="274320"/>
+          </a:xfrm>
+          <a:prstGeom prst="rect">
+            <a:avLst/>
+          </a:prstGeom>
+          <a:noFill/>
+          <a:ln/>
+        </p:spPr>
+        <p:txBody>
+          <a:bodyPr wrap="square" lIns="0" tIns="0" rIns="0" bIns="0" rtlCol="0" anchor="ctr"/>
+          <a:lstStyle/>
+          <a:p>
+            <a:pPr algn="r" indent="0" marL="0">
+              <a:buNone/>
+            </a:pPr>
+            <a:r>
+              <a:rPr lang="en-US" sz="1100" dirty="0">
+                <a:solidFill>
+                  <a:srgbClr val="A8B4B8"/>
+                </a:solidFill>
+                <a:latin typeface="Meiryo" pitchFamily="34" charset="0"/>
+                <a:ea typeface="Meiryo" pitchFamily="34" charset="-122"/>
+                <a:cs typeface="Meiryo" pitchFamily="34" charset="-120"/>
+              </a:rPr>
+              <a:t>8</a:t>
+            </a:r>
+            <a:endParaRPr lang="en-US" sz="1100" dirty="0"/>
+          </a:p>
+        </p:txBody>
+      </p:sp>
+      <p:pic>
+        <p:nvPicPr>
+          <p:cNvPr id="7" name="Image 1" descr="/sessions/compassionate-sweet-heisenberg/mnt/dev-aspath-life-main/_wp移行素材/★引継ぎ資料/画像/04_初回体験の申込.jpg">    </p:cNvPr>
+          <p:cNvPicPr>
+            <a:picLocks noChangeAspect="1"/>
+          </p:cNvPicPr>
+          <p:nvPr/>
+        </p:nvPicPr>
+        <p:blipFill>
+          <a:blip r:embed="rId2"/>
+          <a:stretch>
+            <a:fillRect/>
+          </a:stretch>
+        </p:blipFill>
+        <p:spPr>
+          <a:xfrm>
             <a:off x="640080" y="1691640"/>
             <a:ext cx="6766560" cy="3296972"/>
           </a:xfrm>
@@ -16074,7 +17264,7 @@
       </p:pic>
       <p:sp>
         <p:nvSpPr>
-          <p:cNvPr id="6" name="Text 3"/>
+          <p:cNvPr id="8" name="Text 4"/>
           <p:cNvSpPr/>
           <p:nvPr/>
         </p:nvSpPr>
@@ -16113,7 +17303,7 @@
       </p:sp>
       <p:sp>
         <p:nvSpPr>
-          <p:cNvPr id="7" name="Shape 4"/>
+          <p:cNvPr id="9" name="Shape 5"/>
           <p:cNvSpPr/>
           <p:nvPr/>
         </p:nvSpPr>
@@ -16135,7 +17325,7 @@
       </p:sp>
       <p:sp>
         <p:nvSpPr>
-          <p:cNvPr id="8" name="Text 5"/>
+          <p:cNvPr id="10" name="Text 6"/>
           <p:cNvSpPr/>
           <p:nvPr/>
         </p:nvSpPr>
@@ -16197,7 +17387,7 @@
       </p:sp>
       <p:sp>
         <p:nvSpPr>
-          <p:cNvPr id="9" name="Shape 6"/>
+          <p:cNvPr id="11" name="Shape 7"/>
           <p:cNvSpPr/>
           <p:nvPr/>
         </p:nvSpPr>
@@ -16219,7 +17409,7 @@
       </p:sp>
       <p:sp>
         <p:nvSpPr>
-          <p:cNvPr id="10" name="Text 7"/>
+          <p:cNvPr id="12" name="Text 8"/>
           <p:cNvSpPr/>
           <p:nvPr/>
         </p:nvSpPr>
@@ -16258,7 +17448,7 @@
       </p:sp>
       <p:sp>
         <p:nvSpPr>
-          <p:cNvPr id="11" name="Shape 8"/>
+          <p:cNvPr id="13" name="Shape 9"/>
           <p:cNvSpPr/>
           <p:nvPr/>
         </p:nvSpPr>
@@ -16280,7 +17470,7 @@
       </p:sp>
       <p:sp>
         <p:nvSpPr>
-          <p:cNvPr id="12" name="Text 9"/>
+          <p:cNvPr id="14" name="Text 10"/>
           <p:cNvSpPr/>
           <p:nvPr/>
         </p:nvSpPr>
@@ -16362,7 +17552,7 @@
       </p:sp>
       <p:sp>
         <p:nvSpPr>
-          <p:cNvPr id="13" name="Text 10"/>
+          <p:cNvPr id="15" name="Text 11"/>
           <p:cNvSpPr/>
           <p:nvPr/>
         </p:nvSpPr>
